--- a/deck/UP-Excise-Ask-the-Data-Demo.pptx
+++ b/deck/UP-Excise-Ask-the-Data-Demo.pptx
@@ -4837,7 +4837,7 @@
                 </a:solidFill>
                 <a:latin typeface="Calibri"/>
               </a:rPr>
-              <a:t>Proof of concept  |  Presentation to the Cabinet and the Chief Secretary</a:t>
+              <a:t>Proof of concept</a:t>
             </a:r>
           </a:p>
         </p:txBody>
@@ -8055,7 +8055,7 @@
                 </a:solidFill>
                 <a:latin typeface="Calibri"/>
               </a:rPr>
-              <a:t>District revenue after 2018 in the NITI workbooks is booked at the central treasury in Lucknow. We cross-checked against shop-level revenue and now point the system to the correct source.</a:t>
+              <a:t>District revenue after 2018 in the Rajkosh and Koshwani portal data is booked at the central treasury in Lucknow. We cross-checked against shop-level revenue and now point the system to the correct source.</a:t>
             </a:r>
           </a:p>
           <a:p>
@@ -8625,7 +8625,7 @@
                 </a:solidFill>
                 <a:latin typeface="Calibri"/>
               </a:rPr>
-              <a:t>Faster hardware</a:t>
+              <a:t>High-performance compute</a:t>
             </a:r>
           </a:p>
         </p:txBody>
@@ -8660,7 +8660,7 @@
                 </a:solidFill>
                 <a:latin typeface="Calibri"/>
               </a:rPr>
-              <a:t>A dedicated server with a graphics card brings answers down to seconds.</a:t>
+              <a:t>A high-performance computing (HPC) node with high-end GPU servers runs larger, more capable models and shortens response times.</a:t>
             </a:r>
           </a:p>
         </p:txBody>
@@ -9712,7 +9712,7 @@
                 </a:solidFill>
                 <a:latin typeface="Calibri"/>
               </a:rPr>
-              <a:t>2.  A dedicated server with a graphics card.</a:t>
+              <a:t>2.  A high-performance GPU compute node.</a:t>
             </a:r>
           </a:p>
           <a:p>
@@ -11393,8 +11393,8 @@
         </p:nvSpPr>
         <p:spPr>
           <a:xfrm>
-            <a:off x="548640" y="5440680"/>
-            <a:ext cx="11064240" cy="731520"/>
+            <a:off x="548640" y="5349240"/>
+            <a:ext cx="11064240" cy="914400"/>
           </a:xfrm>
           <a:prstGeom prst="rect">
             <a:avLst/>
@@ -11409,13 +11409,13 @@
           <a:p>
             <a:pPr algn="l"/>
             <a:r>
-              <a:rPr sz="2000" b="1">
+              <a:rPr sz="1900" b="1">
                 <a:solidFill>
                   <a:srgbClr val="243B7A"/>
                 </a:solidFill>
                 <a:latin typeface="Calibri"/>
               </a:rPr>
-              <a:t>It runs on a server in the department's own office. No question and no figure is sent to an outside AI service.</a:t>
+              <a:t>It runs on the departmental server, completely local. No external AI service provider and no closed-source or proprietary tool is used; all models run locally.</a:t>
             </a:r>
           </a:p>
         </p:txBody>
@@ -12959,7 +12959,7 @@
                 </a:solidFill>
                 <a:latin typeface="Calibri"/>
               </a:rPr>
-              <a:t>Source: the monthly dispatch report from the department's IESCMS system.</a:t>
+              <a:t>Source: the monthly dispatch report from the Integrated Excise Supply Chain Management System (IESCMS).</a:t>
             </a:r>
           </a:p>
         </p:txBody>
@@ -14396,13 +14396,13 @@
           <a:p>
             <a:pPr algn="l"/>
             <a:r>
-              <a:rPr sz="1600" b="0">
+              <a:rPr sz="1400" b="0">
                 <a:solidFill>
                   <a:srgbClr val="1F2937"/>
                 </a:solidFill>
                 <a:latin typeface="Calibri"/>
               </a:rPr>
-              <a:t>dispatch records, Lucknow, August 2026, from IESCMS</a:t>
+              <a:t>dispatch records for Lucknow, August 2026, from the Integrated Excise Supply Chain Management System</a:t>
             </a:r>
           </a:p>
         </p:txBody>
@@ -14582,7 +14582,7 @@
           <a:p>
             <a:pPr algn="l"/>
             <a:r>
-              <a:rPr sz="1600" b="0">
+              <a:rPr sz="1400" b="0">
                 <a:solidFill>
                   <a:srgbClr val="1F2937"/>
                 </a:solidFill>
@@ -14768,13 +14768,13 @@
           <a:p>
             <a:pPr algn="l"/>
             <a:r>
-              <a:rPr sz="1600" b="0">
+              <a:rPr sz="1400" b="0">
                 <a:solidFill>
                   <a:srgbClr val="1F2937"/>
                 </a:solidFill>
                 <a:latin typeface="Calibri"/>
               </a:rPr>
-              <a:t>district revenue records from the NITI workbooks</a:t>
+              <a:t>district revenue records from the Rajkosh and Koshwani portal data</a:t>
             </a:r>
           </a:p>
         </p:txBody>
@@ -14954,7 +14954,7 @@
           <a:p>
             <a:pPr algn="l"/>
             <a:r>
-              <a:rPr sz="1600" b="0">
+              <a:rPr sz="1400" b="0">
                 <a:solidFill>
                   <a:srgbClr val="1F2937"/>
                 </a:solidFill>
@@ -15140,7 +15140,7 @@
           <a:p>
             <a:pPr algn="l"/>
             <a:r>
-              <a:rPr sz="1600" b="0">
+              <a:rPr sz="1400" b="0">
                 <a:solidFill>
                   <a:srgbClr val="1F2937"/>
                 </a:solidFill>
@@ -15326,7 +15326,7 @@
           <a:p>
             <a:pPr algn="l"/>
             <a:r>
-              <a:rPr sz="1600" b="0">
+              <a:rPr sz="1400" b="0">
                 <a:solidFill>
                   <a:srgbClr val="1F2937"/>
                 </a:solidFill>

--- a/deck/UP-Excise-Ask-the-Data-Demo.pptx
+++ b/deck/UP-Excise-Ask-the-Data-Demo.pptx
@@ -796,7 +796,7 @@
           <a:lstStyle/>
           <a:p>
             <a:r>
-              <a:t>Being open about limits is deliberate. The cabinet will ask what can go wrong; this slide answers before they do.</a:t>
+              <a:t>Being open about limits is deliberate. The audience will ask what can go wrong; this slide answers before they do.</a:t>
             </a:r>
           </a:p>
         </p:txBody>
@@ -9622,7 +9622,7 @@
                 </a:solidFill>
                 <a:latin typeface="Calibri"/>
               </a:rPr>
-              <a:t>We ask the Cabinet and the Chief Secretary for a decision on the next step.</a:t>
+              <a:t>We ask the respected authorities for a decision on the next step.</a:t>
             </a:r>
           </a:p>
         </p:txBody>
@@ -9728,7 +9728,7 @@
                 </a:solidFill>
                 <a:latin typeface="Calibri"/>
               </a:rPr>
-              <a:t>3.  Monthly data feeds from the source systems.</a:t>
+              <a:t>3.  Monthly data feeds from the source systems and involved stakeholders.</a:t>
             </a:r>
           </a:p>
         </p:txBody>

--- a/deck/UP-Excise-Ask-the-Data-Demo.pptx
+++ b/deck/UP-Excise-Ask-the-Data-Demo.pptx
@@ -516,7 +516,7 @@
           <a:lstStyle/>
           <a:p>
             <a:r>
-              <a:t>Welcome. This is a working proof of concept, not a mock-up. Everything shown in the demo slides came from the live system running in the department's office, answering real questions against real department data.</a:t>
+              <a:t>Welcome. This is a working proof of concept, not a mock-up. Everything in the demo slides came from the live system running in the department's office. It answered real questions against real department data.</a:t>
             </a:r>
           </a:p>
         </p:txBody>
@@ -726,7 +726,7 @@
           <a:lstStyle/>
           <a:p>
             <a:r>
-              <a:t>Mention that the build followed a written plan with milestones, and that every live failure found in testing is documented. Honest testing is part of the case for trusting the results.</a:t>
+              <a:t>We followed a written plan with milestones, and every live failure found in testing is documented. Honest testing is part of the case for trusting the results.</a:t>
             </a:r>
           </a:p>
         </p:txBody>
@@ -796,7 +796,7 @@
           <a:lstStyle/>
           <a:p>
             <a:r>
-              <a:t>Being open about limits is deliberate. The audience will ask what can go wrong; this slide answers before they do.</a:t>
+              <a:t>We are open about limits deliberately. The audience will ask what can go wrong; this slide answers first.</a:t>
             </a:r>
           </a:p>
         </p:txBody>
@@ -1006,7 +1006,7 @@
           <a:lstStyle/>
           <a:p>
             <a:r>
-              <a:t>Set the scene in the department's own terms. Examples to mention: a district total needed before a review meeting; a rule position needed alongside a figure.</a:t>
+              <a:t>Set the scene in the department's own terms. Two examples to mention: a district total needed before a review meeting, and a rule position needed alongside a figure.</a:t>
             </a:r>
           </a:p>
         </p:txBody>
@@ -1076,7 +1076,7 @@
           <a:lstStyle/>
           <a:p>
             <a:r>
-              <a:t>Three entry points, one engine. Ask is for a single well-formed question. Chat is for exploring. The knowledge library lets the same chat quote the department's published rules.</a:t>
+              <a:t>We built three entry points on one engine. Ask takes a single well-formed question. Chat is for exploring. The knowledge library lets the same chat quote the department's published rules.</a:t>
             </a:r>
           </a:p>
         </p:txBody>
@@ -1216,7 +1216,7 @@
           <a:lstStyle/>
           <a:p>
             <a:r>
-              <a:t>Click the screenshot to open it full size. Read the question aloud, then point to the total and the two parts. This question was chosen because it has a split and a total. Earlier versions gave only one combined number; we fixed that so each part is shown.</a:t>
+              <a:t>Click the screenshot to open it full size. Read the question aloud, then point to the total and the two parts. This question was chosen because it has a split and a total. Earlier versions gave one combined number; we fixed that so each part is shown.</a:t>
             </a:r>
           </a:p>
         </p:txBody>
@@ -1426,7 +1426,7 @@
           <a:lstStyle/>
           <a:p>
             <a:r>
-              <a:t>These are the row counts loaded so far. The data bank is a copy; the source systems are untouched. More sources can be added without changing how officers ask questions.</a:t>
+              <a:t>These are the row counts loaded so far. The data bank is a copy; the source systems are untouched. We can add more sources without changing how officers ask questions.</a:t>
             </a:r>
           </a:p>
         </p:txBody>
@@ -1496,7 +1496,7 @@
           <a:lstStyle/>
           <a:p>
             <a:r>
-              <a:t>Both models are open weights, run through Ollama on the office server. Neither is a DeepSeek model. The server has no GPU today, which is why answers take one to three minutes.</a:t>
+              <a:t>Both models are open weights, run through Ollama on the office server. Neither is a DeepSeek model. The server has no graphics card today, so answers take one to three minutes.</a:t>
             </a:r>
           </a:p>
         </p:txBody>
@@ -4781,7 +4781,7 @@
         <p:spPr>
           <a:xfrm>
             <a:off x="731520" y="3794760"/>
-            <a:ext cx="7498079" cy="1280160"/>
+            <a:ext cx="8229600" cy="1463040"/>
           </a:xfrm>
           <a:prstGeom prst="rect">
             <a:avLst/>
@@ -4794,7 +4794,11 @@
           </a:bodyPr>
           <a:lstStyle/>
           <a:p>
-            <a:pPr algn="l"/>
+            <a:pPr algn="l">
+              <a:spcAft>
+                <a:spcPts val="600"/>
+              </a:spcAft>
+            </a:pPr>
             <a:r>
               <a:rPr sz="2400" b="0">
                 <a:solidFill>
@@ -4802,7 +4806,23 @@
                 </a:solidFill>
                 <a:latin typeface="Calibri"/>
               </a:rPr>
-              <a:t>Questions in plain language, answered from the department's own figures and rules, on the department's own server</a:t>
+              <a:t>Ask a question in plain language.</a:t>
+            </a:r>
+          </a:p>
+          <a:p>
+            <a:pPr algn="l">
+              <a:spcAft>
+                <a:spcPts val="600"/>
+              </a:spcAft>
+            </a:pPr>
+            <a:r>
+              <a:rPr sz="2400" b="0">
+                <a:solidFill>
+                  <a:srgbClr val="1F2937"/>
+                </a:solidFill>
+                <a:latin typeface="Calibri"/>
+              </a:rPr>
+              <a:t>The answer comes from the department's own figures and rules, on the department's own server.</a:t>
             </a:r>
           </a:p>
         </p:txBody>
@@ -6005,41 +6025,6 @@
           </a:p>
         </p:txBody>
       </p:sp>
-      <p:sp>
-        <p:nvSpPr>
-          <p:cNvPr id="33" name="TextBox 32"/>
-          <p:cNvSpPr txBox="1"/>
-          <p:nvPr/>
-        </p:nvSpPr>
-        <p:spPr>
-          <a:xfrm>
-            <a:off x="548640" y="6144768"/>
-            <a:ext cx="11064240" cy="274320"/>
-          </a:xfrm>
-          <a:prstGeom prst="rect">
-            <a:avLst/>
-          </a:prstGeom>
-          <a:noFill/>
-        </p:spPr>
-        <p:txBody>
-          <a:bodyPr wrap="square" anchor="t" lIns="45720" rIns="45720" tIns="27432" bIns="27432">
-            <a:spAutoFit/>
-          </a:bodyPr>
-          <a:lstStyle/>
-          <a:p>
-            <a:pPr algn="l"/>
-            <a:r>
-              <a:rPr sz="1300" b="0">
-                <a:solidFill>
-                  <a:srgbClr val="4B5563"/>
-                </a:solidFill>
-                <a:latin typeface="Calibri"/>
-              </a:rPr>
-              <a:t>The only outside connection is the secure tunnel that lets officers reach the site.</a:t>
-            </a:r>
-          </a:p>
-        </p:txBody>
-      </p:sp>
     </p:spTree>
   </p:cSld>
   <p:clrMapOvr>
@@ -7676,7 +7661,11 @@
           </a:bodyPr>
           <a:lstStyle/>
           <a:p>
-            <a:pPr algn="l"/>
+            <a:pPr algn="l">
+              <a:spcAft>
+                <a:spcPts val="400"/>
+              </a:spcAft>
+            </a:pPr>
             <a:r>
               <a:rPr sz="1700" b="0">
                 <a:solidFill>
@@ -7684,7 +7673,23 @@
                 </a:solidFill>
                 <a:latin typeface="Calibri"/>
               </a:rPr>
-              <a:t>The automated tests cover the safety checks, the data loaders and the chat flow. Live testing against real questions found problems the tests could not, and each one was fixed and recorded.</a:t>
+              <a:t>The automated tests cover the safety checks, the data loaders and the chat flow.</a:t>
+            </a:r>
+          </a:p>
+          <a:p>
+            <a:pPr algn="l">
+              <a:spcAft>
+                <a:spcPts val="400"/>
+              </a:spcAft>
+            </a:pPr>
+            <a:r>
+              <a:rPr sz="1700" b="0">
+                <a:solidFill>
+                  <a:srgbClr val="1F2937"/>
+                </a:solidFill>
+                <a:latin typeface="Calibri"/>
+              </a:rPr>
+              <a:t>Live testing on real questions found problems the tests could not. Each one was fixed and recorded.</a:t>
             </a:r>
           </a:p>
         </p:txBody>
@@ -8055,7 +8060,23 @@
                 </a:solidFill>
                 <a:latin typeface="Calibri"/>
               </a:rPr>
-              <a:t>District revenue after 2018 in the Rajkosh and Koshwani portal data is booked at the central treasury in Lucknow. We cross-checked against shop-level revenue and now point the system to the correct source.</a:t>
+              <a:t>District revenue after 2018 in the Rajkosh and Koshwani portal data is booked at the central treasury in Lucknow.</a:t>
+            </a:r>
+          </a:p>
+          <a:p>
+            <a:pPr algn="l">
+              <a:spcAft>
+                <a:spcPts val="1000"/>
+              </a:spcAft>
+            </a:pPr>
+            <a:r>
+              <a:rPr sz="1500" b="0">
+                <a:solidFill>
+                  <a:srgbClr val="1F2937"/>
+                </a:solidFill>
+                <a:latin typeface="Calibri"/>
+              </a:rPr>
+              <a:t>We cross-checked against shop-level revenue and now point the system to the correct source.</a:t>
             </a:r>
           </a:p>
           <a:p>
@@ -10333,7 +10354,7 @@
                 </a:solidFill>
                 <a:latin typeface="Calibri"/>
               </a:rPr>
-              <a:t>An officer asks, an analyst finds the files, builds the table and sends it back. A new angle on the same question starts the cycle again.</a:t>
+              <a:t>An officer asks, an analyst finds the files, builds the table and sends it back. A new angle starts the cycle again.</a:t>
             </a:r>
           </a:p>
         </p:txBody>
@@ -10554,7 +10575,7 @@
                 </a:solidFill>
                 <a:latin typeface="Calibri"/>
               </a:rPr>
-              <a:t>An officer who needs a number for a meeting today should be able to get it today, with the source shown, without waiting for a report to be prepared.</a:t>
+              <a:t>An officer who needs a number for a meeting today should get it today, with its source, without waiting for a report.</a:t>
             </a:r>
           </a:p>
         </p:txBody>
@@ -11407,7 +11428,11 @@
           </a:bodyPr>
           <a:lstStyle/>
           <a:p>
-            <a:pPr algn="l"/>
+            <a:pPr algn="l">
+              <a:spcAft>
+                <a:spcPts val="400"/>
+              </a:spcAft>
+            </a:pPr>
             <a:r>
               <a:rPr sz="1900" b="1">
                 <a:solidFill>
@@ -11415,7 +11440,23 @@
                 </a:solidFill>
                 <a:latin typeface="Calibri"/>
               </a:rPr>
-              <a:t>It runs on the departmental server, completely local. No external AI service provider and no closed-source or proprietary tool is used; all models run locally.</a:t>
+              <a:t>It runs on the departmental server, completely local.</a:t>
+            </a:r>
+          </a:p>
+          <a:p>
+            <a:pPr algn="l">
+              <a:spcAft>
+                <a:spcPts val="400"/>
+              </a:spcAft>
+            </a:pPr>
+            <a:r>
+              <a:rPr sz="1900" b="1">
+                <a:solidFill>
+                  <a:srgbClr val="243B7A"/>
+                </a:solidFill>
+                <a:latin typeface="Calibri"/>
+              </a:rPr>
+              <a:t>No external AI service provider and no closed-source or proprietary tool is used. All models run locally.</a:t>
             </a:r>
           </a:p>
         </p:txBody>
@@ -12943,7 +12984,7 @@
                 </a:solidFill>
                 <a:latin typeface="Calibri"/>
               </a:rPr>
-              <a:t>The total is counted by the database itself, not added up by the AI.</a:t>
+              <a:t>The database counts the total; the AI does not add it up.</a:t>
             </a:r>
           </a:p>
           <a:p>
@@ -16164,7 +16205,7 @@
                 </a:solidFill>
                 <a:latin typeface="Calibri"/>
               </a:rPr>
-              <a:t>Why two models: a conversational model and a code-writing model are each better at their own task.</a:t>
+              <a:t>A conversational model and a code-writing model each do their own job better, so we use two.</a:t>
             </a:r>
           </a:p>
           <a:p>
@@ -16180,7 +16221,7 @@
                 </a:solidFill>
                 <a:latin typeface="Calibri"/>
               </a:rPr>
-              <a:t>Why local: the department's questions and figures never leave the building.</a:t>
+              <a:t>Both run locally: the department's questions and figures never leave the building.</a:t>
             </a:r>
           </a:p>
         </p:txBody>

--- a/deck/UP-Excise-Ask-the-Data-Demo.pptx
+++ b/deck/UP-Excise-Ask-the-Data-Demo.pptx
@@ -4,24 +4,27 @@
   <p:sldMasterIdLst>
     <p:sldMasterId id="2147483648" r:id="rId1"/>
   </p:sldMasterIdLst>
+  <p:notesMasterIdLst>
+    <p:notesMasterId r:id="rId17"/>
+  </p:notesMasterIdLst>
   <p:sldIdLst>
-    <p:sldId id="256" r:id="rId7"/>
-    <p:sldId id="257" r:id="rId9"/>
-    <p:sldId id="258" r:id="rId10"/>
-    <p:sldId id="259" r:id="rId11"/>
-    <p:sldId id="260" r:id="rId12"/>
-    <p:sldId id="261" r:id="rId13"/>
-    <p:sldId id="262" r:id="rId14"/>
-    <p:sldId id="263" r:id="rId15"/>
-    <p:sldId id="264" r:id="rId16"/>
-    <p:sldId id="265" r:id="rId17"/>
-    <p:sldId id="266" r:id="rId18"/>
-    <p:sldId id="267" r:id="rId19"/>
-    <p:sldId id="268" r:id="rId20"/>
-    <p:sldId id="269" r:id="rId21"/>
-    <p:sldId id="270" r:id="rId22"/>
+    <p:sldId id="256" r:id="rId2"/>
+    <p:sldId id="257" r:id="rId3"/>
+    <p:sldId id="258" r:id="rId4"/>
+    <p:sldId id="259" r:id="rId5"/>
+    <p:sldId id="260" r:id="rId6"/>
+    <p:sldId id="261" r:id="rId7"/>
+    <p:sldId id="262" r:id="rId8"/>
+    <p:sldId id="263" r:id="rId9"/>
+    <p:sldId id="264" r:id="rId10"/>
+    <p:sldId id="265" r:id="rId11"/>
+    <p:sldId id="266" r:id="rId12"/>
+    <p:sldId id="267" r:id="rId13"/>
+    <p:sldId id="268" r:id="rId14"/>
+    <p:sldId id="269" r:id="rId15"/>
+    <p:sldId id="270" r:id="rId16"/>
   </p:sldIdLst>
-  <p:sldSz cx="12191695" cy="6858000" type="screen4x3"/>
+  <p:sldSz cx="12192000" cy="6858000"/>
   <p:notesSz cx="6858000" cy="9144000"/>
   <p:defaultTextStyle>
     <a:defPPr>
@@ -118,11 +121,27 @@
       </a:defRPr>
     </a:lvl9pPr>
   </p:defaultTextStyle>
+  <p:extLst>
+    <p:ext uri="{EFAFB233-063F-42B5-8137-9DF3F51BA10A}">
+      <p15:sldGuideLst xmlns:p15="http://schemas.microsoft.com/office/powerpoint/2012/main">
+        <p15:guide id="1" orient="horz" pos="2160">
+          <p15:clr>
+            <a:srgbClr val="A4A3A4"/>
+          </p15:clr>
+        </p15:guide>
+        <p15:guide id="2" pos="2880">
+          <p15:clr>
+            <a:srgbClr val="A4A3A4"/>
+          </p15:clr>
+        </p15:guide>
+      </p15:sldGuideLst>
+    </p:ext>
+  </p:extLst>
 </p:presentation>
 </file>
 
 <file path=ppt/notesMasters/notesMaster1.xml><?xml version="1.0" encoding="utf-8"?>
-<p:notesMaster xmlns:a="http://schemas.openxmlformats.org/drawingml/2006/main" xmlns:p="http://schemas.openxmlformats.org/presentationml/2006/main" xmlns:r="http://schemas.openxmlformats.org/officeDocument/2006/relationships">
+<p:notesMaster xmlns:a="http://schemas.openxmlformats.org/drawingml/2006/main" xmlns:r="http://schemas.openxmlformats.org/officeDocument/2006/relationships" xmlns:p="http://schemas.openxmlformats.org/presentationml/2006/main">
   <p:cSld>
     <p:bg>
       <p:bgRef idx="1001">
@@ -143,241 +162,16 @@
           <a:chExt cx="0" cy="0"/>
         </a:xfrm>
       </p:grpSpPr>
-      <p:sp>
-        <p:nvSpPr>
-          <p:cNvPr id="2" name="Header Placeholder 1"/>
-          <p:cNvSpPr>
-            <a:spLocks noGrp="1"/>
-          </p:cNvSpPr>
-          <p:nvPr>
-            <p:ph type="hdr" sz="quarter"/>
-          </p:nvPr>
-        </p:nvSpPr>
-        <p:spPr>
-          <a:xfrm>
-            <a:off x="0" y="0"/>
-            <a:ext cx="2971800" cy="457200"/>
-          </a:xfrm>
-          <a:prstGeom prst="rect">
-            <a:avLst/>
-          </a:prstGeom>
-        </p:spPr>
-        <p:txBody>
-          <a:bodyPr vert="horz" lIns="91440" tIns="45720" rIns="91440" bIns="45720" rtlCol="0"/>
-          <a:lstStyle>
-            <a:lvl1pPr algn="l">
-              <a:defRPr sz="1200"/>
-            </a:lvl1pPr>
-          </a:lstStyle>
-          <a:p>
-            <a:endParaRPr lang="en-US"/>
-          </a:p>
-        </p:txBody>
-      </p:sp>
-      <p:sp>
-        <p:nvSpPr>
-          <p:cNvPr id="3" name="Date Placeholder 2"/>
-          <p:cNvSpPr>
-            <a:spLocks noGrp="1"/>
-          </p:cNvSpPr>
-          <p:nvPr>
-            <p:ph type="dt" idx="1"/>
-          </p:nvPr>
-        </p:nvSpPr>
-        <p:spPr>
-          <a:xfrm>
-            <a:off x="3884613" y="0"/>
-            <a:ext cx="2971800" cy="457200"/>
-          </a:xfrm>
-          <a:prstGeom prst="rect">
-            <a:avLst/>
-          </a:prstGeom>
-        </p:spPr>
-        <p:txBody>
-          <a:bodyPr vert="horz" lIns="91440" tIns="45720" rIns="91440" bIns="45720" rtlCol="0"/>
-          <a:lstStyle>
-            <a:lvl1pPr algn="r">
-              <a:defRPr sz="1200"/>
-            </a:lvl1pPr>
-          </a:lstStyle>
-          <a:p>
-            <a:fld id="{0F89C1C7-3DCD-1040-A9CF-14679D8B5DDD}" type="datetimeFigureOut">
-              <a:rPr lang="en-US" smtClean="0"/>
-              <a:t>10/17/16</a:t>
-            </a:fld>
-            <a:endParaRPr lang="en-US"/>
-          </a:p>
-        </p:txBody>
-      </p:sp>
-      <p:sp>
-        <p:nvSpPr>
-          <p:cNvPr id="4" name="Slide Image Placeholder 3"/>
-          <p:cNvSpPr>
-            <a:spLocks noGrp="1" noRot="1" noChangeAspect="1"/>
-          </p:cNvSpPr>
-          <p:nvPr>
-            <p:ph type="sldImg" idx="2"/>
-          </p:nvPr>
-        </p:nvSpPr>
-        <p:spPr>
-          <a:xfrm>
-            <a:off x="1143000" y="685800"/>
-            <a:ext cx="4572000" cy="3429000"/>
-          </a:xfrm>
-          <a:prstGeom prst="rect">
-            <a:avLst/>
-          </a:prstGeom>
-          <a:noFill/>
-          <a:ln w="12700">
-            <a:solidFill>
-              <a:prstClr val="black"/>
-            </a:solidFill>
-          </a:ln>
-        </p:spPr>
-        <p:txBody>
-          <a:bodyPr vert="horz" lIns="91440" tIns="45720" rIns="91440" bIns="45720" rtlCol="0" anchor="ctr"/>
-          <a:lstStyle/>
-          <a:p>
-            <a:endParaRPr lang="en-US"/>
-          </a:p>
-        </p:txBody>
-      </p:sp>
-      <p:sp>
-        <p:nvSpPr>
-          <p:cNvPr id="5" name="Notes Placeholder 4"/>
-          <p:cNvSpPr>
-            <a:spLocks noGrp="1"/>
-          </p:cNvSpPr>
-          <p:nvPr>
-            <p:ph type="body" sz="quarter" idx="3"/>
-          </p:nvPr>
-        </p:nvSpPr>
-        <p:spPr>
-          <a:xfrm>
-            <a:off x="685800" y="4343400"/>
-            <a:ext cx="5486400" cy="4114800"/>
-          </a:xfrm>
-          <a:prstGeom prst="rect">
-            <a:avLst/>
-          </a:prstGeom>
-        </p:spPr>
-        <p:txBody>
-          <a:bodyPr vert="horz" lIns="91440" tIns="45720" rIns="91440" bIns="45720" rtlCol="0"/>
-          <a:lstStyle/>
-          <a:p>
-            <a:pPr lvl="0"/>
-            <a:r>
-              <a:rPr lang="en-US" smtClean="0"/>
-              <a:t>Click to edit Master text styles</a:t>
-            </a:r>
-          </a:p>
-          <a:p>
-            <a:pPr lvl="1"/>
-            <a:r>
-              <a:rPr lang="en-US" smtClean="0"/>
-              <a:t>Second level</a:t>
-            </a:r>
-          </a:p>
-          <a:p>
-            <a:pPr lvl="2"/>
-            <a:r>
-              <a:rPr lang="en-US" smtClean="0"/>
-              <a:t>Third level</a:t>
-            </a:r>
-          </a:p>
-          <a:p>
-            <a:pPr lvl="3"/>
-            <a:r>
-              <a:rPr lang="en-US" smtClean="0"/>
-              <a:t>Fourth level</a:t>
-            </a:r>
-          </a:p>
-          <a:p>
-            <a:pPr lvl="4"/>
-            <a:r>
-              <a:rPr lang="en-US" smtClean="0"/>
-              <a:t>Fifth level</a:t>
-            </a:r>
-            <a:endParaRPr lang="en-US"/>
-          </a:p>
-        </p:txBody>
-      </p:sp>
-      <p:sp>
-        <p:nvSpPr>
-          <p:cNvPr id="6" name="Footer Placeholder 5"/>
-          <p:cNvSpPr>
-            <a:spLocks noGrp="1"/>
-          </p:cNvSpPr>
-          <p:nvPr>
-            <p:ph type="ftr" sz="quarter" idx="4"/>
-          </p:nvPr>
-        </p:nvSpPr>
-        <p:spPr>
-          <a:xfrm>
-            <a:off x="0" y="8685213"/>
-            <a:ext cx="2971800" cy="457200"/>
-          </a:xfrm>
-          <a:prstGeom prst="rect">
-            <a:avLst/>
-          </a:prstGeom>
-        </p:spPr>
-        <p:txBody>
-          <a:bodyPr vert="horz" lIns="91440" tIns="45720" rIns="91440" bIns="45720" rtlCol="0" anchor="b"/>
-          <a:lstStyle>
-            <a:lvl1pPr algn="l">
-              <a:defRPr sz="1200"/>
-            </a:lvl1pPr>
-          </a:lstStyle>
-          <a:p>
-            <a:endParaRPr lang="en-US"/>
-          </a:p>
-        </p:txBody>
-      </p:sp>
-      <p:sp>
-        <p:nvSpPr>
-          <p:cNvPr id="7" name="Slide Number Placeholder 6"/>
-          <p:cNvSpPr>
-            <a:spLocks noGrp="1"/>
-          </p:cNvSpPr>
-          <p:nvPr>
-            <p:ph type="sldNum" sz="quarter" idx="5"/>
-          </p:nvPr>
-        </p:nvSpPr>
-        <p:spPr>
-          <a:xfrm>
-            <a:off x="3884613" y="8685213"/>
-            <a:ext cx="2971800" cy="457200"/>
-          </a:xfrm>
-          <a:prstGeom prst="rect">
-            <a:avLst/>
-          </a:prstGeom>
-        </p:spPr>
-        <p:txBody>
-          <a:bodyPr vert="horz" lIns="91440" tIns="45720" rIns="91440" bIns="45720" rtlCol="0" anchor="b"/>
-          <a:lstStyle>
-            <a:lvl1pPr algn="r">
-              <a:defRPr sz="1200"/>
-            </a:lvl1pPr>
-          </a:lstStyle>
-          <a:p>
-            <a:fld id="{BB5E49A5-4136-284D-997B-48E1D791AD67}" type="slidenum">
-              <a:rPr lang="en-US" smtClean="0"/>
-              <a:t>‹#›</a:t>
-            </a:fld>
-            <a:endParaRPr lang="en-US"/>
-          </a:p>
-        </p:txBody>
-      </p:sp>
     </p:spTree>
     <p:extLst>
       <p:ext uri="{BB962C8B-B14F-4D97-AF65-F5344CB8AC3E}">
-        <p14:creationId xmlns:p14="http://schemas.microsoft.com/office/powerpoint/2010/main" val="2623252185"/>
+        <p14:creationId xmlns:p14="http://schemas.microsoft.com/office/powerpoint/2010/main" val="3193798116"/>
       </p:ext>
     </p:extLst>
   </p:cSld>
   <p:clrMap bg1="lt1" tx1="dk1" bg2="lt2" tx2="dk2" accent1="accent1" accent2="accent2" accent3="accent3" accent4="accent4" accent5="accent5" accent6="accent6" hlink="hlink" folHlink="folHlink"/>
   <p:notesStyle>
-    <a:lvl1pPr marL="0" algn="l" defTabSz="457200" rtl="0" eaLnBrk="1" latinLnBrk="0" hangingPunct="1">
+    <a:lvl1pPr marL="0" algn="l" defTabSz="914400" rtl="0" eaLnBrk="1" latinLnBrk="0" hangingPunct="1">
       <a:defRPr sz="1200" kern="1200">
         <a:solidFill>
           <a:schemeClr val="tx1"/>
@@ -387,7 +181,7 @@
         <a:cs typeface="+mn-cs"/>
       </a:defRPr>
     </a:lvl1pPr>
-    <a:lvl2pPr marL="457200" algn="l" defTabSz="457200" rtl="0" eaLnBrk="1" latinLnBrk="0" hangingPunct="1">
+    <a:lvl2pPr marL="457200" algn="l" defTabSz="914400" rtl="0" eaLnBrk="1" latinLnBrk="0" hangingPunct="1">
       <a:defRPr sz="1200" kern="1200">
         <a:solidFill>
           <a:schemeClr val="tx1"/>
@@ -397,7 +191,7 @@
         <a:cs typeface="+mn-cs"/>
       </a:defRPr>
     </a:lvl2pPr>
-    <a:lvl3pPr marL="914400" algn="l" defTabSz="457200" rtl="0" eaLnBrk="1" latinLnBrk="0" hangingPunct="1">
+    <a:lvl3pPr marL="914400" algn="l" defTabSz="914400" rtl="0" eaLnBrk="1" latinLnBrk="0" hangingPunct="1">
       <a:defRPr sz="1200" kern="1200">
         <a:solidFill>
           <a:schemeClr val="tx1"/>
@@ -407,7 +201,7 @@
         <a:cs typeface="+mn-cs"/>
       </a:defRPr>
     </a:lvl3pPr>
-    <a:lvl4pPr marL="1371600" algn="l" defTabSz="457200" rtl="0" eaLnBrk="1" latinLnBrk="0" hangingPunct="1">
+    <a:lvl4pPr marL="1371600" algn="l" defTabSz="914400" rtl="0" eaLnBrk="1" latinLnBrk="0" hangingPunct="1">
       <a:defRPr sz="1200" kern="1200">
         <a:solidFill>
           <a:schemeClr val="tx1"/>
@@ -417,7 +211,7 @@
         <a:cs typeface="+mn-cs"/>
       </a:defRPr>
     </a:lvl4pPr>
-    <a:lvl5pPr marL="1828800" algn="l" defTabSz="457200" rtl="0" eaLnBrk="1" latinLnBrk="0" hangingPunct="1">
+    <a:lvl5pPr marL="1828800" algn="l" defTabSz="914400" rtl="0" eaLnBrk="1" latinLnBrk="0" hangingPunct="1">
       <a:defRPr sz="1200" kern="1200">
         <a:solidFill>
           <a:schemeClr val="tx1"/>
@@ -427,7 +221,7 @@
         <a:cs typeface="+mn-cs"/>
       </a:defRPr>
     </a:lvl5pPr>
-    <a:lvl6pPr marL="2286000" algn="l" defTabSz="457200" rtl="0" eaLnBrk="1" latinLnBrk="0" hangingPunct="1">
+    <a:lvl6pPr marL="2286000" algn="l" defTabSz="914400" rtl="0" eaLnBrk="1" latinLnBrk="0" hangingPunct="1">
       <a:defRPr sz="1200" kern="1200">
         <a:solidFill>
           <a:schemeClr val="tx1"/>
@@ -437,7 +231,7 @@
         <a:cs typeface="+mn-cs"/>
       </a:defRPr>
     </a:lvl6pPr>
-    <a:lvl7pPr marL="2743200" algn="l" defTabSz="457200" rtl="0" eaLnBrk="1" latinLnBrk="0" hangingPunct="1">
+    <a:lvl7pPr marL="2743200" algn="l" defTabSz="914400" rtl="0" eaLnBrk="1" latinLnBrk="0" hangingPunct="1">
       <a:defRPr sz="1200" kern="1200">
         <a:solidFill>
           <a:schemeClr val="tx1"/>
@@ -447,7 +241,7 @@
         <a:cs typeface="+mn-cs"/>
       </a:defRPr>
     </a:lvl7pPr>
-    <a:lvl8pPr marL="3200400" algn="l" defTabSz="457200" rtl="0" eaLnBrk="1" latinLnBrk="0" hangingPunct="1">
+    <a:lvl8pPr marL="3200400" algn="l" defTabSz="914400" rtl="0" eaLnBrk="1" latinLnBrk="0" hangingPunct="1">
       <a:defRPr sz="1200" kern="1200">
         <a:solidFill>
           <a:schemeClr val="tx1"/>
@@ -457,7 +251,7 @@
         <a:cs typeface="+mn-cs"/>
       </a:defRPr>
     </a:lvl8pPr>
-    <a:lvl9pPr marL="3657600" algn="l" defTabSz="457200" rtl="0" eaLnBrk="1" latinLnBrk="0" hangingPunct="1">
+    <a:lvl9pPr marL="3657600" algn="l" defTabSz="914400" rtl="0" eaLnBrk="1" latinLnBrk="0" hangingPunct="1">
       <a:defRPr sz="1200" kern="1200">
         <a:solidFill>
           <a:schemeClr val="tx1"/>
@@ -472,7 +266,7 @@
 </file>
 
 <file path=ppt/notesSlides/notesSlide1.xml><?xml version="1.0" encoding="utf-8"?>
-<p:notes xmlns:a="http://schemas.openxmlformats.org/drawingml/2006/main" xmlns:p="http://schemas.openxmlformats.org/presentationml/2006/main" xmlns:r="http://schemas.openxmlformats.org/officeDocument/2006/relationships">
+<p:notes xmlns:a="http://schemas.openxmlformats.org/drawingml/2006/main" xmlns:r="http://schemas.openxmlformats.org/officeDocument/2006/relationships" xmlns:p="http://schemas.openxmlformats.org/presentationml/2006/main">
   <p:cSld>
     <p:spTree>
       <p:nvGrpSpPr>
@@ -492,7 +286,7 @@
         <p:nvSpPr>
           <p:cNvPr id="2" name="Slide Image Placeholder 1"/>
           <p:cNvSpPr>
-            <a:spLocks noGrp="1"/>
+            <a:spLocks noGrp="1" noRot="1" noChangeAspect="1"/>
           </p:cNvSpPr>
           <p:nvPr>
             <p:ph type="sldImg" idx="2"/>
@@ -507,7 +301,7 @@
             <a:spLocks noGrp="1"/>
           </p:cNvSpPr>
           <p:nvPr>
-            <p:ph type="body" idx="3" sz="quarter"/>
+            <p:ph type="body" sz="quarter" idx="3"/>
           </p:nvPr>
         </p:nvSpPr>
         <p:spPr/>
@@ -528,7 +322,7 @@
             <a:spLocks noGrp="1"/>
           </p:cNvSpPr>
           <p:nvPr>
-            <p:ph type="sldNum" idx="5" sz="quarter"/>
+            <p:ph type="sldNum" sz="quarter" idx="5"/>
           </p:nvPr>
         </p:nvSpPr>
         <p:spPr/>
@@ -542,7 +336,7 @@
 </file>
 
 <file path=ppt/notesSlides/notesSlide10.xml><?xml version="1.0" encoding="utf-8"?>
-<p:notes xmlns:a="http://schemas.openxmlformats.org/drawingml/2006/main" xmlns:p="http://schemas.openxmlformats.org/presentationml/2006/main" xmlns:r="http://schemas.openxmlformats.org/officeDocument/2006/relationships">
+<p:notes xmlns:a="http://schemas.openxmlformats.org/drawingml/2006/main" xmlns:r="http://schemas.openxmlformats.org/officeDocument/2006/relationships" xmlns:p="http://schemas.openxmlformats.org/presentationml/2006/main">
   <p:cSld>
     <p:spTree>
       <p:nvGrpSpPr>
@@ -562,7 +356,7 @@
         <p:nvSpPr>
           <p:cNvPr id="2" name="Slide Image Placeholder 1"/>
           <p:cNvSpPr>
-            <a:spLocks noGrp="1"/>
+            <a:spLocks noGrp="1" noRot="1" noChangeAspect="1"/>
           </p:cNvSpPr>
           <p:nvPr>
             <p:ph type="sldImg" idx="2"/>
@@ -577,7 +371,7 @@
             <a:spLocks noGrp="1"/>
           </p:cNvSpPr>
           <p:nvPr>
-            <p:ph type="body" idx="3" sz="quarter"/>
+            <p:ph type="body" sz="quarter" idx="3"/>
           </p:nvPr>
         </p:nvSpPr>
         <p:spPr/>
@@ -598,7 +392,7 @@
             <a:spLocks noGrp="1"/>
           </p:cNvSpPr>
           <p:nvPr>
-            <p:ph type="sldNum" idx="5" sz="quarter"/>
+            <p:ph type="sldNum" sz="quarter" idx="5"/>
           </p:nvPr>
         </p:nvSpPr>
         <p:spPr/>
@@ -612,7 +406,7 @@
 </file>
 
 <file path=ppt/notesSlides/notesSlide11.xml><?xml version="1.0" encoding="utf-8"?>
-<p:notes xmlns:a="http://schemas.openxmlformats.org/drawingml/2006/main" xmlns:p="http://schemas.openxmlformats.org/presentationml/2006/main" xmlns:r="http://schemas.openxmlformats.org/officeDocument/2006/relationships">
+<p:notes xmlns:a="http://schemas.openxmlformats.org/drawingml/2006/main" xmlns:r="http://schemas.openxmlformats.org/officeDocument/2006/relationships" xmlns:p="http://schemas.openxmlformats.org/presentationml/2006/main">
   <p:cSld>
     <p:spTree>
       <p:nvGrpSpPr>
@@ -632,7 +426,7 @@
         <p:nvSpPr>
           <p:cNvPr id="2" name="Slide Image Placeholder 1"/>
           <p:cNvSpPr>
-            <a:spLocks noGrp="1"/>
+            <a:spLocks noGrp="1" noRot="1" noChangeAspect="1"/>
           </p:cNvSpPr>
           <p:nvPr>
             <p:ph type="sldImg" idx="2"/>
@@ -647,7 +441,7 @@
             <a:spLocks noGrp="1"/>
           </p:cNvSpPr>
           <p:nvPr>
-            <p:ph type="body" idx="3" sz="quarter"/>
+            <p:ph type="body" sz="quarter" idx="3"/>
           </p:nvPr>
         </p:nvSpPr>
         <p:spPr/>
@@ -668,7 +462,7 @@
             <a:spLocks noGrp="1"/>
           </p:cNvSpPr>
           <p:nvPr>
-            <p:ph type="sldNum" idx="5" sz="quarter"/>
+            <p:ph type="sldNum" sz="quarter" idx="5"/>
           </p:nvPr>
         </p:nvSpPr>
         <p:spPr/>
@@ -682,7 +476,7 @@
 </file>
 
 <file path=ppt/notesSlides/notesSlide12.xml><?xml version="1.0" encoding="utf-8"?>
-<p:notes xmlns:a="http://schemas.openxmlformats.org/drawingml/2006/main" xmlns:p="http://schemas.openxmlformats.org/presentationml/2006/main" xmlns:r="http://schemas.openxmlformats.org/officeDocument/2006/relationships">
+<p:notes xmlns:a="http://schemas.openxmlformats.org/drawingml/2006/main" xmlns:r="http://schemas.openxmlformats.org/officeDocument/2006/relationships" xmlns:p="http://schemas.openxmlformats.org/presentationml/2006/main">
   <p:cSld>
     <p:spTree>
       <p:nvGrpSpPr>
@@ -702,7 +496,7 @@
         <p:nvSpPr>
           <p:cNvPr id="2" name="Slide Image Placeholder 1"/>
           <p:cNvSpPr>
-            <a:spLocks noGrp="1"/>
+            <a:spLocks noGrp="1" noRot="1" noChangeAspect="1"/>
           </p:cNvSpPr>
           <p:nvPr>
             <p:ph type="sldImg" idx="2"/>
@@ -717,7 +511,7 @@
             <a:spLocks noGrp="1"/>
           </p:cNvSpPr>
           <p:nvPr>
-            <p:ph type="body" idx="3" sz="quarter"/>
+            <p:ph type="body" sz="quarter" idx="3"/>
           </p:nvPr>
         </p:nvSpPr>
         <p:spPr/>
@@ -738,7 +532,7 @@
             <a:spLocks noGrp="1"/>
           </p:cNvSpPr>
           <p:nvPr>
-            <p:ph type="sldNum" idx="5" sz="quarter"/>
+            <p:ph type="sldNum" sz="quarter" idx="5"/>
           </p:nvPr>
         </p:nvSpPr>
         <p:spPr/>
@@ -752,7 +546,7 @@
 </file>
 
 <file path=ppt/notesSlides/notesSlide13.xml><?xml version="1.0" encoding="utf-8"?>
-<p:notes xmlns:a="http://schemas.openxmlformats.org/drawingml/2006/main" xmlns:p="http://schemas.openxmlformats.org/presentationml/2006/main" xmlns:r="http://schemas.openxmlformats.org/officeDocument/2006/relationships">
+<p:notes xmlns:a="http://schemas.openxmlformats.org/drawingml/2006/main" xmlns:r="http://schemas.openxmlformats.org/officeDocument/2006/relationships" xmlns:p="http://schemas.openxmlformats.org/presentationml/2006/main">
   <p:cSld>
     <p:spTree>
       <p:nvGrpSpPr>
@@ -772,7 +566,7 @@
         <p:nvSpPr>
           <p:cNvPr id="2" name="Slide Image Placeholder 1"/>
           <p:cNvSpPr>
-            <a:spLocks noGrp="1"/>
+            <a:spLocks noGrp="1" noRot="1" noChangeAspect="1"/>
           </p:cNvSpPr>
           <p:nvPr>
             <p:ph type="sldImg" idx="2"/>
@@ -787,7 +581,7 @@
             <a:spLocks noGrp="1"/>
           </p:cNvSpPr>
           <p:nvPr>
-            <p:ph type="body" idx="3" sz="quarter"/>
+            <p:ph type="body" sz="quarter" idx="3"/>
           </p:nvPr>
         </p:nvSpPr>
         <p:spPr/>
@@ -808,7 +602,7 @@
             <a:spLocks noGrp="1"/>
           </p:cNvSpPr>
           <p:nvPr>
-            <p:ph type="sldNum" idx="5" sz="quarter"/>
+            <p:ph type="sldNum" sz="quarter" idx="5"/>
           </p:nvPr>
         </p:nvSpPr>
         <p:spPr/>
@@ -822,7 +616,7 @@
 </file>
 
 <file path=ppt/notesSlides/notesSlide14.xml><?xml version="1.0" encoding="utf-8"?>
-<p:notes xmlns:a="http://schemas.openxmlformats.org/drawingml/2006/main" xmlns:p="http://schemas.openxmlformats.org/presentationml/2006/main" xmlns:r="http://schemas.openxmlformats.org/officeDocument/2006/relationships">
+<p:notes xmlns:a="http://schemas.openxmlformats.org/drawingml/2006/main" xmlns:r="http://schemas.openxmlformats.org/officeDocument/2006/relationships" xmlns:p="http://schemas.openxmlformats.org/presentationml/2006/main">
   <p:cSld>
     <p:spTree>
       <p:nvGrpSpPr>
@@ -842,7 +636,7 @@
         <p:nvSpPr>
           <p:cNvPr id="2" name="Slide Image Placeholder 1"/>
           <p:cNvSpPr>
-            <a:spLocks noGrp="1"/>
+            <a:spLocks noGrp="1" noRot="1" noChangeAspect="1"/>
           </p:cNvSpPr>
           <p:nvPr>
             <p:ph type="sldImg" idx="2"/>
@@ -857,7 +651,7 @@
             <a:spLocks noGrp="1"/>
           </p:cNvSpPr>
           <p:nvPr>
-            <p:ph type="body" idx="3" sz="quarter"/>
+            <p:ph type="body" sz="quarter" idx="3"/>
           </p:nvPr>
         </p:nvSpPr>
         <p:spPr/>
@@ -878,7 +672,7 @@
             <a:spLocks noGrp="1"/>
           </p:cNvSpPr>
           <p:nvPr>
-            <p:ph type="sldNum" idx="5" sz="quarter"/>
+            <p:ph type="sldNum" sz="quarter" idx="5"/>
           </p:nvPr>
         </p:nvSpPr>
         <p:spPr/>
@@ -892,7 +686,7 @@
 </file>
 
 <file path=ppt/notesSlides/notesSlide15.xml><?xml version="1.0" encoding="utf-8"?>
-<p:notes xmlns:a="http://schemas.openxmlformats.org/drawingml/2006/main" xmlns:p="http://schemas.openxmlformats.org/presentationml/2006/main" xmlns:r="http://schemas.openxmlformats.org/officeDocument/2006/relationships">
+<p:notes xmlns:a="http://schemas.openxmlformats.org/drawingml/2006/main" xmlns:r="http://schemas.openxmlformats.org/officeDocument/2006/relationships" xmlns:p="http://schemas.openxmlformats.org/presentationml/2006/main">
   <p:cSld>
     <p:spTree>
       <p:nvGrpSpPr>
@@ -912,7 +706,7 @@
         <p:nvSpPr>
           <p:cNvPr id="2" name="Slide Image Placeholder 1"/>
           <p:cNvSpPr>
-            <a:spLocks noGrp="1"/>
+            <a:spLocks noGrp="1" noRot="1" noChangeAspect="1"/>
           </p:cNvSpPr>
           <p:nvPr>
             <p:ph type="sldImg" idx="2"/>
@@ -927,7 +721,7 @@
             <a:spLocks noGrp="1"/>
           </p:cNvSpPr>
           <p:nvPr>
-            <p:ph type="body" idx="3" sz="quarter"/>
+            <p:ph type="body" sz="quarter" idx="3"/>
           </p:nvPr>
         </p:nvSpPr>
         <p:spPr/>
@@ -948,7 +742,7 @@
             <a:spLocks noGrp="1"/>
           </p:cNvSpPr>
           <p:nvPr>
-            <p:ph type="sldNum" idx="5" sz="quarter"/>
+            <p:ph type="sldNum" sz="quarter" idx="5"/>
           </p:nvPr>
         </p:nvSpPr>
         <p:spPr/>
@@ -962,7 +756,7 @@
 </file>
 
 <file path=ppt/notesSlides/notesSlide2.xml><?xml version="1.0" encoding="utf-8"?>
-<p:notes xmlns:a="http://schemas.openxmlformats.org/drawingml/2006/main" xmlns:p="http://schemas.openxmlformats.org/presentationml/2006/main" xmlns:r="http://schemas.openxmlformats.org/officeDocument/2006/relationships">
+<p:notes xmlns:a="http://schemas.openxmlformats.org/drawingml/2006/main" xmlns:r="http://schemas.openxmlformats.org/officeDocument/2006/relationships" xmlns:p="http://schemas.openxmlformats.org/presentationml/2006/main">
   <p:cSld>
     <p:spTree>
       <p:nvGrpSpPr>
@@ -982,7 +776,7 @@
         <p:nvSpPr>
           <p:cNvPr id="2" name="Slide Image Placeholder 1"/>
           <p:cNvSpPr>
-            <a:spLocks noGrp="1"/>
+            <a:spLocks noGrp="1" noRot="1" noChangeAspect="1"/>
           </p:cNvSpPr>
           <p:nvPr>
             <p:ph type="sldImg" idx="2"/>
@@ -997,7 +791,7 @@
             <a:spLocks noGrp="1"/>
           </p:cNvSpPr>
           <p:nvPr>
-            <p:ph type="body" idx="3" sz="quarter"/>
+            <p:ph type="body" sz="quarter" idx="3"/>
           </p:nvPr>
         </p:nvSpPr>
         <p:spPr/>
@@ -1018,7 +812,7 @@
             <a:spLocks noGrp="1"/>
           </p:cNvSpPr>
           <p:nvPr>
-            <p:ph type="sldNum" idx="5" sz="quarter"/>
+            <p:ph type="sldNum" sz="quarter" idx="5"/>
           </p:nvPr>
         </p:nvSpPr>
         <p:spPr/>
@@ -1032,7 +826,7 @@
 </file>
 
 <file path=ppt/notesSlides/notesSlide3.xml><?xml version="1.0" encoding="utf-8"?>
-<p:notes xmlns:a="http://schemas.openxmlformats.org/drawingml/2006/main" xmlns:p="http://schemas.openxmlformats.org/presentationml/2006/main" xmlns:r="http://schemas.openxmlformats.org/officeDocument/2006/relationships">
+<p:notes xmlns:a="http://schemas.openxmlformats.org/drawingml/2006/main" xmlns:r="http://schemas.openxmlformats.org/officeDocument/2006/relationships" xmlns:p="http://schemas.openxmlformats.org/presentationml/2006/main">
   <p:cSld>
     <p:spTree>
       <p:nvGrpSpPr>
@@ -1052,7 +846,7 @@
         <p:nvSpPr>
           <p:cNvPr id="2" name="Slide Image Placeholder 1"/>
           <p:cNvSpPr>
-            <a:spLocks noGrp="1"/>
+            <a:spLocks noGrp="1" noRot="1" noChangeAspect="1"/>
           </p:cNvSpPr>
           <p:nvPr>
             <p:ph type="sldImg" idx="2"/>
@@ -1067,7 +861,7 @@
             <a:spLocks noGrp="1"/>
           </p:cNvSpPr>
           <p:nvPr>
-            <p:ph type="body" idx="3" sz="quarter"/>
+            <p:ph type="body" sz="quarter" idx="3"/>
           </p:nvPr>
         </p:nvSpPr>
         <p:spPr/>
@@ -1088,7 +882,7 @@
             <a:spLocks noGrp="1"/>
           </p:cNvSpPr>
           <p:nvPr>
-            <p:ph type="sldNum" idx="5" sz="quarter"/>
+            <p:ph type="sldNum" sz="quarter" idx="5"/>
           </p:nvPr>
         </p:nvSpPr>
         <p:spPr/>
@@ -1102,7 +896,7 @@
 </file>
 
 <file path=ppt/notesSlides/notesSlide4.xml><?xml version="1.0" encoding="utf-8"?>
-<p:notes xmlns:a="http://schemas.openxmlformats.org/drawingml/2006/main" xmlns:p="http://schemas.openxmlformats.org/presentationml/2006/main" xmlns:r="http://schemas.openxmlformats.org/officeDocument/2006/relationships">
+<p:notes xmlns:a="http://schemas.openxmlformats.org/drawingml/2006/main" xmlns:r="http://schemas.openxmlformats.org/officeDocument/2006/relationships" xmlns:p="http://schemas.openxmlformats.org/presentationml/2006/main">
   <p:cSld>
     <p:spTree>
       <p:nvGrpSpPr>
@@ -1122,7 +916,7 @@
         <p:nvSpPr>
           <p:cNvPr id="2" name="Slide Image Placeholder 1"/>
           <p:cNvSpPr>
-            <a:spLocks noGrp="1"/>
+            <a:spLocks noGrp="1" noRot="1" noChangeAspect="1"/>
           </p:cNvSpPr>
           <p:nvPr>
             <p:ph type="sldImg" idx="2"/>
@@ -1137,7 +931,7 @@
             <a:spLocks noGrp="1"/>
           </p:cNvSpPr>
           <p:nvPr>
-            <p:ph type="body" idx="3" sz="quarter"/>
+            <p:ph type="body" sz="quarter" idx="3"/>
           </p:nvPr>
         </p:nvSpPr>
         <p:spPr/>
@@ -1158,7 +952,7 @@
             <a:spLocks noGrp="1"/>
           </p:cNvSpPr>
           <p:nvPr>
-            <p:ph type="sldNum" idx="5" sz="quarter"/>
+            <p:ph type="sldNum" sz="quarter" idx="5"/>
           </p:nvPr>
         </p:nvSpPr>
         <p:spPr/>
@@ -1172,7 +966,7 @@
 </file>
 
 <file path=ppt/notesSlides/notesSlide5.xml><?xml version="1.0" encoding="utf-8"?>
-<p:notes xmlns:a="http://schemas.openxmlformats.org/drawingml/2006/main" xmlns:p="http://schemas.openxmlformats.org/presentationml/2006/main" xmlns:r="http://schemas.openxmlformats.org/officeDocument/2006/relationships">
+<p:notes xmlns:a="http://schemas.openxmlformats.org/drawingml/2006/main" xmlns:r="http://schemas.openxmlformats.org/officeDocument/2006/relationships" xmlns:p="http://schemas.openxmlformats.org/presentationml/2006/main">
   <p:cSld>
     <p:spTree>
       <p:nvGrpSpPr>
@@ -1192,7 +986,7 @@
         <p:nvSpPr>
           <p:cNvPr id="2" name="Slide Image Placeholder 1"/>
           <p:cNvSpPr>
-            <a:spLocks noGrp="1"/>
+            <a:spLocks noGrp="1" noRot="1" noChangeAspect="1"/>
           </p:cNvSpPr>
           <p:nvPr>
             <p:ph type="sldImg" idx="2"/>
@@ -1207,7 +1001,7 @@
             <a:spLocks noGrp="1"/>
           </p:cNvSpPr>
           <p:nvPr>
-            <p:ph type="body" idx="3" sz="quarter"/>
+            <p:ph type="body" sz="quarter" idx="3"/>
           </p:nvPr>
         </p:nvSpPr>
         <p:spPr/>
@@ -1228,7 +1022,7 @@
             <a:spLocks noGrp="1"/>
           </p:cNvSpPr>
           <p:nvPr>
-            <p:ph type="sldNum" idx="5" sz="quarter"/>
+            <p:ph type="sldNum" sz="quarter" idx="5"/>
           </p:nvPr>
         </p:nvSpPr>
         <p:spPr/>
@@ -1242,7 +1036,7 @@
 </file>
 
 <file path=ppt/notesSlides/notesSlide6.xml><?xml version="1.0" encoding="utf-8"?>
-<p:notes xmlns:a="http://schemas.openxmlformats.org/drawingml/2006/main" xmlns:p="http://schemas.openxmlformats.org/presentationml/2006/main" xmlns:r="http://schemas.openxmlformats.org/officeDocument/2006/relationships">
+<p:notes xmlns:a="http://schemas.openxmlformats.org/drawingml/2006/main" xmlns:r="http://schemas.openxmlformats.org/officeDocument/2006/relationships" xmlns:p="http://schemas.openxmlformats.org/presentationml/2006/main">
   <p:cSld>
     <p:spTree>
       <p:nvGrpSpPr>
@@ -1262,7 +1056,7 @@
         <p:nvSpPr>
           <p:cNvPr id="2" name="Slide Image Placeholder 1"/>
           <p:cNvSpPr>
-            <a:spLocks noGrp="1"/>
+            <a:spLocks noGrp="1" noRot="1" noChangeAspect="1"/>
           </p:cNvSpPr>
           <p:nvPr>
             <p:ph type="sldImg" idx="2"/>
@@ -1277,7 +1071,7 @@
             <a:spLocks noGrp="1"/>
           </p:cNvSpPr>
           <p:nvPr>
-            <p:ph type="body" idx="3" sz="quarter"/>
+            <p:ph type="body" sz="quarter" idx="3"/>
           </p:nvPr>
         </p:nvSpPr>
         <p:spPr/>
@@ -1298,7 +1092,7 @@
             <a:spLocks noGrp="1"/>
           </p:cNvSpPr>
           <p:nvPr>
-            <p:ph type="sldNum" idx="5" sz="quarter"/>
+            <p:ph type="sldNum" sz="quarter" idx="5"/>
           </p:nvPr>
         </p:nvSpPr>
         <p:spPr/>
@@ -1312,7 +1106,7 @@
 </file>
 
 <file path=ppt/notesSlides/notesSlide7.xml><?xml version="1.0" encoding="utf-8"?>
-<p:notes xmlns:a="http://schemas.openxmlformats.org/drawingml/2006/main" xmlns:p="http://schemas.openxmlformats.org/presentationml/2006/main" xmlns:r="http://schemas.openxmlformats.org/officeDocument/2006/relationships">
+<p:notes xmlns:a="http://schemas.openxmlformats.org/drawingml/2006/main" xmlns:r="http://schemas.openxmlformats.org/officeDocument/2006/relationships" xmlns:p="http://schemas.openxmlformats.org/presentationml/2006/main">
   <p:cSld>
     <p:spTree>
       <p:nvGrpSpPr>
@@ -1332,7 +1126,7 @@
         <p:nvSpPr>
           <p:cNvPr id="2" name="Slide Image Placeholder 1"/>
           <p:cNvSpPr>
-            <a:spLocks noGrp="1"/>
+            <a:spLocks noGrp="1" noRot="1" noChangeAspect="1"/>
           </p:cNvSpPr>
           <p:nvPr>
             <p:ph type="sldImg" idx="2"/>
@@ -1347,7 +1141,7 @@
             <a:spLocks noGrp="1"/>
           </p:cNvSpPr>
           <p:nvPr>
-            <p:ph type="body" idx="3" sz="quarter"/>
+            <p:ph type="body" sz="quarter" idx="3"/>
           </p:nvPr>
         </p:nvSpPr>
         <p:spPr/>
@@ -1368,7 +1162,7 @@
             <a:spLocks noGrp="1"/>
           </p:cNvSpPr>
           <p:nvPr>
-            <p:ph type="sldNum" idx="5" sz="quarter"/>
+            <p:ph type="sldNum" sz="quarter" idx="5"/>
           </p:nvPr>
         </p:nvSpPr>
         <p:spPr/>
@@ -1382,7 +1176,7 @@
 </file>
 
 <file path=ppt/notesSlides/notesSlide8.xml><?xml version="1.0" encoding="utf-8"?>
-<p:notes xmlns:a="http://schemas.openxmlformats.org/drawingml/2006/main" xmlns:p="http://schemas.openxmlformats.org/presentationml/2006/main" xmlns:r="http://schemas.openxmlformats.org/officeDocument/2006/relationships">
+<p:notes xmlns:a="http://schemas.openxmlformats.org/drawingml/2006/main" xmlns:r="http://schemas.openxmlformats.org/officeDocument/2006/relationships" xmlns:p="http://schemas.openxmlformats.org/presentationml/2006/main">
   <p:cSld>
     <p:spTree>
       <p:nvGrpSpPr>
@@ -1402,7 +1196,7 @@
         <p:nvSpPr>
           <p:cNvPr id="2" name="Slide Image Placeholder 1"/>
           <p:cNvSpPr>
-            <a:spLocks noGrp="1"/>
+            <a:spLocks noGrp="1" noRot="1" noChangeAspect="1"/>
           </p:cNvSpPr>
           <p:nvPr>
             <p:ph type="sldImg" idx="2"/>
@@ -1417,7 +1211,7 @@
             <a:spLocks noGrp="1"/>
           </p:cNvSpPr>
           <p:nvPr>
-            <p:ph type="body" idx="3" sz="quarter"/>
+            <p:ph type="body" sz="quarter" idx="3"/>
           </p:nvPr>
         </p:nvSpPr>
         <p:spPr/>
@@ -1438,7 +1232,7 @@
             <a:spLocks noGrp="1"/>
           </p:cNvSpPr>
           <p:nvPr>
-            <p:ph type="sldNum" idx="5" sz="quarter"/>
+            <p:ph type="sldNum" sz="quarter" idx="5"/>
           </p:nvPr>
         </p:nvSpPr>
         <p:spPr/>
@@ -1452,7 +1246,7 @@
 </file>
 
 <file path=ppt/notesSlides/notesSlide9.xml><?xml version="1.0" encoding="utf-8"?>
-<p:notes xmlns:a="http://schemas.openxmlformats.org/drawingml/2006/main" xmlns:p="http://schemas.openxmlformats.org/presentationml/2006/main" xmlns:r="http://schemas.openxmlformats.org/officeDocument/2006/relationships">
+<p:notes xmlns:a="http://schemas.openxmlformats.org/drawingml/2006/main" xmlns:r="http://schemas.openxmlformats.org/officeDocument/2006/relationships" xmlns:p="http://schemas.openxmlformats.org/presentationml/2006/main">
   <p:cSld>
     <p:spTree>
       <p:nvGrpSpPr>
@@ -1472,7 +1266,7 @@
         <p:nvSpPr>
           <p:cNvPr id="2" name="Slide Image Placeholder 1"/>
           <p:cNvSpPr>
-            <a:spLocks noGrp="1"/>
+            <a:spLocks noGrp="1" noRot="1" noChangeAspect="1"/>
           </p:cNvSpPr>
           <p:nvPr>
             <p:ph type="sldImg" idx="2"/>
@@ -1487,7 +1281,7 @@
             <a:spLocks noGrp="1"/>
           </p:cNvSpPr>
           <p:nvPr>
-            <p:ph type="body" idx="3" sz="quarter"/>
+            <p:ph type="body" sz="quarter" idx="3"/>
           </p:nvPr>
         </p:nvSpPr>
         <p:spPr/>
@@ -1508,7 +1302,7 @@
             <a:spLocks noGrp="1"/>
           </p:cNvSpPr>
           <p:nvPr>
-            <p:ph type="sldNum" idx="5" sz="quarter"/>
+            <p:ph type="sldNum" sz="quarter" idx="5"/>
           </p:nvPr>
         </p:nvSpPr>
         <p:spPr/>
@@ -1559,10 +1353,9 @@
           <a:lstStyle/>
           <a:p>
             <a:r>
-              <a:rPr lang="en-US" smtClean="0"/>
+              <a:rPr lang="en-US"/>
               <a:t>Click to edit Master title style</a:t>
             </a:r>
-            <a:endParaRPr lang="en-US"/>
           </a:p>
         </p:txBody>
       </p:sp>
@@ -1678,10 +1471,9 @@
           </a:lstStyle>
           <a:p>
             <a:r>
-              <a:rPr lang="en-US" smtClean="0"/>
+              <a:rPr lang="en-US"/>
               <a:t>Click to edit Master subtitle style</a:t>
             </a:r>
-            <a:endParaRPr lang="en-US"/>
           </a:p>
         </p:txBody>
       </p:sp>
@@ -1702,7 +1494,7 @@
           <a:p>
             <a:fld id="{5BCAD085-E8A6-8845-BD4E-CB4CCA059FC4}" type="datetimeFigureOut">
               <a:rPr lang="en-US" smtClean="0"/>
-              <a:t>1/27/13</a:t>
+              <a:t>10/12/2026</a:t>
             </a:fld>
             <a:endParaRPr lang="en-US"/>
           </a:p>
@@ -1796,10 +1588,9 @@
           <a:lstStyle/>
           <a:p>
             <a:r>
-              <a:rPr lang="en-US" smtClean="0"/>
+              <a:rPr lang="en-US"/>
               <a:t>Click to edit Master title style</a:t>
             </a:r>
-            <a:endParaRPr lang="en-US"/>
           </a:p>
         </p:txBody>
       </p:sp>
@@ -1820,38 +1611,37 @@
           <a:p>
             <a:pPr lvl="0"/>
             <a:r>
-              <a:rPr lang="en-US" smtClean="0"/>
+              <a:rPr lang="en-US"/>
               <a:t>Click to edit Master text styles</a:t>
             </a:r>
           </a:p>
           <a:p>
             <a:pPr lvl="1"/>
             <a:r>
-              <a:rPr lang="en-US" smtClean="0"/>
+              <a:rPr lang="en-US"/>
               <a:t>Second level</a:t>
             </a:r>
           </a:p>
           <a:p>
             <a:pPr lvl="2"/>
             <a:r>
-              <a:rPr lang="en-US" smtClean="0"/>
+              <a:rPr lang="en-US"/>
               <a:t>Third level</a:t>
             </a:r>
           </a:p>
           <a:p>
             <a:pPr lvl="3"/>
             <a:r>
-              <a:rPr lang="en-US" smtClean="0"/>
+              <a:rPr lang="en-US"/>
               <a:t>Fourth level</a:t>
             </a:r>
           </a:p>
           <a:p>
             <a:pPr lvl="4"/>
             <a:r>
-              <a:rPr lang="en-US" smtClean="0"/>
+              <a:rPr lang="en-US"/>
               <a:t>Fifth level</a:t>
             </a:r>
-            <a:endParaRPr lang="en-US"/>
           </a:p>
         </p:txBody>
       </p:sp>
@@ -1872,7 +1662,7 @@
           <a:p>
             <a:fld id="{5BCAD085-E8A6-8845-BD4E-CB4CCA059FC4}" type="datetimeFigureOut">
               <a:rPr lang="en-US" smtClean="0"/>
-              <a:t>1/27/13</a:t>
+              <a:t>10/12/2026</a:t>
             </a:fld>
             <a:endParaRPr lang="en-US"/>
           </a:p>
@@ -1971,10 +1761,9 @@
           <a:lstStyle/>
           <a:p>
             <a:r>
-              <a:rPr lang="en-US" smtClean="0"/>
+              <a:rPr lang="en-US"/>
               <a:t>Click to edit Master title style</a:t>
             </a:r>
-            <a:endParaRPr lang="en-US"/>
           </a:p>
         </p:txBody>
       </p:sp>
@@ -2000,38 +1789,37 @@
           <a:p>
             <a:pPr lvl="0"/>
             <a:r>
-              <a:rPr lang="en-US" smtClean="0"/>
+              <a:rPr lang="en-US"/>
               <a:t>Click to edit Master text styles</a:t>
             </a:r>
           </a:p>
           <a:p>
             <a:pPr lvl="1"/>
             <a:r>
-              <a:rPr lang="en-US" smtClean="0"/>
+              <a:rPr lang="en-US"/>
               <a:t>Second level</a:t>
             </a:r>
           </a:p>
           <a:p>
             <a:pPr lvl="2"/>
             <a:r>
-              <a:rPr lang="en-US" smtClean="0"/>
+              <a:rPr lang="en-US"/>
               <a:t>Third level</a:t>
             </a:r>
           </a:p>
           <a:p>
             <a:pPr lvl="3"/>
             <a:r>
-              <a:rPr lang="en-US" smtClean="0"/>
+              <a:rPr lang="en-US"/>
               <a:t>Fourth level</a:t>
             </a:r>
           </a:p>
           <a:p>
             <a:pPr lvl="4"/>
             <a:r>
-              <a:rPr lang="en-US" smtClean="0"/>
+              <a:rPr lang="en-US"/>
               <a:t>Fifth level</a:t>
             </a:r>
-            <a:endParaRPr lang="en-US"/>
           </a:p>
         </p:txBody>
       </p:sp>
@@ -2052,7 +1840,7 @@
           <a:p>
             <a:fld id="{5BCAD085-E8A6-8845-BD4E-CB4CCA059FC4}" type="datetimeFigureOut">
               <a:rPr lang="en-US" smtClean="0"/>
-              <a:t>1/27/13</a:t>
+              <a:t>10/12/2026</a:t>
             </a:fld>
             <a:endParaRPr lang="en-US"/>
           </a:p>
@@ -2146,10 +1934,9 @@
           <a:lstStyle/>
           <a:p>
             <a:r>
-              <a:rPr lang="en-US" smtClean="0"/>
+              <a:rPr lang="en-US"/>
               <a:t>Click to edit Master title style</a:t>
             </a:r>
-            <a:endParaRPr lang="en-US"/>
           </a:p>
         </p:txBody>
       </p:sp>
@@ -2170,38 +1957,37 @@
           <a:p>
             <a:pPr lvl="0"/>
             <a:r>
-              <a:rPr lang="en-US" smtClean="0"/>
+              <a:rPr lang="en-US"/>
               <a:t>Click to edit Master text styles</a:t>
             </a:r>
           </a:p>
           <a:p>
             <a:pPr lvl="1"/>
             <a:r>
-              <a:rPr lang="en-US" smtClean="0"/>
+              <a:rPr lang="en-US"/>
               <a:t>Second level</a:t>
             </a:r>
           </a:p>
           <a:p>
             <a:pPr lvl="2"/>
             <a:r>
-              <a:rPr lang="en-US" smtClean="0"/>
+              <a:rPr lang="en-US"/>
               <a:t>Third level</a:t>
             </a:r>
           </a:p>
           <a:p>
             <a:pPr lvl="3"/>
             <a:r>
-              <a:rPr lang="en-US" smtClean="0"/>
+              <a:rPr lang="en-US"/>
               <a:t>Fourth level</a:t>
             </a:r>
           </a:p>
           <a:p>
             <a:pPr lvl="4"/>
             <a:r>
-              <a:rPr lang="en-US" smtClean="0"/>
+              <a:rPr lang="en-US"/>
               <a:t>Fifth level</a:t>
             </a:r>
-            <a:endParaRPr lang="en-US"/>
           </a:p>
         </p:txBody>
       </p:sp>
@@ -2222,7 +2008,7 @@
           <a:p>
             <a:fld id="{5BCAD085-E8A6-8845-BD4E-CB4CCA059FC4}" type="datetimeFigureOut">
               <a:rPr lang="en-US" smtClean="0"/>
-              <a:t>1/27/13</a:t>
+              <a:t>10/12/2026</a:t>
             </a:fld>
             <a:endParaRPr lang="en-US"/>
           </a:p>
@@ -2325,10 +2111,9 @@
           </a:lstStyle>
           <a:p>
             <a:r>
-              <a:rPr lang="en-US" smtClean="0"/>
+              <a:rPr lang="en-US"/>
               <a:t>Click to edit Master title style</a:t>
             </a:r>
-            <a:endParaRPr lang="en-US"/>
           </a:p>
         </p:txBody>
       </p:sp>
@@ -2445,7 +2230,7 @@
           <a:p>
             <a:pPr lvl="0"/>
             <a:r>
-              <a:rPr lang="en-US" smtClean="0"/>
+              <a:rPr lang="en-US"/>
               <a:t>Click to edit Master text styles</a:t>
             </a:r>
           </a:p>
@@ -2468,7 +2253,7 @@
           <a:p>
             <a:fld id="{5BCAD085-E8A6-8845-BD4E-CB4CCA059FC4}" type="datetimeFigureOut">
               <a:rPr lang="en-US" smtClean="0"/>
-              <a:t>1/27/13</a:t>
+              <a:t>10/12/2026</a:t>
             </a:fld>
             <a:endParaRPr lang="en-US"/>
           </a:p>
@@ -2562,10 +2347,9 @@
           <a:lstStyle/>
           <a:p>
             <a:r>
-              <a:rPr lang="en-US" smtClean="0"/>
+              <a:rPr lang="en-US"/>
               <a:t>Click to edit Master title style</a:t>
             </a:r>
-            <a:endParaRPr lang="en-US"/>
           </a:p>
         </p:txBody>
       </p:sp>
@@ -2619,38 +2403,37 @@
           <a:p>
             <a:pPr lvl="0"/>
             <a:r>
-              <a:rPr lang="en-US" smtClean="0"/>
+              <a:rPr lang="en-US"/>
               <a:t>Click to edit Master text styles</a:t>
             </a:r>
           </a:p>
           <a:p>
             <a:pPr lvl="1"/>
             <a:r>
-              <a:rPr lang="en-US" smtClean="0"/>
+              <a:rPr lang="en-US"/>
               <a:t>Second level</a:t>
             </a:r>
           </a:p>
           <a:p>
             <a:pPr lvl="2"/>
             <a:r>
-              <a:rPr lang="en-US" smtClean="0"/>
+              <a:rPr lang="en-US"/>
               <a:t>Third level</a:t>
             </a:r>
           </a:p>
           <a:p>
             <a:pPr lvl="3"/>
             <a:r>
-              <a:rPr lang="en-US" smtClean="0"/>
+              <a:rPr lang="en-US"/>
               <a:t>Fourth level</a:t>
             </a:r>
           </a:p>
           <a:p>
             <a:pPr lvl="4"/>
             <a:r>
-              <a:rPr lang="en-US" smtClean="0"/>
+              <a:rPr lang="en-US"/>
               <a:t>Fifth level</a:t>
             </a:r>
-            <a:endParaRPr lang="en-US"/>
           </a:p>
         </p:txBody>
       </p:sp>
@@ -2704,38 +2487,37 @@
           <a:p>
             <a:pPr lvl="0"/>
             <a:r>
-              <a:rPr lang="en-US" smtClean="0"/>
+              <a:rPr lang="en-US"/>
               <a:t>Click to edit Master text styles</a:t>
             </a:r>
           </a:p>
           <a:p>
             <a:pPr lvl="1"/>
             <a:r>
-              <a:rPr lang="en-US" smtClean="0"/>
+              <a:rPr lang="en-US"/>
               <a:t>Second level</a:t>
             </a:r>
           </a:p>
           <a:p>
             <a:pPr lvl="2"/>
             <a:r>
-              <a:rPr lang="en-US" smtClean="0"/>
+              <a:rPr lang="en-US"/>
               <a:t>Third level</a:t>
             </a:r>
           </a:p>
           <a:p>
             <a:pPr lvl="3"/>
             <a:r>
-              <a:rPr lang="en-US" smtClean="0"/>
+              <a:rPr lang="en-US"/>
               <a:t>Fourth level</a:t>
             </a:r>
           </a:p>
           <a:p>
             <a:pPr lvl="4"/>
             <a:r>
-              <a:rPr lang="en-US" smtClean="0"/>
+              <a:rPr lang="en-US"/>
               <a:t>Fifth level</a:t>
             </a:r>
-            <a:endParaRPr lang="en-US"/>
           </a:p>
         </p:txBody>
       </p:sp>
@@ -2756,7 +2538,7 @@
           <a:p>
             <a:fld id="{5BCAD085-E8A6-8845-BD4E-CB4CCA059FC4}" type="datetimeFigureOut">
               <a:rPr lang="en-US" smtClean="0"/>
-              <a:t>1/27/13</a:t>
+              <a:t>10/12/2026</a:t>
             </a:fld>
             <a:endParaRPr lang="en-US"/>
           </a:p>
@@ -2854,10 +2636,9 @@
           </a:lstStyle>
           <a:p>
             <a:r>
-              <a:rPr lang="en-US" smtClean="0"/>
+              <a:rPr lang="en-US"/>
               <a:t>Click to edit Master title style</a:t>
             </a:r>
-            <a:endParaRPr lang="en-US"/>
           </a:p>
         </p:txBody>
       </p:sp>
@@ -2920,7 +2701,7 @@
           <a:p>
             <a:pPr lvl="0"/>
             <a:r>
-              <a:rPr lang="en-US" smtClean="0"/>
+              <a:rPr lang="en-US"/>
               <a:t>Click to edit Master text styles</a:t>
             </a:r>
           </a:p>
@@ -2976,38 +2757,37 @@
           <a:p>
             <a:pPr lvl="0"/>
             <a:r>
-              <a:rPr lang="en-US" smtClean="0"/>
+              <a:rPr lang="en-US"/>
               <a:t>Click to edit Master text styles</a:t>
             </a:r>
           </a:p>
           <a:p>
             <a:pPr lvl="1"/>
             <a:r>
-              <a:rPr lang="en-US" smtClean="0"/>
+              <a:rPr lang="en-US"/>
               <a:t>Second level</a:t>
             </a:r>
           </a:p>
           <a:p>
             <a:pPr lvl="2"/>
             <a:r>
-              <a:rPr lang="en-US" smtClean="0"/>
+              <a:rPr lang="en-US"/>
               <a:t>Third level</a:t>
             </a:r>
           </a:p>
           <a:p>
             <a:pPr lvl="3"/>
             <a:r>
-              <a:rPr lang="en-US" smtClean="0"/>
+              <a:rPr lang="en-US"/>
               <a:t>Fourth level</a:t>
             </a:r>
           </a:p>
           <a:p>
             <a:pPr lvl="4"/>
             <a:r>
-              <a:rPr lang="en-US" smtClean="0"/>
+              <a:rPr lang="en-US"/>
               <a:t>Fifth level</a:t>
             </a:r>
-            <a:endParaRPr lang="en-US"/>
           </a:p>
         </p:txBody>
       </p:sp>
@@ -3070,7 +2850,7 @@
           <a:p>
             <a:pPr lvl="0"/>
             <a:r>
-              <a:rPr lang="en-US" smtClean="0"/>
+              <a:rPr lang="en-US"/>
               <a:t>Click to edit Master text styles</a:t>
             </a:r>
           </a:p>
@@ -3126,38 +2906,37 @@
           <a:p>
             <a:pPr lvl="0"/>
             <a:r>
-              <a:rPr lang="en-US" smtClean="0"/>
+              <a:rPr lang="en-US"/>
               <a:t>Click to edit Master text styles</a:t>
             </a:r>
           </a:p>
           <a:p>
             <a:pPr lvl="1"/>
             <a:r>
-              <a:rPr lang="en-US" smtClean="0"/>
+              <a:rPr lang="en-US"/>
               <a:t>Second level</a:t>
             </a:r>
           </a:p>
           <a:p>
             <a:pPr lvl="2"/>
             <a:r>
-              <a:rPr lang="en-US" smtClean="0"/>
+              <a:rPr lang="en-US"/>
               <a:t>Third level</a:t>
             </a:r>
           </a:p>
           <a:p>
             <a:pPr lvl="3"/>
             <a:r>
-              <a:rPr lang="en-US" smtClean="0"/>
+              <a:rPr lang="en-US"/>
               <a:t>Fourth level</a:t>
             </a:r>
           </a:p>
           <a:p>
             <a:pPr lvl="4"/>
             <a:r>
-              <a:rPr lang="en-US" smtClean="0"/>
+              <a:rPr lang="en-US"/>
               <a:t>Fifth level</a:t>
             </a:r>
-            <a:endParaRPr lang="en-US"/>
           </a:p>
         </p:txBody>
       </p:sp>
@@ -3178,7 +2957,7 @@
           <a:p>
             <a:fld id="{5BCAD085-E8A6-8845-BD4E-CB4CCA059FC4}" type="datetimeFigureOut">
               <a:rPr lang="en-US" smtClean="0"/>
-              <a:t>1/27/13</a:t>
+              <a:t>10/12/2026</a:t>
             </a:fld>
             <a:endParaRPr lang="en-US"/>
           </a:p>
@@ -3272,10 +3051,9 @@
           <a:lstStyle/>
           <a:p>
             <a:r>
-              <a:rPr lang="en-US" smtClean="0"/>
+              <a:rPr lang="en-US"/>
               <a:t>Click to edit Master title style</a:t>
             </a:r>
-            <a:endParaRPr lang="en-US"/>
           </a:p>
         </p:txBody>
       </p:sp>
@@ -3296,7 +3074,7 @@
           <a:p>
             <a:fld id="{5BCAD085-E8A6-8845-BD4E-CB4CCA059FC4}" type="datetimeFigureOut">
               <a:rPr lang="en-US" smtClean="0"/>
-              <a:t>1/27/13</a:t>
+              <a:t>10/12/2026</a:t>
             </a:fld>
             <a:endParaRPr lang="en-US"/>
           </a:p>
@@ -3391,7 +3169,7 @@
           <a:p>
             <a:fld id="{5BCAD085-E8A6-8845-BD4E-CB4CCA059FC4}" type="datetimeFigureOut">
               <a:rPr lang="en-US" smtClean="0"/>
-              <a:t>1/27/13</a:t>
+              <a:t>10/12/2026</a:t>
             </a:fld>
             <a:endParaRPr lang="en-US"/>
           </a:p>
@@ -3494,10 +3272,9 @@
           </a:lstStyle>
           <a:p>
             <a:r>
-              <a:rPr lang="en-US" smtClean="0"/>
+              <a:rPr lang="en-US"/>
               <a:t>Click to edit Master title style</a:t>
             </a:r>
-            <a:endParaRPr lang="en-US"/>
           </a:p>
         </p:txBody>
       </p:sp>
@@ -3551,38 +3328,37 @@
           <a:p>
             <a:pPr lvl="0"/>
             <a:r>
-              <a:rPr lang="en-US" smtClean="0"/>
+              <a:rPr lang="en-US"/>
               <a:t>Click to edit Master text styles</a:t>
             </a:r>
           </a:p>
           <a:p>
             <a:pPr lvl="1"/>
             <a:r>
-              <a:rPr lang="en-US" smtClean="0"/>
+              <a:rPr lang="en-US"/>
               <a:t>Second level</a:t>
             </a:r>
           </a:p>
           <a:p>
             <a:pPr lvl="2"/>
             <a:r>
-              <a:rPr lang="en-US" smtClean="0"/>
+              <a:rPr lang="en-US"/>
               <a:t>Third level</a:t>
             </a:r>
           </a:p>
           <a:p>
             <a:pPr lvl="3"/>
             <a:r>
-              <a:rPr lang="en-US" smtClean="0"/>
+              <a:rPr lang="en-US"/>
               <a:t>Fourth level</a:t>
             </a:r>
           </a:p>
           <a:p>
             <a:pPr lvl="4"/>
             <a:r>
-              <a:rPr lang="en-US" smtClean="0"/>
+              <a:rPr lang="en-US"/>
               <a:t>Fifth level</a:t>
             </a:r>
-            <a:endParaRPr lang="en-US"/>
           </a:p>
         </p:txBody>
       </p:sp>
@@ -3645,7 +3421,7 @@
           <a:p>
             <a:pPr lvl="0"/>
             <a:r>
-              <a:rPr lang="en-US" smtClean="0"/>
+              <a:rPr lang="en-US"/>
               <a:t>Click to edit Master text styles</a:t>
             </a:r>
           </a:p>
@@ -3668,7 +3444,7 @@
           <a:p>
             <a:fld id="{5BCAD085-E8A6-8845-BD4E-CB4CCA059FC4}" type="datetimeFigureOut">
               <a:rPr lang="en-US" smtClean="0"/>
-              <a:t>1/27/13</a:t>
+              <a:t>10/12/2026</a:t>
             </a:fld>
             <a:endParaRPr lang="en-US"/>
           </a:p>
@@ -3771,10 +3547,9 @@
           </a:lstStyle>
           <a:p>
             <a:r>
-              <a:rPr lang="en-US" smtClean="0"/>
+              <a:rPr lang="en-US"/>
               <a:t>Click to edit Master title style</a:t>
             </a:r>
-            <a:endParaRPr lang="en-US"/>
           </a:p>
         </p:txBody>
       </p:sp>
@@ -3898,7 +3673,7 @@
           <a:p>
             <a:pPr lvl="0"/>
             <a:r>
-              <a:rPr lang="en-US" smtClean="0"/>
+              <a:rPr lang="en-US"/>
               <a:t>Click to edit Master text styles</a:t>
             </a:r>
           </a:p>
@@ -3921,7 +3696,7 @@
           <a:p>
             <a:fld id="{5BCAD085-E8A6-8845-BD4E-CB4CCA059FC4}" type="datetimeFigureOut">
               <a:rPr lang="en-US" smtClean="0"/>
-              <a:t>1/27/13</a:t>
+              <a:t>10/12/2026</a:t>
             </a:fld>
             <a:endParaRPr lang="en-US"/>
           </a:p>
@@ -4030,10 +3805,9 @@
           <a:lstStyle/>
           <a:p>
             <a:r>
-              <a:rPr lang="en-US" smtClean="0"/>
+              <a:rPr lang="en-US"/>
               <a:t>Click to edit Master title style</a:t>
             </a:r>
-            <a:endParaRPr lang="en-US"/>
           </a:p>
         </p:txBody>
       </p:sp>
@@ -4064,38 +3838,37 @@
           <a:p>
             <a:pPr lvl="0"/>
             <a:r>
-              <a:rPr lang="en-US" smtClean="0"/>
+              <a:rPr lang="en-US"/>
               <a:t>Click to edit Master text styles</a:t>
             </a:r>
           </a:p>
           <a:p>
             <a:pPr lvl="1"/>
             <a:r>
-              <a:rPr lang="en-US" smtClean="0"/>
+              <a:rPr lang="en-US"/>
               <a:t>Second level</a:t>
             </a:r>
           </a:p>
           <a:p>
             <a:pPr lvl="2"/>
             <a:r>
-              <a:rPr lang="en-US" smtClean="0"/>
+              <a:rPr lang="en-US"/>
               <a:t>Third level</a:t>
             </a:r>
           </a:p>
           <a:p>
             <a:pPr lvl="3"/>
             <a:r>
-              <a:rPr lang="en-US" smtClean="0"/>
+              <a:rPr lang="en-US"/>
               <a:t>Fourth level</a:t>
             </a:r>
           </a:p>
           <a:p>
             <a:pPr lvl="4"/>
             <a:r>
-              <a:rPr lang="en-US" smtClean="0"/>
+              <a:rPr lang="en-US"/>
               <a:t>Fifth level</a:t>
             </a:r>
-            <a:endParaRPr lang="en-US"/>
           </a:p>
         </p:txBody>
       </p:sp>
@@ -4134,7 +3907,7 @@
           <a:p>
             <a:fld id="{5BCAD085-E8A6-8845-BD4E-CB4CCA059FC4}" type="datetimeFigureOut">
               <a:rPr lang="en-US" smtClean="0"/>
-              <a:t>1/27/13</a:t>
+              <a:t>10/12/2026</a:t>
             </a:fld>
             <a:endParaRPr lang="en-US"/>
           </a:p>
@@ -4493,7 +4266,7 @@
 </file>
 
 <file path=ppt/slides/slide1.xml><?xml version="1.0" encoding="utf-8"?>
-<p:sld xmlns:a="http://schemas.openxmlformats.org/drawingml/2006/main" xmlns:p="http://schemas.openxmlformats.org/presentationml/2006/main" xmlns:r="http://schemas.openxmlformats.org/officeDocument/2006/relationships">
+<p:sld xmlns:a="http://schemas.openxmlformats.org/drawingml/2006/main" xmlns:r="http://schemas.openxmlformats.org/officeDocument/2006/relationships" xmlns:p="http://schemas.openxmlformats.org/presentationml/2006/main">
   <p:cSld>
     <p:spTree>
       <p:nvGrpSpPr>
@@ -4501,7 +4274,14 @@
         <p:cNvGrpSpPr/>
         <p:nvPr/>
       </p:nvGrpSpPr>
-      <p:grpSpPr/>
+      <p:grpSpPr>
+        <a:xfrm>
+          <a:off x="0" y="0"/>
+          <a:ext cx="0" cy="0"/>
+          <a:chOff x="0" y="0"/>
+          <a:chExt cx="0" cy="0"/>
+        </a:xfrm>
+      </p:grpSpPr>
       <p:sp>
         <p:nvSpPr>
           <p:cNvPr id="2" name="Rectangle 1"/>
@@ -4542,6 +4322,7 @@
           <a:lstStyle/>
           <a:p>
             <a:pPr algn="ctr"/>
+            <a:endParaRPr/>
           </a:p>
         </p:txBody>
       </p:sp>
@@ -4603,6 +4384,7 @@
           <a:lstStyle/>
           <a:p>
             <a:pPr algn="ctr"/>
+            <a:endParaRPr/>
           </a:p>
         </p:txBody>
       </p:sp>
@@ -4615,7 +4397,7 @@
           <p:nvPr/>
         </p:nvPicPr>
         <p:blipFill>
-          <a:blip r:embed="rId2"/>
+          <a:blip r:embed="rId3"/>
           <a:stretch>
             <a:fillRect/>
           </a:stretch>
@@ -4647,7 +4429,7 @@
           <a:noFill/>
         </p:spPr>
         <p:txBody>
-          <a:bodyPr wrap="square" anchor="t" lIns="45720" rIns="45720" tIns="27432" bIns="27432">
+          <a:bodyPr wrap="square" lIns="45720" tIns="27432" rIns="45720" bIns="27432" anchor="t">
             <a:spAutoFit/>
           </a:bodyPr>
           <a:lstStyle/>
@@ -4682,7 +4464,7 @@
           <a:noFill/>
         </p:spPr>
         <p:txBody>
-          <a:bodyPr wrap="square" anchor="t" lIns="45720" rIns="45720" tIns="27432" bIns="27432">
+          <a:bodyPr wrap="square" lIns="45720" tIns="27432" rIns="45720" bIns="27432" anchor="t">
             <a:spAutoFit/>
           </a:bodyPr>
           <a:lstStyle/>
@@ -4717,14 +4499,14 @@
           <a:noFill/>
         </p:spPr>
         <p:txBody>
-          <a:bodyPr wrap="square" anchor="t" lIns="45720" rIns="45720" tIns="27432" bIns="27432">
+          <a:bodyPr wrap="square" lIns="45720" tIns="27432" rIns="45720" bIns="27432" anchor="t">
             <a:spAutoFit/>
           </a:bodyPr>
           <a:lstStyle/>
           <a:p>
             <a:pPr algn="l"/>
             <a:r>
-              <a:rPr sz="2200" b="0" lang="hi-IN">
+              <a:rPr lang="hi-IN" sz="2200" b="0">
                 <a:solidFill>
                   <a:srgbClr val="1F2937"/>
                 </a:solidFill>
@@ -4754,7 +4536,7 @@
           <a:noFill/>
         </p:spPr>
         <p:txBody>
-          <a:bodyPr wrap="square" anchor="t" lIns="45720" rIns="45720" tIns="27432" bIns="27432">
+          <a:bodyPr wrap="square" lIns="45720" tIns="27432" rIns="45720" bIns="27432" anchor="t">
             <a:spAutoFit/>
           </a:bodyPr>
           <a:lstStyle/>
@@ -4789,7 +4571,7 @@
           <a:noFill/>
         </p:spPr>
         <p:txBody>
-          <a:bodyPr wrap="square" anchor="t" lIns="45720" rIns="45720" tIns="27432" bIns="27432">
+          <a:bodyPr wrap="square" lIns="45720" tIns="27432" rIns="45720" bIns="27432" anchor="t">
             <a:spAutoFit/>
           </a:bodyPr>
           <a:lstStyle/>
@@ -4844,7 +4626,7 @@
           <a:noFill/>
         </p:spPr>
         <p:txBody>
-          <a:bodyPr wrap="square" anchor="t" lIns="45720" rIns="45720" tIns="27432" bIns="27432">
+          <a:bodyPr wrap="square" lIns="45720" tIns="27432" rIns="45720" bIns="27432" anchor="t">
             <a:spAutoFit/>
           </a:bodyPr>
           <a:lstStyle/>
@@ -4871,7 +4653,7 @@
 </file>
 
 <file path=ppt/slides/slide10.xml><?xml version="1.0" encoding="utf-8"?>
-<p:sld xmlns:a="http://schemas.openxmlformats.org/drawingml/2006/main" xmlns:p="http://schemas.openxmlformats.org/presentationml/2006/main" xmlns:r="http://schemas.openxmlformats.org/officeDocument/2006/relationships">
+<p:sld xmlns:a="http://schemas.openxmlformats.org/drawingml/2006/main" xmlns:r="http://schemas.openxmlformats.org/officeDocument/2006/relationships" xmlns:p="http://schemas.openxmlformats.org/presentationml/2006/main">
   <p:cSld>
     <p:spTree>
       <p:nvGrpSpPr>
@@ -4879,7 +4661,14 @@
         <p:cNvGrpSpPr/>
         <p:nvPr/>
       </p:nvGrpSpPr>
-      <p:grpSpPr/>
+      <p:grpSpPr>
+        <a:xfrm>
+          <a:off x="0" y="0"/>
+          <a:ext cx="0" cy="0"/>
+          <a:chOff x="0" y="0"/>
+          <a:chExt cx="0" cy="0"/>
+        </a:xfrm>
+      </p:grpSpPr>
       <p:sp>
         <p:nvSpPr>
           <p:cNvPr id="2" name="Rectangle 1"/>
@@ -4920,6 +4709,7 @@
           <a:lstStyle/>
           <a:p>
             <a:pPr algn="ctr"/>
+            <a:endParaRPr/>
           </a:p>
         </p:txBody>
       </p:sp>
@@ -4963,6 +4753,7 @@
           <a:lstStyle/>
           <a:p>
             <a:pPr algn="ctr"/>
+            <a:endParaRPr/>
           </a:p>
         </p:txBody>
       </p:sp>
@@ -4983,7 +4774,7 @@
           <a:noFill/>
         </p:spPr>
         <p:txBody>
-          <a:bodyPr wrap="square" anchor="ctr" lIns="45720" rIns="45720" tIns="27432" bIns="27432">
+          <a:bodyPr wrap="square" lIns="45720" tIns="27432" rIns="45720" bIns="27432" anchor="ctr">
             <a:spAutoFit/>
           </a:bodyPr>
           <a:lstStyle/>
@@ -5010,7 +4801,7 @@
           <p:nvPr/>
         </p:nvPicPr>
         <p:blipFill>
-          <a:blip r:embed="rId2"/>
+          <a:blip r:embed="rId3"/>
           <a:stretch>
             <a:fillRect/>
           </a:stretch>
@@ -5042,7 +4833,7 @@
           <a:noFill/>
         </p:spPr>
         <p:txBody>
-          <a:bodyPr wrap="square" anchor="t" lIns="45720" rIns="45720" tIns="27432" bIns="27432">
+          <a:bodyPr wrap="square" lIns="45720" tIns="27432" rIns="45720" bIns="27432" anchor="t">
             <a:spAutoFit/>
           </a:bodyPr>
           <a:lstStyle/>
@@ -5077,7 +4868,7 @@
           <a:noFill/>
         </p:spPr>
         <p:txBody>
-          <a:bodyPr wrap="square" anchor="t" lIns="45720" rIns="45720" tIns="27432" bIns="27432">
+          <a:bodyPr wrap="square" lIns="45720" tIns="27432" rIns="45720" bIns="27432" anchor="t">
             <a:spAutoFit/>
           </a:bodyPr>
           <a:lstStyle/>
@@ -5140,6 +4931,7 @@
           <a:lstStyle/>
           <a:p>
             <a:pPr algn="ctr"/>
+            <a:endParaRPr/>
           </a:p>
         </p:txBody>
       </p:sp>
@@ -5184,6 +4976,7 @@
           <a:lstStyle/>
           <a:p>
             <a:pPr algn="ctr"/>
+            <a:endParaRPr/>
           </a:p>
         </p:txBody>
       </p:sp>
@@ -5196,7 +4989,7 @@
           <p:nvPr/>
         </p:nvPicPr>
         <p:blipFill>
-          <a:blip r:embed="rId3"/>
+          <a:blip r:embed="rId4"/>
           <a:stretch>
             <a:fillRect/>
           </a:stretch>
@@ -5228,7 +5021,7 @@
           <a:noFill/>
         </p:spPr>
         <p:txBody>
-          <a:bodyPr wrap="square" anchor="ctr" lIns="45720" rIns="45720" tIns="27432" bIns="27432">
+          <a:bodyPr wrap="square" lIns="45720" tIns="27432" rIns="45720" bIns="27432" anchor="ctr">
             <a:spAutoFit/>
           </a:bodyPr>
           <a:lstStyle/>
@@ -5263,7 +5056,7 @@
           <a:noFill/>
         </p:spPr>
         <p:txBody>
-          <a:bodyPr wrap="square" anchor="ctr" lIns="45720" rIns="45720" tIns="27432" bIns="27432">
+          <a:bodyPr wrap="square" lIns="45720" tIns="27432" rIns="45720" bIns="27432" anchor="ctr">
             <a:spAutoFit/>
           </a:bodyPr>
           <a:lstStyle/>
@@ -5326,6 +5119,7 @@
           <a:lstStyle/>
           <a:p>
             <a:pPr algn="ctr"/>
+            <a:endParaRPr/>
           </a:p>
         </p:txBody>
       </p:sp>
@@ -5370,6 +5164,7 @@
           <a:lstStyle/>
           <a:p>
             <a:pPr algn="ctr"/>
+            <a:endParaRPr/>
           </a:p>
         </p:txBody>
       </p:sp>
@@ -5382,7 +5177,7 @@
           <p:nvPr/>
         </p:nvPicPr>
         <p:blipFill>
-          <a:blip r:embed="rId4"/>
+          <a:blip r:embed="rId5"/>
           <a:stretch>
             <a:fillRect/>
           </a:stretch>
@@ -5414,7 +5209,7 @@
           <a:noFill/>
         </p:spPr>
         <p:txBody>
-          <a:bodyPr wrap="square" anchor="ctr" lIns="45720" rIns="45720" tIns="27432" bIns="27432">
+          <a:bodyPr wrap="square" lIns="45720" tIns="27432" rIns="45720" bIns="27432" anchor="ctr">
             <a:spAutoFit/>
           </a:bodyPr>
           <a:lstStyle/>
@@ -5449,7 +5244,7 @@
           <a:noFill/>
         </p:spPr>
         <p:txBody>
-          <a:bodyPr wrap="square" anchor="ctr" lIns="45720" rIns="45720" tIns="27432" bIns="27432">
+          <a:bodyPr wrap="square" lIns="45720" tIns="27432" rIns="45720" bIns="27432" anchor="ctr">
             <a:spAutoFit/>
           </a:bodyPr>
           <a:lstStyle/>
@@ -5512,6 +5307,7 @@
           <a:lstStyle/>
           <a:p>
             <a:pPr algn="ctr"/>
+            <a:endParaRPr/>
           </a:p>
         </p:txBody>
       </p:sp>
@@ -5556,6 +5352,7 @@
           <a:lstStyle/>
           <a:p>
             <a:pPr algn="ctr"/>
+            <a:endParaRPr/>
           </a:p>
         </p:txBody>
       </p:sp>
@@ -5568,7 +5365,7 @@
           <p:nvPr/>
         </p:nvPicPr>
         <p:blipFill>
-          <a:blip r:embed="rId5"/>
+          <a:blip r:embed="rId6"/>
           <a:stretch>
             <a:fillRect/>
           </a:stretch>
@@ -5600,7 +5397,7 @@
           <a:noFill/>
         </p:spPr>
         <p:txBody>
-          <a:bodyPr wrap="square" anchor="ctr" lIns="45720" rIns="45720" tIns="27432" bIns="27432">
+          <a:bodyPr wrap="square" lIns="45720" tIns="27432" rIns="45720" bIns="27432" anchor="ctr">
             <a:spAutoFit/>
           </a:bodyPr>
           <a:lstStyle/>
@@ -5635,7 +5432,7 @@
           <a:noFill/>
         </p:spPr>
         <p:txBody>
-          <a:bodyPr wrap="square" anchor="ctr" lIns="45720" rIns="45720" tIns="27432" bIns="27432">
+          <a:bodyPr wrap="square" lIns="45720" tIns="27432" rIns="45720" bIns="27432" anchor="ctr">
             <a:spAutoFit/>
           </a:bodyPr>
           <a:lstStyle/>
@@ -5698,6 +5495,7 @@
           <a:lstStyle/>
           <a:p>
             <a:pPr algn="ctr"/>
+            <a:endParaRPr/>
           </a:p>
         </p:txBody>
       </p:sp>
@@ -5742,6 +5540,7 @@
           <a:lstStyle/>
           <a:p>
             <a:pPr algn="ctr"/>
+            <a:endParaRPr/>
           </a:p>
         </p:txBody>
       </p:sp>
@@ -5754,7 +5553,7 @@
           <p:nvPr/>
         </p:nvPicPr>
         <p:blipFill>
-          <a:blip r:embed="rId6"/>
+          <a:blip r:embed="rId7"/>
           <a:stretch>
             <a:fillRect/>
           </a:stretch>
@@ -5786,7 +5585,7 @@
           <a:noFill/>
         </p:spPr>
         <p:txBody>
-          <a:bodyPr wrap="square" anchor="ctr" lIns="45720" rIns="45720" tIns="27432" bIns="27432">
+          <a:bodyPr wrap="square" lIns="45720" tIns="27432" rIns="45720" bIns="27432" anchor="ctr">
             <a:spAutoFit/>
           </a:bodyPr>
           <a:lstStyle/>
@@ -5821,7 +5620,7 @@
           <a:noFill/>
         </p:spPr>
         <p:txBody>
-          <a:bodyPr wrap="square" anchor="ctr" lIns="45720" rIns="45720" tIns="27432" bIns="27432">
+          <a:bodyPr wrap="square" lIns="45720" tIns="27432" rIns="45720" bIns="27432" anchor="ctr">
             <a:spAutoFit/>
           </a:bodyPr>
           <a:lstStyle/>
@@ -5884,6 +5683,7 @@
           <a:lstStyle/>
           <a:p>
             <a:pPr algn="ctr"/>
+            <a:endParaRPr/>
           </a:p>
         </p:txBody>
       </p:sp>
@@ -5928,6 +5728,7 @@
           <a:lstStyle/>
           <a:p>
             <a:pPr algn="ctr"/>
+            <a:endParaRPr/>
           </a:p>
         </p:txBody>
       </p:sp>
@@ -5940,7 +5741,7 @@
           <p:nvPr/>
         </p:nvPicPr>
         <p:blipFill>
-          <a:blip r:embed="rId7"/>
+          <a:blip r:embed="rId8"/>
           <a:stretch>
             <a:fillRect/>
           </a:stretch>
@@ -5972,7 +5773,7 @@
           <a:noFill/>
         </p:spPr>
         <p:txBody>
-          <a:bodyPr wrap="square" anchor="ctr" lIns="45720" rIns="45720" tIns="27432" bIns="27432">
+          <a:bodyPr wrap="square" lIns="45720" tIns="27432" rIns="45720" bIns="27432" anchor="ctr">
             <a:spAutoFit/>
           </a:bodyPr>
           <a:lstStyle/>
@@ -6007,7 +5808,7 @@
           <a:noFill/>
         </p:spPr>
         <p:txBody>
-          <a:bodyPr wrap="square" anchor="ctr" lIns="45720" rIns="45720" tIns="27432" bIns="27432">
+          <a:bodyPr wrap="square" lIns="45720" tIns="27432" rIns="45720" bIns="27432" anchor="ctr">
             <a:spAutoFit/>
           </a:bodyPr>
           <a:lstStyle/>
@@ -6034,7 +5835,7 @@
 </file>
 
 <file path=ppt/slides/slide11.xml><?xml version="1.0" encoding="utf-8"?>
-<p:sld xmlns:a="http://schemas.openxmlformats.org/drawingml/2006/main" xmlns:p="http://schemas.openxmlformats.org/presentationml/2006/main" xmlns:r="http://schemas.openxmlformats.org/officeDocument/2006/relationships">
+<p:sld xmlns:a="http://schemas.openxmlformats.org/drawingml/2006/main" xmlns:r="http://schemas.openxmlformats.org/officeDocument/2006/relationships" xmlns:p="http://schemas.openxmlformats.org/presentationml/2006/main">
   <p:cSld>
     <p:spTree>
       <p:nvGrpSpPr>
@@ -6042,7 +5843,14 @@
         <p:cNvGrpSpPr/>
         <p:nvPr/>
       </p:nvGrpSpPr>
-      <p:grpSpPr/>
+      <p:grpSpPr>
+        <a:xfrm>
+          <a:off x="0" y="0"/>
+          <a:ext cx="0" cy="0"/>
+          <a:chOff x="0" y="0"/>
+          <a:chExt cx="0" cy="0"/>
+        </a:xfrm>
+      </p:grpSpPr>
       <p:sp>
         <p:nvSpPr>
           <p:cNvPr id="2" name="Rectangle 1"/>
@@ -6083,6 +5891,7 @@
           <a:lstStyle/>
           <a:p>
             <a:pPr algn="ctr"/>
+            <a:endParaRPr/>
           </a:p>
         </p:txBody>
       </p:sp>
@@ -6126,6 +5935,7 @@
           <a:lstStyle/>
           <a:p>
             <a:pPr algn="ctr"/>
+            <a:endParaRPr/>
           </a:p>
         </p:txBody>
       </p:sp>
@@ -6146,7 +5956,7 @@
           <a:noFill/>
         </p:spPr>
         <p:txBody>
-          <a:bodyPr wrap="square" anchor="ctr" lIns="45720" rIns="45720" tIns="27432" bIns="27432">
+          <a:bodyPr wrap="square" lIns="45720" tIns="27432" rIns="45720" bIns="27432" anchor="ctr">
             <a:spAutoFit/>
           </a:bodyPr>
           <a:lstStyle/>
@@ -6173,7 +5983,7 @@
           <p:nvPr/>
         </p:nvPicPr>
         <p:blipFill>
-          <a:blip r:embed="rId2"/>
+          <a:blip r:embed="rId3"/>
           <a:stretch>
             <a:fillRect/>
           </a:stretch>
@@ -6205,7 +6015,7 @@
           <a:noFill/>
         </p:spPr>
         <p:txBody>
-          <a:bodyPr wrap="square" anchor="t" lIns="45720" rIns="45720" tIns="27432" bIns="27432">
+          <a:bodyPr wrap="square" lIns="45720" tIns="27432" rIns="45720" bIns="27432" anchor="t">
             <a:spAutoFit/>
           </a:bodyPr>
           <a:lstStyle/>
@@ -6240,7 +6050,7 @@
           <a:noFill/>
         </p:spPr>
         <p:txBody>
-          <a:bodyPr wrap="square" anchor="t" lIns="45720" rIns="45720" tIns="27432" bIns="27432">
+          <a:bodyPr wrap="square" lIns="45720" tIns="27432" rIns="45720" bIns="27432" anchor="t">
             <a:spAutoFit/>
           </a:bodyPr>
           <a:lstStyle/>
@@ -6303,6 +6113,7 @@
           <a:lstStyle/>
           <a:p>
             <a:pPr algn="ctr"/>
+            <a:endParaRPr/>
           </a:p>
         </p:txBody>
       </p:sp>
@@ -6317,7 +6128,7 @@
           <p:nvPr/>
         </p:nvPicPr>
         <p:blipFill>
-          <a:blip r:embed="rId3"/>
+          <a:blip r:embed="rId5"/>
           <a:stretch>
             <a:fillRect/>
           </a:stretch>
@@ -6377,6 +6188,7 @@
           <a:lstStyle/>
           <a:p>
             <a:pPr algn="ctr"/>
+            <a:endParaRPr/>
           </a:p>
         </p:txBody>
       </p:sp>
@@ -6391,7 +6203,7 @@
           <p:nvPr/>
         </p:nvPicPr>
         <p:blipFill>
-          <a:blip r:embed="rId5"/>
+          <a:blip r:embed="rId7"/>
           <a:stretch>
             <a:fillRect/>
           </a:stretch>
@@ -6423,7 +6235,7 @@
           <a:noFill/>
         </p:spPr>
         <p:txBody>
-          <a:bodyPr wrap="square" anchor="t" lIns="45720" rIns="45720" tIns="27432" bIns="27432">
+          <a:bodyPr wrap="square" lIns="45720" tIns="27432" rIns="45720" bIns="27432" anchor="t">
             <a:spAutoFit/>
           </a:bodyPr>
           <a:lstStyle/>
@@ -6458,7 +6270,7 @@
           <a:noFill/>
         </p:spPr>
         <p:txBody>
-          <a:bodyPr wrap="square" anchor="t" lIns="45720" rIns="45720" tIns="27432" bIns="27432">
+          <a:bodyPr wrap="square" lIns="45720" tIns="27432" rIns="45720" bIns="27432" anchor="t">
             <a:spAutoFit/>
           </a:bodyPr>
           <a:lstStyle/>
@@ -6485,7 +6297,7 @@
 </file>
 
 <file path=ppt/slides/slide12.xml><?xml version="1.0" encoding="utf-8"?>
-<p:sld xmlns:a="http://schemas.openxmlformats.org/drawingml/2006/main" xmlns:p="http://schemas.openxmlformats.org/presentationml/2006/main" xmlns:r="http://schemas.openxmlformats.org/officeDocument/2006/relationships">
+<p:sld xmlns:a="http://schemas.openxmlformats.org/drawingml/2006/main" xmlns:r="http://schemas.openxmlformats.org/officeDocument/2006/relationships" xmlns:p="http://schemas.openxmlformats.org/presentationml/2006/main">
   <p:cSld>
     <p:spTree>
       <p:nvGrpSpPr>
@@ -6493,7 +6305,14 @@
         <p:cNvGrpSpPr/>
         <p:nvPr/>
       </p:nvGrpSpPr>
-      <p:grpSpPr/>
+      <p:grpSpPr>
+        <a:xfrm>
+          <a:off x="0" y="0"/>
+          <a:ext cx="0" cy="0"/>
+          <a:chOff x="0" y="0"/>
+          <a:chExt cx="0" cy="0"/>
+        </a:xfrm>
+      </p:grpSpPr>
       <p:sp>
         <p:nvSpPr>
           <p:cNvPr id="2" name="Rectangle 1"/>
@@ -6534,6 +6353,7 @@
           <a:lstStyle/>
           <a:p>
             <a:pPr algn="ctr"/>
+            <a:endParaRPr/>
           </a:p>
         </p:txBody>
       </p:sp>
@@ -6577,6 +6397,7 @@
           <a:lstStyle/>
           <a:p>
             <a:pPr algn="ctr"/>
+            <a:endParaRPr/>
           </a:p>
         </p:txBody>
       </p:sp>
@@ -6597,7 +6418,7 @@
           <a:noFill/>
         </p:spPr>
         <p:txBody>
-          <a:bodyPr wrap="square" anchor="ctr" lIns="45720" rIns="45720" tIns="27432" bIns="27432">
+          <a:bodyPr wrap="square" lIns="45720" tIns="27432" rIns="45720" bIns="27432" anchor="ctr">
             <a:spAutoFit/>
           </a:bodyPr>
           <a:lstStyle/>
@@ -6624,7 +6445,7 @@
           <p:nvPr/>
         </p:nvPicPr>
         <p:blipFill>
-          <a:blip r:embed="rId2"/>
+          <a:blip r:embed="rId3"/>
           <a:stretch>
             <a:fillRect/>
           </a:stretch>
@@ -6656,7 +6477,7 @@
           <a:noFill/>
         </p:spPr>
         <p:txBody>
-          <a:bodyPr wrap="square" anchor="t" lIns="45720" rIns="45720" tIns="27432" bIns="27432">
+          <a:bodyPr wrap="square" lIns="45720" tIns="27432" rIns="45720" bIns="27432" anchor="t">
             <a:spAutoFit/>
           </a:bodyPr>
           <a:lstStyle/>
@@ -6691,7 +6512,7 @@
           <a:noFill/>
         </p:spPr>
         <p:txBody>
-          <a:bodyPr wrap="square" anchor="t" lIns="45720" rIns="45720" tIns="27432" bIns="27432">
+          <a:bodyPr wrap="square" lIns="45720" tIns="27432" rIns="45720" bIns="27432" anchor="t">
             <a:spAutoFit/>
           </a:bodyPr>
           <a:lstStyle/>
@@ -6754,6 +6575,7 @@
           <a:lstStyle/>
           <a:p>
             <a:pPr algn="ctr"/>
+            <a:endParaRPr/>
           </a:p>
         </p:txBody>
       </p:sp>
@@ -6798,6 +6620,7 @@
           <a:lstStyle/>
           <a:p>
             <a:pPr algn="ctr"/>
+            <a:endParaRPr/>
           </a:p>
         </p:txBody>
       </p:sp>
@@ -6810,7 +6633,7 @@
           <p:nvPr/>
         </p:nvPicPr>
         <p:blipFill>
-          <a:blip r:embed="rId3"/>
+          <a:blip r:embed="rId4"/>
           <a:stretch>
             <a:fillRect/>
           </a:stretch>
@@ -6842,7 +6665,7 @@
           <a:noFill/>
         </p:spPr>
         <p:txBody>
-          <a:bodyPr wrap="square" anchor="t" lIns="45720" rIns="45720" tIns="27432" bIns="27432">
+          <a:bodyPr wrap="square" lIns="45720" tIns="27432" rIns="45720" bIns="27432" anchor="t">
             <a:spAutoFit/>
           </a:bodyPr>
           <a:lstStyle/>
@@ -6877,7 +6700,7 @@
           <a:noFill/>
         </p:spPr>
         <p:txBody>
-          <a:bodyPr wrap="square" anchor="t" lIns="45720" rIns="45720" tIns="27432" bIns="27432">
+          <a:bodyPr wrap="square" lIns="45720" tIns="27432" rIns="45720" bIns="27432" anchor="t">
             <a:spAutoFit/>
           </a:bodyPr>
           <a:lstStyle/>
@@ -6940,6 +6763,7 @@
           <a:lstStyle/>
           <a:p>
             <a:pPr algn="ctr"/>
+            <a:endParaRPr/>
           </a:p>
         </p:txBody>
       </p:sp>
@@ -6984,6 +6808,7 @@
           <a:lstStyle/>
           <a:p>
             <a:pPr algn="ctr"/>
+            <a:endParaRPr/>
           </a:p>
         </p:txBody>
       </p:sp>
@@ -6996,7 +6821,7 @@
           <p:nvPr/>
         </p:nvPicPr>
         <p:blipFill>
-          <a:blip r:embed="rId4"/>
+          <a:blip r:embed="rId5"/>
           <a:stretch>
             <a:fillRect/>
           </a:stretch>
@@ -7028,7 +6853,7 @@
           <a:noFill/>
         </p:spPr>
         <p:txBody>
-          <a:bodyPr wrap="square" anchor="t" lIns="45720" rIns="45720" tIns="27432" bIns="27432">
+          <a:bodyPr wrap="square" lIns="45720" tIns="27432" rIns="45720" bIns="27432" anchor="t">
             <a:spAutoFit/>
           </a:bodyPr>
           <a:lstStyle/>
@@ -7063,7 +6888,7 @@
           <a:noFill/>
         </p:spPr>
         <p:txBody>
-          <a:bodyPr wrap="square" anchor="t" lIns="45720" rIns="45720" tIns="27432" bIns="27432">
+          <a:bodyPr wrap="square" lIns="45720" tIns="27432" rIns="45720" bIns="27432" anchor="t">
             <a:spAutoFit/>
           </a:bodyPr>
           <a:lstStyle/>
@@ -7126,6 +6951,7 @@
           <a:lstStyle/>
           <a:p>
             <a:pPr algn="ctr"/>
+            <a:endParaRPr/>
           </a:p>
         </p:txBody>
       </p:sp>
@@ -7170,6 +6996,7 @@
           <a:lstStyle/>
           <a:p>
             <a:pPr algn="ctr"/>
+            <a:endParaRPr/>
           </a:p>
         </p:txBody>
       </p:sp>
@@ -7182,7 +7009,7 @@
           <p:nvPr/>
         </p:nvPicPr>
         <p:blipFill>
-          <a:blip r:embed="rId5"/>
+          <a:blip r:embed="rId6"/>
           <a:stretch>
             <a:fillRect/>
           </a:stretch>
@@ -7214,7 +7041,7 @@
           <a:noFill/>
         </p:spPr>
         <p:txBody>
-          <a:bodyPr wrap="square" anchor="t" lIns="45720" rIns="45720" tIns="27432" bIns="27432">
+          <a:bodyPr wrap="square" lIns="45720" tIns="27432" rIns="45720" bIns="27432" anchor="t">
             <a:spAutoFit/>
           </a:bodyPr>
           <a:lstStyle/>
@@ -7249,7 +7076,7 @@
           <a:noFill/>
         </p:spPr>
         <p:txBody>
-          <a:bodyPr wrap="square" anchor="t" lIns="45720" rIns="45720" tIns="27432" bIns="27432">
+          <a:bodyPr wrap="square" lIns="45720" tIns="27432" rIns="45720" bIns="27432" anchor="t">
             <a:spAutoFit/>
           </a:bodyPr>
           <a:lstStyle/>
@@ -7312,6 +7139,7 @@
           <a:lstStyle/>
           <a:p>
             <a:pPr algn="ctr"/>
+            <a:endParaRPr/>
           </a:p>
         </p:txBody>
       </p:sp>
@@ -7356,6 +7184,7 @@
           <a:lstStyle/>
           <a:p>
             <a:pPr algn="ctr"/>
+            <a:endParaRPr/>
           </a:p>
         </p:txBody>
       </p:sp>
@@ -7368,7 +7197,7 @@
           <p:nvPr/>
         </p:nvPicPr>
         <p:blipFill>
-          <a:blip r:embed="rId6"/>
+          <a:blip r:embed="rId7"/>
           <a:stretch>
             <a:fillRect/>
           </a:stretch>
@@ -7400,7 +7229,7 @@
           <a:noFill/>
         </p:spPr>
         <p:txBody>
-          <a:bodyPr wrap="square" anchor="t" lIns="45720" rIns="45720" tIns="27432" bIns="27432">
+          <a:bodyPr wrap="square" lIns="45720" tIns="27432" rIns="45720" bIns="27432" anchor="t">
             <a:spAutoFit/>
           </a:bodyPr>
           <a:lstStyle/>
@@ -7435,7 +7264,7 @@
           <a:noFill/>
         </p:spPr>
         <p:txBody>
-          <a:bodyPr wrap="square" anchor="t" lIns="45720" rIns="45720" tIns="27432" bIns="27432">
+          <a:bodyPr wrap="square" lIns="45720" tIns="27432" rIns="45720" bIns="27432" anchor="t">
             <a:spAutoFit/>
           </a:bodyPr>
           <a:lstStyle/>
@@ -7498,6 +7327,7 @@
           <a:lstStyle/>
           <a:p>
             <a:pPr algn="ctr"/>
+            <a:endParaRPr/>
           </a:p>
         </p:txBody>
       </p:sp>
@@ -7542,6 +7372,7 @@
           <a:lstStyle/>
           <a:p>
             <a:pPr algn="ctr"/>
+            <a:endParaRPr/>
           </a:p>
         </p:txBody>
       </p:sp>
@@ -7554,7 +7385,7 @@
           <p:nvPr/>
         </p:nvPicPr>
         <p:blipFill>
-          <a:blip r:embed="rId7"/>
+          <a:blip r:embed="rId8"/>
           <a:stretch>
             <a:fillRect/>
           </a:stretch>
@@ -7586,7 +7417,7 @@
           <a:noFill/>
         </p:spPr>
         <p:txBody>
-          <a:bodyPr wrap="square" anchor="t" lIns="45720" rIns="45720" tIns="27432" bIns="27432">
+          <a:bodyPr wrap="square" lIns="45720" tIns="27432" rIns="45720" bIns="27432" anchor="t">
             <a:spAutoFit/>
           </a:bodyPr>
           <a:lstStyle/>
@@ -7621,7 +7452,7 @@
           <a:noFill/>
         </p:spPr>
         <p:txBody>
-          <a:bodyPr wrap="square" anchor="t" lIns="45720" rIns="45720" tIns="27432" bIns="27432">
+          <a:bodyPr wrap="square" lIns="45720" tIns="27432" rIns="45720" bIns="27432" anchor="t">
             <a:spAutoFit/>
           </a:bodyPr>
           <a:lstStyle/>
@@ -7656,7 +7487,7 @@
           <a:noFill/>
         </p:spPr>
         <p:txBody>
-          <a:bodyPr wrap="square" anchor="t" lIns="45720" rIns="45720" tIns="27432" bIns="27432">
+          <a:bodyPr wrap="square" lIns="45720" tIns="27432" rIns="45720" bIns="27432" anchor="t">
             <a:spAutoFit/>
           </a:bodyPr>
           <a:lstStyle/>
@@ -7703,7 +7534,7 @@
 </file>
 
 <file path=ppt/slides/slide13.xml><?xml version="1.0" encoding="utf-8"?>
-<p:sld xmlns:a="http://schemas.openxmlformats.org/drawingml/2006/main" xmlns:p="http://schemas.openxmlformats.org/presentationml/2006/main" xmlns:r="http://schemas.openxmlformats.org/officeDocument/2006/relationships">
+<p:sld xmlns:a="http://schemas.openxmlformats.org/drawingml/2006/main" xmlns:r="http://schemas.openxmlformats.org/officeDocument/2006/relationships" xmlns:p="http://schemas.openxmlformats.org/presentationml/2006/main">
   <p:cSld>
     <p:spTree>
       <p:nvGrpSpPr>
@@ -7711,7 +7542,14 @@
         <p:cNvGrpSpPr/>
         <p:nvPr/>
       </p:nvGrpSpPr>
-      <p:grpSpPr/>
+      <p:grpSpPr>
+        <a:xfrm>
+          <a:off x="0" y="0"/>
+          <a:ext cx="0" cy="0"/>
+          <a:chOff x="0" y="0"/>
+          <a:chExt cx="0" cy="0"/>
+        </a:xfrm>
+      </p:grpSpPr>
       <p:sp>
         <p:nvSpPr>
           <p:cNvPr id="2" name="Rectangle 1"/>
@@ -7752,6 +7590,7 @@
           <a:lstStyle/>
           <a:p>
             <a:pPr algn="ctr"/>
+            <a:endParaRPr/>
           </a:p>
         </p:txBody>
       </p:sp>
@@ -7795,6 +7634,7 @@
           <a:lstStyle/>
           <a:p>
             <a:pPr algn="ctr"/>
+            <a:endParaRPr/>
           </a:p>
         </p:txBody>
       </p:sp>
@@ -7815,7 +7655,7 @@
           <a:noFill/>
         </p:spPr>
         <p:txBody>
-          <a:bodyPr wrap="square" anchor="ctr" lIns="45720" rIns="45720" tIns="27432" bIns="27432">
+          <a:bodyPr wrap="square" lIns="45720" tIns="27432" rIns="45720" bIns="27432" anchor="ctr">
             <a:spAutoFit/>
           </a:bodyPr>
           <a:lstStyle/>
@@ -7842,7 +7682,7 @@
           <p:nvPr/>
         </p:nvPicPr>
         <p:blipFill>
-          <a:blip r:embed="rId2"/>
+          <a:blip r:embed="rId3"/>
           <a:stretch>
             <a:fillRect/>
           </a:stretch>
@@ -7874,7 +7714,7 @@
           <a:noFill/>
         </p:spPr>
         <p:txBody>
-          <a:bodyPr wrap="square" anchor="t" lIns="45720" rIns="45720" tIns="27432" bIns="27432">
+          <a:bodyPr wrap="square" lIns="45720" tIns="27432" rIns="45720" bIns="27432" anchor="t">
             <a:spAutoFit/>
           </a:bodyPr>
           <a:lstStyle/>
@@ -7909,7 +7749,7 @@
           <a:noFill/>
         </p:spPr>
         <p:txBody>
-          <a:bodyPr wrap="square" anchor="t" lIns="45720" rIns="45720" tIns="27432" bIns="27432">
+          <a:bodyPr wrap="square" lIns="45720" tIns="27432" rIns="45720" bIns="27432" anchor="t">
             <a:spAutoFit/>
           </a:bodyPr>
           <a:lstStyle/>
@@ -7972,6 +7812,7 @@
           <a:lstStyle/>
           <a:p>
             <a:pPr algn="ctr"/>
+            <a:endParaRPr/>
           </a:p>
         </p:txBody>
       </p:sp>
@@ -7992,7 +7833,7 @@
           <a:noFill/>
         </p:spPr>
         <p:txBody>
-          <a:bodyPr wrap="square" anchor="t" lIns="45720" rIns="45720" tIns="27432" bIns="27432">
+          <a:bodyPr wrap="square" lIns="45720" tIns="27432" rIns="45720" bIns="27432" anchor="t">
             <a:spAutoFit/>
           </a:bodyPr>
           <a:lstStyle/>
@@ -8027,7 +7868,7 @@
           <a:noFill/>
         </p:spPr>
         <p:txBody>
-          <a:bodyPr wrap="square" anchor="t" lIns="45720" rIns="45720" tIns="27432" bIns="27432">
+          <a:bodyPr wrap="square" lIns="45720" tIns="27432" rIns="45720" bIns="27432" anchor="t">
             <a:spAutoFit/>
           </a:bodyPr>
           <a:lstStyle/>
@@ -8142,6 +7983,7 @@
           <a:lstStyle/>
           <a:p>
             <a:pPr algn="ctr"/>
+            <a:endParaRPr/>
           </a:p>
         </p:txBody>
       </p:sp>
@@ -8162,7 +8004,7 @@
           <a:noFill/>
         </p:spPr>
         <p:txBody>
-          <a:bodyPr wrap="square" anchor="t" lIns="45720" rIns="45720" tIns="27432" bIns="27432">
+          <a:bodyPr wrap="square" lIns="45720" tIns="27432" rIns="45720" bIns="27432" anchor="t">
             <a:spAutoFit/>
           </a:bodyPr>
           <a:lstStyle/>
@@ -8197,7 +8039,7 @@
           <a:noFill/>
         </p:spPr>
         <p:txBody>
-          <a:bodyPr wrap="square" anchor="t" lIns="45720" rIns="45720" tIns="27432" bIns="27432">
+          <a:bodyPr wrap="square" lIns="45720" tIns="27432" rIns="45720" bIns="27432" anchor="t">
             <a:spAutoFit/>
           </a:bodyPr>
           <a:lstStyle/>
@@ -8276,7 +8118,7 @@
 </file>
 
 <file path=ppt/slides/slide14.xml><?xml version="1.0" encoding="utf-8"?>
-<p:sld xmlns:a="http://schemas.openxmlformats.org/drawingml/2006/main" xmlns:p="http://schemas.openxmlformats.org/presentationml/2006/main" xmlns:r="http://schemas.openxmlformats.org/officeDocument/2006/relationships">
+<p:sld xmlns:a="http://schemas.openxmlformats.org/drawingml/2006/main" xmlns:r="http://schemas.openxmlformats.org/officeDocument/2006/relationships" xmlns:p="http://schemas.openxmlformats.org/presentationml/2006/main">
   <p:cSld>
     <p:spTree>
       <p:nvGrpSpPr>
@@ -8284,7 +8126,14 @@
         <p:cNvGrpSpPr/>
         <p:nvPr/>
       </p:nvGrpSpPr>
-      <p:grpSpPr/>
+      <p:grpSpPr>
+        <a:xfrm>
+          <a:off x="0" y="0"/>
+          <a:ext cx="0" cy="0"/>
+          <a:chOff x="0" y="0"/>
+          <a:chExt cx="0" cy="0"/>
+        </a:xfrm>
+      </p:grpSpPr>
       <p:sp>
         <p:nvSpPr>
           <p:cNvPr id="2" name="Rectangle 1"/>
@@ -8325,6 +8174,7 @@
           <a:lstStyle/>
           <a:p>
             <a:pPr algn="ctr"/>
+            <a:endParaRPr/>
           </a:p>
         </p:txBody>
       </p:sp>
@@ -8368,6 +8218,7 @@
           <a:lstStyle/>
           <a:p>
             <a:pPr algn="ctr"/>
+            <a:endParaRPr/>
           </a:p>
         </p:txBody>
       </p:sp>
@@ -8388,7 +8239,7 @@
           <a:noFill/>
         </p:spPr>
         <p:txBody>
-          <a:bodyPr wrap="square" anchor="ctr" lIns="45720" rIns="45720" tIns="27432" bIns="27432">
+          <a:bodyPr wrap="square" lIns="45720" tIns="27432" rIns="45720" bIns="27432" anchor="ctr">
             <a:spAutoFit/>
           </a:bodyPr>
           <a:lstStyle/>
@@ -8415,7 +8266,7 @@
           <p:nvPr/>
         </p:nvPicPr>
         <p:blipFill>
-          <a:blip r:embed="rId2"/>
+          <a:blip r:embed="rId3"/>
           <a:stretch>
             <a:fillRect/>
           </a:stretch>
@@ -8447,7 +8298,7 @@
           <a:noFill/>
         </p:spPr>
         <p:txBody>
-          <a:bodyPr wrap="square" anchor="t" lIns="45720" rIns="45720" tIns="27432" bIns="27432">
+          <a:bodyPr wrap="square" lIns="45720" tIns="27432" rIns="45720" bIns="27432" anchor="t">
             <a:spAutoFit/>
           </a:bodyPr>
           <a:lstStyle/>
@@ -8482,7 +8333,7 @@
           <a:noFill/>
         </p:spPr>
         <p:txBody>
-          <a:bodyPr wrap="square" anchor="t" lIns="45720" rIns="45720" tIns="27432" bIns="27432">
+          <a:bodyPr wrap="square" lIns="45720" tIns="27432" rIns="45720" bIns="27432" anchor="t">
             <a:spAutoFit/>
           </a:bodyPr>
           <a:lstStyle/>
@@ -8545,6 +8396,7 @@
           <a:lstStyle/>
           <a:p>
             <a:pPr algn="ctr"/>
+            <a:endParaRPr/>
           </a:p>
         </p:txBody>
       </p:sp>
@@ -8589,6 +8441,7 @@
           <a:lstStyle/>
           <a:p>
             <a:pPr algn="ctr"/>
+            <a:endParaRPr/>
           </a:p>
         </p:txBody>
       </p:sp>
@@ -8601,7 +8454,7 @@
           <p:nvPr/>
         </p:nvPicPr>
         <p:blipFill>
-          <a:blip r:embed="rId3"/>
+          <a:blip r:embed="rId4"/>
           <a:stretch>
             <a:fillRect/>
           </a:stretch>
@@ -8633,7 +8486,7 @@
           <a:noFill/>
         </p:spPr>
         <p:txBody>
-          <a:bodyPr wrap="square" anchor="ctr" lIns="45720" rIns="45720" tIns="27432" bIns="27432">
+          <a:bodyPr wrap="square" lIns="45720" tIns="27432" rIns="45720" bIns="27432" anchor="ctr">
             <a:spAutoFit/>
           </a:bodyPr>
           <a:lstStyle/>
@@ -8668,7 +8521,7 @@
           <a:noFill/>
         </p:spPr>
         <p:txBody>
-          <a:bodyPr wrap="square" anchor="t" lIns="45720" rIns="45720" tIns="27432" bIns="27432">
+          <a:bodyPr wrap="square" lIns="45720" tIns="27432" rIns="45720" bIns="27432" anchor="t">
             <a:spAutoFit/>
           </a:bodyPr>
           <a:lstStyle/>
@@ -8731,6 +8584,7 @@
           <a:lstStyle/>
           <a:p>
             <a:pPr algn="ctr"/>
+            <a:endParaRPr/>
           </a:p>
         </p:txBody>
       </p:sp>
@@ -8775,6 +8629,7 @@
           <a:lstStyle/>
           <a:p>
             <a:pPr algn="ctr"/>
+            <a:endParaRPr/>
           </a:p>
         </p:txBody>
       </p:sp>
@@ -8787,7 +8642,7 @@
           <p:nvPr/>
         </p:nvPicPr>
         <p:blipFill>
-          <a:blip r:embed="rId4"/>
+          <a:blip r:embed="rId5"/>
           <a:stretch>
             <a:fillRect/>
           </a:stretch>
@@ -8819,7 +8674,7 @@
           <a:noFill/>
         </p:spPr>
         <p:txBody>
-          <a:bodyPr wrap="square" anchor="ctr" lIns="45720" rIns="45720" tIns="27432" bIns="27432">
+          <a:bodyPr wrap="square" lIns="45720" tIns="27432" rIns="45720" bIns="27432" anchor="ctr">
             <a:spAutoFit/>
           </a:bodyPr>
           <a:lstStyle/>
@@ -8854,7 +8709,7 @@
           <a:noFill/>
         </p:spPr>
         <p:txBody>
-          <a:bodyPr wrap="square" anchor="t" lIns="45720" rIns="45720" tIns="27432" bIns="27432">
+          <a:bodyPr wrap="square" lIns="45720" tIns="27432" rIns="45720" bIns="27432" anchor="t">
             <a:spAutoFit/>
           </a:bodyPr>
           <a:lstStyle/>
@@ -8917,6 +8772,7 @@
           <a:lstStyle/>
           <a:p>
             <a:pPr algn="ctr"/>
+            <a:endParaRPr/>
           </a:p>
         </p:txBody>
       </p:sp>
@@ -8961,6 +8817,7 @@
           <a:lstStyle/>
           <a:p>
             <a:pPr algn="ctr"/>
+            <a:endParaRPr/>
           </a:p>
         </p:txBody>
       </p:sp>
@@ -8973,7 +8830,7 @@
           <p:nvPr/>
         </p:nvPicPr>
         <p:blipFill>
-          <a:blip r:embed="rId5"/>
+          <a:blip r:embed="rId6"/>
           <a:stretch>
             <a:fillRect/>
           </a:stretch>
@@ -9005,7 +8862,7 @@
           <a:noFill/>
         </p:spPr>
         <p:txBody>
-          <a:bodyPr wrap="square" anchor="ctr" lIns="45720" rIns="45720" tIns="27432" bIns="27432">
+          <a:bodyPr wrap="square" lIns="45720" tIns="27432" rIns="45720" bIns="27432" anchor="ctr">
             <a:spAutoFit/>
           </a:bodyPr>
           <a:lstStyle/>
@@ -9040,7 +8897,7 @@
           <a:noFill/>
         </p:spPr>
         <p:txBody>
-          <a:bodyPr wrap="square" anchor="t" lIns="45720" rIns="45720" tIns="27432" bIns="27432">
+          <a:bodyPr wrap="square" lIns="45720" tIns="27432" rIns="45720" bIns="27432" anchor="t">
             <a:spAutoFit/>
           </a:bodyPr>
           <a:lstStyle/>
@@ -9103,6 +8960,7 @@
           <a:lstStyle/>
           <a:p>
             <a:pPr algn="ctr"/>
+            <a:endParaRPr/>
           </a:p>
         </p:txBody>
       </p:sp>
@@ -9147,6 +9005,7 @@
           <a:lstStyle/>
           <a:p>
             <a:pPr algn="ctr"/>
+            <a:endParaRPr/>
           </a:p>
         </p:txBody>
       </p:sp>
@@ -9159,7 +9018,7 @@
           <p:nvPr/>
         </p:nvPicPr>
         <p:blipFill>
-          <a:blip r:embed="rId6"/>
+          <a:blip r:embed="rId7"/>
           <a:stretch>
             <a:fillRect/>
           </a:stretch>
@@ -9191,7 +9050,7 @@
           <a:noFill/>
         </p:spPr>
         <p:txBody>
-          <a:bodyPr wrap="square" anchor="ctr" lIns="45720" rIns="45720" tIns="27432" bIns="27432">
+          <a:bodyPr wrap="square" lIns="45720" tIns="27432" rIns="45720" bIns="27432" anchor="ctr">
             <a:spAutoFit/>
           </a:bodyPr>
           <a:lstStyle/>
@@ -9226,7 +9085,7 @@
           <a:noFill/>
         </p:spPr>
         <p:txBody>
-          <a:bodyPr wrap="square" anchor="t" lIns="45720" rIns="45720" tIns="27432" bIns="27432">
+          <a:bodyPr wrap="square" lIns="45720" tIns="27432" rIns="45720" bIns="27432" anchor="t">
             <a:spAutoFit/>
           </a:bodyPr>
           <a:lstStyle/>
@@ -9253,7 +9112,7 @@
 </file>
 
 <file path=ppt/slides/slide15.xml><?xml version="1.0" encoding="utf-8"?>
-<p:sld xmlns:a="http://schemas.openxmlformats.org/drawingml/2006/main" xmlns:p="http://schemas.openxmlformats.org/presentationml/2006/main" xmlns:r="http://schemas.openxmlformats.org/officeDocument/2006/relationships">
+<p:sld xmlns:a="http://schemas.openxmlformats.org/drawingml/2006/main" xmlns:r="http://schemas.openxmlformats.org/officeDocument/2006/relationships" xmlns:p="http://schemas.openxmlformats.org/presentationml/2006/main">
   <p:cSld>
     <p:spTree>
       <p:nvGrpSpPr>
@@ -9261,7 +9120,14 @@
         <p:cNvGrpSpPr/>
         <p:nvPr/>
       </p:nvGrpSpPr>
-      <p:grpSpPr/>
+      <p:grpSpPr>
+        <a:xfrm>
+          <a:off x="0" y="0"/>
+          <a:ext cx="0" cy="0"/>
+          <a:chOff x="0" y="0"/>
+          <a:chExt cx="0" cy="0"/>
+        </a:xfrm>
+      </p:grpSpPr>
       <p:sp>
         <p:nvSpPr>
           <p:cNvPr id="2" name="Rectangle 1"/>
@@ -9302,6 +9168,7 @@
           <a:lstStyle/>
           <a:p>
             <a:pPr algn="ctr"/>
+            <a:endParaRPr/>
           </a:p>
         </p:txBody>
       </p:sp>
@@ -9345,6 +9212,7 @@
           <a:lstStyle/>
           <a:p>
             <a:pPr algn="ctr"/>
+            <a:endParaRPr/>
           </a:p>
         </p:txBody>
       </p:sp>
@@ -9365,7 +9233,7 @@
           <a:noFill/>
         </p:spPr>
         <p:txBody>
-          <a:bodyPr wrap="square" anchor="ctr" lIns="45720" rIns="45720" tIns="27432" bIns="27432">
+          <a:bodyPr wrap="square" lIns="45720" tIns="27432" rIns="45720" bIns="27432" anchor="ctr">
             <a:spAutoFit/>
           </a:bodyPr>
           <a:lstStyle/>
@@ -9392,7 +9260,7 @@
           <p:nvPr/>
         </p:nvPicPr>
         <p:blipFill>
-          <a:blip r:embed="rId2"/>
+          <a:blip r:embed="rId3"/>
           <a:stretch>
             <a:fillRect/>
           </a:stretch>
@@ -9424,7 +9292,7 @@
           <a:noFill/>
         </p:spPr>
         <p:txBody>
-          <a:bodyPr wrap="square" anchor="t" lIns="45720" rIns="45720" tIns="27432" bIns="27432">
+          <a:bodyPr wrap="square" lIns="45720" tIns="27432" rIns="45720" bIns="27432" anchor="t">
             <a:spAutoFit/>
           </a:bodyPr>
           <a:lstStyle/>
@@ -9459,7 +9327,7 @@
           <a:noFill/>
         </p:spPr>
         <p:txBody>
-          <a:bodyPr wrap="square" anchor="t" lIns="45720" rIns="45720" tIns="27432" bIns="27432">
+          <a:bodyPr wrap="square" lIns="45720" tIns="27432" rIns="45720" bIns="27432" anchor="t">
             <a:spAutoFit/>
           </a:bodyPr>
           <a:lstStyle/>
@@ -9522,6 +9390,7 @@
           <a:lstStyle/>
           <a:p>
             <a:pPr algn="ctr"/>
+            <a:endParaRPr/>
           </a:p>
         </p:txBody>
       </p:sp>
@@ -9566,6 +9435,7 @@
           <a:lstStyle/>
           <a:p>
             <a:pPr algn="ctr"/>
+            <a:endParaRPr/>
           </a:p>
         </p:txBody>
       </p:sp>
@@ -9578,7 +9448,7 @@
           <p:nvPr/>
         </p:nvPicPr>
         <p:blipFill>
-          <a:blip r:embed="rId3"/>
+          <a:blip r:embed="rId4"/>
           <a:stretch>
             <a:fillRect/>
           </a:stretch>
@@ -9610,7 +9480,7 @@
           <a:noFill/>
         </p:spPr>
         <p:txBody>
-          <a:bodyPr wrap="square" anchor="t" lIns="45720" rIns="45720" tIns="27432" bIns="27432">
+          <a:bodyPr wrap="square" lIns="45720" tIns="27432" rIns="45720" bIns="27432" anchor="t">
             <a:spAutoFit/>
           </a:bodyPr>
           <a:lstStyle/>
@@ -9665,7 +9535,7 @@
           <a:noFill/>
         </p:spPr>
         <p:txBody>
-          <a:bodyPr wrap="square" anchor="t" lIns="45720" rIns="45720" tIns="27432" bIns="27432">
+          <a:bodyPr wrap="square" lIns="45720" tIns="27432" rIns="45720" bIns="27432" anchor="t">
             <a:spAutoFit/>
           </a:bodyPr>
           <a:lstStyle/>
@@ -9700,7 +9570,7 @@
           <a:noFill/>
         </p:spPr>
         <p:txBody>
-          <a:bodyPr wrap="square" anchor="t" lIns="45720" rIns="45720" tIns="27432" bIns="27432">
+          <a:bodyPr wrap="square" lIns="45720" tIns="27432" rIns="45720" bIns="27432" anchor="t">
             <a:spAutoFit/>
           </a:bodyPr>
           <a:lstStyle/>
@@ -9763,7 +9633,7 @@
 </file>
 
 <file path=ppt/slides/slide2.xml><?xml version="1.0" encoding="utf-8"?>
-<p:sld xmlns:a="http://schemas.openxmlformats.org/drawingml/2006/main" xmlns:p="http://schemas.openxmlformats.org/presentationml/2006/main" xmlns:r="http://schemas.openxmlformats.org/officeDocument/2006/relationships">
+<p:sld xmlns:a="http://schemas.openxmlformats.org/drawingml/2006/main" xmlns:r="http://schemas.openxmlformats.org/officeDocument/2006/relationships" xmlns:p="http://schemas.openxmlformats.org/presentationml/2006/main">
   <p:cSld>
     <p:spTree>
       <p:nvGrpSpPr>
@@ -9771,7 +9641,14 @@
         <p:cNvGrpSpPr/>
         <p:nvPr/>
       </p:nvGrpSpPr>
-      <p:grpSpPr/>
+      <p:grpSpPr>
+        <a:xfrm>
+          <a:off x="0" y="0"/>
+          <a:ext cx="0" cy="0"/>
+          <a:chOff x="0" y="0"/>
+          <a:chExt cx="0" cy="0"/>
+        </a:xfrm>
+      </p:grpSpPr>
       <p:sp>
         <p:nvSpPr>
           <p:cNvPr id="2" name="Rectangle 1"/>
@@ -9812,6 +9689,7 @@
           <a:lstStyle/>
           <a:p>
             <a:pPr algn="ctr"/>
+            <a:endParaRPr/>
           </a:p>
         </p:txBody>
       </p:sp>
@@ -9855,6 +9733,7 @@
           <a:lstStyle/>
           <a:p>
             <a:pPr algn="ctr"/>
+            <a:endParaRPr/>
           </a:p>
         </p:txBody>
       </p:sp>
@@ -9875,7 +9754,7 @@
           <a:noFill/>
         </p:spPr>
         <p:txBody>
-          <a:bodyPr wrap="square" anchor="ctr" lIns="45720" rIns="45720" tIns="27432" bIns="27432">
+          <a:bodyPr wrap="square" lIns="45720" tIns="27432" rIns="45720" bIns="27432" anchor="ctr">
             <a:spAutoFit/>
           </a:bodyPr>
           <a:lstStyle/>
@@ -9902,7 +9781,7 @@
           <p:nvPr/>
         </p:nvPicPr>
         <p:blipFill>
-          <a:blip r:embed="rId2"/>
+          <a:blip r:embed="rId3"/>
           <a:stretch>
             <a:fillRect/>
           </a:stretch>
@@ -9934,7 +9813,7 @@
           <a:noFill/>
         </p:spPr>
         <p:txBody>
-          <a:bodyPr wrap="square" anchor="t" lIns="45720" rIns="45720" tIns="27432" bIns="27432">
+          <a:bodyPr wrap="square" lIns="45720" tIns="27432" rIns="45720" bIns="27432" anchor="t">
             <a:spAutoFit/>
           </a:bodyPr>
           <a:lstStyle/>
@@ -9969,7 +9848,7 @@
           <a:noFill/>
         </p:spPr>
         <p:txBody>
-          <a:bodyPr wrap="square" anchor="t" lIns="45720" rIns="45720" tIns="27432" bIns="27432">
+          <a:bodyPr wrap="square" lIns="45720" tIns="27432" rIns="45720" bIns="27432" anchor="t">
             <a:spAutoFit/>
           </a:bodyPr>
           <a:lstStyle/>
@@ -10032,6 +9911,7 @@
           <a:lstStyle/>
           <a:p>
             <a:pPr algn="ctr"/>
+            <a:endParaRPr/>
           </a:p>
         </p:txBody>
       </p:sp>
@@ -10076,6 +9956,7 @@
           <a:lstStyle/>
           <a:p>
             <a:pPr algn="ctr"/>
+            <a:endParaRPr/>
           </a:p>
         </p:txBody>
       </p:sp>
@@ -10088,7 +9969,7 @@
           <p:nvPr/>
         </p:nvPicPr>
         <p:blipFill>
-          <a:blip r:embed="rId3"/>
+          <a:blip r:embed="rId4"/>
           <a:stretch>
             <a:fillRect/>
           </a:stretch>
@@ -10120,7 +10001,7 @@
           <a:noFill/>
         </p:spPr>
         <p:txBody>
-          <a:bodyPr wrap="square" anchor="t" lIns="45720" rIns="45720" tIns="27432" bIns="27432">
+          <a:bodyPr wrap="square" lIns="45720" tIns="27432" rIns="45720" bIns="27432" anchor="t">
             <a:spAutoFit/>
           </a:bodyPr>
           <a:lstStyle/>
@@ -10155,7 +10036,7 @@
           <a:noFill/>
         </p:spPr>
         <p:txBody>
-          <a:bodyPr wrap="square" anchor="t" lIns="45720" rIns="45720" tIns="27432" bIns="27432">
+          <a:bodyPr wrap="square" lIns="45720" tIns="27432" rIns="45720" bIns="27432" anchor="t">
             <a:spAutoFit/>
           </a:bodyPr>
           <a:lstStyle/>
@@ -10218,6 +10099,7 @@
           <a:lstStyle/>
           <a:p>
             <a:pPr algn="ctr"/>
+            <a:endParaRPr/>
           </a:p>
         </p:txBody>
       </p:sp>
@@ -10262,6 +10144,7 @@
           <a:lstStyle/>
           <a:p>
             <a:pPr algn="ctr"/>
+            <a:endParaRPr/>
           </a:p>
         </p:txBody>
       </p:sp>
@@ -10274,7 +10157,7 @@
           <p:nvPr/>
         </p:nvPicPr>
         <p:blipFill>
-          <a:blip r:embed="rId4"/>
+          <a:blip r:embed="rId5"/>
           <a:stretch>
             <a:fillRect/>
           </a:stretch>
@@ -10306,7 +10189,7 @@
           <a:noFill/>
         </p:spPr>
         <p:txBody>
-          <a:bodyPr wrap="square" anchor="t" lIns="45720" rIns="45720" tIns="27432" bIns="27432">
+          <a:bodyPr wrap="square" lIns="45720" tIns="27432" rIns="45720" bIns="27432" anchor="t">
             <a:spAutoFit/>
           </a:bodyPr>
           <a:lstStyle/>
@@ -10341,7 +10224,7 @@
           <a:noFill/>
         </p:spPr>
         <p:txBody>
-          <a:bodyPr wrap="square" anchor="t" lIns="45720" rIns="45720" tIns="27432" bIns="27432">
+          <a:bodyPr wrap="square" lIns="45720" tIns="27432" rIns="45720" bIns="27432" anchor="t">
             <a:spAutoFit/>
           </a:bodyPr>
           <a:lstStyle/>
@@ -10404,6 +10287,7 @@
           <a:lstStyle/>
           <a:p>
             <a:pPr algn="ctr"/>
+            <a:endParaRPr/>
           </a:p>
         </p:txBody>
       </p:sp>
@@ -10448,6 +10332,7 @@
           <a:lstStyle/>
           <a:p>
             <a:pPr algn="ctr"/>
+            <a:endParaRPr/>
           </a:p>
         </p:txBody>
       </p:sp>
@@ -10460,7 +10345,7 @@
           <p:nvPr/>
         </p:nvPicPr>
         <p:blipFill>
-          <a:blip r:embed="rId5"/>
+          <a:blip r:embed="rId6"/>
           <a:stretch>
             <a:fillRect/>
           </a:stretch>
@@ -10492,7 +10377,7 @@
           <a:noFill/>
         </p:spPr>
         <p:txBody>
-          <a:bodyPr wrap="square" anchor="t" lIns="45720" rIns="45720" tIns="27432" bIns="27432">
+          <a:bodyPr wrap="square" lIns="45720" tIns="27432" rIns="45720" bIns="27432" anchor="t">
             <a:spAutoFit/>
           </a:bodyPr>
           <a:lstStyle/>
@@ -10527,7 +10412,7 @@
           <a:noFill/>
         </p:spPr>
         <p:txBody>
-          <a:bodyPr wrap="square" anchor="t" lIns="45720" rIns="45720" tIns="27432" bIns="27432">
+          <a:bodyPr wrap="square" lIns="45720" tIns="27432" rIns="45720" bIns="27432" anchor="t">
             <a:spAutoFit/>
           </a:bodyPr>
           <a:lstStyle/>
@@ -10562,7 +10447,7 @@
           <a:noFill/>
         </p:spPr>
         <p:txBody>
-          <a:bodyPr wrap="square" anchor="t" lIns="45720" rIns="45720" tIns="27432" bIns="27432">
+          <a:bodyPr wrap="square" lIns="45720" tIns="27432" rIns="45720" bIns="27432" anchor="t">
             <a:spAutoFit/>
           </a:bodyPr>
           <a:lstStyle/>
@@ -10589,7 +10474,7 @@
 </file>
 
 <file path=ppt/slides/slide3.xml><?xml version="1.0" encoding="utf-8"?>
-<p:sld xmlns:a="http://schemas.openxmlformats.org/drawingml/2006/main" xmlns:p="http://schemas.openxmlformats.org/presentationml/2006/main" xmlns:r="http://schemas.openxmlformats.org/officeDocument/2006/relationships">
+<p:sld xmlns:a="http://schemas.openxmlformats.org/drawingml/2006/main" xmlns:r="http://schemas.openxmlformats.org/officeDocument/2006/relationships" xmlns:p="http://schemas.openxmlformats.org/presentationml/2006/main">
   <p:cSld>
     <p:spTree>
       <p:nvGrpSpPr>
@@ -10597,7 +10482,14 @@
         <p:cNvGrpSpPr/>
         <p:nvPr/>
       </p:nvGrpSpPr>
-      <p:grpSpPr/>
+      <p:grpSpPr>
+        <a:xfrm>
+          <a:off x="0" y="0"/>
+          <a:ext cx="0" cy="0"/>
+          <a:chOff x="0" y="0"/>
+          <a:chExt cx="0" cy="0"/>
+        </a:xfrm>
+      </p:grpSpPr>
       <p:sp>
         <p:nvSpPr>
           <p:cNvPr id="2" name="Rectangle 1"/>
@@ -10638,6 +10530,7 @@
           <a:lstStyle/>
           <a:p>
             <a:pPr algn="ctr"/>
+            <a:endParaRPr/>
           </a:p>
         </p:txBody>
       </p:sp>
@@ -10681,6 +10574,7 @@
           <a:lstStyle/>
           <a:p>
             <a:pPr algn="ctr"/>
+            <a:endParaRPr/>
           </a:p>
         </p:txBody>
       </p:sp>
@@ -10701,7 +10595,7 @@
           <a:noFill/>
         </p:spPr>
         <p:txBody>
-          <a:bodyPr wrap="square" anchor="ctr" lIns="45720" rIns="45720" tIns="27432" bIns="27432">
+          <a:bodyPr wrap="square" lIns="45720" tIns="27432" rIns="45720" bIns="27432" anchor="ctr">
             <a:spAutoFit/>
           </a:bodyPr>
           <a:lstStyle/>
@@ -10728,7 +10622,7 @@
           <p:nvPr/>
         </p:nvPicPr>
         <p:blipFill>
-          <a:blip r:embed="rId2"/>
+          <a:blip r:embed="rId3"/>
           <a:stretch>
             <a:fillRect/>
           </a:stretch>
@@ -10760,7 +10654,7 @@
           <a:noFill/>
         </p:spPr>
         <p:txBody>
-          <a:bodyPr wrap="square" anchor="t" lIns="45720" rIns="45720" tIns="27432" bIns="27432">
+          <a:bodyPr wrap="square" lIns="45720" tIns="27432" rIns="45720" bIns="27432" anchor="t">
             <a:spAutoFit/>
           </a:bodyPr>
           <a:lstStyle/>
@@ -10795,7 +10689,7 @@
           <a:noFill/>
         </p:spPr>
         <p:txBody>
-          <a:bodyPr wrap="square" anchor="t" lIns="45720" rIns="45720" tIns="27432" bIns="27432">
+          <a:bodyPr wrap="square" lIns="45720" tIns="27432" rIns="45720" bIns="27432" anchor="t">
             <a:spAutoFit/>
           </a:bodyPr>
           <a:lstStyle/>
@@ -10830,7 +10724,7 @@
           <a:noFill/>
         </p:spPr>
         <p:txBody>
-          <a:bodyPr wrap="square" anchor="t" lIns="45720" rIns="45720" tIns="27432" bIns="27432">
+          <a:bodyPr wrap="square" lIns="45720" tIns="27432" rIns="45720" bIns="27432" anchor="t">
             <a:spAutoFit/>
           </a:bodyPr>
           <a:lstStyle/>
@@ -10893,6 +10787,7 @@
           <a:lstStyle/>
           <a:p>
             <a:pPr algn="ctr"/>
+            <a:endParaRPr/>
           </a:p>
         </p:txBody>
       </p:sp>
@@ -10937,6 +10832,7 @@
           <a:lstStyle/>
           <a:p>
             <a:pPr algn="ctr"/>
+            <a:endParaRPr/>
           </a:p>
         </p:txBody>
       </p:sp>
@@ -10949,7 +10845,7 @@
           <p:nvPr/>
         </p:nvPicPr>
         <p:blipFill>
-          <a:blip r:embed="rId3"/>
+          <a:blip r:embed="rId4"/>
           <a:stretch>
             <a:fillRect/>
           </a:stretch>
@@ -10981,7 +10877,7 @@
           <a:noFill/>
         </p:spPr>
         <p:txBody>
-          <a:bodyPr wrap="square" anchor="ctr" lIns="45720" rIns="45720" tIns="27432" bIns="27432">
+          <a:bodyPr wrap="square" lIns="45720" tIns="27432" rIns="45720" bIns="27432" anchor="ctr">
             <a:spAutoFit/>
           </a:bodyPr>
           <a:lstStyle/>
@@ -11016,7 +10912,7 @@
           <a:noFill/>
         </p:spPr>
         <p:txBody>
-          <a:bodyPr wrap="square" anchor="t" lIns="45720" rIns="45720" tIns="27432" bIns="27432">
+          <a:bodyPr wrap="square" lIns="45720" tIns="27432" rIns="45720" bIns="27432" anchor="t">
             <a:spAutoFit/>
           </a:bodyPr>
           <a:lstStyle/>
@@ -11079,6 +10975,7 @@
           <a:lstStyle/>
           <a:p>
             <a:pPr algn="ctr"/>
+            <a:endParaRPr/>
           </a:p>
         </p:txBody>
       </p:sp>
@@ -11123,6 +11020,7 @@
           <a:lstStyle/>
           <a:p>
             <a:pPr algn="ctr"/>
+            <a:endParaRPr/>
           </a:p>
         </p:txBody>
       </p:sp>
@@ -11135,7 +11033,7 @@
           <p:nvPr/>
         </p:nvPicPr>
         <p:blipFill>
-          <a:blip r:embed="rId4"/>
+          <a:blip r:embed="rId5"/>
           <a:stretch>
             <a:fillRect/>
           </a:stretch>
@@ -11167,7 +11065,7 @@
           <a:noFill/>
         </p:spPr>
         <p:txBody>
-          <a:bodyPr wrap="square" anchor="ctr" lIns="45720" rIns="45720" tIns="27432" bIns="27432">
+          <a:bodyPr wrap="square" lIns="45720" tIns="27432" rIns="45720" bIns="27432" anchor="ctr">
             <a:spAutoFit/>
           </a:bodyPr>
           <a:lstStyle/>
@@ -11202,7 +11100,7 @@
           <a:noFill/>
         </p:spPr>
         <p:txBody>
-          <a:bodyPr wrap="square" anchor="t" lIns="45720" rIns="45720" tIns="27432" bIns="27432">
+          <a:bodyPr wrap="square" lIns="45720" tIns="27432" rIns="45720" bIns="27432" anchor="t">
             <a:spAutoFit/>
           </a:bodyPr>
           <a:lstStyle/>
@@ -11265,6 +11163,7 @@
           <a:lstStyle/>
           <a:p>
             <a:pPr algn="ctr"/>
+            <a:endParaRPr/>
           </a:p>
         </p:txBody>
       </p:sp>
@@ -11309,6 +11208,7 @@
           <a:lstStyle/>
           <a:p>
             <a:pPr algn="ctr"/>
+            <a:endParaRPr/>
           </a:p>
         </p:txBody>
       </p:sp>
@@ -11321,7 +11221,7 @@
           <p:nvPr/>
         </p:nvPicPr>
         <p:blipFill>
-          <a:blip r:embed="rId5"/>
+          <a:blip r:embed="rId6"/>
           <a:stretch>
             <a:fillRect/>
           </a:stretch>
@@ -11353,7 +11253,7 @@
           <a:noFill/>
         </p:spPr>
         <p:txBody>
-          <a:bodyPr wrap="square" anchor="ctr" lIns="45720" rIns="45720" tIns="27432" bIns="27432">
+          <a:bodyPr wrap="square" lIns="45720" tIns="27432" rIns="45720" bIns="27432" anchor="ctr">
             <a:spAutoFit/>
           </a:bodyPr>
           <a:lstStyle/>
@@ -11388,7 +11288,7 @@
           <a:noFill/>
         </p:spPr>
         <p:txBody>
-          <a:bodyPr wrap="square" anchor="t" lIns="45720" rIns="45720" tIns="27432" bIns="27432">
+          <a:bodyPr wrap="square" lIns="45720" tIns="27432" rIns="45720" bIns="27432" anchor="t">
             <a:spAutoFit/>
           </a:bodyPr>
           <a:lstStyle/>
@@ -11423,7 +11323,7 @@
           <a:noFill/>
         </p:spPr>
         <p:txBody>
-          <a:bodyPr wrap="square" anchor="t" lIns="45720" rIns="45720" tIns="27432" bIns="27432">
+          <a:bodyPr wrap="square" lIns="45720" tIns="27432" rIns="45720" bIns="27432" anchor="t">
             <a:spAutoFit/>
           </a:bodyPr>
           <a:lstStyle/>
@@ -11470,7 +11370,7 @@
 </file>
 
 <file path=ppt/slides/slide4.xml><?xml version="1.0" encoding="utf-8"?>
-<p:sld xmlns:a="http://schemas.openxmlformats.org/drawingml/2006/main" xmlns:p="http://schemas.openxmlformats.org/presentationml/2006/main" xmlns:r="http://schemas.openxmlformats.org/officeDocument/2006/relationships">
+<p:sld xmlns:a="http://schemas.openxmlformats.org/drawingml/2006/main" xmlns:r="http://schemas.openxmlformats.org/officeDocument/2006/relationships" xmlns:p="http://schemas.openxmlformats.org/presentationml/2006/main">
   <p:cSld>
     <p:spTree>
       <p:nvGrpSpPr>
@@ -11478,7 +11378,14 @@
         <p:cNvGrpSpPr/>
         <p:nvPr/>
       </p:nvGrpSpPr>
-      <p:grpSpPr/>
+      <p:grpSpPr>
+        <a:xfrm>
+          <a:off x="0" y="0"/>
+          <a:ext cx="0" cy="0"/>
+          <a:chOff x="0" y="0"/>
+          <a:chExt cx="0" cy="0"/>
+        </a:xfrm>
+      </p:grpSpPr>
       <p:sp>
         <p:nvSpPr>
           <p:cNvPr id="2" name="Rectangle 1"/>
@@ -11519,6 +11426,7 @@
           <a:lstStyle/>
           <a:p>
             <a:pPr algn="ctr"/>
+            <a:endParaRPr/>
           </a:p>
         </p:txBody>
       </p:sp>
@@ -11562,6 +11470,7 @@
           <a:lstStyle/>
           <a:p>
             <a:pPr algn="ctr"/>
+            <a:endParaRPr/>
           </a:p>
         </p:txBody>
       </p:sp>
@@ -11582,7 +11491,7 @@
           <a:noFill/>
         </p:spPr>
         <p:txBody>
-          <a:bodyPr wrap="square" anchor="ctr" lIns="45720" rIns="45720" tIns="27432" bIns="27432">
+          <a:bodyPr wrap="square" lIns="45720" tIns="27432" rIns="45720" bIns="27432" anchor="ctr">
             <a:spAutoFit/>
           </a:bodyPr>
           <a:lstStyle/>
@@ -11609,7 +11518,7 @@
           <p:nvPr/>
         </p:nvPicPr>
         <p:blipFill>
-          <a:blip r:embed="rId2"/>
+          <a:blip r:embed="rId3"/>
           <a:stretch>
             <a:fillRect/>
           </a:stretch>
@@ -11641,7 +11550,7 @@
           <a:noFill/>
         </p:spPr>
         <p:txBody>
-          <a:bodyPr wrap="square" anchor="t" lIns="45720" rIns="45720" tIns="27432" bIns="27432">
+          <a:bodyPr wrap="square" lIns="45720" tIns="27432" rIns="45720" bIns="27432" anchor="t">
             <a:spAutoFit/>
           </a:bodyPr>
           <a:lstStyle/>
@@ -11676,7 +11585,7 @@
           <a:noFill/>
         </p:spPr>
         <p:txBody>
-          <a:bodyPr wrap="square" anchor="t" lIns="45720" rIns="45720" tIns="27432" bIns="27432">
+          <a:bodyPr wrap="square" lIns="45720" tIns="27432" rIns="45720" bIns="27432" anchor="t">
             <a:spAutoFit/>
           </a:bodyPr>
           <a:lstStyle/>
@@ -11739,6 +11648,7 @@
           <a:lstStyle/>
           <a:p>
             <a:pPr algn="ctr"/>
+            <a:endParaRPr/>
           </a:p>
         </p:txBody>
       </p:sp>
@@ -11783,6 +11693,7 @@
           <a:lstStyle/>
           <a:p>
             <a:pPr algn="ctr"/>
+            <a:endParaRPr/>
           </a:p>
         </p:txBody>
       </p:sp>
@@ -11795,7 +11706,7 @@
           <p:nvPr/>
         </p:nvPicPr>
         <p:blipFill>
-          <a:blip r:embed="rId3"/>
+          <a:blip r:embed="rId4"/>
           <a:stretch>
             <a:fillRect/>
           </a:stretch>
@@ -11827,7 +11738,7 @@
           <a:noFill/>
         </p:spPr>
         <p:txBody>
-          <a:bodyPr wrap="square" anchor="t" lIns="45720" rIns="45720" tIns="27432" bIns="27432">
+          <a:bodyPr wrap="square" lIns="45720" tIns="27432" rIns="45720" bIns="27432" anchor="t">
             <a:spAutoFit/>
           </a:bodyPr>
           <a:lstStyle/>
@@ -11862,7 +11773,7 @@
           <a:noFill/>
         </p:spPr>
         <p:txBody>
-          <a:bodyPr wrap="square" anchor="t" lIns="45720" rIns="45720" tIns="27432" bIns="27432">
+          <a:bodyPr wrap="square" lIns="45720" tIns="27432" rIns="45720" bIns="27432" anchor="t">
             <a:spAutoFit/>
           </a:bodyPr>
           <a:lstStyle/>
@@ -11920,6 +11831,7 @@
           <a:lstStyle/>
           <a:p>
             <a:pPr algn="ctr"/>
+            <a:endParaRPr/>
           </a:p>
         </p:txBody>
       </p:sp>
@@ -11968,6 +11880,7 @@
           <a:lstStyle/>
           <a:p>
             <a:pPr algn="ctr"/>
+            <a:endParaRPr/>
           </a:p>
         </p:txBody>
       </p:sp>
@@ -12012,6 +11925,7 @@
           <a:lstStyle/>
           <a:p>
             <a:pPr algn="ctr"/>
+            <a:endParaRPr/>
           </a:p>
         </p:txBody>
       </p:sp>
@@ -12024,7 +11938,7 @@
           <p:nvPr/>
         </p:nvPicPr>
         <p:blipFill>
-          <a:blip r:embed="rId4"/>
+          <a:blip r:embed="rId5"/>
           <a:stretch>
             <a:fillRect/>
           </a:stretch>
@@ -12056,7 +11970,7 @@
           <a:noFill/>
         </p:spPr>
         <p:txBody>
-          <a:bodyPr wrap="square" anchor="t" lIns="45720" rIns="45720" tIns="27432" bIns="27432">
+          <a:bodyPr wrap="square" lIns="45720" tIns="27432" rIns="45720" bIns="27432" anchor="t">
             <a:spAutoFit/>
           </a:bodyPr>
           <a:lstStyle/>
@@ -12091,7 +12005,7 @@
           <a:noFill/>
         </p:spPr>
         <p:txBody>
-          <a:bodyPr wrap="square" anchor="t" lIns="45720" rIns="45720" tIns="27432" bIns="27432">
+          <a:bodyPr wrap="square" lIns="45720" tIns="27432" rIns="45720" bIns="27432" anchor="t">
             <a:spAutoFit/>
           </a:bodyPr>
           <a:lstStyle/>
@@ -12149,6 +12063,7 @@
           <a:lstStyle/>
           <a:p>
             <a:pPr algn="ctr"/>
+            <a:endParaRPr/>
           </a:p>
         </p:txBody>
       </p:sp>
@@ -12197,6 +12112,7 @@
           <a:lstStyle/>
           <a:p>
             <a:pPr algn="ctr"/>
+            <a:endParaRPr/>
           </a:p>
         </p:txBody>
       </p:sp>
@@ -12241,6 +12157,7 @@
           <a:lstStyle/>
           <a:p>
             <a:pPr algn="ctr"/>
+            <a:endParaRPr/>
           </a:p>
         </p:txBody>
       </p:sp>
@@ -12253,7 +12170,7 @@
           <p:nvPr/>
         </p:nvPicPr>
         <p:blipFill>
-          <a:blip r:embed="rId5"/>
+          <a:blip r:embed="rId6"/>
           <a:stretch>
             <a:fillRect/>
           </a:stretch>
@@ -12285,7 +12202,7 @@
           <a:noFill/>
         </p:spPr>
         <p:txBody>
-          <a:bodyPr wrap="square" anchor="t" lIns="45720" rIns="45720" tIns="27432" bIns="27432">
+          <a:bodyPr wrap="square" lIns="45720" tIns="27432" rIns="45720" bIns="27432" anchor="t">
             <a:spAutoFit/>
           </a:bodyPr>
           <a:lstStyle/>
@@ -12320,7 +12237,7 @@
           <a:noFill/>
         </p:spPr>
         <p:txBody>
-          <a:bodyPr wrap="square" anchor="t" lIns="45720" rIns="45720" tIns="27432" bIns="27432">
+          <a:bodyPr wrap="square" lIns="45720" tIns="27432" rIns="45720" bIns="27432" anchor="t">
             <a:spAutoFit/>
           </a:bodyPr>
           <a:lstStyle/>
@@ -12378,6 +12295,7 @@
           <a:lstStyle/>
           <a:p>
             <a:pPr algn="ctr"/>
+            <a:endParaRPr/>
           </a:p>
         </p:txBody>
       </p:sp>
@@ -12426,6 +12344,7 @@
           <a:lstStyle/>
           <a:p>
             <a:pPr algn="ctr"/>
+            <a:endParaRPr/>
           </a:p>
         </p:txBody>
       </p:sp>
@@ -12470,6 +12389,7 @@
           <a:lstStyle/>
           <a:p>
             <a:pPr algn="ctr"/>
+            <a:endParaRPr/>
           </a:p>
         </p:txBody>
       </p:sp>
@@ -12482,7 +12402,7 @@
           <p:nvPr/>
         </p:nvPicPr>
         <p:blipFill>
-          <a:blip r:embed="rId6"/>
+          <a:blip r:embed="rId7"/>
           <a:stretch>
             <a:fillRect/>
           </a:stretch>
@@ -12514,7 +12434,7 @@
           <a:noFill/>
         </p:spPr>
         <p:txBody>
-          <a:bodyPr wrap="square" anchor="t" lIns="45720" rIns="45720" tIns="27432" bIns="27432">
+          <a:bodyPr wrap="square" lIns="45720" tIns="27432" rIns="45720" bIns="27432" anchor="t">
             <a:spAutoFit/>
           </a:bodyPr>
           <a:lstStyle/>
@@ -12549,7 +12469,7 @@
           <a:noFill/>
         </p:spPr>
         <p:txBody>
-          <a:bodyPr wrap="square" anchor="t" lIns="45720" rIns="45720" tIns="27432" bIns="27432">
+          <a:bodyPr wrap="square" lIns="45720" tIns="27432" rIns="45720" bIns="27432" anchor="t">
             <a:spAutoFit/>
           </a:bodyPr>
           <a:lstStyle/>
@@ -12612,6 +12532,7 @@
           <a:lstStyle/>
           <a:p>
             <a:pPr algn="ctr"/>
+            <a:endParaRPr/>
           </a:p>
         </p:txBody>
       </p:sp>
@@ -12632,7 +12553,7 @@
           <a:noFill/>
         </p:spPr>
         <p:txBody>
-          <a:bodyPr wrap="square" anchor="ctr" lIns="45720" rIns="45720" tIns="27432" bIns="27432">
+          <a:bodyPr wrap="square" lIns="45720" tIns="27432" rIns="45720" bIns="27432" anchor="ctr">
             <a:spAutoFit/>
           </a:bodyPr>
           <a:lstStyle/>
@@ -12659,7 +12580,7 @@
 </file>
 
 <file path=ppt/slides/slide5.xml><?xml version="1.0" encoding="utf-8"?>
-<p:sld xmlns:a="http://schemas.openxmlformats.org/drawingml/2006/main" xmlns:p="http://schemas.openxmlformats.org/presentationml/2006/main" xmlns:r="http://schemas.openxmlformats.org/officeDocument/2006/relationships">
+<p:sld xmlns:a="http://schemas.openxmlformats.org/drawingml/2006/main" xmlns:r="http://schemas.openxmlformats.org/officeDocument/2006/relationships" xmlns:p="http://schemas.openxmlformats.org/presentationml/2006/main">
   <p:cSld>
     <p:spTree>
       <p:nvGrpSpPr>
@@ -12667,7 +12588,14 @@
         <p:cNvGrpSpPr/>
         <p:nvPr/>
       </p:nvGrpSpPr>
-      <p:grpSpPr/>
+      <p:grpSpPr>
+        <a:xfrm>
+          <a:off x="0" y="0"/>
+          <a:ext cx="0" cy="0"/>
+          <a:chOff x="0" y="0"/>
+          <a:chExt cx="0" cy="0"/>
+        </a:xfrm>
+      </p:grpSpPr>
       <p:sp>
         <p:nvSpPr>
           <p:cNvPr id="2" name="Rectangle 1"/>
@@ -12708,6 +12636,7 @@
           <a:lstStyle/>
           <a:p>
             <a:pPr algn="ctr"/>
+            <a:endParaRPr/>
           </a:p>
         </p:txBody>
       </p:sp>
@@ -12751,6 +12680,7 @@
           <a:lstStyle/>
           <a:p>
             <a:pPr algn="ctr"/>
+            <a:endParaRPr/>
           </a:p>
         </p:txBody>
       </p:sp>
@@ -12771,7 +12701,7 @@
           <a:noFill/>
         </p:spPr>
         <p:txBody>
-          <a:bodyPr wrap="square" anchor="ctr" lIns="45720" rIns="45720" tIns="27432" bIns="27432">
+          <a:bodyPr wrap="square" lIns="45720" tIns="27432" rIns="45720" bIns="27432" anchor="ctr">
             <a:spAutoFit/>
           </a:bodyPr>
           <a:lstStyle/>
@@ -12798,7 +12728,7 @@
           <p:nvPr/>
         </p:nvPicPr>
         <p:blipFill>
-          <a:blip r:embed="rId2"/>
+          <a:blip r:embed="rId3"/>
           <a:stretch>
             <a:fillRect/>
           </a:stretch>
@@ -12830,7 +12760,7 @@
           <a:noFill/>
         </p:spPr>
         <p:txBody>
-          <a:bodyPr wrap="square" anchor="t" lIns="45720" rIns="45720" tIns="27432" bIns="27432">
+          <a:bodyPr wrap="square" lIns="45720" tIns="27432" rIns="45720" bIns="27432" anchor="t">
             <a:spAutoFit/>
           </a:bodyPr>
           <a:lstStyle/>
@@ -12865,7 +12795,7 @@
           <a:noFill/>
         </p:spPr>
         <p:txBody>
-          <a:bodyPr wrap="square" anchor="t" lIns="45720" rIns="45720" tIns="27432" bIns="27432">
+          <a:bodyPr wrap="square" lIns="45720" tIns="27432" rIns="45720" bIns="27432" anchor="t">
             <a:spAutoFit/>
           </a:bodyPr>
           <a:lstStyle/>
@@ -12900,7 +12830,7 @@
           <a:noFill/>
         </p:spPr>
         <p:txBody>
-          <a:bodyPr wrap="square" anchor="t" lIns="45720" rIns="45720" tIns="27432" bIns="27432">
+          <a:bodyPr wrap="square" lIns="45720" tIns="27432" rIns="45720" bIns="27432" anchor="t">
             <a:spAutoFit/>
           </a:bodyPr>
           <a:lstStyle/>
@@ -12935,7 +12865,7 @@
           <a:noFill/>
         </p:spPr>
         <p:txBody>
-          <a:bodyPr wrap="square" anchor="t" lIns="45720" rIns="45720" tIns="27432" bIns="27432">
+          <a:bodyPr wrap="square" lIns="45720" tIns="27432" rIns="45720" bIns="27432" anchor="t">
             <a:spAutoFit/>
           </a:bodyPr>
           <a:lstStyle/>
@@ -13050,6 +12980,7 @@
           <a:lstStyle/>
           <a:p>
             <a:pPr algn="ctr"/>
+            <a:endParaRPr/>
           </a:p>
         </p:txBody>
       </p:sp>
@@ -13064,7 +12995,7 @@
           <p:nvPr/>
         </p:nvPicPr>
         <p:blipFill>
-          <a:blip r:embed="rId3"/>
+          <a:blip r:embed="rId5"/>
           <a:stretch>
             <a:fillRect/>
           </a:stretch>
@@ -13088,7 +13019,7 @@
 </file>
 
 <file path=ppt/slides/slide6.xml><?xml version="1.0" encoding="utf-8"?>
-<p:sld xmlns:a="http://schemas.openxmlformats.org/drawingml/2006/main" xmlns:p="http://schemas.openxmlformats.org/presentationml/2006/main" xmlns:r="http://schemas.openxmlformats.org/officeDocument/2006/relationships">
+<p:sld xmlns:a="http://schemas.openxmlformats.org/drawingml/2006/main" xmlns:r="http://schemas.openxmlformats.org/officeDocument/2006/relationships" xmlns:p="http://schemas.openxmlformats.org/presentationml/2006/main">
   <p:cSld>
     <p:spTree>
       <p:nvGrpSpPr>
@@ -13096,7 +13027,14 @@
         <p:cNvGrpSpPr/>
         <p:nvPr/>
       </p:nvGrpSpPr>
-      <p:grpSpPr/>
+      <p:grpSpPr>
+        <a:xfrm>
+          <a:off x="0" y="0"/>
+          <a:ext cx="0" cy="0"/>
+          <a:chOff x="0" y="0"/>
+          <a:chExt cx="0" cy="0"/>
+        </a:xfrm>
+      </p:grpSpPr>
       <p:sp>
         <p:nvSpPr>
           <p:cNvPr id="2" name="Rectangle 1"/>
@@ -13137,6 +13075,7 @@
           <a:lstStyle/>
           <a:p>
             <a:pPr algn="ctr"/>
+            <a:endParaRPr/>
           </a:p>
         </p:txBody>
       </p:sp>
@@ -13180,6 +13119,7 @@
           <a:lstStyle/>
           <a:p>
             <a:pPr algn="ctr"/>
+            <a:endParaRPr/>
           </a:p>
         </p:txBody>
       </p:sp>
@@ -13200,7 +13140,7 @@
           <a:noFill/>
         </p:spPr>
         <p:txBody>
-          <a:bodyPr wrap="square" anchor="ctr" lIns="45720" rIns="45720" tIns="27432" bIns="27432">
+          <a:bodyPr wrap="square" lIns="45720" tIns="27432" rIns="45720" bIns="27432" anchor="ctr">
             <a:spAutoFit/>
           </a:bodyPr>
           <a:lstStyle/>
@@ -13227,7 +13167,7 @@
           <p:nvPr/>
         </p:nvPicPr>
         <p:blipFill>
-          <a:blip r:embed="rId2"/>
+          <a:blip r:embed="rId3"/>
           <a:stretch>
             <a:fillRect/>
           </a:stretch>
@@ -13259,7 +13199,7 @@
           <a:noFill/>
         </p:spPr>
         <p:txBody>
-          <a:bodyPr wrap="square" anchor="t" lIns="45720" rIns="45720" tIns="27432" bIns="27432">
+          <a:bodyPr wrap="square" lIns="45720" tIns="27432" rIns="45720" bIns="27432" anchor="t">
             <a:spAutoFit/>
           </a:bodyPr>
           <a:lstStyle/>
@@ -13294,7 +13234,7 @@
           <a:noFill/>
         </p:spPr>
         <p:txBody>
-          <a:bodyPr wrap="square" anchor="t" lIns="45720" rIns="45720" tIns="27432" bIns="27432">
+          <a:bodyPr wrap="square" lIns="45720" tIns="27432" rIns="45720" bIns="27432" anchor="t">
             <a:spAutoFit/>
           </a:bodyPr>
           <a:lstStyle/>
@@ -13357,6 +13297,7 @@
           <a:lstStyle/>
           <a:p>
             <a:pPr algn="ctr"/>
+            <a:endParaRPr/>
           </a:p>
         </p:txBody>
       </p:sp>
@@ -13371,7 +13312,7 @@
           <p:nvPr/>
         </p:nvPicPr>
         <p:blipFill>
-          <a:blip r:embed="rId3"/>
+          <a:blip r:embed="rId5"/>
           <a:stretch>
             <a:fillRect/>
           </a:stretch>
@@ -13431,6 +13372,7 @@
           <a:lstStyle/>
           <a:p>
             <a:pPr algn="ctr"/>
+            <a:endParaRPr/>
           </a:p>
         </p:txBody>
       </p:sp>
@@ -13445,7 +13387,7 @@
           <p:nvPr/>
         </p:nvPicPr>
         <p:blipFill>
-          <a:blip r:embed="rId5"/>
+          <a:blip r:embed="rId7"/>
           <a:stretch>
             <a:fillRect/>
           </a:stretch>
@@ -13477,7 +13419,7 @@
           <a:noFill/>
         </p:spPr>
         <p:txBody>
-          <a:bodyPr wrap="square" anchor="t" lIns="45720" rIns="45720" tIns="27432" bIns="27432">
+          <a:bodyPr wrap="square" lIns="45720" tIns="27432" rIns="45720" bIns="27432" anchor="t">
             <a:spAutoFit/>
           </a:bodyPr>
           <a:lstStyle/>
@@ -13512,7 +13454,7 @@
           <a:noFill/>
         </p:spPr>
         <p:txBody>
-          <a:bodyPr wrap="square" anchor="t" lIns="45720" rIns="45720" tIns="27432" bIns="27432">
+          <a:bodyPr wrap="square" lIns="45720" tIns="27432" rIns="45720" bIns="27432" anchor="t">
             <a:spAutoFit/>
           </a:bodyPr>
           <a:lstStyle/>
@@ -13547,7 +13489,7 @@
           <a:noFill/>
         </p:spPr>
         <p:txBody>
-          <a:bodyPr wrap="square" anchor="t" lIns="45720" rIns="45720" tIns="27432" bIns="27432">
+          <a:bodyPr wrap="square" lIns="45720" tIns="27432" rIns="45720" bIns="27432" anchor="t">
             <a:spAutoFit/>
           </a:bodyPr>
           <a:lstStyle/>
@@ -13582,7 +13524,7 @@
           <a:noFill/>
         </p:spPr>
         <p:txBody>
-          <a:bodyPr wrap="square" anchor="t" lIns="45720" rIns="45720" tIns="27432" bIns="27432">
+          <a:bodyPr wrap="square" lIns="45720" tIns="27432" rIns="45720" bIns="27432" anchor="t">
             <a:spAutoFit/>
           </a:bodyPr>
           <a:lstStyle/>
@@ -13609,7 +13551,7 @@
 </file>
 
 <file path=ppt/slides/slide7.xml><?xml version="1.0" encoding="utf-8"?>
-<p:sld xmlns:a="http://schemas.openxmlformats.org/drawingml/2006/main" xmlns:p="http://schemas.openxmlformats.org/presentationml/2006/main" xmlns:r="http://schemas.openxmlformats.org/officeDocument/2006/relationships">
+<p:sld xmlns:a="http://schemas.openxmlformats.org/drawingml/2006/main" xmlns:r="http://schemas.openxmlformats.org/officeDocument/2006/relationships" xmlns:p="http://schemas.openxmlformats.org/presentationml/2006/main">
   <p:cSld>
     <p:spTree>
       <p:nvGrpSpPr>
@@ -13617,7 +13559,14 @@
         <p:cNvGrpSpPr/>
         <p:nvPr/>
       </p:nvGrpSpPr>
-      <p:grpSpPr/>
+      <p:grpSpPr>
+        <a:xfrm>
+          <a:off x="0" y="0"/>
+          <a:ext cx="0" cy="0"/>
+          <a:chOff x="0" y="0"/>
+          <a:chExt cx="0" cy="0"/>
+        </a:xfrm>
+      </p:grpSpPr>
       <p:sp>
         <p:nvSpPr>
           <p:cNvPr id="2" name="Rectangle 1"/>
@@ -13658,6 +13607,7 @@
           <a:lstStyle/>
           <a:p>
             <a:pPr algn="ctr"/>
+            <a:endParaRPr/>
           </a:p>
         </p:txBody>
       </p:sp>
@@ -13701,6 +13651,7 @@
           <a:lstStyle/>
           <a:p>
             <a:pPr algn="ctr"/>
+            <a:endParaRPr/>
           </a:p>
         </p:txBody>
       </p:sp>
@@ -13721,7 +13672,7 @@
           <a:noFill/>
         </p:spPr>
         <p:txBody>
-          <a:bodyPr wrap="square" anchor="ctr" lIns="45720" rIns="45720" tIns="27432" bIns="27432">
+          <a:bodyPr wrap="square" lIns="45720" tIns="27432" rIns="45720" bIns="27432" anchor="ctr">
             <a:spAutoFit/>
           </a:bodyPr>
           <a:lstStyle/>
@@ -13748,7 +13699,7 @@
           <p:nvPr/>
         </p:nvPicPr>
         <p:blipFill>
-          <a:blip r:embed="rId2"/>
+          <a:blip r:embed="rId3"/>
           <a:stretch>
             <a:fillRect/>
           </a:stretch>
@@ -13780,7 +13731,7 @@
           <a:noFill/>
         </p:spPr>
         <p:txBody>
-          <a:bodyPr wrap="square" anchor="t" lIns="45720" rIns="45720" tIns="27432" bIns="27432">
+          <a:bodyPr wrap="square" lIns="45720" tIns="27432" rIns="45720" bIns="27432" anchor="t">
             <a:spAutoFit/>
           </a:bodyPr>
           <a:lstStyle/>
@@ -13815,7 +13766,7 @@
           <a:noFill/>
         </p:spPr>
         <p:txBody>
-          <a:bodyPr wrap="square" anchor="t" lIns="45720" rIns="45720" tIns="27432" bIns="27432">
+          <a:bodyPr wrap="square" lIns="45720" tIns="27432" rIns="45720" bIns="27432" anchor="t">
             <a:spAutoFit/>
           </a:bodyPr>
           <a:lstStyle/>
@@ -13850,7 +13801,7 @@
           <a:noFill/>
         </p:spPr>
         <p:txBody>
-          <a:bodyPr wrap="square" anchor="t" lIns="45720" rIns="45720" tIns="27432" bIns="27432">
+          <a:bodyPr wrap="square" lIns="45720" tIns="27432" rIns="45720" bIns="27432" anchor="t">
             <a:spAutoFit/>
           </a:bodyPr>
           <a:lstStyle/>
@@ -13885,7 +13836,7 @@
           <a:noFill/>
         </p:spPr>
         <p:txBody>
-          <a:bodyPr wrap="square" anchor="t" lIns="45720" rIns="45720" tIns="27432" bIns="27432">
+          <a:bodyPr wrap="square" lIns="45720" tIns="27432" rIns="45720" bIns="27432" anchor="t">
             <a:spAutoFit/>
           </a:bodyPr>
           <a:lstStyle/>
@@ -14000,6 +13951,7 @@
           <a:lstStyle/>
           <a:p>
             <a:pPr algn="ctr"/>
+            <a:endParaRPr/>
           </a:p>
         </p:txBody>
       </p:sp>
@@ -14014,7 +13966,7 @@
           <p:nvPr/>
         </p:nvPicPr>
         <p:blipFill>
-          <a:blip r:embed="rId3"/>
+          <a:blip r:embed="rId5"/>
           <a:stretch>
             <a:fillRect/>
           </a:stretch>
@@ -14038,7 +13990,7 @@
 </file>
 
 <file path=ppt/slides/slide8.xml><?xml version="1.0" encoding="utf-8"?>
-<p:sld xmlns:a="http://schemas.openxmlformats.org/drawingml/2006/main" xmlns:p="http://schemas.openxmlformats.org/presentationml/2006/main" xmlns:r="http://schemas.openxmlformats.org/officeDocument/2006/relationships">
+<p:sld xmlns:a="http://schemas.openxmlformats.org/drawingml/2006/main" xmlns:r="http://schemas.openxmlformats.org/officeDocument/2006/relationships" xmlns:p="http://schemas.openxmlformats.org/presentationml/2006/main">
   <p:cSld>
     <p:spTree>
       <p:nvGrpSpPr>
@@ -14046,7 +13998,14 @@
         <p:cNvGrpSpPr/>
         <p:nvPr/>
       </p:nvGrpSpPr>
-      <p:grpSpPr/>
+      <p:grpSpPr>
+        <a:xfrm>
+          <a:off x="0" y="0"/>
+          <a:ext cx="0" cy="0"/>
+          <a:chOff x="0" y="0"/>
+          <a:chExt cx="0" cy="0"/>
+        </a:xfrm>
+      </p:grpSpPr>
       <p:sp>
         <p:nvSpPr>
           <p:cNvPr id="2" name="Rectangle 1"/>
@@ -14087,6 +14046,7 @@
           <a:lstStyle/>
           <a:p>
             <a:pPr algn="ctr"/>
+            <a:endParaRPr/>
           </a:p>
         </p:txBody>
       </p:sp>
@@ -14130,6 +14090,7 @@
           <a:lstStyle/>
           <a:p>
             <a:pPr algn="ctr"/>
+            <a:endParaRPr/>
           </a:p>
         </p:txBody>
       </p:sp>
@@ -14150,7 +14111,7 @@
           <a:noFill/>
         </p:spPr>
         <p:txBody>
-          <a:bodyPr wrap="square" anchor="ctr" lIns="45720" rIns="45720" tIns="27432" bIns="27432">
+          <a:bodyPr wrap="square" lIns="45720" tIns="27432" rIns="45720" bIns="27432" anchor="ctr">
             <a:spAutoFit/>
           </a:bodyPr>
           <a:lstStyle/>
@@ -14177,7 +14138,7 @@
           <p:nvPr/>
         </p:nvPicPr>
         <p:blipFill>
-          <a:blip r:embed="rId2"/>
+          <a:blip r:embed="rId3"/>
           <a:stretch>
             <a:fillRect/>
           </a:stretch>
@@ -14209,7 +14170,7 @@
           <a:noFill/>
         </p:spPr>
         <p:txBody>
-          <a:bodyPr wrap="square" anchor="t" lIns="45720" rIns="45720" tIns="27432" bIns="27432">
+          <a:bodyPr wrap="square" lIns="45720" tIns="27432" rIns="45720" bIns="27432" anchor="t">
             <a:spAutoFit/>
           </a:bodyPr>
           <a:lstStyle/>
@@ -14244,7 +14205,7 @@
           <a:noFill/>
         </p:spPr>
         <p:txBody>
-          <a:bodyPr wrap="square" anchor="t" lIns="45720" rIns="45720" tIns="27432" bIns="27432">
+          <a:bodyPr wrap="square" lIns="45720" tIns="27432" rIns="45720" bIns="27432" anchor="t">
             <a:spAutoFit/>
           </a:bodyPr>
           <a:lstStyle/>
@@ -14307,6 +14268,7 @@
           <a:lstStyle/>
           <a:p>
             <a:pPr algn="ctr"/>
+            <a:endParaRPr/>
           </a:p>
         </p:txBody>
       </p:sp>
@@ -14351,6 +14313,7 @@
           <a:lstStyle/>
           <a:p>
             <a:pPr algn="ctr"/>
+            <a:endParaRPr/>
           </a:p>
         </p:txBody>
       </p:sp>
@@ -14363,7 +14326,7 @@
           <p:nvPr/>
         </p:nvPicPr>
         <p:blipFill>
-          <a:blip r:embed="rId3"/>
+          <a:blip r:embed="rId4"/>
           <a:stretch>
             <a:fillRect/>
           </a:stretch>
@@ -14395,7 +14358,7 @@
           <a:noFill/>
         </p:spPr>
         <p:txBody>
-          <a:bodyPr wrap="square" anchor="ctr" lIns="45720" rIns="45720" tIns="27432" bIns="27432">
+          <a:bodyPr wrap="square" lIns="45720" tIns="27432" rIns="45720" bIns="27432" anchor="ctr">
             <a:spAutoFit/>
           </a:bodyPr>
           <a:lstStyle/>
@@ -14410,6 +14373,15 @@
               </a:rPr>
               <a:t>9,322</a:t>
             </a:r>
+            <a:r>
+              <a:rPr sz="1800" b="0">
+                <a:solidFill>
+                  <a:srgbClr val="243B7A"/>
+                </a:solidFill>
+                <a:latin typeface="Calibri"/>
+              </a:rPr>
+              <a:t> records</a:t>
+            </a:r>
           </a:p>
         </p:txBody>
       </p:sp>
@@ -14430,7 +14402,7 @@
           <a:noFill/>
         </p:spPr>
         <p:txBody>
-          <a:bodyPr wrap="square" anchor="t" lIns="45720" rIns="45720" tIns="27432" bIns="27432">
+          <a:bodyPr wrap="square" lIns="45720" tIns="27432" rIns="45720" bIns="27432" anchor="t">
             <a:spAutoFit/>
           </a:bodyPr>
           <a:lstStyle/>
@@ -14493,6 +14465,7 @@
           <a:lstStyle/>
           <a:p>
             <a:pPr algn="ctr"/>
+            <a:endParaRPr/>
           </a:p>
         </p:txBody>
       </p:sp>
@@ -14537,6 +14510,7 @@
           <a:lstStyle/>
           <a:p>
             <a:pPr algn="ctr"/>
+            <a:endParaRPr/>
           </a:p>
         </p:txBody>
       </p:sp>
@@ -14549,7 +14523,7 @@
           <p:nvPr/>
         </p:nvPicPr>
         <p:blipFill>
-          <a:blip r:embed="rId4"/>
+          <a:blip r:embed="rId5"/>
           <a:stretch>
             <a:fillRect/>
           </a:stretch>
@@ -14581,7 +14555,7 @@
           <a:noFill/>
         </p:spPr>
         <p:txBody>
-          <a:bodyPr wrap="square" anchor="ctr" lIns="45720" rIns="45720" tIns="27432" bIns="27432">
+          <a:bodyPr wrap="square" lIns="45720" tIns="27432" rIns="45720" bIns="27432" anchor="ctr">
             <a:spAutoFit/>
           </a:bodyPr>
           <a:lstStyle/>
@@ -14596,6 +14570,15 @@
               </a:rPr>
               <a:t>28,405</a:t>
             </a:r>
+            <a:r>
+              <a:rPr sz="1800" b="0">
+                <a:solidFill>
+                  <a:srgbClr val="243B7A"/>
+                </a:solidFill>
+                <a:latin typeface="Calibri"/>
+              </a:rPr>
+              <a:t> shops</a:t>
+            </a:r>
           </a:p>
         </p:txBody>
       </p:sp>
@@ -14616,7 +14599,7 @@
           <a:noFill/>
         </p:spPr>
         <p:txBody>
-          <a:bodyPr wrap="square" anchor="t" lIns="45720" rIns="45720" tIns="27432" bIns="27432">
+          <a:bodyPr wrap="square" lIns="45720" tIns="27432" rIns="45720" bIns="27432" anchor="t">
             <a:spAutoFit/>
           </a:bodyPr>
           <a:lstStyle/>
@@ -14679,6 +14662,7 @@
           <a:lstStyle/>
           <a:p>
             <a:pPr algn="ctr"/>
+            <a:endParaRPr/>
           </a:p>
         </p:txBody>
       </p:sp>
@@ -14723,6 +14707,7 @@
           <a:lstStyle/>
           <a:p>
             <a:pPr algn="ctr"/>
+            <a:endParaRPr/>
           </a:p>
         </p:txBody>
       </p:sp>
@@ -14735,7 +14720,7 @@
           <p:nvPr/>
         </p:nvPicPr>
         <p:blipFill>
-          <a:blip r:embed="rId5"/>
+          <a:blip r:embed="rId6"/>
           <a:stretch>
             <a:fillRect/>
           </a:stretch>
@@ -14758,8 +14743,8 @@
         </p:nvSpPr>
         <p:spPr>
           <a:xfrm>
-            <a:off x="9052559" y="1554480"/>
-            <a:ext cx="2377440" cy="731520"/>
+            <a:off x="9052559" y="1630930"/>
+            <a:ext cx="2377440" cy="578620"/>
           </a:xfrm>
           <a:prstGeom prst="rect">
             <a:avLst/>
@@ -14767,14 +14752,14 @@
           <a:noFill/>
         </p:spPr>
         <p:txBody>
-          <a:bodyPr wrap="square" anchor="ctr" lIns="45720" rIns="45720" tIns="27432" bIns="27432">
+          <a:bodyPr wrap="square" lIns="45720" tIns="27432" rIns="45720" bIns="27432" anchor="ctr">
             <a:spAutoFit/>
           </a:bodyPr>
           <a:lstStyle/>
           <a:p>
             <a:pPr algn="l"/>
             <a:r>
-              <a:rPr sz="3400" b="1">
+              <a:rPr sz="3400" b="1" dirty="0">
                 <a:solidFill>
                   <a:srgbClr val="243B7A"/>
                 </a:solidFill>
@@ -14782,6 +14767,21 @@
               </a:rPr>
               <a:t>3,455</a:t>
             </a:r>
+            <a:r>
+              <a:rPr lang="en-IN" sz="1800" b="0" dirty="0">
+                <a:solidFill>
+                  <a:srgbClr val="243B7A"/>
+                </a:solidFill>
+                <a:latin typeface="Calibri"/>
+              </a:rPr>
+              <a:t> records</a:t>
+            </a:r>
+            <a:endParaRPr sz="3400" b="1" dirty="0">
+              <a:solidFill>
+                <a:srgbClr val="243B7A"/>
+              </a:solidFill>
+              <a:latin typeface="Calibri"/>
+            </a:endParaRPr>
           </a:p>
         </p:txBody>
       </p:sp>
@@ -14802,7 +14802,7 @@
           <a:noFill/>
         </p:spPr>
         <p:txBody>
-          <a:bodyPr wrap="square" anchor="t" lIns="45720" rIns="45720" tIns="27432" bIns="27432">
+          <a:bodyPr wrap="square" lIns="45720" tIns="27432" rIns="45720" bIns="27432" anchor="t">
             <a:spAutoFit/>
           </a:bodyPr>
           <a:lstStyle/>
@@ -14865,6 +14865,7 @@
           <a:lstStyle/>
           <a:p>
             <a:pPr algn="ctr"/>
+            <a:endParaRPr/>
           </a:p>
         </p:txBody>
       </p:sp>
@@ -14909,6 +14910,7 @@
           <a:lstStyle/>
           <a:p>
             <a:pPr algn="ctr"/>
+            <a:endParaRPr/>
           </a:p>
         </p:txBody>
       </p:sp>
@@ -14921,7 +14923,7 @@
           <p:nvPr/>
         </p:nvPicPr>
         <p:blipFill>
-          <a:blip r:embed="rId6"/>
+          <a:blip r:embed="rId7"/>
           <a:stretch>
             <a:fillRect/>
           </a:stretch>
@@ -14953,7 +14955,7 @@
           <a:noFill/>
         </p:spPr>
         <p:txBody>
-          <a:bodyPr wrap="square" anchor="ctr" lIns="45720" rIns="45720" tIns="27432" bIns="27432">
+          <a:bodyPr wrap="square" lIns="45720" tIns="27432" rIns="45720" bIns="27432" anchor="ctr">
             <a:spAutoFit/>
           </a:bodyPr>
           <a:lstStyle/>
@@ -14968,6 +14970,15 @@
               </a:rPr>
               <a:t>3,812</a:t>
             </a:r>
+            <a:r>
+              <a:rPr sz="1800" b="0">
+                <a:solidFill>
+                  <a:srgbClr val="243B7A"/>
+                </a:solidFill>
+                <a:latin typeface="Calibri"/>
+              </a:rPr>
+              <a:t> records</a:t>
+            </a:r>
           </a:p>
         </p:txBody>
       </p:sp>
@@ -14988,14 +14999,14 @@
           <a:noFill/>
         </p:spPr>
         <p:txBody>
-          <a:bodyPr wrap="square" anchor="t" lIns="45720" rIns="45720" tIns="27432" bIns="27432">
+          <a:bodyPr wrap="square" lIns="45720" tIns="27432" rIns="45720" bIns="27432" anchor="t">
             <a:spAutoFit/>
           </a:bodyPr>
           <a:lstStyle/>
           <a:p>
             <a:pPr algn="l"/>
             <a:r>
-              <a:rPr sz="1400" b="0">
+              <a:rPr sz="1400" b="0" dirty="0">
                 <a:solidFill>
                   <a:srgbClr val="1F2937"/>
                 </a:solidFill>
@@ -15051,6 +15062,7 @@
           <a:lstStyle/>
           <a:p>
             <a:pPr algn="ctr"/>
+            <a:endParaRPr/>
           </a:p>
         </p:txBody>
       </p:sp>
@@ -15095,6 +15107,7 @@
           <a:lstStyle/>
           <a:p>
             <a:pPr algn="ctr"/>
+            <a:endParaRPr/>
           </a:p>
         </p:txBody>
       </p:sp>
@@ -15107,7 +15120,7 @@
           <p:nvPr/>
         </p:nvPicPr>
         <p:blipFill>
-          <a:blip r:embed="rId7"/>
+          <a:blip r:embed="rId8"/>
           <a:stretch>
             <a:fillRect/>
           </a:stretch>
@@ -15139,14 +15152,14 @@
           <a:noFill/>
         </p:spPr>
         <p:txBody>
-          <a:bodyPr wrap="square" anchor="ctr" lIns="45720" rIns="45720" tIns="27432" bIns="27432">
+          <a:bodyPr wrap="square" lIns="45720" tIns="27432" rIns="45720" bIns="27432" anchor="ctr">
             <a:spAutoFit/>
           </a:bodyPr>
           <a:lstStyle/>
           <a:p>
             <a:pPr algn="l"/>
             <a:r>
-              <a:rPr sz="3400" b="1">
+              <a:rPr sz="3400" b="1" dirty="0">
                 <a:solidFill>
                   <a:srgbClr val="243B7A"/>
                 </a:solidFill>
@@ -15154,6 +15167,15 @@
               </a:rPr>
               <a:t>11,124</a:t>
             </a:r>
+            <a:r>
+              <a:rPr sz="1800" b="0" dirty="0">
+                <a:solidFill>
+                  <a:srgbClr val="243B7A"/>
+                </a:solidFill>
+                <a:latin typeface="Calibri"/>
+              </a:rPr>
+              <a:t> records</a:t>
+            </a:r>
           </a:p>
         </p:txBody>
       </p:sp>
@@ -15174,7 +15196,7 @@
           <a:noFill/>
         </p:spPr>
         <p:txBody>
-          <a:bodyPr wrap="square" anchor="t" lIns="45720" rIns="45720" tIns="27432" bIns="27432">
+          <a:bodyPr wrap="square" lIns="45720" tIns="27432" rIns="45720" bIns="27432" anchor="t">
             <a:spAutoFit/>
           </a:bodyPr>
           <a:lstStyle/>
@@ -15237,6 +15259,7 @@
           <a:lstStyle/>
           <a:p>
             <a:pPr algn="ctr"/>
+            <a:endParaRPr/>
           </a:p>
         </p:txBody>
       </p:sp>
@@ -15281,6 +15304,7 @@
           <a:lstStyle/>
           <a:p>
             <a:pPr algn="ctr"/>
+            <a:endParaRPr/>
           </a:p>
         </p:txBody>
       </p:sp>
@@ -15293,7 +15317,7 @@
           <p:nvPr/>
         </p:nvPicPr>
         <p:blipFill>
-          <a:blip r:embed="rId8"/>
+          <a:blip r:embed="rId9"/>
           <a:stretch>
             <a:fillRect/>
           </a:stretch>
@@ -15325,7 +15349,7 @@
           <a:noFill/>
         </p:spPr>
         <p:txBody>
-          <a:bodyPr wrap="square" anchor="ctr" lIns="45720" rIns="45720" tIns="27432" bIns="27432">
+          <a:bodyPr wrap="square" lIns="45720" tIns="27432" rIns="45720" bIns="27432" anchor="ctr">
             <a:spAutoFit/>
           </a:bodyPr>
           <a:lstStyle/>
@@ -15340,6 +15364,15 @@
               </a:rPr>
               <a:t>330+</a:t>
             </a:r>
+            <a:r>
+              <a:rPr sz="1800" b="0">
+                <a:solidFill>
+                  <a:srgbClr val="243B7A"/>
+                </a:solidFill>
+                <a:latin typeface="Calibri"/>
+              </a:rPr>
+              <a:t> documents</a:t>
+            </a:r>
           </a:p>
         </p:txBody>
       </p:sp>
@@ -15360,7 +15393,7 @@
           <a:noFill/>
         </p:spPr>
         <p:txBody>
-          <a:bodyPr wrap="square" anchor="t" lIns="45720" rIns="45720" tIns="27432" bIns="27432">
+          <a:bodyPr wrap="square" lIns="45720" tIns="27432" rIns="45720" bIns="27432" anchor="t">
             <a:spAutoFit/>
           </a:bodyPr>
           <a:lstStyle/>
@@ -15395,7 +15428,7 @@
           <a:noFill/>
         </p:spPr>
         <p:txBody>
-          <a:bodyPr wrap="square" anchor="t" lIns="45720" rIns="45720" tIns="27432" bIns="27432">
+          <a:bodyPr wrap="square" lIns="45720" tIns="27432" rIns="45720" bIns="27432" anchor="t">
             <a:spAutoFit/>
           </a:bodyPr>
           <a:lstStyle/>
@@ -15422,7 +15455,7 @@
 </file>
 
 <file path=ppt/slides/slide9.xml><?xml version="1.0" encoding="utf-8"?>
-<p:sld xmlns:a="http://schemas.openxmlformats.org/drawingml/2006/main" xmlns:p="http://schemas.openxmlformats.org/presentationml/2006/main" xmlns:r="http://schemas.openxmlformats.org/officeDocument/2006/relationships">
+<p:sld xmlns:a="http://schemas.openxmlformats.org/drawingml/2006/main" xmlns:r="http://schemas.openxmlformats.org/officeDocument/2006/relationships" xmlns:p="http://schemas.openxmlformats.org/presentationml/2006/main">
   <p:cSld>
     <p:spTree>
       <p:nvGrpSpPr>
@@ -15430,7 +15463,14 @@
         <p:cNvGrpSpPr/>
         <p:nvPr/>
       </p:nvGrpSpPr>
-      <p:grpSpPr/>
+      <p:grpSpPr>
+        <a:xfrm>
+          <a:off x="0" y="0"/>
+          <a:ext cx="0" cy="0"/>
+          <a:chOff x="0" y="0"/>
+          <a:chExt cx="0" cy="0"/>
+        </a:xfrm>
+      </p:grpSpPr>
       <p:sp>
         <p:nvSpPr>
           <p:cNvPr id="2" name="Rectangle 1"/>
@@ -15471,6 +15511,7 @@
           <a:lstStyle/>
           <a:p>
             <a:pPr algn="ctr"/>
+            <a:endParaRPr/>
           </a:p>
         </p:txBody>
       </p:sp>
@@ -15514,6 +15555,7 @@
           <a:lstStyle/>
           <a:p>
             <a:pPr algn="ctr"/>
+            <a:endParaRPr/>
           </a:p>
         </p:txBody>
       </p:sp>
@@ -15534,7 +15576,7 @@
           <a:noFill/>
         </p:spPr>
         <p:txBody>
-          <a:bodyPr wrap="square" anchor="ctr" lIns="45720" rIns="45720" tIns="27432" bIns="27432">
+          <a:bodyPr wrap="square" lIns="45720" tIns="27432" rIns="45720" bIns="27432" anchor="ctr">
             <a:spAutoFit/>
           </a:bodyPr>
           <a:lstStyle/>
@@ -15561,7 +15603,7 @@
           <p:nvPr/>
         </p:nvPicPr>
         <p:blipFill>
-          <a:blip r:embed="rId2"/>
+          <a:blip r:embed="rId3"/>
           <a:stretch>
             <a:fillRect/>
           </a:stretch>
@@ -15593,7 +15635,7 @@
           <a:noFill/>
         </p:spPr>
         <p:txBody>
-          <a:bodyPr wrap="square" anchor="t" lIns="45720" rIns="45720" tIns="27432" bIns="27432">
+          <a:bodyPr wrap="square" lIns="45720" tIns="27432" rIns="45720" bIns="27432" anchor="t">
             <a:spAutoFit/>
           </a:bodyPr>
           <a:lstStyle/>
@@ -15628,7 +15670,7 @@
           <a:noFill/>
         </p:spPr>
         <p:txBody>
-          <a:bodyPr wrap="square" anchor="t" lIns="45720" rIns="45720" tIns="27432" bIns="27432">
+          <a:bodyPr wrap="square" lIns="45720" tIns="27432" rIns="45720" bIns="27432" anchor="t">
             <a:spAutoFit/>
           </a:bodyPr>
           <a:lstStyle/>
@@ -15663,7 +15705,7 @@
           <a:noFill/>
         </p:spPr>
         <p:txBody>
-          <a:bodyPr wrap="square" anchor="t" lIns="45720" rIns="45720" tIns="27432" bIns="27432">
+          <a:bodyPr wrap="square" lIns="45720" tIns="27432" rIns="45720" bIns="27432" anchor="t">
             <a:spAutoFit/>
           </a:bodyPr>
           <a:lstStyle/>
@@ -15726,6 +15768,7 @@
           <a:lstStyle/>
           <a:p>
             <a:pPr algn="ctr"/>
+            <a:endParaRPr/>
           </a:p>
         </p:txBody>
       </p:sp>
@@ -15770,6 +15813,7 @@
           <a:lstStyle/>
           <a:p>
             <a:pPr algn="ctr"/>
+            <a:endParaRPr/>
           </a:p>
         </p:txBody>
       </p:sp>
@@ -15782,7 +15826,7 @@
           <p:nvPr/>
         </p:nvPicPr>
         <p:blipFill>
-          <a:blip r:embed="rId3"/>
+          <a:blip r:embed="rId4"/>
           <a:stretch>
             <a:fillRect/>
           </a:stretch>
@@ -15814,7 +15858,7 @@
           <a:noFill/>
         </p:spPr>
         <p:txBody>
-          <a:bodyPr wrap="square" anchor="t" lIns="45720" rIns="45720" tIns="27432" bIns="27432">
+          <a:bodyPr wrap="square" lIns="45720" tIns="27432" rIns="45720" bIns="27432" anchor="t">
             <a:spAutoFit/>
           </a:bodyPr>
           <a:lstStyle/>
@@ -15849,7 +15893,7 @@
           <a:noFill/>
         </p:spPr>
         <p:txBody>
-          <a:bodyPr wrap="square" anchor="t" lIns="45720" rIns="45720" tIns="27432" bIns="27432">
+          <a:bodyPr wrap="square" lIns="45720" tIns="27432" rIns="45720" bIns="27432" anchor="t">
             <a:spAutoFit/>
           </a:bodyPr>
           <a:lstStyle/>
@@ -15884,7 +15928,7 @@
           <a:noFill/>
         </p:spPr>
         <p:txBody>
-          <a:bodyPr wrap="square" anchor="t" lIns="45720" rIns="45720" tIns="27432" bIns="27432">
+          <a:bodyPr wrap="square" lIns="45720" tIns="27432" rIns="45720" bIns="27432" anchor="t">
             <a:spAutoFit/>
           </a:bodyPr>
           <a:lstStyle/>
@@ -15947,6 +15991,7 @@
           <a:lstStyle/>
           <a:p>
             <a:pPr algn="ctr"/>
+            <a:endParaRPr/>
           </a:p>
         </p:txBody>
       </p:sp>
@@ -15991,6 +16036,7 @@
           <a:lstStyle/>
           <a:p>
             <a:pPr algn="ctr"/>
+            <a:endParaRPr/>
           </a:p>
         </p:txBody>
       </p:sp>
@@ -16003,7 +16049,7 @@
           <p:nvPr/>
         </p:nvPicPr>
         <p:blipFill>
-          <a:blip r:embed="rId4"/>
+          <a:blip r:embed="rId5"/>
           <a:stretch>
             <a:fillRect/>
           </a:stretch>
@@ -16035,7 +16081,7 @@
           <a:noFill/>
         </p:spPr>
         <p:txBody>
-          <a:bodyPr wrap="square" anchor="t" lIns="45720" rIns="45720" tIns="27432" bIns="27432">
+          <a:bodyPr wrap="square" lIns="45720" tIns="27432" rIns="45720" bIns="27432" anchor="t">
             <a:spAutoFit/>
           </a:bodyPr>
           <a:lstStyle/>
@@ -16070,7 +16116,7 @@
           <a:noFill/>
         </p:spPr>
         <p:txBody>
-          <a:bodyPr wrap="square" anchor="t" lIns="45720" rIns="45720" tIns="27432" bIns="27432">
+          <a:bodyPr wrap="square" lIns="45720" tIns="27432" rIns="45720" bIns="27432" anchor="t">
             <a:spAutoFit/>
           </a:bodyPr>
           <a:lstStyle/>
@@ -16105,7 +16151,7 @@
           <a:noFill/>
         </p:spPr>
         <p:txBody>
-          <a:bodyPr wrap="square" anchor="t" lIns="45720" rIns="45720" tIns="27432" bIns="27432">
+          <a:bodyPr wrap="square" lIns="45720" tIns="27432" rIns="45720" bIns="27432" anchor="t">
             <a:spAutoFit/>
           </a:bodyPr>
           <a:lstStyle/>
@@ -16168,6 +16214,7 @@
           <a:lstStyle/>
           <a:p>
             <a:pPr algn="ctr"/>
+            <a:endParaRPr/>
           </a:p>
         </p:txBody>
       </p:sp>
@@ -16188,7 +16235,7 @@
           <a:noFill/>
         </p:spPr>
         <p:txBody>
-          <a:bodyPr wrap="square" anchor="ctr" lIns="45720" rIns="45720" tIns="27432" bIns="27432">
+          <a:bodyPr wrap="square" lIns="45720" tIns="27432" rIns="45720" bIns="27432" anchor="ctr">
             <a:spAutoFit/>
           </a:bodyPr>
           <a:lstStyle/>
@@ -16565,44 +16612,44 @@
         <a:sysClr val="window" lastClr="FFFFFF"/>
       </a:lt1>
       <a:dk2>
-        <a:srgbClr val="1F497D"/>
+        <a:srgbClr val="0E2841"/>
       </a:dk2>
       <a:lt2>
-        <a:srgbClr val="EEECE1"/>
+        <a:srgbClr val="E8E8E8"/>
       </a:lt2>
       <a:accent1>
-        <a:srgbClr val="4F81BD"/>
+        <a:srgbClr val="156082"/>
       </a:accent1>
       <a:accent2>
-        <a:srgbClr val="C0504D"/>
+        <a:srgbClr val="E97132"/>
       </a:accent2>
       <a:accent3>
-        <a:srgbClr val="9BBB59"/>
+        <a:srgbClr val="196B24"/>
       </a:accent3>
       <a:accent4>
-        <a:srgbClr val="8064A2"/>
+        <a:srgbClr val="0F9ED5"/>
       </a:accent4>
       <a:accent5>
-        <a:srgbClr val="4BACC6"/>
+        <a:srgbClr val="A02B93"/>
       </a:accent5>
       <a:accent6>
-        <a:srgbClr val="F79646"/>
+        <a:srgbClr val="4EA72E"/>
       </a:accent6>
       <a:hlink>
-        <a:srgbClr val="0000FF"/>
+        <a:srgbClr val="467886"/>
       </a:hlink>
       <a:folHlink>
-        <a:srgbClr val="800080"/>
+        <a:srgbClr val="96607D"/>
       </a:folHlink>
     </a:clrScheme>
     <a:fontScheme name="Office">
       <a:majorFont>
-        <a:latin typeface="Calibri"/>
+        <a:latin typeface="Aptos Display" panose="02110004020202020204"/>
         <a:ea typeface=""/>
         <a:cs typeface=""/>
-        <a:font script="Jpan" typeface="ＭＳ Ｐゴシック"/>
+        <a:font script="Jpan" typeface="游ゴシック Light"/>
         <a:font script="Hang" typeface="맑은 고딕"/>
-        <a:font script="Hans" typeface="宋体"/>
+        <a:font script="Hans" typeface="等线 Light"/>
         <a:font script="Hant" typeface="新細明體"/>
         <a:font script="Arab" typeface="Times New Roman"/>
         <a:font script="Hebr" typeface="Times New Roman"/>
@@ -16630,14 +16677,31 @@
         <a:font script="Viet" typeface="Times New Roman"/>
         <a:font script="Uigh" typeface="Microsoft Uighur"/>
         <a:font script="Geor" typeface="Sylfaen"/>
+        <a:font script="Armn" typeface="Arial"/>
+        <a:font script="Bugi" typeface="Leelawadee UI"/>
+        <a:font script="Bopo" typeface="Microsoft JhengHei"/>
+        <a:font script="Java" typeface="Javanese Text"/>
+        <a:font script="Lisu" typeface="Segoe UI"/>
+        <a:font script="Mymr" typeface="Myanmar Text"/>
+        <a:font script="Nkoo" typeface="Ebrima"/>
+        <a:font script="Olck" typeface="Nirmala UI"/>
+        <a:font script="Osma" typeface="Ebrima"/>
+        <a:font script="Phag" typeface="Phagspa"/>
+        <a:font script="Syrn" typeface="Estrangelo Edessa"/>
+        <a:font script="Syrj" typeface="Estrangelo Edessa"/>
+        <a:font script="Syre" typeface="Estrangelo Edessa"/>
+        <a:font script="Sora" typeface="Nirmala UI"/>
+        <a:font script="Tale" typeface="Microsoft Tai Le"/>
+        <a:font script="Talu" typeface="Microsoft New Tai Lue"/>
+        <a:font script="Tfng" typeface="Ebrima"/>
       </a:majorFont>
       <a:minorFont>
-        <a:latin typeface="Calibri"/>
+        <a:latin typeface="Aptos" panose="02110004020202020204"/>
         <a:ea typeface=""/>
         <a:cs typeface=""/>
-        <a:font script="Jpan" typeface="ＭＳ Ｐゴシック"/>
+        <a:font script="Jpan" typeface="游ゴシック"/>
         <a:font script="Hang" typeface="맑은 고딕"/>
-        <a:font script="Hans" typeface="宋体"/>
+        <a:font script="Hans" typeface="等线"/>
         <a:font script="Hant" typeface="新細明體"/>
         <a:font script="Arab" typeface="Arial"/>
         <a:font script="Hebr" typeface="Arial"/>
@@ -16665,6 +16729,23 @@
         <a:font script="Viet" typeface="Arial"/>
         <a:font script="Uigh" typeface="Microsoft Uighur"/>
         <a:font script="Geor" typeface="Sylfaen"/>
+        <a:font script="Armn" typeface="Arial"/>
+        <a:font script="Bugi" typeface="Leelawadee UI"/>
+        <a:font script="Bopo" typeface="Microsoft JhengHei"/>
+        <a:font script="Java" typeface="Javanese Text"/>
+        <a:font script="Lisu" typeface="Segoe UI"/>
+        <a:font script="Mymr" typeface="Myanmar Text"/>
+        <a:font script="Nkoo" typeface="Ebrima"/>
+        <a:font script="Olck" typeface="Nirmala UI"/>
+        <a:font script="Osma" typeface="Ebrima"/>
+        <a:font script="Phag" typeface="Phagspa"/>
+        <a:font script="Syrn" typeface="Estrangelo Edessa"/>
+        <a:font script="Syrj" typeface="Estrangelo Edessa"/>
+        <a:font script="Syre" typeface="Estrangelo Edessa"/>
+        <a:font script="Sora" typeface="Nirmala UI"/>
+        <a:font script="Tale" typeface="Microsoft Tai Le"/>
+        <a:font script="Talu" typeface="Microsoft New Tai Lue"/>
+        <a:font script="Tfng" typeface="Ebrima"/>
       </a:minorFont>
     </a:fontScheme>
     <a:fmtScheme name="Office">
@@ -16676,180 +16757,136 @@
           <a:gsLst>
             <a:gs pos="0">
               <a:schemeClr val="phClr">
-                <a:tint val="50000"/>
-                <a:satMod val="300000"/>
+                <a:lumMod val="110000"/>
+                <a:satMod val="105000"/>
+                <a:tint val="67000"/>
               </a:schemeClr>
             </a:gs>
-            <a:gs pos="35000">
+            <a:gs pos="50000">
               <a:schemeClr val="phClr">
-                <a:tint val="37000"/>
-                <a:satMod val="300000"/>
+                <a:lumMod val="105000"/>
+                <a:satMod val="103000"/>
+                <a:tint val="73000"/>
               </a:schemeClr>
             </a:gs>
             <a:gs pos="100000">
               <a:schemeClr val="phClr">
-                <a:tint val="15000"/>
-                <a:satMod val="350000"/>
+                <a:lumMod val="105000"/>
+                <a:satMod val="109000"/>
+                <a:tint val="81000"/>
               </a:schemeClr>
             </a:gs>
           </a:gsLst>
-          <a:lin ang="16200000" scaled="1"/>
+          <a:lin ang="5400000" scaled="0"/>
         </a:gradFill>
         <a:gradFill rotWithShape="1">
           <a:gsLst>
             <a:gs pos="0">
               <a:schemeClr val="phClr">
-                <a:tint val="100000"/>
+                <a:satMod val="103000"/>
+                <a:lumMod val="102000"/>
+                <a:tint val="94000"/>
+              </a:schemeClr>
+            </a:gs>
+            <a:gs pos="50000">
+              <a:schemeClr val="phClr">
+                <a:satMod val="110000"/>
+                <a:lumMod val="100000"/>
                 <a:shade val="100000"/>
-                <a:satMod val="130000"/>
               </a:schemeClr>
             </a:gs>
             <a:gs pos="100000">
               <a:schemeClr val="phClr">
-                <a:tint val="50000"/>
-                <a:shade val="100000"/>
-                <a:satMod val="350000"/>
+                <a:lumMod val="99000"/>
+                <a:satMod val="120000"/>
+                <a:shade val="78000"/>
               </a:schemeClr>
             </a:gs>
           </a:gsLst>
-          <a:lin ang="16200000" scaled="0"/>
+          <a:lin ang="5400000" scaled="0"/>
         </a:gradFill>
       </a:fillStyleLst>
       <a:lnStyleLst>
-        <a:ln w="9525" cap="flat" cmpd="sng" algn="ctr">
+        <a:ln w="12700" cap="flat" cmpd="sng" algn="ctr">
           <a:solidFill>
-            <a:schemeClr val="phClr">
-              <a:shade val="95000"/>
-              <a:satMod val="105000"/>
-            </a:schemeClr>
+            <a:schemeClr val="phClr"/>
           </a:solidFill>
           <a:prstDash val="solid"/>
+          <a:miter lim="800000"/>
+        </a:ln>
+        <a:ln w="19050" cap="flat" cmpd="sng" algn="ctr">
+          <a:solidFill>
+            <a:schemeClr val="phClr"/>
+          </a:solidFill>
+          <a:prstDash val="solid"/>
+          <a:miter lim="800000"/>
         </a:ln>
         <a:ln w="25400" cap="flat" cmpd="sng" algn="ctr">
           <a:solidFill>
             <a:schemeClr val="phClr"/>
           </a:solidFill>
           <a:prstDash val="solid"/>
-        </a:ln>
-        <a:ln w="38100" cap="flat" cmpd="sng" algn="ctr">
-          <a:solidFill>
-            <a:schemeClr val="phClr"/>
-          </a:solidFill>
-          <a:prstDash val="solid"/>
+          <a:miter lim="800000"/>
         </a:ln>
       </a:lnStyleLst>
       <a:effectStyleLst>
         <a:effectStyle>
+          <a:effectLst/>
+        </a:effectStyle>
+        <a:effectStyle>
+          <a:effectLst/>
+        </a:effectStyle>
+        <a:effectStyle>
           <a:effectLst>
-            <a:outerShdw blurRad="40000" dist="20000" dir="5400000" rotWithShape="0">
+            <a:outerShdw blurRad="57150" dist="19050" dir="5400000" algn="ctr" rotWithShape="0">
               <a:srgbClr val="000000">
-                <a:alpha val="38000"/>
+                <a:alpha val="63000"/>
               </a:srgbClr>
             </a:outerShdw>
           </a:effectLst>
-        </a:effectStyle>
-        <a:effectStyle>
-          <a:effectLst>
-            <a:outerShdw blurRad="40000" dist="23000" dir="5400000" rotWithShape="0">
-              <a:srgbClr val="000000">
-                <a:alpha val="35000"/>
-              </a:srgbClr>
-            </a:outerShdw>
-          </a:effectLst>
-        </a:effectStyle>
-        <a:effectStyle>
-          <a:effectLst>
-            <a:outerShdw blurRad="40000" dist="23000" dir="5400000" rotWithShape="0">
-              <a:srgbClr val="000000">
-                <a:alpha val="35000"/>
-              </a:srgbClr>
-            </a:outerShdw>
-          </a:effectLst>
-          <a:scene3d>
-            <a:camera prst="orthographicFront">
-              <a:rot lat="0" lon="0" rev="0"/>
-            </a:camera>
-            <a:lightRig rig="threePt" dir="t">
-              <a:rot lat="0" lon="0" rev="1200000"/>
-            </a:lightRig>
-          </a:scene3d>
-          <a:sp3d>
-            <a:bevelT w="63500" h="25400"/>
-          </a:sp3d>
         </a:effectStyle>
       </a:effectStyleLst>
       <a:bgFillStyleLst>
         <a:solidFill>
           <a:schemeClr val="phClr"/>
         </a:solidFill>
+        <a:solidFill>
+          <a:schemeClr val="phClr">
+            <a:tint val="95000"/>
+            <a:satMod val="170000"/>
+          </a:schemeClr>
+        </a:solidFill>
         <a:gradFill rotWithShape="1">
           <a:gsLst>
             <a:gs pos="0">
               <a:schemeClr val="phClr">
-                <a:tint val="40000"/>
-                <a:satMod val="350000"/>
+                <a:tint val="93000"/>
+                <a:satMod val="150000"/>
+                <a:shade val="98000"/>
+                <a:lumMod val="102000"/>
               </a:schemeClr>
             </a:gs>
-            <a:gs pos="40000">
+            <a:gs pos="50000">
               <a:schemeClr val="phClr">
-                <a:tint val="45000"/>
-                <a:shade val="99000"/>
-                <a:satMod val="350000"/>
+                <a:tint val="98000"/>
+                <a:satMod val="130000"/>
+                <a:shade val="90000"/>
+                <a:lumMod val="103000"/>
               </a:schemeClr>
             </a:gs>
             <a:gs pos="100000">
               <a:schemeClr val="phClr">
-                <a:shade val="20000"/>
-                <a:satMod val="255000"/>
+                <a:shade val="63000"/>
+                <a:satMod val="120000"/>
               </a:schemeClr>
             </a:gs>
           </a:gsLst>
-          <a:path path="circle">
-            <a:fillToRect l="50000" t="-80000" r="50000" b="180000"/>
-          </a:path>
-        </a:gradFill>
-        <a:gradFill rotWithShape="1">
-          <a:gsLst>
-            <a:gs pos="0">
-              <a:schemeClr val="phClr">
-                <a:tint val="80000"/>
-                <a:satMod val="300000"/>
-              </a:schemeClr>
-            </a:gs>
-            <a:gs pos="100000">
-              <a:schemeClr val="phClr">
-                <a:shade val="30000"/>
-                <a:satMod val="200000"/>
-              </a:schemeClr>
-            </a:gs>
-          </a:gsLst>
-          <a:path path="circle">
-            <a:fillToRect l="50000" t="50000" r="50000" b="50000"/>
-          </a:path>
+          <a:lin ang="5400000" scaled="0"/>
         </a:gradFill>
       </a:bgFillStyleLst>
     </a:fmtScheme>
   </a:themeElements>
   <a:objectDefaults>
-    <a:spDef>
-      <a:spPr/>
-      <a:bodyPr/>
-      <a:lstStyle/>
-      <a:style>
-        <a:lnRef idx="1">
-          <a:schemeClr val="accent1"/>
-        </a:lnRef>
-        <a:fillRef idx="3">
-          <a:schemeClr val="accent1"/>
-        </a:fillRef>
-        <a:effectRef idx="2">
-          <a:schemeClr val="accent1"/>
-        </a:effectRef>
-        <a:fontRef idx="minor">
-          <a:schemeClr val="lt1"/>
-        </a:fontRef>
-      </a:style>
-    </a:spDef>
     <a:lnDef>
       <a:spPr/>
       <a:bodyPr/>
@@ -16871,5 +16908,10 @@
     </a:lnDef>
   </a:objectDefaults>
   <a:extraClrSchemeLst/>
+  <a:extLst>
+    <a:ext uri="{05A4C25C-085E-4340-85A3-A5531E510DB2}">
+      <thm15:themeFamily xmlns:thm15="http://schemas.microsoft.com/office/thememl/2012/main" name="Office Theme" id="{2E142A2C-CD16-42D6-873A-C26D2A0506FA}" vid="{1BDDFF52-6CD6-40A5-AB3C-68EB2F1E4D0A}"/>
+    </a:ext>
+  </a:extLst>
 </a:theme>
 </file>
--- a/deck/UP-Excise-Ask-the-Data-Demo.pptx
+++ b/deck/UP-Excise-Ask-the-Data-Demo.pptx
@@ -4521,9 +4521,11 @@
       </p:sp>
       <p:sp>
         <p:nvSpPr>
-          <p:cNvPr id="8" name="TextBox 7"/>
-          <p:cNvSpPr txBox="1"/>
-          <p:nvPr/>
+          <p:cNvPr id="8" name="Title"/>
+          <p:cNvSpPr/>
+          <p:nvPr>
+            <p:ph type="ctrTitle"/>
+          </p:nvPr>
         </p:nvSpPr>
         <p:spPr>
           <a:xfrm>
@@ -4759,9 +4761,11 @@
       </p:sp>
       <p:sp>
         <p:nvSpPr>
-          <p:cNvPr id="4" name="TextBox 3"/>
-          <p:cNvSpPr txBox="1"/>
-          <p:nvPr/>
+          <p:cNvPr id="4" name="Title"/>
+          <p:cNvSpPr/>
+          <p:nvPr>
+            <p:ph type="title"/>
+          </p:nvPr>
         </p:nvSpPr>
         <p:spPr>
           <a:xfrm>
@@ -5941,9 +5945,11 @@
       </p:sp>
       <p:sp>
         <p:nvSpPr>
-          <p:cNvPr id="4" name="TextBox 3"/>
-          <p:cNvSpPr txBox="1"/>
-          <p:nvPr/>
+          <p:cNvPr id="4" name="Title"/>
+          <p:cNvSpPr/>
+          <p:nvPr>
+            <p:ph type="title"/>
+          </p:nvPr>
         </p:nvSpPr>
         <p:spPr>
           <a:xfrm>
@@ -6403,9 +6409,11 @@
       </p:sp>
       <p:sp>
         <p:nvSpPr>
-          <p:cNvPr id="4" name="TextBox 3"/>
-          <p:cNvSpPr txBox="1"/>
-          <p:nvPr/>
+          <p:cNvPr id="4" name="Title"/>
+          <p:cNvSpPr/>
+          <p:nvPr>
+            <p:ph type="title"/>
+          </p:nvPr>
         </p:nvSpPr>
         <p:spPr>
           <a:xfrm>
@@ -7640,9 +7648,11 @@
       </p:sp>
       <p:sp>
         <p:nvSpPr>
-          <p:cNvPr id="4" name="TextBox 3"/>
-          <p:cNvSpPr txBox="1"/>
-          <p:nvPr/>
+          <p:cNvPr id="4" name="Title"/>
+          <p:cNvSpPr/>
+          <p:nvPr>
+            <p:ph type="title"/>
+          </p:nvPr>
         </p:nvSpPr>
         <p:spPr>
           <a:xfrm>
@@ -8224,9 +8234,11 @@
       </p:sp>
       <p:sp>
         <p:nvSpPr>
-          <p:cNvPr id="4" name="TextBox 3"/>
-          <p:cNvSpPr txBox="1"/>
-          <p:nvPr/>
+          <p:cNvPr id="4" name="Title"/>
+          <p:cNvSpPr/>
+          <p:nvPr>
+            <p:ph type="title"/>
+          </p:nvPr>
         </p:nvSpPr>
         <p:spPr>
           <a:xfrm>
@@ -9218,9 +9230,11 @@
       </p:sp>
       <p:sp>
         <p:nvSpPr>
-          <p:cNvPr id="4" name="TextBox 3"/>
-          <p:cNvSpPr txBox="1"/>
-          <p:nvPr/>
+          <p:cNvPr id="4" name="Title"/>
+          <p:cNvSpPr/>
+          <p:nvPr>
+            <p:ph type="title"/>
+          </p:nvPr>
         </p:nvSpPr>
         <p:spPr>
           <a:xfrm>
@@ -9739,9 +9753,11 @@
       </p:sp>
       <p:sp>
         <p:nvSpPr>
-          <p:cNvPr id="4" name="TextBox 3"/>
-          <p:cNvSpPr txBox="1"/>
-          <p:nvPr/>
+          <p:cNvPr id="4" name="Title"/>
+          <p:cNvSpPr/>
+          <p:nvPr>
+            <p:ph type="title"/>
+          </p:nvPr>
         </p:nvSpPr>
         <p:spPr>
           <a:xfrm>
@@ -10580,9 +10596,11 @@
       </p:sp>
       <p:sp>
         <p:nvSpPr>
-          <p:cNvPr id="4" name="TextBox 3"/>
-          <p:cNvSpPr txBox="1"/>
-          <p:nvPr/>
+          <p:cNvPr id="4" name="Title"/>
+          <p:cNvSpPr/>
+          <p:nvPr>
+            <p:ph type="title"/>
+          </p:nvPr>
         </p:nvSpPr>
         <p:spPr>
           <a:xfrm>
@@ -11476,9 +11494,11 @@
       </p:sp>
       <p:sp>
         <p:nvSpPr>
-          <p:cNvPr id="4" name="TextBox 3"/>
-          <p:cNvSpPr txBox="1"/>
-          <p:nvPr/>
+          <p:cNvPr id="4" name="Title"/>
+          <p:cNvSpPr/>
+          <p:nvPr>
+            <p:ph type="title"/>
+          </p:nvPr>
         </p:nvSpPr>
         <p:spPr>
           <a:xfrm>
@@ -12686,9 +12706,11 @@
       </p:sp>
       <p:sp>
         <p:nvSpPr>
-          <p:cNvPr id="4" name="TextBox 3"/>
-          <p:cNvSpPr txBox="1"/>
-          <p:nvPr/>
+          <p:cNvPr id="4" name="Title"/>
+          <p:cNvSpPr/>
+          <p:nvPr>
+            <p:ph type="title"/>
+          </p:nvPr>
         </p:nvSpPr>
         <p:spPr>
           <a:xfrm>
@@ -13125,9 +13147,11 @@
       </p:sp>
       <p:sp>
         <p:nvSpPr>
-          <p:cNvPr id="4" name="TextBox 3"/>
-          <p:cNvSpPr txBox="1"/>
-          <p:nvPr/>
+          <p:cNvPr id="4" name="Title"/>
+          <p:cNvSpPr/>
+          <p:nvPr>
+            <p:ph type="title"/>
+          </p:nvPr>
         </p:nvSpPr>
         <p:spPr>
           <a:xfrm>
@@ -13657,9 +13681,11 @@
       </p:sp>
       <p:sp>
         <p:nvSpPr>
-          <p:cNvPr id="4" name="TextBox 3"/>
-          <p:cNvSpPr txBox="1"/>
-          <p:nvPr/>
+          <p:cNvPr id="4" name="Title"/>
+          <p:cNvSpPr/>
+          <p:nvPr>
+            <p:ph type="title"/>
+          </p:nvPr>
         </p:nvSpPr>
         <p:spPr>
           <a:xfrm>
@@ -14096,9 +14122,11 @@
       </p:sp>
       <p:sp>
         <p:nvSpPr>
-          <p:cNvPr id="4" name="TextBox 3"/>
-          <p:cNvSpPr txBox="1"/>
-          <p:nvPr/>
+          <p:cNvPr id="4" name="Title"/>
+          <p:cNvSpPr/>
+          <p:nvPr>
+            <p:ph type="title"/>
+          </p:nvPr>
         </p:nvSpPr>
         <p:spPr>
           <a:xfrm>
@@ -15561,9 +15589,11 @@
       </p:sp>
       <p:sp>
         <p:nvSpPr>
-          <p:cNvPr id="4" name="TextBox 3"/>
-          <p:cNvSpPr txBox="1"/>
-          <p:nvPr/>
+          <p:cNvPr id="4" name="Title"/>
+          <p:cNvSpPr/>
+          <p:nvPr>
+            <p:ph type="title"/>
+          </p:nvPr>
         </p:nvSpPr>
         <p:spPr>
           <a:xfrm>

--- a/deck/UP-Excise-Ask-the-Data-Demo.pptx
+++ b/deck/UP-Excise-Ask-the-Data-Demo.pptx
@@ -4436,7 +4436,7 @@
           <a:p>
             <a:pPr algn="l"/>
             <a:r>
-              <a:rPr sz="2200" b="0">
+              <a:rPr sz="2200" b="0" lang="en-IN">
                 <a:solidFill>
                   <a:srgbClr val="1F2937"/>
                 </a:solidFill>
@@ -4471,7 +4471,7 @@
           <a:p>
             <a:pPr algn="l"/>
             <a:r>
-              <a:rPr sz="3600" b="1">
+              <a:rPr sz="3600" b="1" lang="en-IN">
                 <a:solidFill>
                   <a:srgbClr val="243B7A"/>
                 </a:solidFill>
@@ -4545,7 +4545,7 @@
           <a:p>
             <a:pPr algn="l"/>
             <a:r>
-              <a:rPr sz="6000" b="1">
+              <a:rPr sz="6000" b="1" lang="en-IN">
                 <a:solidFill>
                   <a:srgbClr val="243B7A"/>
                 </a:solidFill>
@@ -4584,7 +4584,7 @@
               </a:spcAft>
             </a:pPr>
             <a:r>
-              <a:rPr sz="2400" b="0">
+              <a:rPr sz="2400" b="0" lang="en-IN">
                 <a:solidFill>
                   <a:srgbClr val="1F2937"/>
                 </a:solidFill>
@@ -4600,7 +4600,7 @@
               </a:spcAft>
             </a:pPr>
             <a:r>
-              <a:rPr sz="2400" b="0">
+              <a:rPr sz="2400" b="0" lang="en-IN">
                 <a:solidFill>
                   <a:srgbClr val="1F2937"/>
                 </a:solidFill>
@@ -4635,7 +4635,7 @@
           <a:p>
             <a:pPr algn="l"/>
             <a:r>
-              <a:rPr sz="1800" b="0">
+              <a:rPr sz="1800" b="0" lang="en-IN">
                 <a:solidFill>
                   <a:srgbClr val="243B7A"/>
                 </a:solidFill>
@@ -4785,7 +4785,7 @@
           <a:p>
             <a:pPr algn="l"/>
             <a:r>
-              <a:rPr sz="3000" b="1">
+              <a:rPr sz="3000" b="1" lang="en-IN">
                 <a:solidFill>
                   <a:srgbClr val="243B7A"/>
                 </a:solidFill>
@@ -4844,7 +4844,7 @@
           <a:p>
             <a:pPr algn="l"/>
             <a:r>
-              <a:rPr sz="1000" b="0">
+              <a:rPr sz="1000" b="0" lang="en-IN">
                 <a:solidFill>
                   <a:srgbClr val="4B5563"/>
                 </a:solidFill>
@@ -4879,7 +4879,7 @@
           <a:p>
             <a:pPr algn="r"/>
             <a:r>
-              <a:rPr sz="1000" b="0">
+              <a:rPr sz="1000" b="0" lang="en-IN">
                 <a:solidFill>
                   <a:srgbClr val="4B5563"/>
                 </a:solidFill>
@@ -5032,7 +5032,7 @@
           <a:p>
             <a:pPr algn="l"/>
             <a:r>
-              <a:rPr sz="2100" b="1">
+              <a:rPr sz="2100" b="1" lang="en-IN">
                 <a:solidFill>
                   <a:srgbClr val="243B7A"/>
                 </a:solidFill>
@@ -5067,7 +5067,7 @@
           <a:p>
             <a:pPr algn="l"/>
             <a:r>
-              <a:rPr sz="1600" b="0">
+              <a:rPr sz="1600" b="0" lang="en-IN">
                 <a:solidFill>
                   <a:srgbClr val="1F2937"/>
                 </a:solidFill>
@@ -5220,7 +5220,7 @@
           <a:p>
             <a:pPr algn="l"/>
             <a:r>
-              <a:rPr sz="2100" b="1">
+              <a:rPr sz="2100" b="1" lang="en-IN">
                 <a:solidFill>
                   <a:srgbClr val="243B7A"/>
                 </a:solidFill>
@@ -5255,7 +5255,7 @@
           <a:p>
             <a:pPr algn="l"/>
             <a:r>
-              <a:rPr sz="1600" b="0">
+              <a:rPr sz="1600" b="0" lang="en-IN">
                 <a:solidFill>
                   <a:srgbClr val="1F2937"/>
                 </a:solidFill>
@@ -5408,7 +5408,7 @@
           <a:p>
             <a:pPr algn="l"/>
             <a:r>
-              <a:rPr sz="2100" b="1">
+              <a:rPr sz="2100" b="1" lang="en-IN">
                 <a:solidFill>
                   <a:srgbClr val="243B7A"/>
                 </a:solidFill>
@@ -5443,7 +5443,7 @@
           <a:p>
             <a:pPr algn="l"/>
             <a:r>
-              <a:rPr sz="1600" b="0">
+              <a:rPr sz="1600" b="0" lang="en-IN">
                 <a:solidFill>
                   <a:srgbClr val="1F2937"/>
                 </a:solidFill>
@@ -5596,7 +5596,7 @@
           <a:p>
             <a:pPr algn="l"/>
             <a:r>
-              <a:rPr sz="2100" b="1">
+              <a:rPr sz="2100" b="1" lang="en-IN">
                 <a:solidFill>
                   <a:srgbClr val="243B7A"/>
                 </a:solidFill>
@@ -5631,7 +5631,7 @@
           <a:p>
             <a:pPr algn="l"/>
             <a:r>
-              <a:rPr sz="1600" b="0">
+              <a:rPr sz="1600" b="0" lang="en-IN">
                 <a:solidFill>
                   <a:srgbClr val="1F2937"/>
                 </a:solidFill>
@@ -5784,7 +5784,7 @@
           <a:p>
             <a:pPr algn="l"/>
             <a:r>
-              <a:rPr sz="2100" b="1">
+              <a:rPr sz="2100" b="1" lang="en-IN">
                 <a:solidFill>
                   <a:srgbClr val="243B7A"/>
                 </a:solidFill>
@@ -5819,7 +5819,7 @@
           <a:p>
             <a:pPr algn="l"/>
             <a:r>
-              <a:rPr sz="1600" b="0">
+              <a:rPr sz="1600" b="0" lang="en-IN">
                 <a:solidFill>
                   <a:srgbClr val="1F2937"/>
                 </a:solidFill>
@@ -5969,7 +5969,7 @@
           <a:p>
             <a:pPr algn="l"/>
             <a:r>
-              <a:rPr sz="3000" b="1">
+              <a:rPr sz="3000" b="1" lang="en-IN">
                 <a:solidFill>
                   <a:srgbClr val="243B7A"/>
                 </a:solidFill>
@@ -6028,7 +6028,7 @@
           <a:p>
             <a:pPr algn="l"/>
             <a:r>
-              <a:rPr sz="1000" b="0">
+              <a:rPr sz="1000" b="0" lang="en-IN">
                 <a:solidFill>
                   <a:srgbClr val="4B5563"/>
                 </a:solidFill>
@@ -6063,7 +6063,7 @@
           <a:p>
             <a:pPr algn="r"/>
             <a:r>
-              <a:rPr sz="1000" b="0">
+              <a:rPr sz="1000" b="0" lang="en-IN">
                 <a:solidFill>
                   <a:srgbClr val="4B5563"/>
                 </a:solidFill>
@@ -6248,7 +6248,7 @@
           <a:p>
             <a:pPr algn="l"/>
             <a:r>
-              <a:rPr sz="1600" b="0">
+              <a:rPr sz="1600" b="0" lang="en-IN">
                 <a:solidFill>
                   <a:srgbClr val="1F2937"/>
                 </a:solidFill>
@@ -6283,7 +6283,7 @@
           <a:p>
             <a:pPr algn="l"/>
             <a:r>
-              <a:rPr sz="1600" b="0">
+              <a:rPr sz="1600" b="0" lang="en-IN">
                 <a:solidFill>
                   <a:srgbClr val="1F2937"/>
                 </a:solidFill>
@@ -6433,7 +6433,7 @@
           <a:p>
             <a:pPr algn="l"/>
             <a:r>
-              <a:rPr sz="3000" b="1">
+              <a:rPr sz="3000" b="1" lang="en-IN">
                 <a:solidFill>
                   <a:srgbClr val="243B7A"/>
                 </a:solidFill>
@@ -6492,7 +6492,7 @@
           <a:p>
             <a:pPr algn="l"/>
             <a:r>
-              <a:rPr sz="1000" b="0">
+              <a:rPr sz="1000" b="0" lang="en-IN">
                 <a:solidFill>
                   <a:srgbClr val="4B5563"/>
                 </a:solidFill>
@@ -6527,7 +6527,7 @@
           <a:p>
             <a:pPr algn="r"/>
             <a:r>
-              <a:rPr sz="1000" b="0">
+              <a:rPr sz="1000" b="0" lang="en-IN">
                 <a:solidFill>
                   <a:srgbClr val="4B5563"/>
                 </a:solidFill>
@@ -6680,7 +6680,7 @@
           <a:p>
             <a:pPr algn="ctr"/>
             <a:r>
-              <a:rPr sz="1700" b="1">
+              <a:rPr sz="1700" b="1" lang="en-IN">
                 <a:solidFill>
                   <a:srgbClr val="243B7A"/>
                 </a:solidFill>
@@ -6715,7 +6715,7 @@
           <a:p>
             <a:pPr algn="ctr"/>
             <a:r>
-              <a:rPr sz="1400" b="0">
+              <a:rPr sz="1400" b="0" lang="en-IN">
                 <a:solidFill>
                   <a:srgbClr val="1F2937"/>
                 </a:solidFill>
@@ -6868,7 +6868,7 @@
           <a:p>
             <a:pPr algn="ctr"/>
             <a:r>
-              <a:rPr sz="1700" b="1">
+              <a:rPr sz="1700" b="1" lang="en-IN">
                 <a:solidFill>
                   <a:srgbClr val="243B7A"/>
                 </a:solidFill>
@@ -6903,7 +6903,7 @@
           <a:p>
             <a:pPr algn="ctr"/>
             <a:r>
-              <a:rPr sz="1400" b="0">
+              <a:rPr sz="1400" b="0" lang="en-IN">
                 <a:solidFill>
                   <a:srgbClr val="1F2937"/>
                 </a:solidFill>
@@ -7056,7 +7056,7 @@
           <a:p>
             <a:pPr algn="ctr"/>
             <a:r>
-              <a:rPr sz="1700" b="1">
+              <a:rPr sz="1700" b="1" lang="en-IN">
                 <a:solidFill>
                   <a:srgbClr val="243B7A"/>
                 </a:solidFill>
@@ -7091,7 +7091,7 @@
           <a:p>
             <a:pPr algn="ctr"/>
             <a:r>
-              <a:rPr sz="1400" b="0">
+              <a:rPr sz="1400" b="0" lang="en-IN">
                 <a:solidFill>
                   <a:srgbClr val="1F2937"/>
                 </a:solidFill>
@@ -7244,7 +7244,7 @@
           <a:p>
             <a:pPr algn="ctr"/>
             <a:r>
-              <a:rPr sz="1700" b="1">
+              <a:rPr sz="1700" b="1" lang="en-IN">
                 <a:solidFill>
                   <a:srgbClr val="243B7A"/>
                 </a:solidFill>
@@ -7279,7 +7279,7 @@
           <a:p>
             <a:pPr algn="ctr"/>
             <a:r>
-              <a:rPr sz="1400" b="0">
+              <a:rPr sz="1400" b="0" lang="en-IN">
                 <a:solidFill>
                   <a:srgbClr val="1F2937"/>
                 </a:solidFill>
@@ -7432,7 +7432,7 @@
           <a:p>
             <a:pPr algn="ctr"/>
             <a:r>
-              <a:rPr sz="1700" b="1">
+              <a:rPr sz="1700" b="1" lang="en-IN">
                 <a:solidFill>
                   <a:srgbClr val="243B7A"/>
                 </a:solidFill>
@@ -7467,7 +7467,7 @@
           <a:p>
             <a:pPr algn="ctr"/>
             <a:r>
-              <a:rPr sz="1400" b="0">
+              <a:rPr sz="1400" b="0" lang="en-IN">
                 <a:solidFill>
                   <a:srgbClr val="1F2937"/>
                 </a:solidFill>
@@ -7506,7 +7506,7 @@
               </a:spcAft>
             </a:pPr>
             <a:r>
-              <a:rPr sz="1700" b="0">
+              <a:rPr sz="1700" b="0" lang="en-IN">
                 <a:solidFill>
                   <a:srgbClr val="1F2937"/>
                 </a:solidFill>
@@ -7522,7 +7522,7 @@
               </a:spcAft>
             </a:pPr>
             <a:r>
-              <a:rPr sz="1700" b="0">
+              <a:rPr sz="1700" b="0" lang="en-IN">
                 <a:solidFill>
                   <a:srgbClr val="1F2937"/>
                 </a:solidFill>
@@ -7672,7 +7672,7 @@
           <a:p>
             <a:pPr algn="l"/>
             <a:r>
-              <a:rPr sz="3000" b="1">
+              <a:rPr sz="3000" b="1" lang="en-IN">
                 <a:solidFill>
                   <a:srgbClr val="243B7A"/>
                 </a:solidFill>
@@ -7731,7 +7731,7 @@
           <a:p>
             <a:pPr algn="l"/>
             <a:r>
-              <a:rPr sz="1000" b="0">
+              <a:rPr sz="1000" b="0" lang="en-IN">
                 <a:solidFill>
                   <a:srgbClr val="4B5563"/>
                 </a:solidFill>
@@ -7766,7 +7766,7 @@
           <a:p>
             <a:pPr algn="r"/>
             <a:r>
-              <a:rPr sz="1000" b="0">
+              <a:rPr sz="1000" b="0" lang="en-IN">
                 <a:solidFill>
                   <a:srgbClr val="4B5563"/>
                 </a:solidFill>
@@ -7850,7 +7850,7 @@
           <a:p>
             <a:pPr algn="l"/>
             <a:r>
-              <a:rPr sz="2200" b="1">
+              <a:rPr sz="2200" b="1" lang="en-IN">
                 <a:solidFill>
                   <a:srgbClr val="243B7A"/>
                 </a:solidFill>
@@ -7889,7 +7889,7 @@
               </a:spcAft>
             </a:pPr>
             <a:r>
-              <a:rPr sz="1500" b="0">
+              <a:rPr sz="1500" b="0" lang="en-IN">
                 <a:solidFill>
                   <a:srgbClr val="1F2937"/>
                 </a:solidFill>
@@ -7905,7 +7905,7 @@
               </a:spcAft>
             </a:pPr>
             <a:r>
-              <a:rPr sz="1500" b="0">
+              <a:rPr sz="1500" b="0" lang="en-IN">
                 <a:solidFill>
                   <a:srgbClr val="1F2937"/>
                 </a:solidFill>
@@ -7921,7 +7921,7 @@
               </a:spcAft>
             </a:pPr>
             <a:r>
-              <a:rPr sz="1500" b="0">
+              <a:rPr sz="1500" b="0" lang="en-IN">
                 <a:solidFill>
                   <a:srgbClr val="1F2937"/>
                 </a:solidFill>
@@ -7937,7 +7937,7 @@
               </a:spcAft>
             </a:pPr>
             <a:r>
-              <a:rPr sz="1500" b="0">
+              <a:rPr sz="1500" b="0" lang="en-IN">
                 <a:solidFill>
                   <a:srgbClr val="1F2937"/>
                 </a:solidFill>
@@ -8021,7 +8021,7 @@
           <a:p>
             <a:pPr algn="l"/>
             <a:r>
-              <a:rPr sz="2200" b="1">
+              <a:rPr sz="2200" b="1" lang="en-IN">
                 <a:solidFill>
                   <a:srgbClr val="8A6300"/>
                 </a:solidFill>
@@ -8060,7 +8060,7 @@
               </a:spcAft>
             </a:pPr>
             <a:r>
-              <a:rPr sz="1500" b="0">
+              <a:rPr sz="1500" b="0" lang="en-IN">
                 <a:solidFill>
                   <a:srgbClr val="1F2937"/>
                 </a:solidFill>
@@ -8076,7 +8076,7 @@
               </a:spcAft>
             </a:pPr>
             <a:r>
-              <a:rPr sz="1500" b="0">
+              <a:rPr sz="1500" b="0" lang="en-IN">
                 <a:solidFill>
                   <a:srgbClr val="1F2937"/>
                 </a:solidFill>
@@ -8092,7 +8092,7 @@
               </a:spcAft>
             </a:pPr>
             <a:r>
-              <a:rPr sz="1500" b="0">
+              <a:rPr sz="1500" b="0" lang="en-IN">
                 <a:solidFill>
                   <a:srgbClr val="1F2937"/>
                 </a:solidFill>
@@ -8108,7 +8108,7 @@
               </a:spcAft>
             </a:pPr>
             <a:r>
-              <a:rPr sz="1500" b="0">
+              <a:rPr sz="1500" b="0" lang="en-IN">
                 <a:solidFill>
                   <a:srgbClr val="1F2937"/>
                 </a:solidFill>
@@ -8258,7 +8258,7 @@
           <a:p>
             <a:pPr algn="l"/>
             <a:r>
-              <a:rPr sz="3000" b="1">
+              <a:rPr sz="3000" b="1" lang="en-IN">
                 <a:solidFill>
                   <a:srgbClr val="243B7A"/>
                 </a:solidFill>
@@ -8317,7 +8317,7 @@
           <a:p>
             <a:pPr algn="l"/>
             <a:r>
-              <a:rPr sz="1000" b="0">
+              <a:rPr sz="1000" b="0" lang="en-IN">
                 <a:solidFill>
                   <a:srgbClr val="4B5563"/>
                 </a:solidFill>
@@ -8352,7 +8352,7 @@
           <a:p>
             <a:pPr algn="r"/>
             <a:r>
-              <a:rPr sz="1000" b="0">
+              <a:rPr sz="1000" b="0" lang="en-IN">
                 <a:solidFill>
                   <a:srgbClr val="4B5563"/>
                 </a:solidFill>
@@ -8505,7 +8505,7 @@
           <a:p>
             <a:pPr algn="l"/>
             <a:r>
-              <a:rPr sz="2200" b="1">
+              <a:rPr sz="2200" b="1" lang="en-IN">
                 <a:solidFill>
                   <a:srgbClr val="243B7A"/>
                 </a:solidFill>
@@ -8540,7 +8540,7 @@
           <a:p>
             <a:pPr algn="l"/>
             <a:r>
-              <a:rPr sz="1600" b="0">
+              <a:rPr sz="1600" b="0" lang="en-IN">
                 <a:solidFill>
                   <a:srgbClr val="1F2937"/>
                 </a:solidFill>
@@ -8693,7 +8693,7 @@
           <a:p>
             <a:pPr algn="l"/>
             <a:r>
-              <a:rPr sz="2200" b="1">
+              <a:rPr sz="2200" b="1" lang="en-IN">
                 <a:solidFill>
                   <a:srgbClr val="243B7A"/>
                 </a:solidFill>
@@ -8728,7 +8728,7 @@
           <a:p>
             <a:pPr algn="l"/>
             <a:r>
-              <a:rPr sz="1600" b="0">
+              <a:rPr sz="1600" b="0" lang="en-IN">
                 <a:solidFill>
                   <a:srgbClr val="1F2937"/>
                 </a:solidFill>
@@ -8881,7 +8881,7 @@
           <a:p>
             <a:pPr algn="l"/>
             <a:r>
-              <a:rPr sz="2200" b="1">
+              <a:rPr sz="2200" b="1" lang="en-IN">
                 <a:solidFill>
                   <a:srgbClr val="243B7A"/>
                 </a:solidFill>
@@ -8916,7 +8916,7 @@
           <a:p>
             <a:pPr algn="l"/>
             <a:r>
-              <a:rPr sz="1600" b="0">
+              <a:rPr sz="1600" b="0" lang="en-IN">
                 <a:solidFill>
                   <a:srgbClr val="1F2937"/>
                 </a:solidFill>
@@ -9069,7 +9069,7 @@
           <a:p>
             <a:pPr algn="l"/>
             <a:r>
-              <a:rPr sz="2200" b="1">
+              <a:rPr sz="2200" b="1" lang="en-IN">
                 <a:solidFill>
                   <a:srgbClr val="243B7A"/>
                 </a:solidFill>
@@ -9104,7 +9104,7 @@
           <a:p>
             <a:pPr algn="l"/>
             <a:r>
-              <a:rPr sz="1600" b="0">
+              <a:rPr sz="1600" b="0" lang="en-IN">
                 <a:solidFill>
                   <a:srgbClr val="1F2937"/>
                 </a:solidFill>
@@ -9254,7 +9254,7 @@
           <a:p>
             <a:pPr algn="l"/>
             <a:r>
-              <a:rPr sz="3000" b="1">
+              <a:rPr sz="3000" b="1" lang="en-IN">
                 <a:solidFill>
                   <a:srgbClr val="243B7A"/>
                 </a:solidFill>
@@ -9313,7 +9313,7 @@
           <a:p>
             <a:pPr algn="l"/>
             <a:r>
-              <a:rPr sz="1000" b="0">
+              <a:rPr sz="1000" b="0" lang="en-IN">
                 <a:solidFill>
                   <a:srgbClr val="4B5563"/>
                 </a:solidFill>
@@ -9348,7 +9348,7 @@
           <a:p>
             <a:pPr algn="r"/>
             <a:r>
-              <a:rPr sz="1000" b="0">
+              <a:rPr sz="1000" b="0" lang="en-IN">
                 <a:solidFill>
                   <a:srgbClr val="4B5563"/>
                 </a:solidFill>
@@ -9505,7 +9505,7 @@
               </a:spcAft>
             </a:pPr>
             <a:r>
-              <a:rPr sz="2000" b="1">
+              <a:rPr sz="2000" b="1" lang="en-IN">
                 <a:solidFill>
                   <a:srgbClr val="1F2937"/>
                 </a:solidFill>
@@ -9521,7 +9521,7 @@
               </a:spcAft>
             </a:pPr>
             <a:r>
-              <a:rPr sz="2000" b="1">
+              <a:rPr sz="2000" b="1" lang="en-IN">
                 <a:solidFill>
                   <a:srgbClr val="1F2937"/>
                 </a:solidFill>
@@ -9556,7 +9556,7 @@
           <a:p>
             <a:pPr algn="l"/>
             <a:r>
-              <a:rPr sz="2200" b="1">
+              <a:rPr sz="2200" b="1" lang="en-IN">
                 <a:solidFill>
                   <a:srgbClr val="243B7A"/>
                 </a:solidFill>
@@ -9595,7 +9595,7 @@
               </a:spcAft>
             </a:pPr>
             <a:r>
-              <a:rPr sz="1800" b="0">
+              <a:rPr sz="1800" b="0" lang="en-IN">
                 <a:solidFill>
                   <a:srgbClr val="1F2937"/>
                 </a:solidFill>
@@ -9611,7 +9611,7 @@
               </a:spcAft>
             </a:pPr>
             <a:r>
-              <a:rPr sz="1800" b="0">
+              <a:rPr sz="1800" b="0" lang="en-IN">
                 <a:solidFill>
                   <a:srgbClr val="1F2937"/>
                 </a:solidFill>
@@ -9627,7 +9627,7 @@
               </a:spcAft>
             </a:pPr>
             <a:r>
-              <a:rPr sz="1800" b="0">
+              <a:rPr sz="1800" b="0" lang="en-IN">
                 <a:solidFill>
                   <a:srgbClr val="1F2937"/>
                 </a:solidFill>
@@ -9777,7 +9777,7 @@
           <a:p>
             <a:pPr algn="l"/>
             <a:r>
-              <a:rPr sz="3000" b="1">
+              <a:rPr sz="3000" b="1" lang="en-IN">
                 <a:solidFill>
                   <a:srgbClr val="243B7A"/>
                 </a:solidFill>
@@ -9836,7 +9836,7 @@
           <a:p>
             <a:pPr algn="l"/>
             <a:r>
-              <a:rPr sz="1000" b="0">
+              <a:rPr sz="1000" b="0" lang="en-IN">
                 <a:solidFill>
                   <a:srgbClr val="4B5563"/>
                 </a:solidFill>
@@ -9871,7 +9871,7 @@
           <a:p>
             <a:pPr algn="r"/>
             <a:r>
-              <a:rPr sz="1000" b="0">
+              <a:rPr sz="1000" b="0" lang="en-IN">
                 <a:solidFill>
                   <a:srgbClr val="4B5563"/>
                 </a:solidFill>
@@ -10024,7 +10024,7 @@
           <a:p>
             <a:pPr algn="l"/>
             <a:r>
-              <a:rPr sz="2200" b="1">
+              <a:rPr sz="2200" b="1" lang="en-IN">
                 <a:solidFill>
                   <a:srgbClr val="243B7A"/>
                 </a:solidFill>
@@ -10059,7 +10059,7 @@
           <a:p>
             <a:pPr algn="l"/>
             <a:r>
-              <a:rPr sz="1600" b="0">
+              <a:rPr sz="1600" b="0" lang="en-IN">
                 <a:solidFill>
                   <a:srgbClr val="1F2937"/>
                 </a:solidFill>
@@ -10212,7 +10212,7 @@
           <a:p>
             <a:pPr algn="l"/>
             <a:r>
-              <a:rPr sz="2200" b="1">
+              <a:rPr sz="2200" b="1" lang="en-IN">
                 <a:solidFill>
                   <a:srgbClr val="243B7A"/>
                 </a:solidFill>
@@ -10247,7 +10247,7 @@
           <a:p>
             <a:pPr algn="l"/>
             <a:r>
-              <a:rPr sz="1600" b="0">
+              <a:rPr sz="1600" b="0" lang="en-IN">
                 <a:solidFill>
                   <a:srgbClr val="1F2937"/>
                 </a:solidFill>
@@ -10400,7 +10400,7 @@
           <a:p>
             <a:pPr algn="l"/>
             <a:r>
-              <a:rPr sz="2200" b="1">
+              <a:rPr sz="2200" b="1" lang="en-IN">
                 <a:solidFill>
                   <a:srgbClr val="243B7A"/>
                 </a:solidFill>
@@ -10435,7 +10435,7 @@
           <a:p>
             <a:pPr algn="l"/>
             <a:r>
-              <a:rPr sz="1600" b="0">
+              <a:rPr sz="1600" b="0" lang="en-IN">
                 <a:solidFill>
                   <a:srgbClr val="1F2937"/>
                 </a:solidFill>
@@ -10470,7 +10470,7 @@
           <a:p>
             <a:pPr algn="l"/>
             <a:r>
-              <a:rPr sz="2000" b="1">
+              <a:rPr sz="2000" b="1" lang="en-IN">
                 <a:solidFill>
                   <a:srgbClr val="1F2937"/>
                 </a:solidFill>
@@ -10620,7 +10620,7 @@
           <a:p>
             <a:pPr algn="l"/>
             <a:r>
-              <a:rPr sz="3000" b="1">
+              <a:rPr sz="3000" b="1" lang="en-IN">
                 <a:solidFill>
                   <a:srgbClr val="243B7A"/>
                 </a:solidFill>
@@ -10679,7 +10679,7 @@
           <a:p>
             <a:pPr algn="l"/>
             <a:r>
-              <a:rPr sz="1000" b="0">
+              <a:rPr sz="1000" b="0" lang="en-IN">
                 <a:solidFill>
                   <a:srgbClr val="4B5563"/>
                 </a:solidFill>
@@ -10714,7 +10714,7 @@
           <a:p>
             <a:pPr algn="r"/>
             <a:r>
-              <a:rPr sz="1000" b="0">
+              <a:rPr sz="1000" b="0" lang="en-IN">
                 <a:solidFill>
                   <a:srgbClr val="4B5563"/>
                 </a:solidFill>
@@ -10749,7 +10749,7 @@
           <a:p>
             <a:pPr algn="l"/>
             <a:r>
-              <a:rPr sz="2000" b="0">
+              <a:rPr sz="2000" b="0" lang="en-IN">
                 <a:solidFill>
                   <a:srgbClr val="1F2937"/>
                 </a:solidFill>
@@ -10902,7 +10902,7 @@
           <a:p>
             <a:pPr algn="l"/>
             <a:r>
-              <a:rPr sz="2400" b="1">
+              <a:rPr sz="2400" b="1" lang="en-IN">
                 <a:solidFill>
                   <a:srgbClr val="243B7A"/>
                 </a:solidFill>
@@ -10937,7 +10937,7 @@
           <a:p>
             <a:pPr algn="l"/>
             <a:r>
-              <a:rPr sz="1700" b="0">
+              <a:rPr sz="1700" b="0" lang="en-IN">
                 <a:solidFill>
                   <a:srgbClr val="1F2937"/>
                 </a:solidFill>
@@ -11090,7 +11090,7 @@
           <a:p>
             <a:pPr algn="l"/>
             <a:r>
-              <a:rPr sz="2400" b="1">
+              <a:rPr sz="2400" b="1" lang="en-IN">
                 <a:solidFill>
                   <a:srgbClr val="243B7A"/>
                 </a:solidFill>
@@ -11125,7 +11125,7 @@
           <a:p>
             <a:pPr algn="l"/>
             <a:r>
-              <a:rPr sz="1700" b="0">
+              <a:rPr sz="1700" b="0" lang="en-IN">
                 <a:solidFill>
                   <a:srgbClr val="1F2937"/>
                 </a:solidFill>
@@ -11278,7 +11278,7 @@
           <a:p>
             <a:pPr algn="l"/>
             <a:r>
-              <a:rPr sz="2400" b="1">
+              <a:rPr sz="2400" b="1" lang="en-IN">
                 <a:solidFill>
                   <a:srgbClr val="243B7A"/>
                 </a:solidFill>
@@ -11313,7 +11313,7 @@
           <a:p>
             <a:pPr algn="l"/>
             <a:r>
-              <a:rPr sz="1700" b="0">
+              <a:rPr sz="1700" b="0" lang="en-IN">
                 <a:solidFill>
                   <a:srgbClr val="1F2937"/>
                 </a:solidFill>
@@ -11352,7 +11352,7 @@
               </a:spcAft>
             </a:pPr>
             <a:r>
-              <a:rPr sz="1900" b="1">
+              <a:rPr sz="1900" b="1" lang="en-IN">
                 <a:solidFill>
                   <a:srgbClr val="243B7A"/>
                 </a:solidFill>
@@ -11368,7 +11368,7 @@
               </a:spcAft>
             </a:pPr>
             <a:r>
-              <a:rPr sz="1900" b="1">
+              <a:rPr sz="1900" b="1" lang="en-IN">
                 <a:solidFill>
                   <a:srgbClr val="243B7A"/>
                 </a:solidFill>
@@ -11518,7 +11518,7 @@
           <a:p>
             <a:pPr algn="l"/>
             <a:r>
-              <a:rPr sz="3000" b="1">
+              <a:rPr sz="3000" b="1" lang="en-IN">
                 <a:solidFill>
                   <a:srgbClr val="243B7A"/>
                 </a:solidFill>
@@ -11577,7 +11577,7 @@
           <a:p>
             <a:pPr algn="l"/>
             <a:r>
-              <a:rPr sz="1000" b="0">
+              <a:rPr sz="1000" b="0" lang="en-IN">
                 <a:solidFill>
                   <a:srgbClr val="4B5563"/>
                 </a:solidFill>
@@ -11612,7 +11612,7 @@
           <a:p>
             <a:pPr algn="r"/>
             <a:r>
-              <a:rPr sz="1000" b="0">
+              <a:rPr sz="1000" b="0" lang="en-IN">
                 <a:solidFill>
                   <a:srgbClr val="4B5563"/>
                 </a:solidFill>
@@ -11765,7 +11765,7 @@
           <a:p>
             <a:pPr algn="ctr"/>
             <a:r>
-              <a:rPr sz="1900" b="1">
+              <a:rPr sz="1900" b="1" lang="en-IN">
                 <a:solidFill>
                   <a:srgbClr val="243B7A"/>
                 </a:solidFill>
@@ -11800,7 +11800,7 @@
           <a:p>
             <a:pPr algn="ctr"/>
             <a:r>
-              <a:rPr sz="1600" b="0">
+              <a:rPr sz="1600" b="0" lang="en-IN">
                 <a:solidFill>
                   <a:srgbClr val="1F2937"/>
                 </a:solidFill>
@@ -11997,7 +11997,7 @@
           <a:p>
             <a:pPr algn="ctr"/>
             <a:r>
-              <a:rPr sz="1900" b="1">
+              <a:rPr sz="1900" b="1" lang="en-IN">
                 <a:solidFill>
                   <a:srgbClr val="243B7A"/>
                 </a:solidFill>
@@ -12032,7 +12032,7 @@
           <a:p>
             <a:pPr algn="ctr"/>
             <a:r>
-              <a:rPr sz="1600" b="0">
+              <a:rPr sz="1600" b="0" lang="en-IN">
                 <a:solidFill>
                   <a:srgbClr val="1F2937"/>
                 </a:solidFill>
@@ -12229,7 +12229,7 @@
           <a:p>
             <a:pPr algn="ctr"/>
             <a:r>
-              <a:rPr sz="1900" b="1">
+              <a:rPr sz="1900" b="1" lang="en-IN">
                 <a:solidFill>
                   <a:srgbClr val="243B7A"/>
                 </a:solidFill>
@@ -12264,7 +12264,7 @@
           <a:p>
             <a:pPr algn="ctr"/>
             <a:r>
-              <a:rPr sz="1600" b="0">
+              <a:rPr sz="1600" b="0" lang="en-IN">
                 <a:solidFill>
                   <a:srgbClr val="1F2937"/>
                 </a:solidFill>
@@ -12461,7 +12461,7 @@
           <a:p>
             <a:pPr algn="ctr"/>
             <a:r>
-              <a:rPr sz="1900" b="1">
+              <a:rPr sz="1900" b="1" lang="en-IN">
                 <a:solidFill>
                   <a:srgbClr val="243B7A"/>
                 </a:solidFill>
@@ -12496,7 +12496,7 @@
           <a:p>
             <a:pPr algn="ctr"/>
             <a:r>
-              <a:rPr sz="1600" b="0">
+              <a:rPr sz="1600" b="0" lang="en-IN">
                 <a:solidFill>
                   <a:srgbClr val="1F2937"/>
                 </a:solidFill>
@@ -12580,7 +12580,7 @@
           <a:p>
             <a:pPr algn="l"/>
             <a:r>
-              <a:rPr sz="1900" b="1">
+              <a:rPr sz="1900" b="1" lang="en-IN">
                 <a:solidFill>
                   <a:srgbClr val="243B7A"/>
                 </a:solidFill>
@@ -12730,7 +12730,7 @@
           <a:p>
             <a:pPr algn="l"/>
             <a:r>
-              <a:rPr sz="3000" b="1">
+              <a:rPr sz="3000" b="1" lang="en-IN">
                 <a:solidFill>
                   <a:srgbClr val="243B7A"/>
                 </a:solidFill>
@@ -12789,7 +12789,7 @@
           <a:p>
             <a:pPr algn="l"/>
             <a:r>
-              <a:rPr sz="1000" b="0">
+              <a:rPr sz="1000" b="0" lang="en-IN">
                 <a:solidFill>
                   <a:srgbClr val="4B5563"/>
                 </a:solidFill>
@@ -12824,7 +12824,7 @@
           <a:p>
             <a:pPr algn="r"/>
             <a:r>
-              <a:rPr sz="1000" b="0">
+              <a:rPr sz="1000" b="0" lang="en-IN">
                 <a:solidFill>
                   <a:srgbClr val="4B5563"/>
                 </a:solidFill>
@@ -12859,7 +12859,7 @@
           <a:p>
             <a:pPr algn="l"/>
             <a:r>
-              <a:rPr sz="1800" b="1">
+              <a:rPr sz="1800" b="1" lang="en-IN">
                 <a:solidFill>
                   <a:srgbClr val="243B7A"/>
                 </a:solidFill>
@@ -12898,7 +12898,7 @@
               </a:spcAft>
             </a:pPr>
             <a:r>
-              <a:rPr sz="1600" b="0">
+              <a:rPr sz="1600" b="0" lang="en-IN">
                 <a:solidFill>
                   <a:srgbClr val="1F2937"/>
                 </a:solidFill>
@@ -12914,7 +12914,7 @@
               </a:spcAft>
             </a:pPr>
             <a:r>
-              <a:rPr sz="1600" b="0">
+              <a:rPr sz="1600" b="0" lang="en-IN">
                 <a:solidFill>
                   <a:srgbClr val="1F2937"/>
                 </a:solidFill>
@@ -12930,7 +12930,7 @@
               </a:spcAft>
             </a:pPr>
             <a:r>
-              <a:rPr sz="1600" b="0">
+              <a:rPr sz="1600" b="0" lang="en-IN">
                 <a:solidFill>
                   <a:srgbClr val="1F2937"/>
                 </a:solidFill>
@@ -12946,7 +12946,7 @@
               </a:spcAft>
             </a:pPr>
             <a:r>
-              <a:rPr sz="1600" b="0">
+              <a:rPr sz="1600" b="0" lang="en-IN">
                 <a:solidFill>
                   <a:srgbClr val="1F2937"/>
                 </a:solidFill>
@@ -13171,7 +13171,7 @@
           <a:p>
             <a:pPr algn="l"/>
             <a:r>
-              <a:rPr sz="3000" b="1">
+              <a:rPr sz="3000" b="1" lang="en-IN">
                 <a:solidFill>
                   <a:srgbClr val="243B7A"/>
                 </a:solidFill>
@@ -13230,7 +13230,7 @@
           <a:p>
             <a:pPr algn="l"/>
             <a:r>
-              <a:rPr sz="1000" b="0">
+              <a:rPr sz="1000" b="0" lang="en-IN">
                 <a:solidFill>
                   <a:srgbClr val="4B5563"/>
                 </a:solidFill>
@@ -13265,7 +13265,7 @@
           <a:p>
             <a:pPr algn="r"/>
             <a:r>
-              <a:rPr sz="1000" b="0">
+              <a:rPr sz="1000" b="0" lang="en-IN">
                 <a:solidFill>
                   <a:srgbClr val="4B5563"/>
                 </a:solidFill>
@@ -13450,7 +13450,7 @@
           <a:p>
             <a:pPr algn="l"/>
             <a:r>
-              <a:rPr sz="1500" b="1">
+              <a:rPr sz="1500" b="1" lang="en-IN">
                 <a:solidFill>
                   <a:srgbClr val="243B7A"/>
                 </a:solidFill>
@@ -13485,7 +13485,7 @@
           <a:p>
             <a:pPr algn="l"/>
             <a:r>
-              <a:rPr sz="1500" b="1">
+              <a:rPr sz="1500" b="1" lang="en-IN">
                 <a:solidFill>
                   <a:srgbClr val="243B7A"/>
                 </a:solidFill>
@@ -13520,7 +13520,7 @@
           <a:p>
             <a:pPr algn="l"/>
             <a:r>
-              <a:rPr sz="1600" b="0">
+              <a:rPr sz="1600" b="0" lang="en-IN">
                 <a:solidFill>
                   <a:srgbClr val="1F2937"/>
                 </a:solidFill>
@@ -13555,7 +13555,7 @@
           <a:p>
             <a:pPr algn="l"/>
             <a:r>
-              <a:rPr sz="1600" b="0">
+              <a:rPr sz="1600" b="0" lang="en-IN">
                 <a:solidFill>
                   <a:srgbClr val="1F2937"/>
                 </a:solidFill>
@@ -13705,7 +13705,7 @@
           <a:p>
             <a:pPr algn="l"/>
             <a:r>
-              <a:rPr sz="3000" b="1">
+              <a:rPr sz="3000" b="1" lang="en-IN">
                 <a:solidFill>
                   <a:srgbClr val="243B7A"/>
                 </a:solidFill>
@@ -13764,7 +13764,7 @@
           <a:p>
             <a:pPr algn="l"/>
             <a:r>
-              <a:rPr sz="1000" b="0">
+              <a:rPr sz="1000" b="0" lang="en-IN">
                 <a:solidFill>
                   <a:srgbClr val="4B5563"/>
                 </a:solidFill>
@@ -13799,7 +13799,7 @@
           <a:p>
             <a:pPr algn="r"/>
             <a:r>
-              <a:rPr sz="1000" b="0">
+              <a:rPr sz="1000" b="0" lang="en-IN">
                 <a:solidFill>
                   <a:srgbClr val="4B5563"/>
                 </a:solidFill>
@@ -13834,7 +13834,7 @@
           <a:p>
             <a:pPr algn="l"/>
             <a:r>
-              <a:rPr sz="1800" b="1">
+              <a:rPr sz="1800" b="1" lang="en-IN">
                 <a:solidFill>
                   <a:srgbClr val="243B7A"/>
                 </a:solidFill>
@@ -13873,7 +13873,7 @@
               </a:spcAft>
             </a:pPr>
             <a:r>
-              <a:rPr sz="1600" b="0">
+              <a:rPr sz="1600" b="0" lang="en-IN">
                 <a:solidFill>
                   <a:srgbClr val="1F2937"/>
                 </a:solidFill>
@@ -13889,7 +13889,7 @@
               </a:spcAft>
             </a:pPr>
             <a:r>
-              <a:rPr sz="1600" b="0">
+              <a:rPr sz="1600" b="0" lang="en-IN">
                 <a:solidFill>
                   <a:srgbClr val="1F2937"/>
                 </a:solidFill>
@@ -13905,7 +13905,7 @@
               </a:spcAft>
             </a:pPr>
             <a:r>
-              <a:rPr sz="1600" b="0">
+              <a:rPr sz="1600" b="0" lang="en-IN">
                 <a:solidFill>
                   <a:srgbClr val="1F2937"/>
                 </a:solidFill>
@@ -13921,7 +13921,7 @@
               </a:spcAft>
             </a:pPr>
             <a:r>
-              <a:rPr sz="1600" b="0">
+              <a:rPr sz="1600" b="0" lang="en-IN">
                 <a:solidFill>
                   <a:srgbClr val="1F2937"/>
                 </a:solidFill>
@@ -14146,7 +14146,7 @@
           <a:p>
             <a:pPr algn="l"/>
             <a:r>
-              <a:rPr sz="3000" b="1">
+              <a:rPr sz="3000" b="1" lang="en-IN">
                 <a:solidFill>
                   <a:srgbClr val="243B7A"/>
                 </a:solidFill>
@@ -14205,7 +14205,7 @@
           <a:p>
             <a:pPr algn="l"/>
             <a:r>
-              <a:rPr sz="1000" b="0">
+              <a:rPr sz="1000" b="0" lang="en-IN">
                 <a:solidFill>
                   <a:srgbClr val="4B5563"/>
                 </a:solidFill>
@@ -14240,7 +14240,7 @@
           <a:p>
             <a:pPr algn="r"/>
             <a:r>
-              <a:rPr sz="1000" b="0">
+              <a:rPr sz="1000" b="0" lang="en-IN">
                 <a:solidFill>
                   <a:srgbClr val="4B5563"/>
                 </a:solidFill>
@@ -14393,7 +14393,7 @@
           <a:p>
             <a:pPr algn="l"/>
             <a:r>
-              <a:rPr sz="3400" b="1">
+              <a:rPr sz="3400" b="1" lang="en-IN">
                 <a:solidFill>
                   <a:srgbClr val="243B7A"/>
                 </a:solidFill>
@@ -14402,7 +14402,7 @@
               <a:t>9,322</a:t>
             </a:r>
             <a:r>
-              <a:rPr sz="1800" b="0">
+              <a:rPr sz="1800" b="0" lang="en-IN">
                 <a:solidFill>
                   <a:srgbClr val="243B7A"/>
                 </a:solidFill>
@@ -14437,7 +14437,7 @@
           <a:p>
             <a:pPr algn="l"/>
             <a:r>
-              <a:rPr sz="1400" b="0">
+              <a:rPr sz="1400" b="0" lang="en-IN">
                 <a:solidFill>
                   <a:srgbClr val="1F2937"/>
                 </a:solidFill>
@@ -14590,7 +14590,7 @@
           <a:p>
             <a:pPr algn="l"/>
             <a:r>
-              <a:rPr sz="3400" b="1">
+              <a:rPr sz="3400" b="1" lang="en-IN">
                 <a:solidFill>
                   <a:srgbClr val="243B7A"/>
                 </a:solidFill>
@@ -14599,7 +14599,7 @@
               <a:t>28,405</a:t>
             </a:r>
             <a:r>
-              <a:rPr sz="1800" b="0">
+              <a:rPr sz="1800" b="0" lang="en-IN">
                 <a:solidFill>
                   <a:srgbClr val="243B7A"/>
                 </a:solidFill>
@@ -14634,7 +14634,7 @@
           <a:p>
             <a:pPr algn="l"/>
             <a:r>
-              <a:rPr sz="1400" b="0">
+              <a:rPr sz="1400" b="0" lang="en-IN">
                 <a:solidFill>
                   <a:srgbClr val="1F2937"/>
                 </a:solidFill>
@@ -14787,7 +14787,7 @@
           <a:p>
             <a:pPr algn="l"/>
             <a:r>
-              <a:rPr sz="3400" b="1" dirty="0">
+              <a:rPr sz="3400" b="1" dirty="0" lang="en-IN">
                 <a:solidFill>
                   <a:srgbClr val="243B7A"/>
                 </a:solidFill>
@@ -14837,7 +14837,7 @@
           <a:p>
             <a:pPr algn="l"/>
             <a:r>
-              <a:rPr sz="1400" b="0">
+              <a:rPr sz="1400" b="0" lang="en-IN">
                 <a:solidFill>
                   <a:srgbClr val="1F2937"/>
                 </a:solidFill>
@@ -14990,7 +14990,7 @@
           <a:p>
             <a:pPr algn="l"/>
             <a:r>
-              <a:rPr sz="3400" b="1">
+              <a:rPr sz="3400" b="1" lang="en-IN">
                 <a:solidFill>
                   <a:srgbClr val="243B7A"/>
                 </a:solidFill>
@@ -14999,7 +14999,7 @@
               <a:t>3,812</a:t>
             </a:r>
             <a:r>
-              <a:rPr sz="1800" b="0">
+              <a:rPr sz="1800" b="0" lang="en-IN">
                 <a:solidFill>
                   <a:srgbClr val="243B7A"/>
                 </a:solidFill>
@@ -15034,7 +15034,7 @@
           <a:p>
             <a:pPr algn="l"/>
             <a:r>
-              <a:rPr sz="1400" b="0" dirty="0">
+              <a:rPr sz="1400" b="0" dirty="0" lang="en-IN">
                 <a:solidFill>
                   <a:srgbClr val="1F2937"/>
                 </a:solidFill>
@@ -15187,7 +15187,7 @@
           <a:p>
             <a:pPr algn="l"/>
             <a:r>
-              <a:rPr sz="3400" b="1" dirty="0">
+              <a:rPr sz="3400" b="1" dirty="0" lang="en-IN">
                 <a:solidFill>
                   <a:srgbClr val="243B7A"/>
                 </a:solidFill>
@@ -15196,7 +15196,7 @@
               <a:t>11,124</a:t>
             </a:r>
             <a:r>
-              <a:rPr sz="1800" b="0" dirty="0">
+              <a:rPr sz="1800" b="0" dirty="0" lang="en-IN">
                 <a:solidFill>
                   <a:srgbClr val="243B7A"/>
                 </a:solidFill>
@@ -15231,7 +15231,7 @@
           <a:p>
             <a:pPr algn="l"/>
             <a:r>
-              <a:rPr sz="1400" b="0">
+              <a:rPr sz="1400" b="0" lang="en-IN">
                 <a:solidFill>
                   <a:srgbClr val="1F2937"/>
                 </a:solidFill>
@@ -15384,7 +15384,7 @@
           <a:p>
             <a:pPr algn="l"/>
             <a:r>
-              <a:rPr sz="3400" b="1">
+              <a:rPr sz="3400" b="1" lang="en-IN">
                 <a:solidFill>
                   <a:srgbClr val="243B7A"/>
                 </a:solidFill>
@@ -15393,7 +15393,7 @@
               <a:t>330+</a:t>
             </a:r>
             <a:r>
-              <a:rPr sz="1800" b="0">
+              <a:rPr sz="1800" b="0" lang="en-IN">
                 <a:solidFill>
                   <a:srgbClr val="243B7A"/>
                 </a:solidFill>
@@ -15428,7 +15428,7 @@
           <a:p>
             <a:pPr algn="l"/>
             <a:r>
-              <a:rPr sz="1400" b="0">
+              <a:rPr sz="1400" b="0" lang="en-IN">
                 <a:solidFill>
                   <a:srgbClr val="1F2937"/>
                 </a:solidFill>
@@ -15463,7 +15463,7 @@
           <a:p>
             <a:pPr algn="l"/>
             <a:r>
-              <a:rPr sz="1600" b="1">
+              <a:rPr sz="1600" b="1" lang="en-IN">
                 <a:solidFill>
                   <a:srgbClr val="243B7A"/>
                 </a:solidFill>
@@ -15613,7 +15613,7 @@
           <a:p>
             <a:pPr algn="l"/>
             <a:r>
-              <a:rPr sz="3000" b="1">
+              <a:rPr sz="3000" b="1" lang="en-IN">
                 <a:solidFill>
                   <a:srgbClr val="243B7A"/>
                 </a:solidFill>
@@ -15672,7 +15672,7 @@
           <a:p>
             <a:pPr algn="l"/>
             <a:r>
-              <a:rPr sz="1000" b="0">
+              <a:rPr sz="1000" b="0" lang="en-IN">
                 <a:solidFill>
                   <a:srgbClr val="4B5563"/>
                 </a:solidFill>
@@ -15707,7 +15707,7 @@
           <a:p>
             <a:pPr algn="r"/>
             <a:r>
-              <a:rPr sz="1000" b="0">
+              <a:rPr sz="1000" b="0" lang="en-IN">
                 <a:solidFill>
                   <a:srgbClr val="4B5563"/>
                 </a:solidFill>
@@ -15742,7 +15742,7 @@
           <a:p>
             <a:pPr algn="l"/>
             <a:r>
-              <a:rPr sz="1900" b="0">
+              <a:rPr sz="1900" b="0" lang="en-IN">
                 <a:solidFill>
                   <a:srgbClr val="1F2937"/>
                 </a:solidFill>
@@ -15895,7 +15895,7 @@
           <a:p>
             <a:pPr algn="l"/>
             <a:r>
-              <a:rPr sz="2200" b="1">
+              <a:rPr sz="2200" b="1" lang="en-IN">
                 <a:solidFill>
                   <a:srgbClr val="243B7A"/>
                 </a:solidFill>
@@ -15930,7 +15930,7 @@
           <a:p>
             <a:pPr algn="l"/>
             <a:r>
-              <a:rPr sz="1500" b="0">
+              <a:rPr sz="1500" b="0" lang="en-IN">
                 <a:solidFill>
                   <a:srgbClr val="8A6300"/>
                 </a:solidFill>
@@ -15965,7 +15965,7 @@
           <a:p>
             <a:pPr algn="l"/>
             <a:r>
-              <a:rPr sz="1700" b="0">
+              <a:rPr sz="1700" b="0" lang="en-IN">
                 <a:solidFill>
                   <a:srgbClr val="1F2937"/>
                 </a:solidFill>
@@ -16118,7 +16118,7 @@
           <a:p>
             <a:pPr algn="l"/>
             <a:r>
-              <a:rPr sz="2200" b="1">
+              <a:rPr sz="2200" b="1" lang="en-IN">
                 <a:solidFill>
                   <a:srgbClr val="243B7A"/>
                 </a:solidFill>
@@ -16153,7 +16153,7 @@
           <a:p>
             <a:pPr algn="l"/>
             <a:r>
-              <a:rPr sz="1500" b="0">
+              <a:rPr sz="1500" b="0" lang="en-IN">
                 <a:solidFill>
                   <a:srgbClr val="8A6300"/>
                 </a:solidFill>
@@ -16188,7 +16188,7 @@
           <a:p>
             <a:pPr algn="l"/>
             <a:r>
-              <a:rPr sz="1700" b="0">
+              <a:rPr sz="1700" b="0" lang="en-IN">
                 <a:solidFill>
                   <a:srgbClr val="1F2937"/>
                 </a:solidFill>
@@ -16276,7 +16276,7 @@
               </a:spcAft>
             </a:pPr>
             <a:r>
-              <a:rPr sz="1700" b="1">
+              <a:rPr sz="1700" b="1" lang="en-IN">
                 <a:solidFill>
                   <a:srgbClr val="243B7A"/>
                 </a:solidFill>
@@ -16292,7 +16292,7 @@
               </a:spcAft>
             </a:pPr>
             <a:r>
-              <a:rPr sz="1700" b="1">
+              <a:rPr sz="1700" b="1" lang="en-IN">
                 <a:solidFill>
                   <a:srgbClr val="243B7A"/>
                 </a:solidFill>

--- a/deck/UP-Excise-Ask-the-Data-Demo.pptx
+++ b/deck/UP-Excise-Ask-the-Data-Demo.pptx
@@ -4,24 +4,27 @@
   <p:sldMasterIdLst>
     <p:sldMasterId id="2147483648" r:id="rId1"/>
   </p:sldMasterIdLst>
+  <p:notesMasterIdLst>
+    <p:notesMasterId r:id="rId17"/>
+  </p:notesMasterIdLst>
   <p:sldIdLst>
-    <p:sldId id="256" r:id="rId7"/>
-    <p:sldId id="257" r:id="rId9"/>
-    <p:sldId id="258" r:id="rId10"/>
-    <p:sldId id="259" r:id="rId11"/>
-    <p:sldId id="260" r:id="rId12"/>
-    <p:sldId id="261" r:id="rId13"/>
-    <p:sldId id="262" r:id="rId14"/>
-    <p:sldId id="263" r:id="rId15"/>
-    <p:sldId id="264" r:id="rId16"/>
-    <p:sldId id="265" r:id="rId17"/>
-    <p:sldId id="266" r:id="rId18"/>
-    <p:sldId id="267" r:id="rId19"/>
-    <p:sldId id="268" r:id="rId20"/>
-    <p:sldId id="269" r:id="rId21"/>
-    <p:sldId id="270" r:id="rId22"/>
+    <p:sldId id="256" r:id="rId2"/>
+    <p:sldId id="257" r:id="rId3"/>
+    <p:sldId id="258" r:id="rId4"/>
+    <p:sldId id="259" r:id="rId5"/>
+    <p:sldId id="260" r:id="rId6"/>
+    <p:sldId id="261" r:id="rId7"/>
+    <p:sldId id="262" r:id="rId8"/>
+    <p:sldId id="263" r:id="rId9"/>
+    <p:sldId id="264" r:id="rId10"/>
+    <p:sldId id="265" r:id="rId11"/>
+    <p:sldId id="266" r:id="rId12"/>
+    <p:sldId id="267" r:id="rId13"/>
+    <p:sldId id="268" r:id="rId14"/>
+    <p:sldId id="269" r:id="rId15"/>
+    <p:sldId id="270" r:id="rId16"/>
   </p:sldIdLst>
-  <p:sldSz cx="12191695" cy="6858000" type="screen4x3"/>
+  <p:sldSz cx="12192000" cy="6858000"/>
   <p:notesSz cx="6858000" cy="9144000"/>
   <p:defaultTextStyle>
     <a:defPPr>
@@ -118,11 +121,27 @@
       </a:defRPr>
     </a:lvl9pPr>
   </p:defaultTextStyle>
+  <p:extLst>
+    <p:ext uri="{EFAFB233-063F-42B5-8137-9DF3F51BA10A}">
+      <p15:sldGuideLst xmlns:p15="http://schemas.microsoft.com/office/powerpoint/2012/main">
+        <p15:guide id="1" orient="horz" pos="2160">
+          <p15:clr>
+            <a:srgbClr val="A4A3A4"/>
+          </p15:clr>
+        </p15:guide>
+        <p15:guide id="2" pos="2880">
+          <p15:clr>
+            <a:srgbClr val="A4A3A4"/>
+          </p15:clr>
+        </p15:guide>
+      </p15:sldGuideLst>
+    </p:ext>
+  </p:extLst>
 </p:presentation>
 </file>
 
 <file path=ppt/notesMasters/notesMaster1.xml><?xml version="1.0" encoding="utf-8"?>
-<p:notesMaster xmlns:a="http://schemas.openxmlformats.org/drawingml/2006/main" xmlns:p="http://schemas.openxmlformats.org/presentationml/2006/main" xmlns:r="http://schemas.openxmlformats.org/officeDocument/2006/relationships">
+<p:notesMaster xmlns:a="http://schemas.openxmlformats.org/drawingml/2006/main" xmlns:r="http://schemas.openxmlformats.org/officeDocument/2006/relationships" xmlns:p="http://schemas.openxmlformats.org/presentationml/2006/main">
   <p:cSld>
     <p:bg>
       <p:bgRef idx="1001">
@@ -143,241 +162,16 @@
           <a:chExt cx="0" cy="0"/>
         </a:xfrm>
       </p:grpSpPr>
-      <p:sp>
-        <p:nvSpPr>
-          <p:cNvPr id="2" name="Header Placeholder 1"/>
-          <p:cNvSpPr>
-            <a:spLocks noGrp="1"/>
-          </p:cNvSpPr>
-          <p:nvPr>
-            <p:ph type="hdr" sz="quarter"/>
-          </p:nvPr>
-        </p:nvSpPr>
-        <p:spPr>
-          <a:xfrm>
-            <a:off x="0" y="0"/>
-            <a:ext cx="2971800" cy="457200"/>
-          </a:xfrm>
-          <a:prstGeom prst="rect">
-            <a:avLst/>
-          </a:prstGeom>
-        </p:spPr>
-        <p:txBody>
-          <a:bodyPr vert="horz" lIns="91440" tIns="45720" rIns="91440" bIns="45720" rtlCol="0"/>
-          <a:lstStyle>
-            <a:lvl1pPr algn="l">
-              <a:defRPr sz="1200"/>
-            </a:lvl1pPr>
-          </a:lstStyle>
-          <a:p>
-            <a:endParaRPr lang="en-US"/>
-          </a:p>
-        </p:txBody>
-      </p:sp>
-      <p:sp>
-        <p:nvSpPr>
-          <p:cNvPr id="3" name="Date Placeholder 2"/>
-          <p:cNvSpPr>
-            <a:spLocks noGrp="1"/>
-          </p:cNvSpPr>
-          <p:nvPr>
-            <p:ph type="dt" idx="1"/>
-          </p:nvPr>
-        </p:nvSpPr>
-        <p:spPr>
-          <a:xfrm>
-            <a:off x="3884613" y="0"/>
-            <a:ext cx="2971800" cy="457200"/>
-          </a:xfrm>
-          <a:prstGeom prst="rect">
-            <a:avLst/>
-          </a:prstGeom>
-        </p:spPr>
-        <p:txBody>
-          <a:bodyPr vert="horz" lIns="91440" tIns="45720" rIns="91440" bIns="45720" rtlCol="0"/>
-          <a:lstStyle>
-            <a:lvl1pPr algn="r">
-              <a:defRPr sz="1200"/>
-            </a:lvl1pPr>
-          </a:lstStyle>
-          <a:p>
-            <a:fld id="{0F89C1C7-3DCD-1040-A9CF-14679D8B5DDD}" type="datetimeFigureOut">
-              <a:rPr lang="en-US" smtClean="0"/>
-              <a:t>10/17/16</a:t>
-            </a:fld>
-            <a:endParaRPr lang="en-US"/>
-          </a:p>
-        </p:txBody>
-      </p:sp>
-      <p:sp>
-        <p:nvSpPr>
-          <p:cNvPr id="4" name="Slide Image Placeholder 3"/>
-          <p:cNvSpPr>
-            <a:spLocks noGrp="1" noRot="1" noChangeAspect="1"/>
-          </p:cNvSpPr>
-          <p:nvPr>
-            <p:ph type="sldImg" idx="2"/>
-          </p:nvPr>
-        </p:nvSpPr>
-        <p:spPr>
-          <a:xfrm>
-            <a:off x="1143000" y="685800"/>
-            <a:ext cx="4572000" cy="3429000"/>
-          </a:xfrm>
-          <a:prstGeom prst="rect">
-            <a:avLst/>
-          </a:prstGeom>
-          <a:noFill/>
-          <a:ln w="12700">
-            <a:solidFill>
-              <a:prstClr val="black"/>
-            </a:solidFill>
-          </a:ln>
-        </p:spPr>
-        <p:txBody>
-          <a:bodyPr vert="horz" lIns="91440" tIns="45720" rIns="91440" bIns="45720" rtlCol="0" anchor="ctr"/>
-          <a:lstStyle/>
-          <a:p>
-            <a:endParaRPr lang="en-US"/>
-          </a:p>
-        </p:txBody>
-      </p:sp>
-      <p:sp>
-        <p:nvSpPr>
-          <p:cNvPr id="5" name="Notes Placeholder 4"/>
-          <p:cNvSpPr>
-            <a:spLocks noGrp="1"/>
-          </p:cNvSpPr>
-          <p:nvPr>
-            <p:ph type="body" sz="quarter" idx="3"/>
-          </p:nvPr>
-        </p:nvSpPr>
-        <p:spPr>
-          <a:xfrm>
-            <a:off x="685800" y="4343400"/>
-            <a:ext cx="5486400" cy="4114800"/>
-          </a:xfrm>
-          <a:prstGeom prst="rect">
-            <a:avLst/>
-          </a:prstGeom>
-        </p:spPr>
-        <p:txBody>
-          <a:bodyPr vert="horz" lIns="91440" tIns="45720" rIns="91440" bIns="45720" rtlCol="0"/>
-          <a:lstStyle/>
-          <a:p>
-            <a:pPr lvl="0"/>
-            <a:r>
-              <a:rPr lang="en-US" smtClean="0"/>
-              <a:t>Click to edit Master text styles</a:t>
-            </a:r>
-          </a:p>
-          <a:p>
-            <a:pPr lvl="1"/>
-            <a:r>
-              <a:rPr lang="en-US" smtClean="0"/>
-              <a:t>Second level</a:t>
-            </a:r>
-          </a:p>
-          <a:p>
-            <a:pPr lvl="2"/>
-            <a:r>
-              <a:rPr lang="en-US" smtClean="0"/>
-              <a:t>Third level</a:t>
-            </a:r>
-          </a:p>
-          <a:p>
-            <a:pPr lvl="3"/>
-            <a:r>
-              <a:rPr lang="en-US" smtClean="0"/>
-              <a:t>Fourth level</a:t>
-            </a:r>
-          </a:p>
-          <a:p>
-            <a:pPr lvl="4"/>
-            <a:r>
-              <a:rPr lang="en-US" smtClean="0"/>
-              <a:t>Fifth level</a:t>
-            </a:r>
-            <a:endParaRPr lang="en-US"/>
-          </a:p>
-        </p:txBody>
-      </p:sp>
-      <p:sp>
-        <p:nvSpPr>
-          <p:cNvPr id="6" name="Footer Placeholder 5"/>
-          <p:cNvSpPr>
-            <a:spLocks noGrp="1"/>
-          </p:cNvSpPr>
-          <p:nvPr>
-            <p:ph type="ftr" sz="quarter" idx="4"/>
-          </p:nvPr>
-        </p:nvSpPr>
-        <p:spPr>
-          <a:xfrm>
-            <a:off x="0" y="8685213"/>
-            <a:ext cx="2971800" cy="457200"/>
-          </a:xfrm>
-          <a:prstGeom prst="rect">
-            <a:avLst/>
-          </a:prstGeom>
-        </p:spPr>
-        <p:txBody>
-          <a:bodyPr vert="horz" lIns="91440" tIns="45720" rIns="91440" bIns="45720" rtlCol="0" anchor="b"/>
-          <a:lstStyle>
-            <a:lvl1pPr algn="l">
-              <a:defRPr sz="1200"/>
-            </a:lvl1pPr>
-          </a:lstStyle>
-          <a:p>
-            <a:endParaRPr lang="en-US"/>
-          </a:p>
-        </p:txBody>
-      </p:sp>
-      <p:sp>
-        <p:nvSpPr>
-          <p:cNvPr id="7" name="Slide Number Placeholder 6"/>
-          <p:cNvSpPr>
-            <a:spLocks noGrp="1"/>
-          </p:cNvSpPr>
-          <p:nvPr>
-            <p:ph type="sldNum" sz="quarter" idx="5"/>
-          </p:nvPr>
-        </p:nvSpPr>
-        <p:spPr>
-          <a:xfrm>
-            <a:off x="3884613" y="8685213"/>
-            <a:ext cx="2971800" cy="457200"/>
-          </a:xfrm>
-          <a:prstGeom prst="rect">
-            <a:avLst/>
-          </a:prstGeom>
-        </p:spPr>
-        <p:txBody>
-          <a:bodyPr vert="horz" lIns="91440" tIns="45720" rIns="91440" bIns="45720" rtlCol="0" anchor="b"/>
-          <a:lstStyle>
-            <a:lvl1pPr algn="r">
-              <a:defRPr sz="1200"/>
-            </a:lvl1pPr>
-          </a:lstStyle>
-          <a:p>
-            <a:fld id="{BB5E49A5-4136-284D-997B-48E1D791AD67}" type="slidenum">
-              <a:rPr lang="en-US" smtClean="0"/>
-              <a:t>‹#›</a:t>
-            </a:fld>
-            <a:endParaRPr lang="en-US"/>
-          </a:p>
-        </p:txBody>
-      </p:sp>
     </p:spTree>
     <p:extLst>
       <p:ext uri="{BB962C8B-B14F-4D97-AF65-F5344CB8AC3E}">
-        <p14:creationId xmlns:p14="http://schemas.microsoft.com/office/powerpoint/2010/main" val="2623252185"/>
+        <p14:creationId xmlns:p14="http://schemas.microsoft.com/office/powerpoint/2010/main" val="3193798116"/>
       </p:ext>
     </p:extLst>
   </p:cSld>
   <p:clrMap bg1="lt1" tx1="dk1" bg2="lt2" tx2="dk2" accent1="accent1" accent2="accent2" accent3="accent3" accent4="accent4" accent5="accent5" accent6="accent6" hlink="hlink" folHlink="folHlink"/>
   <p:notesStyle>
-    <a:lvl1pPr marL="0" algn="l" defTabSz="457200" rtl="0" eaLnBrk="1" latinLnBrk="0" hangingPunct="1">
+    <a:lvl1pPr marL="0" algn="l" defTabSz="914400" rtl="0" eaLnBrk="1" latinLnBrk="0" hangingPunct="1">
       <a:defRPr sz="1200" kern="1200">
         <a:solidFill>
           <a:schemeClr val="tx1"/>
@@ -387,7 +181,7 @@
         <a:cs typeface="+mn-cs"/>
       </a:defRPr>
     </a:lvl1pPr>
-    <a:lvl2pPr marL="457200" algn="l" defTabSz="457200" rtl="0" eaLnBrk="1" latinLnBrk="0" hangingPunct="1">
+    <a:lvl2pPr marL="457200" algn="l" defTabSz="914400" rtl="0" eaLnBrk="1" latinLnBrk="0" hangingPunct="1">
       <a:defRPr sz="1200" kern="1200">
         <a:solidFill>
           <a:schemeClr val="tx1"/>
@@ -397,7 +191,7 @@
         <a:cs typeface="+mn-cs"/>
       </a:defRPr>
     </a:lvl2pPr>
-    <a:lvl3pPr marL="914400" algn="l" defTabSz="457200" rtl="0" eaLnBrk="1" latinLnBrk="0" hangingPunct="1">
+    <a:lvl3pPr marL="914400" algn="l" defTabSz="914400" rtl="0" eaLnBrk="1" latinLnBrk="0" hangingPunct="1">
       <a:defRPr sz="1200" kern="1200">
         <a:solidFill>
           <a:schemeClr val="tx1"/>
@@ -407,7 +201,7 @@
         <a:cs typeface="+mn-cs"/>
       </a:defRPr>
     </a:lvl3pPr>
-    <a:lvl4pPr marL="1371600" algn="l" defTabSz="457200" rtl="0" eaLnBrk="1" latinLnBrk="0" hangingPunct="1">
+    <a:lvl4pPr marL="1371600" algn="l" defTabSz="914400" rtl="0" eaLnBrk="1" latinLnBrk="0" hangingPunct="1">
       <a:defRPr sz="1200" kern="1200">
         <a:solidFill>
           <a:schemeClr val="tx1"/>
@@ -417,7 +211,7 @@
         <a:cs typeface="+mn-cs"/>
       </a:defRPr>
     </a:lvl4pPr>
-    <a:lvl5pPr marL="1828800" algn="l" defTabSz="457200" rtl="0" eaLnBrk="1" latinLnBrk="0" hangingPunct="1">
+    <a:lvl5pPr marL="1828800" algn="l" defTabSz="914400" rtl="0" eaLnBrk="1" latinLnBrk="0" hangingPunct="1">
       <a:defRPr sz="1200" kern="1200">
         <a:solidFill>
           <a:schemeClr val="tx1"/>
@@ -427,7 +221,7 @@
         <a:cs typeface="+mn-cs"/>
       </a:defRPr>
     </a:lvl5pPr>
-    <a:lvl6pPr marL="2286000" algn="l" defTabSz="457200" rtl="0" eaLnBrk="1" latinLnBrk="0" hangingPunct="1">
+    <a:lvl6pPr marL="2286000" algn="l" defTabSz="914400" rtl="0" eaLnBrk="1" latinLnBrk="0" hangingPunct="1">
       <a:defRPr sz="1200" kern="1200">
         <a:solidFill>
           <a:schemeClr val="tx1"/>
@@ -437,7 +231,7 @@
         <a:cs typeface="+mn-cs"/>
       </a:defRPr>
     </a:lvl6pPr>
-    <a:lvl7pPr marL="2743200" algn="l" defTabSz="457200" rtl="0" eaLnBrk="1" latinLnBrk="0" hangingPunct="1">
+    <a:lvl7pPr marL="2743200" algn="l" defTabSz="914400" rtl="0" eaLnBrk="1" latinLnBrk="0" hangingPunct="1">
       <a:defRPr sz="1200" kern="1200">
         <a:solidFill>
           <a:schemeClr val="tx1"/>
@@ -447,7 +241,7 @@
         <a:cs typeface="+mn-cs"/>
       </a:defRPr>
     </a:lvl7pPr>
-    <a:lvl8pPr marL="3200400" algn="l" defTabSz="457200" rtl="0" eaLnBrk="1" latinLnBrk="0" hangingPunct="1">
+    <a:lvl8pPr marL="3200400" algn="l" defTabSz="914400" rtl="0" eaLnBrk="1" latinLnBrk="0" hangingPunct="1">
       <a:defRPr sz="1200" kern="1200">
         <a:solidFill>
           <a:schemeClr val="tx1"/>
@@ -457,7 +251,7 @@
         <a:cs typeface="+mn-cs"/>
       </a:defRPr>
     </a:lvl8pPr>
-    <a:lvl9pPr marL="3657600" algn="l" defTabSz="457200" rtl="0" eaLnBrk="1" latinLnBrk="0" hangingPunct="1">
+    <a:lvl9pPr marL="3657600" algn="l" defTabSz="914400" rtl="0" eaLnBrk="1" latinLnBrk="0" hangingPunct="1">
       <a:defRPr sz="1200" kern="1200">
         <a:solidFill>
           <a:schemeClr val="tx1"/>
@@ -472,7 +266,7 @@
 </file>
 
 <file path=ppt/notesSlides/notesSlide1.xml><?xml version="1.0" encoding="utf-8"?>
-<p:notes xmlns:a="http://schemas.openxmlformats.org/drawingml/2006/main" xmlns:p="http://schemas.openxmlformats.org/presentationml/2006/main" xmlns:r="http://schemas.openxmlformats.org/officeDocument/2006/relationships">
+<p:notes xmlns:a="http://schemas.openxmlformats.org/drawingml/2006/main" xmlns:r="http://schemas.openxmlformats.org/officeDocument/2006/relationships" xmlns:p="http://schemas.openxmlformats.org/presentationml/2006/main">
   <p:cSld>
     <p:spTree>
       <p:nvGrpSpPr>
@@ -492,7 +286,7 @@
         <p:nvSpPr>
           <p:cNvPr id="2" name="Slide Image Placeholder 1"/>
           <p:cNvSpPr>
-            <a:spLocks noGrp="1"/>
+            <a:spLocks noGrp="1" noRot="1" noChangeAspect="1"/>
           </p:cNvSpPr>
           <p:nvPr>
             <p:ph type="sldImg" idx="2"/>
@@ -507,7 +301,7 @@
             <a:spLocks noGrp="1"/>
           </p:cNvSpPr>
           <p:nvPr>
-            <p:ph type="body" idx="3" sz="quarter"/>
+            <p:ph type="body" sz="quarter" idx="3"/>
           </p:nvPr>
         </p:nvSpPr>
         <p:spPr/>
@@ -528,7 +322,7 @@
             <a:spLocks noGrp="1"/>
           </p:cNvSpPr>
           <p:nvPr>
-            <p:ph type="sldNum" idx="5" sz="quarter"/>
+            <p:ph type="sldNum" sz="quarter" idx="5"/>
           </p:nvPr>
         </p:nvSpPr>
         <p:spPr/>
@@ -542,7 +336,7 @@
 </file>
 
 <file path=ppt/notesSlides/notesSlide10.xml><?xml version="1.0" encoding="utf-8"?>
-<p:notes xmlns:a="http://schemas.openxmlformats.org/drawingml/2006/main" xmlns:p="http://schemas.openxmlformats.org/presentationml/2006/main" xmlns:r="http://schemas.openxmlformats.org/officeDocument/2006/relationships">
+<p:notes xmlns:a="http://schemas.openxmlformats.org/drawingml/2006/main" xmlns:r="http://schemas.openxmlformats.org/officeDocument/2006/relationships" xmlns:p="http://schemas.openxmlformats.org/presentationml/2006/main">
   <p:cSld>
     <p:spTree>
       <p:nvGrpSpPr>
@@ -562,7 +356,7 @@
         <p:nvSpPr>
           <p:cNvPr id="2" name="Slide Image Placeholder 1"/>
           <p:cNvSpPr>
-            <a:spLocks noGrp="1"/>
+            <a:spLocks noGrp="1" noRot="1" noChangeAspect="1"/>
           </p:cNvSpPr>
           <p:nvPr>
             <p:ph type="sldImg" idx="2"/>
@@ -577,7 +371,7 @@
             <a:spLocks noGrp="1"/>
           </p:cNvSpPr>
           <p:nvPr>
-            <p:ph type="body" idx="3" sz="quarter"/>
+            <p:ph type="body" sz="quarter" idx="3"/>
           </p:nvPr>
         </p:nvSpPr>
         <p:spPr/>
@@ -598,7 +392,7 @@
             <a:spLocks noGrp="1"/>
           </p:cNvSpPr>
           <p:nvPr>
-            <p:ph type="sldNum" idx="5" sz="quarter"/>
+            <p:ph type="sldNum" sz="quarter" idx="5"/>
           </p:nvPr>
         </p:nvSpPr>
         <p:spPr/>
@@ -612,7 +406,7 @@
 </file>
 
 <file path=ppt/notesSlides/notesSlide11.xml><?xml version="1.0" encoding="utf-8"?>
-<p:notes xmlns:a="http://schemas.openxmlformats.org/drawingml/2006/main" xmlns:p="http://schemas.openxmlformats.org/presentationml/2006/main" xmlns:r="http://schemas.openxmlformats.org/officeDocument/2006/relationships">
+<p:notes xmlns:a="http://schemas.openxmlformats.org/drawingml/2006/main" xmlns:r="http://schemas.openxmlformats.org/officeDocument/2006/relationships" xmlns:p="http://schemas.openxmlformats.org/presentationml/2006/main">
   <p:cSld>
     <p:spTree>
       <p:nvGrpSpPr>
@@ -632,7 +426,7 @@
         <p:nvSpPr>
           <p:cNvPr id="2" name="Slide Image Placeholder 1"/>
           <p:cNvSpPr>
-            <a:spLocks noGrp="1"/>
+            <a:spLocks noGrp="1" noRot="1" noChangeAspect="1"/>
           </p:cNvSpPr>
           <p:nvPr>
             <p:ph type="sldImg" idx="2"/>
@@ -647,7 +441,7 @@
             <a:spLocks noGrp="1"/>
           </p:cNvSpPr>
           <p:nvPr>
-            <p:ph type="body" idx="3" sz="quarter"/>
+            <p:ph type="body" sz="quarter" idx="3"/>
           </p:nvPr>
         </p:nvSpPr>
         <p:spPr/>
@@ -668,7 +462,7 @@
             <a:spLocks noGrp="1"/>
           </p:cNvSpPr>
           <p:nvPr>
-            <p:ph type="sldNum" idx="5" sz="quarter"/>
+            <p:ph type="sldNum" sz="quarter" idx="5"/>
           </p:nvPr>
         </p:nvSpPr>
         <p:spPr/>
@@ -682,7 +476,7 @@
 </file>
 
 <file path=ppt/notesSlides/notesSlide12.xml><?xml version="1.0" encoding="utf-8"?>
-<p:notes xmlns:a="http://schemas.openxmlformats.org/drawingml/2006/main" xmlns:p="http://schemas.openxmlformats.org/presentationml/2006/main" xmlns:r="http://schemas.openxmlformats.org/officeDocument/2006/relationships">
+<p:notes xmlns:a="http://schemas.openxmlformats.org/drawingml/2006/main" xmlns:r="http://schemas.openxmlformats.org/officeDocument/2006/relationships" xmlns:p="http://schemas.openxmlformats.org/presentationml/2006/main">
   <p:cSld>
     <p:spTree>
       <p:nvGrpSpPr>
@@ -702,7 +496,7 @@
         <p:nvSpPr>
           <p:cNvPr id="2" name="Slide Image Placeholder 1"/>
           <p:cNvSpPr>
-            <a:spLocks noGrp="1"/>
+            <a:spLocks noGrp="1" noRot="1" noChangeAspect="1"/>
           </p:cNvSpPr>
           <p:nvPr>
             <p:ph type="sldImg" idx="2"/>
@@ -717,7 +511,7 @@
             <a:spLocks noGrp="1"/>
           </p:cNvSpPr>
           <p:nvPr>
-            <p:ph type="body" idx="3" sz="quarter"/>
+            <p:ph type="body" sz="quarter" idx="3"/>
           </p:nvPr>
         </p:nvSpPr>
         <p:spPr/>
@@ -738,7 +532,7 @@
             <a:spLocks noGrp="1"/>
           </p:cNvSpPr>
           <p:nvPr>
-            <p:ph type="sldNum" idx="5" sz="quarter"/>
+            <p:ph type="sldNum" sz="quarter" idx="5"/>
           </p:nvPr>
         </p:nvSpPr>
         <p:spPr/>
@@ -752,7 +546,7 @@
 </file>
 
 <file path=ppt/notesSlides/notesSlide13.xml><?xml version="1.0" encoding="utf-8"?>
-<p:notes xmlns:a="http://schemas.openxmlformats.org/drawingml/2006/main" xmlns:p="http://schemas.openxmlformats.org/presentationml/2006/main" xmlns:r="http://schemas.openxmlformats.org/officeDocument/2006/relationships">
+<p:notes xmlns:a="http://schemas.openxmlformats.org/drawingml/2006/main" xmlns:r="http://schemas.openxmlformats.org/officeDocument/2006/relationships" xmlns:p="http://schemas.openxmlformats.org/presentationml/2006/main">
   <p:cSld>
     <p:spTree>
       <p:nvGrpSpPr>
@@ -772,7 +566,7 @@
         <p:nvSpPr>
           <p:cNvPr id="2" name="Slide Image Placeholder 1"/>
           <p:cNvSpPr>
-            <a:spLocks noGrp="1"/>
+            <a:spLocks noGrp="1" noRot="1" noChangeAspect="1"/>
           </p:cNvSpPr>
           <p:nvPr>
             <p:ph type="sldImg" idx="2"/>
@@ -787,7 +581,7 @@
             <a:spLocks noGrp="1"/>
           </p:cNvSpPr>
           <p:nvPr>
-            <p:ph type="body" idx="3" sz="quarter"/>
+            <p:ph type="body" sz="quarter" idx="3"/>
           </p:nvPr>
         </p:nvSpPr>
         <p:spPr/>
@@ -808,7 +602,7 @@
             <a:spLocks noGrp="1"/>
           </p:cNvSpPr>
           <p:nvPr>
-            <p:ph type="sldNum" idx="5" sz="quarter"/>
+            <p:ph type="sldNum" sz="quarter" idx="5"/>
           </p:nvPr>
         </p:nvSpPr>
         <p:spPr/>
@@ -822,7 +616,7 @@
 </file>
 
 <file path=ppt/notesSlides/notesSlide14.xml><?xml version="1.0" encoding="utf-8"?>
-<p:notes xmlns:a="http://schemas.openxmlformats.org/drawingml/2006/main" xmlns:p="http://schemas.openxmlformats.org/presentationml/2006/main" xmlns:r="http://schemas.openxmlformats.org/officeDocument/2006/relationships">
+<p:notes xmlns:a="http://schemas.openxmlformats.org/drawingml/2006/main" xmlns:r="http://schemas.openxmlformats.org/officeDocument/2006/relationships" xmlns:p="http://schemas.openxmlformats.org/presentationml/2006/main">
   <p:cSld>
     <p:spTree>
       <p:nvGrpSpPr>
@@ -842,7 +636,7 @@
         <p:nvSpPr>
           <p:cNvPr id="2" name="Slide Image Placeholder 1"/>
           <p:cNvSpPr>
-            <a:spLocks noGrp="1"/>
+            <a:spLocks noGrp="1" noRot="1" noChangeAspect="1"/>
           </p:cNvSpPr>
           <p:nvPr>
             <p:ph type="sldImg" idx="2"/>
@@ -857,7 +651,7 @@
             <a:spLocks noGrp="1"/>
           </p:cNvSpPr>
           <p:nvPr>
-            <p:ph type="body" idx="3" sz="quarter"/>
+            <p:ph type="body" sz="quarter" idx="3"/>
           </p:nvPr>
         </p:nvSpPr>
         <p:spPr/>
@@ -878,7 +672,7 @@
             <a:spLocks noGrp="1"/>
           </p:cNvSpPr>
           <p:nvPr>
-            <p:ph type="sldNum" idx="5" sz="quarter"/>
+            <p:ph type="sldNum" sz="quarter" idx="5"/>
           </p:nvPr>
         </p:nvSpPr>
         <p:spPr/>
@@ -892,7 +686,7 @@
 </file>
 
 <file path=ppt/notesSlides/notesSlide15.xml><?xml version="1.0" encoding="utf-8"?>
-<p:notes xmlns:a="http://schemas.openxmlformats.org/drawingml/2006/main" xmlns:p="http://schemas.openxmlformats.org/presentationml/2006/main" xmlns:r="http://schemas.openxmlformats.org/officeDocument/2006/relationships">
+<p:notes xmlns:a="http://schemas.openxmlformats.org/drawingml/2006/main" xmlns:r="http://schemas.openxmlformats.org/officeDocument/2006/relationships" xmlns:p="http://schemas.openxmlformats.org/presentationml/2006/main">
   <p:cSld>
     <p:spTree>
       <p:nvGrpSpPr>
@@ -912,7 +706,7 @@
         <p:nvSpPr>
           <p:cNvPr id="2" name="Slide Image Placeholder 1"/>
           <p:cNvSpPr>
-            <a:spLocks noGrp="1"/>
+            <a:spLocks noGrp="1" noRot="1" noChangeAspect="1"/>
           </p:cNvSpPr>
           <p:nvPr>
             <p:ph type="sldImg" idx="2"/>
@@ -927,7 +721,7 @@
             <a:spLocks noGrp="1"/>
           </p:cNvSpPr>
           <p:nvPr>
-            <p:ph type="body" idx="3" sz="quarter"/>
+            <p:ph type="body" sz="quarter" idx="3"/>
           </p:nvPr>
         </p:nvSpPr>
         <p:spPr/>
@@ -948,7 +742,7 @@
             <a:spLocks noGrp="1"/>
           </p:cNvSpPr>
           <p:nvPr>
-            <p:ph type="sldNum" idx="5" sz="quarter"/>
+            <p:ph type="sldNum" sz="quarter" idx="5"/>
           </p:nvPr>
         </p:nvSpPr>
         <p:spPr/>
@@ -962,7 +756,7 @@
 </file>
 
 <file path=ppt/notesSlides/notesSlide2.xml><?xml version="1.0" encoding="utf-8"?>
-<p:notes xmlns:a="http://schemas.openxmlformats.org/drawingml/2006/main" xmlns:p="http://schemas.openxmlformats.org/presentationml/2006/main" xmlns:r="http://schemas.openxmlformats.org/officeDocument/2006/relationships">
+<p:notes xmlns:a="http://schemas.openxmlformats.org/drawingml/2006/main" xmlns:r="http://schemas.openxmlformats.org/officeDocument/2006/relationships" xmlns:p="http://schemas.openxmlformats.org/presentationml/2006/main">
   <p:cSld>
     <p:spTree>
       <p:nvGrpSpPr>
@@ -982,7 +776,7 @@
         <p:nvSpPr>
           <p:cNvPr id="2" name="Slide Image Placeholder 1"/>
           <p:cNvSpPr>
-            <a:spLocks noGrp="1"/>
+            <a:spLocks noGrp="1" noRot="1" noChangeAspect="1"/>
           </p:cNvSpPr>
           <p:nvPr>
             <p:ph type="sldImg" idx="2"/>
@@ -997,7 +791,7 @@
             <a:spLocks noGrp="1"/>
           </p:cNvSpPr>
           <p:nvPr>
-            <p:ph type="body" idx="3" sz="quarter"/>
+            <p:ph type="body" sz="quarter" idx="3"/>
           </p:nvPr>
         </p:nvSpPr>
         <p:spPr/>
@@ -1018,7 +812,7 @@
             <a:spLocks noGrp="1"/>
           </p:cNvSpPr>
           <p:nvPr>
-            <p:ph type="sldNum" idx="5" sz="quarter"/>
+            <p:ph type="sldNum" sz="quarter" idx="5"/>
           </p:nvPr>
         </p:nvSpPr>
         <p:spPr/>
@@ -1032,7 +826,7 @@
 </file>
 
 <file path=ppt/notesSlides/notesSlide3.xml><?xml version="1.0" encoding="utf-8"?>
-<p:notes xmlns:a="http://schemas.openxmlformats.org/drawingml/2006/main" xmlns:p="http://schemas.openxmlformats.org/presentationml/2006/main" xmlns:r="http://schemas.openxmlformats.org/officeDocument/2006/relationships">
+<p:notes xmlns:a="http://schemas.openxmlformats.org/drawingml/2006/main" xmlns:r="http://schemas.openxmlformats.org/officeDocument/2006/relationships" xmlns:p="http://schemas.openxmlformats.org/presentationml/2006/main">
   <p:cSld>
     <p:spTree>
       <p:nvGrpSpPr>
@@ -1052,7 +846,7 @@
         <p:nvSpPr>
           <p:cNvPr id="2" name="Slide Image Placeholder 1"/>
           <p:cNvSpPr>
-            <a:spLocks noGrp="1"/>
+            <a:spLocks noGrp="1" noRot="1" noChangeAspect="1"/>
           </p:cNvSpPr>
           <p:nvPr>
             <p:ph type="sldImg" idx="2"/>
@@ -1067,7 +861,7 @@
             <a:spLocks noGrp="1"/>
           </p:cNvSpPr>
           <p:nvPr>
-            <p:ph type="body" idx="3" sz="quarter"/>
+            <p:ph type="body" sz="quarter" idx="3"/>
           </p:nvPr>
         </p:nvSpPr>
         <p:spPr/>
@@ -1088,7 +882,7 @@
             <a:spLocks noGrp="1"/>
           </p:cNvSpPr>
           <p:nvPr>
-            <p:ph type="sldNum" idx="5" sz="quarter"/>
+            <p:ph type="sldNum" sz="quarter" idx="5"/>
           </p:nvPr>
         </p:nvSpPr>
         <p:spPr/>
@@ -1102,7 +896,7 @@
 </file>
 
 <file path=ppt/notesSlides/notesSlide4.xml><?xml version="1.0" encoding="utf-8"?>
-<p:notes xmlns:a="http://schemas.openxmlformats.org/drawingml/2006/main" xmlns:p="http://schemas.openxmlformats.org/presentationml/2006/main" xmlns:r="http://schemas.openxmlformats.org/officeDocument/2006/relationships">
+<p:notes xmlns:a="http://schemas.openxmlformats.org/drawingml/2006/main" xmlns:r="http://schemas.openxmlformats.org/officeDocument/2006/relationships" xmlns:p="http://schemas.openxmlformats.org/presentationml/2006/main">
   <p:cSld>
     <p:spTree>
       <p:nvGrpSpPr>
@@ -1122,7 +916,7 @@
         <p:nvSpPr>
           <p:cNvPr id="2" name="Slide Image Placeholder 1"/>
           <p:cNvSpPr>
-            <a:spLocks noGrp="1"/>
+            <a:spLocks noGrp="1" noRot="1" noChangeAspect="1"/>
           </p:cNvSpPr>
           <p:nvPr>
             <p:ph type="sldImg" idx="2"/>
@@ -1137,7 +931,7 @@
             <a:spLocks noGrp="1"/>
           </p:cNvSpPr>
           <p:nvPr>
-            <p:ph type="body" idx="3" sz="quarter"/>
+            <p:ph type="body" sz="quarter" idx="3"/>
           </p:nvPr>
         </p:nvSpPr>
         <p:spPr/>
@@ -1158,7 +952,7 @@
             <a:spLocks noGrp="1"/>
           </p:cNvSpPr>
           <p:nvPr>
-            <p:ph type="sldNum" idx="5" sz="quarter"/>
+            <p:ph type="sldNum" sz="quarter" idx="5"/>
           </p:nvPr>
         </p:nvSpPr>
         <p:spPr/>
@@ -1172,7 +966,7 @@
 </file>
 
 <file path=ppt/notesSlides/notesSlide5.xml><?xml version="1.0" encoding="utf-8"?>
-<p:notes xmlns:a="http://schemas.openxmlformats.org/drawingml/2006/main" xmlns:p="http://schemas.openxmlformats.org/presentationml/2006/main" xmlns:r="http://schemas.openxmlformats.org/officeDocument/2006/relationships">
+<p:notes xmlns:a="http://schemas.openxmlformats.org/drawingml/2006/main" xmlns:r="http://schemas.openxmlformats.org/officeDocument/2006/relationships" xmlns:p="http://schemas.openxmlformats.org/presentationml/2006/main">
   <p:cSld>
     <p:spTree>
       <p:nvGrpSpPr>
@@ -1192,7 +986,7 @@
         <p:nvSpPr>
           <p:cNvPr id="2" name="Slide Image Placeholder 1"/>
           <p:cNvSpPr>
-            <a:spLocks noGrp="1"/>
+            <a:spLocks noGrp="1" noRot="1" noChangeAspect="1"/>
           </p:cNvSpPr>
           <p:nvPr>
             <p:ph type="sldImg" idx="2"/>
@@ -1207,7 +1001,7 @@
             <a:spLocks noGrp="1"/>
           </p:cNvSpPr>
           <p:nvPr>
-            <p:ph type="body" idx="3" sz="quarter"/>
+            <p:ph type="body" sz="quarter" idx="3"/>
           </p:nvPr>
         </p:nvSpPr>
         <p:spPr/>
@@ -1228,7 +1022,7 @@
             <a:spLocks noGrp="1"/>
           </p:cNvSpPr>
           <p:nvPr>
-            <p:ph type="sldNum" idx="5" sz="quarter"/>
+            <p:ph type="sldNum" sz="quarter" idx="5"/>
           </p:nvPr>
         </p:nvSpPr>
         <p:spPr/>
@@ -1242,7 +1036,7 @@
 </file>
 
 <file path=ppt/notesSlides/notesSlide6.xml><?xml version="1.0" encoding="utf-8"?>
-<p:notes xmlns:a="http://schemas.openxmlformats.org/drawingml/2006/main" xmlns:p="http://schemas.openxmlformats.org/presentationml/2006/main" xmlns:r="http://schemas.openxmlformats.org/officeDocument/2006/relationships">
+<p:notes xmlns:a="http://schemas.openxmlformats.org/drawingml/2006/main" xmlns:r="http://schemas.openxmlformats.org/officeDocument/2006/relationships" xmlns:p="http://schemas.openxmlformats.org/presentationml/2006/main">
   <p:cSld>
     <p:spTree>
       <p:nvGrpSpPr>
@@ -1262,7 +1056,7 @@
         <p:nvSpPr>
           <p:cNvPr id="2" name="Slide Image Placeholder 1"/>
           <p:cNvSpPr>
-            <a:spLocks noGrp="1"/>
+            <a:spLocks noGrp="1" noRot="1" noChangeAspect="1"/>
           </p:cNvSpPr>
           <p:nvPr>
             <p:ph type="sldImg" idx="2"/>
@@ -1277,7 +1071,7 @@
             <a:spLocks noGrp="1"/>
           </p:cNvSpPr>
           <p:nvPr>
-            <p:ph type="body" idx="3" sz="quarter"/>
+            <p:ph type="body" sz="quarter" idx="3"/>
           </p:nvPr>
         </p:nvSpPr>
         <p:spPr/>
@@ -1298,7 +1092,7 @@
             <a:spLocks noGrp="1"/>
           </p:cNvSpPr>
           <p:nvPr>
-            <p:ph type="sldNum" idx="5" sz="quarter"/>
+            <p:ph type="sldNum" sz="quarter" idx="5"/>
           </p:nvPr>
         </p:nvSpPr>
         <p:spPr/>
@@ -1312,7 +1106,7 @@
 </file>
 
 <file path=ppt/notesSlides/notesSlide7.xml><?xml version="1.0" encoding="utf-8"?>
-<p:notes xmlns:a="http://schemas.openxmlformats.org/drawingml/2006/main" xmlns:p="http://schemas.openxmlformats.org/presentationml/2006/main" xmlns:r="http://schemas.openxmlformats.org/officeDocument/2006/relationships">
+<p:notes xmlns:a="http://schemas.openxmlformats.org/drawingml/2006/main" xmlns:r="http://schemas.openxmlformats.org/officeDocument/2006/relationships" xmlns:p="http://schemas.openxmlformats.org/presentationml/2006/main">
   <p:cSld>
     <p:spTree>
       <p:nvGrpSpPr>
@@ -1332,7 +1126,7 @@
         <p:nvSpPr>
           <p:cNvPr id="2" name="Slide Image Placeholder 1"/>
           <p:cNvSpPr>
-            <a:spLocks noGrp="1"/>
+            <a:spLocks noGrp="1" noRot="1" noChangeAspect="1"/>
           </p:cNvSpPr>
           <p:nvPr>
             <p:ph type="sldImg" idx="2"/>
@@ -1347,7 +1141,7 @@
             <a:spLocks noGrp="1"/>
           </p:cNvSpPr>
           <p:nvPr>
-            <p:ph type="body" idx="3" sz="quarter"/>
+            <p:ph type="body" sz="quarter" idx="3"/>
           </p:nvPr>
         </p:nvSpPr>
         <p:spPr/>
@@ -1368,7 +1162,7 @@
             <a:spLocks noGrp="1"/>
           </p:cNvSpPr>
           <p:nvPr>
-            <p:ph type="sldNum" idx="5" sz="quarter"/>
+            <p:ph type="sldNum" sz="quarter" idx="5"/>
           </p:nvPr>
         </p:nvSpPr>
         <p:spPr/>
@@ -1382,7 +1176,7 @@
 </file>
 
 <file path=ppt/notesSlides/notesSlide8.xml><?xml version="1.0" encoding="utf-8"?>
-<p:notes xmlns:a="http://schemas.openxmlformats.org/drawingml/2006/main" xmlns:p="http://schemas.openxmlformats.org/presentationml/2006/main" xmlns:r="http://schemas.openxmlformats.org/officeDocument/2006/relationships">
+<p:notes xmlns:a="http://schemas.openxmlformats.org/drawingml/2006/main" xmlns:r="http://schemas.openxmlformats.org/officeDocument/2006/relationships" xmlns:p="http://schemas.openxmlformats.org/presentationml/2006/main">
   <p:cSld>
     <p:spTree>
       <p:nvGrpSpPr>
@@ -1402,7 +1196,7 @@
         <p:nvSpPr>
           <p:cNvPr id="2" name="Slide Image Placeholder 1"/>
           <p:cNvSpPr>
-            <a:spLocks noGrp="1"/>
+            <a:spLocks noGrp="1" noRot="1" noChangeAspect="1"/>
           </p:cNvSpPr>
           <p:nvPr>
             <p:ph type="sldImg" idx="2"/>
@@ -1417,7 +1211,7 @@
             <a:spLocks noGrp="1"/>
           </p:cNvSpPr>
           <p:nvPr>
-            <p:ph type="body" idx="3" sz="quarter"/>
+            <p:ph type="body" sz="quarter" idx="3"/>
           </p:nvPr>
         </p:nvSpPr>
         <p:spPr/>
@@ -1438,7 +1232,7 @@
             <a:spLocks noGrp="1"/>
           </p:cNvSpPr>
           <p:nvPr>
-            <p:ph type="sldNum" idx="5" sz="quarter"/>
+            <p:ph type="sldNum" sz="quarter" idx="5"/>
           </p:nvPr>
         </p:nvSpPr>
         <p:spPr/>
@@ -1452,7 +1246,7 @@
 </file>
 
 <file path=ppt/notesSlides/notesSlide9.xml><?xml version="1.0" encoding="utf-8"?>
-<p:notes xmlns:a="http://schemas.openxmlformats.org/drawingml/2006/main" xmlns:p="http://schemas.openxmlformats.org/presentationml/2006/main" xmlns:r="http://schemas.openxmlformats.org/officeDocument/2006/relationships">
+<p:notes xmlns:a="http://schemas.openxmlformats.org/drawingml/2006/main" xmlns:r="http://schemas.openxmlformats.org/officeDocument/2006/relationships" xmlns:p="http://schemas.openxmlformats.org/presentationml/2006/main">
   <p:cSld>
     <p:spTree>
       <p:nvGrpSpPr>
@@ -1472,7 +1266,7 @@
         <p:nvSpPr>
           <p:cNvPr id="2" name="Slide Image Placeholder 1"/>
           <p:cNvSpPr>
-            <a:spLocks noGrp="1"/>
+            <a:spLocks noGrp="1" noRot="1" noChangeAspect="1"/>
           </p:cNvSpPr>
           <p:nvPr>
             <p:ph type="sldImg" idx="2"/>
@@ -1487,7 +1281,7 @@
             <a:spLocks noGrp="1"/>
           </p:cNvSpPr>
           <p:nvPr>
-            <p:ph type="body" idx="3" sz="quarter"/>
+            <p:ph type="body" sz="quarter" idx="3"/>
           </p:nvPr>
         </p:nvSpPr>
         <p:spPr/>
@@ -1508,7 +1302,7 @@
             <a:spLocks noGrp="1"/>
           </p:cNvSpPr>
           <p:nvPr>
-            <p:ph type="sldNum" idx="5" sz="quarter"/>
+            <p:ph type="sldNum" sz="quarter" idx="5"/>
           </p:nvPr>
         </p:nvSpPr>
         <p:spPr/>
@@ -1559,10 +1353,9 @@
           <a:lstStyle/>
           <a:p>
             <a:r>
-              <a:rPr lang="en-US" smtClean="0"/>
+              <a:rPr lang="en-US"/>
               <a:t>Click to edit Master title style</a:t>
             </a:r>
-            <a:endParaRPr lang="en-US"/>
           </a:p>
         </p:txBody>
       </p:sp>
@@ -1678,10 +1471,9 @@
           </a:lstStyle>
           <a:p>
             <a:r>
-              <a:rPr lang="en-US" smtClean="0"/>
+              <a:rPr lang="en-US"/>
               <a:t>Click to edit Master subtitle style</a:t>
             </a:r>
-            <a:endParaRPr lang="en-US"/>
           </a:p>
         </p:txBody>
       </p:sp>
@@ -1702,7 +1494,7 @@
           <a:p>
             <a:fld id="{5BCAD085-E8A6-8845-BD4E-CB4CCA059FC4}" type="datetimeFigureOut">
               <a:rPr lang="en-US" smtClean="0"/>
-              <a:t>1/27/13</a:t>
+              <a:t>10/12/2026</a:t>
             </a:fld>
             <a:endParaRPr lang="en-US"/>
           </a:p>
@@ -1796,10 +1588,9 @@
           <a:lstStyle/>
           <a:p>
             <a:r>
-              <a:rPr lang="en-US" smtClean="0"/>
+              <a:rPr lang="en-US"/>
               <a:t>Click to edit Master title style</a:t>
             </a:r>
-            <a:endParaRPr lang="en-US"/>
           </a:p>
         </p:txBody>
       </p:sp>
@@ -1820,38 +1611,37 @@
           <a:p>
             <a:pPr lvl="0"/>
             <a:r>
-              <a:rPr lang="en-US" smtClean="0"/>
+              <a:rPr lang="en-US"/>
               <a:t>Click to edit Master text styles</a:t>
             </a:r>
           </a:p>
           <a:p>
             <a:pPr lvl="1"/>
             <a:r>
-              <a:rPr lang="en-US" smtClean="0"/>
+              <a:rPr lang="en-US"/>
               <a:t>Second level</a:t>
             </a:r>
           </a:p>
           <a:p>
             <a:pPr lvl="2"/>
             <a:r>
-              <a:rPr lang="en-US" smtClean="0"/>
+              <a:rPr lang="en-US"/>
               <a:t>Third level</a:t>
             </a:r>
           </a:p>
           <a:p>
             <a:pPr lvl="3"/>
             <a:r>
-              <a:rPr lang="en-US" smtClean="0"/>
+              <a:rPr lang="en-US"/>
               <a:t>Fourth level</a:t>
             </a:r>
           </a:p>
           <a:p>
             <a:pPr lvl="4"/>
             <a:r>
-              <a:rPr lang="en-US" smtClean="0"/>
+              <a:rPr lang="en-US"/>
               <a:t>Fifth level</a:t>
             </a:r>
-            <a:endParaRPr lang="en-US"/>
           </a:p>
         </p:txBody>
       </p:sp>
@@ -1872,7 +1662,7 @@
           <a:p>
             <a:fld id="{5BCAD085-E8A6-8845-BD4E-CB4CCA059FC4}" type="datetimeFigureOut">
               <a:rPr lang="en-US" smtClean="0"/>
-              <a:t>1/27/13</a:t>
+              <a:t>10/12/2026</a:t>
             </a:fld>
             <a:endParaRPr lang="en-US"/>
           </a:p>
@@ -1971,10 +1761,9 @@
           <a:lstStyle/>
           <a:p>
             <a:r>
-              <a:rPr lang="en-US" smtClean="0"/>
+              <a:rPr lang="en-US"/>
               <a:t>Click to edit Master title style</a:t>
             </a:r>
-            <a:endParaRPr lang="en-US"/>
           </a:p>
         </p:txBody>
       </p:sp>
@@ -2000,38 +1789,37 @@
           <a:p>
             <a:pPr lvl="0"/>
             <a:r>
-              <a:rPr lang="en-US" smtClean="0"/>
+              <a:rPr lang="en-US"/>
               <a:t>Click to edit Master text styles</a:t>
             </a:r>
           </a:p>
           <a:p>
             <a:pPr lvl="1"/>
             <a:r>
-              <a:rPr lang="en-US" smtClean="0"/>
+              <a:rPr lang="en-US"/>
               <a:t>Second level</a:t>
             </a:r>
           </a:p>
           <a:p>
             <a:pPr lvl="2"/>
             <a:r>
-              <a:rPr lang="en-US" smtClean="0"/>
+              <a:rPr lang="en-US"/>
               <a:t>Third level</a:t>
             </a:r>
           </a:p>
           <a:p>
             <a:pPr lvl="3"/>
             <a:r>
-              <a:rPr lang="en-US" smtClean="0"/>
+              <a:rPr lang="en-US"/>
               <a:t>Fourth level</a:t>
             </a:r>
           </a:p>
           <a:p>
             <a:pPr lvl="4"/>
             <a:r>
-              <a:rPr lang="en-US" smtClean="0"/>
+              <a:rPr lang="en-US"/>
               <a:t>Fifth level</a:t>
             </a:r>
-            <a:endParaRPr lang="en-US"/>
           </a:p>
         </p:txBody>
       </p:sp>
@@ -2052,7 +1840,7 @@
           <a:p>
             <a:fld id="{5BCAD085-E8A6-8845-BD4E-CB4CCA059FC4}" type="datetimeFigureOut">
               <a:rPr lang="en-US" smtClean="0"/>
-              <a:t>1/27/13</a:t>
+              <a:t>10/12/2026</a:t>
             </a:fld>
             <a:endParaRPr lang="en-US"/>
           </a:p>
@@ -2146,10 +1934,9 @@
           <a:lstStyle/>
           <a:p>
             <a:r>
-              <a:rPr lang="en-US" smtClean="0"/>
+              <a:rPr lang="en-US"/>
               <a:t>Click to edit Master title style</a:t>
             </a:r>
-            <a:endParaRPr lang="en-US"/>
           </a:p>
         </p:txBody>
       </p:sp>
@@ -2170,38 +1957,37 @@
           <a:p>
             <a:pPr lvl="0"/>
             <a:r>
-              <a:rPr lang="en-US" smtClean="0"/>
+              <a:rPr lang="en-US"/>
               <a:t>Click to edit Master text styles</a:t>
             </a:r>
           </a:p>
           <a:p>
             <a:pPr lvl="1"/>
             <a:r>
-              <a:rPr lang="en-US" smtClean="0"/>
+              <a:rPr lang="en-US"/>
               <a:t>Second level</a:t>
             </a:r>
           </a:p>
           <a:p>
             <a:pPr lvl="2"/>
             <a:r>
-              <a:rPr lang="en-US" smtClean="0"/>
+              <a:rPr lang="en-US"/>
               <a:t>Third level</a:t>
             </a:r>
           </a:p>
           <a:p>
             <a:pPr lvl="3"/>
             <a:r>
-              <a:rPr lang="en-US" smtClean="0"/>
+              <a:rPr lang="en-US"/>
               <a:t>Fourth level</a:t>
             </a:r>
           </a:p>
           <a:p>
             <a:pPr lvl="4"/>
             <a:r>
-              <a:rPr lang="en-US" smtClean="0"/>
+              <a:rPr lang="en-US"/>
               <a:t>Fifth level</a:t>
             </a:r>
-            <a:endParaRPr lang="en-US"/>
           </a:p>
         </p:txBody>
       </p:sp>
@@ -2222,7 +2008,7 @@
           <a:p>
             <a:fld id="{5BCAD085-E8A6-8845-BD4E-CB4CCA059FC4}" type="datetimeFigureOut">
               <a:rPr lang="en-US" smtClean="0"/>
-              <a:t>1/27/13</a:t>
+              <a:t>10/12/2026</a:t>
             </a:fld>
             <a:endParaRPr lang="en-US"/>
           </a:p>
@@ -2325,10 +2111,9 @@
           </a:lstStyle>
           <a:p>
             <a:r>
-              <a:rPr lang="en-US" smtClean="0"/>
+              <a:rPr lang="en-US"/>
               <a:t>Click to edit Master title style</a:t>
             </a:r>
-            <a:endParaRPr lang="en-US"/>
           </a:p>
         </p:txBody>
       </p:sp>
@@ -2445,7 +2230,7 @@
           <a:p>
             <a:pPr lvl="0"/>
             <a:r>
-              <a:rPr lang="en-US" smtClean="0"/>
+              <a:rPr lang="en-US"/>
               <a:t>Click to edit Master text styles</a:t>
             </a:r>
           </a:p>
@@ -2468,7 +2253,7 @@
           <a:p>
             <a:fld id="{5BCAD085-E8A6-8845-BD4E-CB4CCA059FC4}" type="datetimeFigureOut">
               <a:rPr lang="en-US" smtClean="0"/>
-              <a:t>1/27/13</a:t>
+              <a:t>10/12/2026</a:t>
             </a:fld>
             <a:endParaRPr lang="en-US"/>
           </a:p>
@@ -2562,10 +2347,9 @@
           <a:lstStyle/>
           <a:p>
             <a:r>
-              <a:rPr lang="en-US" smtClean="0"/>
+              <a:rPr lang="en-US"/>
               <a:t>Click to edit Master title style</a:t>
             </a:r>
-            <a:endParaRPr lang="en-US"/>
           </a:p>
         </p:txBody>
       </p:sp>
@@ -2619,38 +2403,37 @@
           <a:p>
             <a:pPr lvl="0"/>
             <a:r>
-              <a:rPr lang="en-US" smtClean="0"/>
+              <a:rPr lang="en-US"/>
               <a:t>Click to edit Master text styles</a:t>
             </a:r>
           </a:p>
           <a:p>
             <a:pPr lvl="1"/>
             <a:r>
-              <a:rPr lang="en-US" smtClean="0"/>
+              <a:rPr lang="en-US"/>
               <a:t>Second level</a:t>
             </a:r>
           </a:p>
           <a:p>
             <a:pPr lvl="2"/>
             <a:r>
-              <a:rPr lang="en-US" smtClean="0"/>
+              <a:rPr lang="en-US"/>
               <a:t>Third level</a:t>
             </a:r>
           </a:p>
           <a:p>
             <a:pPr lvl="3"/>
             <a:r>
-              <a:rPr lang="en-US" smtClean="0"/>
+              <a:rPr lang="en-US"/>
               <a:t>Fourth level</a:t>
             </a:r>
           </a:p>
           <a:p>
             <a:pPr lvl="4"/>
             <a:r>
-              <a:rPr lang="en-US" smtClean="0"/>
+              <a:rPr lang="en-US"/>
               <a:t>Fifth level</a:t>
             </a:r>
-            <a:endParaRPr lang="en-US"/>
           </a:p>
         </p:txBody>
       </p:sp>
@@ -2704,38 +2487,37 @@
           <a:p>
             <a:pPr lvl="0"/>
             <a:r>
-              <a:rPr lang="en-US" smtClean="0"/>
+              <a:rPr lang="en-US"/>
               <a:t>Click to edit Master text styles</a:t>
             </a:r>
           </a:p>
           <a:p>
             <a:pPr lvl="1"/>
             <a:r>
-              <a:rPr lang="en-US" smtClean="0"/>
+              <a:rPr lang="en-US"/>
               <a:t>Second level</a:t>
             </a:r>
           </a:p>
           <a:p>
             <a:pPr lvl="2"/>
             <a:r>
-              <a:rPr lang="en-US" smtClean="0"/>
+              <a:rPr lang="en-US"/>
               <a:t>Third level</a:t>
             </a:r>
           </a:p>
           <a:p>
             <a:pPr lvl="3"/>
             <a:r>
-              <a:rPr lang="en-US" smtClean="0"/>
+              <a:rPr lang="en-US"/>
               <a:t>Fourth level</a:t>
             </a:r>
           </a:p>
           <a:p>
             <a:pPr lvl="4"/>
             <a:r>
-              <a:rPr lang="en-US" smtClean="0"/>
+              <a:rPr lang="en-US"/>
               <a:t>Fifth level</a:t>
             </a:r>
-            <a:endParaRPr lang="en-US"/>
           </a:p>
         </p:txBody>
       </p:sp>
@@ -2756,7 +2538,7 @@
           <a:p>
             <a:fld id="{5BCAD085-E8A6-8845-BD4E-CB4CCA059FC4}" type="datetimeFigureOut">
               <a:rPr lang="en-US" smtClean="0"/>
-              <a:t>1/27/13</a:t>
+              <a:t>10/12/2026</a:t>
             </a:fld>
             <a:endParaRPr lang="en-US"/>
           </a:p>
@@ -2854,10 +2636,9 @@
           </a:lstStyle>
           <a:p>
             <a:r>
-              <a:rPr lang="en-US" smtClean="0"/>
+              <a:rPr lang="en-US"/>
               <a:t>Click to edit Master title style</a:t>
             </a:r>
-            <a:endParaRPr lang="en-US"/>
           </a:p>
         </p:txBody>
       </p:sp>
@@ -2920,7 +2701,7 @@
           <a:p>
             <a:pPr lvl="0"/>
             <a:r>
-              <a:rPr lang="en-US" smtClean="0"/>
+              <a:rPr lang="en-US"/>
               <a:t>Click to edit Master text styles</a:t>
             </a:r>
           </a:p>
@@ -2976,38 +2757,37 @@
           <a:p>
             <a:pPr lvl="0"/>
             <a:r>
-              <a:rPr lang="en-US" smtClean="0"/>
+              <a:rPr lang="en-US"/>
               <a:t>Click to edit Master text styles</a:t>
             </a:r>
           </a:p>
           <a:p>
             <a:pPr lvl="1"/>
             <a:r>
-              <a:rPr lang="en-US" smtClean="0"/>
+              <a:rPr lang="en-US"/>
               <a:t>Second level</a:t>
             </a:r>
           </a:p>
           <a:p>
             <a:pPr lvl="2"/>
             <a:r>
-              <a:rPr lang="en-US" smtClean="0"/>
+              <a:rPr lang="en-US"/>
               <a:t>Third level</a:t>
             </a:r>
           </a:p>
           <a:p>
             <a:pPr lvl="3"/>
             <a:r>
-              <a:rPr lang="en-US" smtClean="0"/>
+              <a:rPr lang="en-US"/>
               <a:t>Fourth level</a:t>
             </a:r>
           </a:p>
           <a:p>
             <a:pPr lvl="4"/>
             <a:r>
-              <a:rPr lang="en-US" smtClean="0"/>
+              <a:rPr lang="en-US"/>
               <a:t>Fifth level</a:t>
             </a:r>
-            <a:endParaRPr lang="en-US"/>
           </a:p>
         </p:txBody>
       </p:sp>
@@ -3070,7 +2850,7 @@
           <a:p>
             <a:pPr lvl="0"/>
             <a:r>
-              <a:rPr lang="en-US" smtClean="0"/>
+              <a:rPr lang="en-US"/>
               <a:t>Click to edit Master text styles</a:t>
             </a:r>
           </a:p>
@@ -3126,38 +2906,37 @@
           <a:p>
             <a:pPr lvl="0"/>
             <a:r>
-              <a:rPr lang="en-US" smtClean="0"/>
+              <a:rPr lang="en-US"/>
               <a:t>Click to edit Master text styles</a:t>
             </a:r>
           </a:p>
           <a:p>
             <a:pPr lvl="1"/>
             <a:r>
-              <a:rPr lang="en-US" smtClean="0"/>
+              <a:rPr lang="en-US"/>
               <a:t>Second level</a:t>
             </a:r>
           </a:p>
           <a:p>
             <a:pPr lvl="2"/>
             <a:r>
-              <a:rPr lang="en-US" smtClean="0"/>
+              <a:rPr lang="en-US"/>
               <a:t>Third level</a:t>
             </a:r>
           </a:p>
           <a:p>
             <a:pPr lvl="3"/>
             <a:r>
-              <a:rPr lang="en-US" smtClean="0"/>
+              <a:rPr lang="en-US"/>
               <a:t>Fourth level</a:t>
             </a:r>
           </a:p>
           <a:p>
             <a:pPr lvl="4"/>
             <a:r>
-              <a:rPr lang="en-US" smtClean="0"/>
+              <a:rPr lang="en-US"/>
               <a:t>Fifth level</a:t>
             </a:r>
-            <a:endParaRPr lang="en-US"/>
           </a:p>
         </p:txBody>
       </p:sp>
@@ -3178,7 +2957,7 @@
           <a:p>
             <a:fld id="{5BCAD085-E8A6-8845-BD4E-CB4CCA059FC4}" type="datetimeFigureOut">
               <a:rPr lang="en-US" smtClean="0"/>
-              <a:t>1/27/13</a:t>
+              <a:t>10/12/2026</a:t>
             </a:fld>
             <a:endParaRPr lang="en-US"/>
           </a:p>
@@ -3272,10 +3051,9 @@
           <a:lstStyle/>
           <a:p>
             <a:r>
-              <a:rPr lang="en-US" smtClean="0"/>
+              <a:rPr lang="en-US"/>
               <a:t>Click to edit Master title style</a:t>
             </a:r>
-            <a:endParaRPr lang="en-US"/>
           </a:p>
         </p:txBody>
       </p:sp>
@@ -3296,7 +3074,7 @@
           <a:p>
             <a:fld id="{5BCAD085-E8A6-8845-BD4E-CB4CCA059FC4}" type="datetimeFigureOut">
               <a:rPr lang="en-US" smtClean="0"/>
-              <a:t>1/27/13</a:t>
+              <a:t>10/12/2026</a:t>
             </a:fld>
             <a:endParaRPr lang="en-US"/>
           </a:p>
@@ -3391,7 +3169,7 @@
           <a:p>
             <a:fld id="{5BCAD085-E8A6-8845-BD4E-CB4CCA059FC4}" type="datetimeFigureOut">
               <a:rPr lang="en-US" smtClean="0"/>
-              <a:t>1/27/13</a:t>
+              <a:t>10/12/2026</a:t>
             </a:fld>
             <a:endParaRPr lang="en-US"/>
           </a:p>
@@ -3494,10 +3272,9 @@
           </a:lstStyle>
           <a:p>
             <a:r>
-              <a:rPr lang="en-US" smtClean="0"/>
+              <a:rPr lang="en-US"/>
               <a:t>Click to edit Master title style</a:t>
             </a:r>
-            <a:endParaRPr lang="en-US"/>
           </a:p>
         </p:txBody>
       </p:sp>
@@ -3551,38 +3328,37 @@
           <a:p>
             <a:pPr lvl="0"/>
             <a:r>
-              <a:rPr lang="en-US" smtClean="0"/>
+              <a:rPr lang="en-US"/>
               <a:t>Click to edit Master text styles</a:t>
             </a:r>
           </a:p>
           <a:p>
             <a:pPr lvl="1"/>
             <a:r>
-              <a:rPr lang="en-US" smtClean="0"/>
+              <a:rPr lang="en-US"/>
               <a:t>Second level</a:t>
             </a:r>
           </a:p>
           <a:p>
             <a:pPr lvl="2"/>
             <a:r>
-              <a:rPr lang="en-US" smtClean="0"/>
+              <a:rPr lang="en-US"/>
               <a:t>Third level</a:t>
             </a:r>
           </a:p>
           <a:p>
             <a:pPr lvl="3"/>
             <a:r>
-              <a:rPr lang="en-US" smtClean="0"/>
+              <a:rPr lang="en-US"/>
               <a:t>Fourth level</a:t>
             </a:r>
           </a:p>
           <a:p>
             <a:pPr lvl="4"/>
             <a:r>
-              <a:rPr lang="en-US" smtClean="0"/>
+              <a:rPr lang="en-US"/>
               <a:t>Fifth level</a:t>
             </a:r>
-            <a:endParaRPr lang="en-US"/>
           </a:p>
         </p:txBody>
       </p:sp>
@@ -3645,7 +3421,7 @@
           <a:p>
             <a:pPr lvl="0"/>
             <a:r>
-              <a:rPr lang="en-US" smtClean="0"/>
+              <a:rPr lang="en-US"/>
               <a:t>Click to edit Master text styles</a:t>
             </a:r>
           </a:p>
@@ -3668,7 +3444,7 @@
           <a:p>
             <a:fld id="{5BCAD085-E8A6-8845-BD4E-CB4CCA059FC4}" type="datetimeFigureOut">
               <a:rPr lang="en-US" smtClean="0"/>
-              <a:t>1/27/13</a:t>
+              <a:t>10/12/2026</a:t>
             </a:fld>
             <a:endParaRPr lang="en-US"/>
           </a:p>
@@ -3771,10 +3547,9 @@
           </a:lstStyle>
           <a:p>
             <a:r>
-              <a:rPr lang="en-US" smtClean="0"/>
+              <a:rPr lang="en-US"/>
               <a:t>Click to edit Master title style</a:t>
             </a:r>
-            <a:endParaRPr lang="en-US"/>
           </a:p>
         </p:txBody>
       </p:sp>
@@ -3898,7 +3673,7 @@
           <a:p>
             <a:pPr lvl="0"/>
             <a:r>
-              <a:rPr lang="en-US" smtClean="0"/>
+              <a:rPr lang="en-US"/>
               <a:t>Click to edit Master text styles</a:t>
             </a:r>
           </a:p>
@@ -3921,7 +3696,7 @@
           <a:p>
             <a:fld id="{5BCAD085-E8A6-8845-BD4E-CB4CCA059FC4}" type="datetimeFigureOut">
               <a:rPr lang="en-US" smtClean="0"/>
-              <a:t>1/27/13</a:t>
+              <a:t>10/12/2026</a:t>
             </a:fld>
             <a:endParaRPr lang="en-US"/>
           </a:p>
@@ -4030,10 +3805,9 @@
           <a:lstStyle/>
           <a:p>
             <a:r>
-              <a:rPr lang="en-US" smtClean="0"/>
+              <a:rPr lang="en-US"/>
               <a:t>Click to edit Master title style</a:t>
             </a:r>
-            <a:endParaRPr lang="en-US"/>
           </a:p>
         </p:txBody>
       </p:sp>
@@ -4064,38 +3838,37 @@
           <a:p>
             <a:pPr lvl="0"/>
             <a:r>
-              <a:rPr lang="en-US" smtClean="0"/>
+              <a:rPr lang="en-US"/>
               <a:t>Click to edit Master text styles</a:t>
             </a:r>
           </a:p>
           <a:p>
             <a:pPr lvl="1"/>
             <a:r>
-              <a:rPr lang="en-US" smtClean="0"/>
+              <a:rPr lang="en-US"/>
               <a:t>Second level</a:t>
             </a:r>
           </a:p>
           <a:p>
             <a:pPr lvl="2"/>
             <a:r>
-              <a:rPr lang="en-US" smtClean="0"/>
+              <a:rPr lang="en-US"/>
               <a:t>Third level</a:t>
             </a:r>
           </a:p>
           <a:p>
             <a:pPr lvl="3"/>
             <a:r>
-              <a:rPr lang="en-US" smtClean="0"/>
+              <a:rPr lang="en-US"/>
               <a:t>Fourth level</a:t>
             </a:r>
           </a:p>
           <a:p>
             <a:pPr lvl="4"/>
             <a:r>
-              <a:rPr lang="en-US" smtClean="0"/>
+              <a:rPr lang="en-US"/>
               <a:t>Fifth level</a:t>
             </a:r>
-            <a:endParaRPr lang="en-US"/>
           </a:p>
         </p:txBody>
       </p:sp>
@@ -4134,7 +3907,7 @@
           <a:p>
             <a:fld id="{5BCAD085-E8A6-8845-BD4E-CB4CCA059FC4}" type="datetimeFigureOut">
               <a:rPr lang="en-US" smtClean="0"/>
-              <a:t>1/27/13</a:t>
+              <a:t>10/12/2026</a:t>
             </a:fld>
             <a:endParaRPr lang="en-US"/>
           </a:p>
@@ -4493,7 +4266,7 @@
 </file>
 
 <file path=ppt/slides/slide1.xml><?xml version="1.0" encoding="utf-8"?>
-<p:sld xmlns:a="http://schemas.openxmlformats.org/drawingml/2006/main" xmlns:p="http://schemas.openxmlformats.org/presentationml/2006/main" xmlns:r="http://schemas.openxmlformats.org/officeDocument/2006/relationships">
+<p:sld xmlns:a="http://schemas.openxmlformats.org/drawingml/2006/main" xmlns:r="http://schemas.openxmlformats.org/officeDocument/2006/relationships" xmlns:p="http://schemas.openxmlformats.org/presentationml/2006/main">
   <p:cSld>
     <p:spTree>
       <p:nvGrpSpPr>
@@ -4501,7 +4274,14 @@
         <p:cNvGrpSpPr/>
         <p:nvPr/>
       </p:nvGrpSpPr>
-      <p:grpSpPr/>
+      <p:grpSpPr>
+        <a:xfrm>
+          <a:off x="0" y="0"/>
+          <a:ext cx="0" cy="0"/>
+          <a:chOff x="0" y="0"/>
+          <a:chExt cx="0" cy="0"/>
+        </a:xfrm>
+      </p:grpSpPr>
       <p:sp>
         <p:nvSpPr>
           <p:cNvPr id="2" name="Rectangle 1"/>
@@ -4542,6 +4322,7 @@
           <a:lstStyle/>
           <a:p>
             <a:pPr algn="ctr"/>
+            <a:endParaRPr/>
           </a:p>
         </p:txBody>
       </p:sp>
@@ -4603,6 +4384,7 @@
           <a:lstStyle/>
           <a:p>
             <a:pPr algn="ctr"/>
+            <a:endParaRPr/>
           </a:p>
         </p:txBody>
       </p:sp>
@@ -4615,7 +4397,7 @@
           <p:nvPr/>
         </p:nvPicPr>
         <p:blipFill>
-          <a:blip r:embed="rId2"/>
+          <a:blip r:embed="rId3"/>
           <a:stretch>
             <a:fillRect/>
           </a:stretch>
@@ -4647,14 +4429,14 @@
           <a:noFill/>
         </p:spPr>
         <p:txBody>
-          <a:bodyPr wrap="square" anchor="t" lIns="45720" rIns="45720" tIns="27432" bIns="27432">
+          <a:bodyPr wrap="square" lIns="45720" tIns="27432" rIns="45720" bIns="27432" anchor="t">
             <a:spAutoFit/>
           </a:bodyPr>
           <a:lstStyle/>
           <a:p>
             <a:pPr algn="l"/>
             <a:r>
-              <a:rPr sz="2200" b="0">
+              <a:rPr sz="2200" b="0" lang="en-IN">
                 <a:solidFill>
                   <a:srgbClr val="1F2937"/>
                 </a:solidFill>
@@ -4682,14 +4464,14 @@
           <a:noFill/>
         </p:spPr>
         <p:txBody>
-          <a:bodyPr wrap="square" anchor="t" lIns="45720" rIns="45720" tIns="27432" bIns="27432">
+          <a:bodyPr wrap="square" lIns="45720" tIns="27432" rIns="45720" bIns="27432" anchor="t">
             <a:spAutoFit/>
           </a:bodyPr>
           <a:lstStyle/>
           <a:p>
             <a:pPr algn="l"/>
             <a:r>
-              <a:rPr sz="3600" b="1">
+              <a:rPr sz="3600" b="1" lang="en-IN">
                 <a:solidFill>
                   <a:srgbClr val="243B7A"/>
                 </a:solidFill>
@@ -4717,14 +4499,14 @@
           <a:noFill/>
         </p:spPr>
         <p:txBody>
-          <a:bodyPr wrap="square" anchor="t" lIns="45720" rIns="45720" tIns="27432" bIns="27432">
+          <a:bodyPr wrap="square" lIns="45720" tIns="27432" rIns="45720" bIns="27432" anchor="t">
             <a:spAutoFit/>
           </a:bodyPr>
           <a:lstStyle/>
           <a:p>
             <a:pPr algn="l"/>
             <a:r>
-              <a:rPr sz="2200" b="0" lang="hi-IN">
+              <a:rPr lang="hi-IN" sz="2200" b="0">
                 <a:solidFill>
                   <a:srgbClr val="1F2937"/>
                 </a:solidFill>
@@ -4739,9 +4521,11 @@
       </p:sp>
       <p:sp>
         <p:nvSpPr>
-          <p:cNvPr id="8" name="TextBox 7"/>
-          <p:cNvSpPr txBox="1"/>
-          <p:nvPr/>
+          <p:cNvPr id="8" name="Title"/>
+          <p:cNvSpPr/>
+          <p:nvPr>
+            <p:ph type="ctrTitle"/>
+          </p:nvPr>
         </p:nvSpPr>
         <p:spPr>
           <a:xfrm>
@@ -4754,14 +4538,14 @@
           <a:noFill/>
         </p:spPr>
         <p:txBody>
-          <a:bodyPr wrap="square" anchor="t" lIns="45720" rIns="45720" tIns="27432" bIns="27432">
+          <a:bodyPr wrap="square" lIns="45720" tIns="27432" rIns="45720" bIns="27432" anchor="t">
             <a:spAutoFit/>
           </a:bodyPr>
           <a:lstStyle/>
           <a:p>
             <a:pPr algn="l"/>
             <a:r>
-              <a:rPr sz="6000" b="1">
+              <a:rPr sz="6000" b="1" lang="en-IN">
                 <a:solidFill>
                   <a:srgbClr val="243B7A"/>
                 </a:solidFill>
@@ -4789,7 +4573,7 @@
           <a:noFill/>
         </p:spPr>
         <p:txBody>
-          <a:bodyPr wrap="square" anchor="t" lIns="45720" rIns="45720" tIns="27432" bIns="27432">
+          <a:bodyPr wrap="square" lIns="45720" tIns="27432" rIns="45720" bIns="27432" anchor="t">
             <a:spAutoFit/>
           </a:bodyPr>
           <a:lstStyle/>
@@ -4800,7 +4584,7 @@
               </a:spcAft>
             </a:pPr>
             <a:r>
-              <a:rPr sz="2400" b="0">
+              <a:rPr sz="2400" b="0" lang="en-IN">
                 <a:solidFill>
                   <a:srgbClr val="1F2937"/>
                 </a:solidFill>
@@ -4816,7 +4600,7 @@
               </a:spcAft>
             </a:pPr>
             <a:r>
-              <a:rPr sz="2400" b="0">
+              <a:rPr sz="2400" b="0" lang="en-IN">
                 <a:solidFill>
                   <a:srgbClr val="1F2937"/>
                 </a:solidFill>
@@ -4844,14 +4628,14 @@
           <a:noFill/>
         </p:spPr>
         <p:txBody>
-          <a:bodyPr wrap="square" anchor="t" lIns="45720" rIns="45720" tIns="27432" bIns="27432">
+          <a:bodyPr wrap="square" lIns="45720" tIns="27432" rIns="45720" bIns="27432" anchor="t">
             <a:spAutoFit/>
           </a:bodyPr>
           <a:lstStyle/>
           <a:p>
             <a:pPr algn="l"/>
             <a:r>
-              <a:rPr sz="1800" b="0">
+              <a:rPr sz="1800" b="0" lang="en-IN">
                 <a:solidFill>
                   <a:srgbClr val="243B7A"/>
                 </a:solidFill>
@@ -4871,7 +4655,7 @@
 </file>
 
 <file path=ppt/slides/slide10.xml><?xml version="1.0" encoding="utf-8"?>
-<p:sld xmlns:a="http://schemas.openxmlformats.org/drawingml/2006/main" xmlns:p="http://schemas.openxmlformats.org/presentationml/2006/main" xmlns:r="http://schemas.openxmlformats.org/officeDocument/2006/relationships">
+<p:sld xmlns:a="http://schemas.openxmlformats.org/drawingml/2006/main" xmlns:r="http://schemas.openxmlformats.org/officeDocument/2006/relationships" xmlns:p="http://schemas.openxmlformats.org/presentationml/2006/main">
   <p:cSld>
     <p:spTree>
       <p:nvGrpSpPr>
@@ -4879,7 +4663,14 @@
         <p:cNvGrpSpPr/>
         <p:nvPr/>
       </p:nvGrpSpPr>
-      <p:grpSpPr/>
+      <p:grpSpPr>
+        <a:xfrm>
+          <a:off x="0" y="0"/>
+          <a:ext cx="0" cy="0"/>
+          <a:chOff x="0" y="0"/>
+          <a:chExt cx="0" cy="0"/>
+        </a:xfrm>
+      </p:grpSpPr>
       <p:sp>
         <p:nvSpPr>
           <p:cNvPr id="2" name="Rectangle 1"/>
@@ -4920,6 +4711,7 @@
           <a:lstStyle/>
           <a:p>
             <a:pPr algn="ctr"/>
+            <a:endParaRPr/>
           </a:p>
         </p:txBody>
       </p:sp>
@@ -4963,14 +4755,17 @@
           <a:lstStyle/>
           <a:p>
             <a:pPr algn="ctr"/>
-          </a:p>
-        </p:txBody>
-      </p:sp>
-      <p:sp>
-        <p:nvSpPr>
-          <p:cNvPr id="4" name="TextBox 3"/>
-          <p:cNvSpPr txBox="1"/>
-          <p:nvPr/>
+            <a:endParaRPr/>
+          </a:p>
+        </p:txBody>
+      </p:sp>
+      <p:sp>
+        <p:nvSpPr>
+          <p:cNvPr id="4" name="Title"/>
+          <p:cNvSpPr/>
+          <p:nvPr>
+            <p:ph type="title"/>
+          </p:nvPr>
         </p:nvSpPr>
         <p:spPr>
           <a:xfrm>
@@ -4983,14 +4778,14 @@
           <a:noFill/>
         </p:spPr>
         <p:txBody>
-          <a:bodyPr wrap="square" anchor="ctr" lIns="45720" rIns="45720" tIns="27432" bIns="27432">
+          <a:bodyPr wrap="square" lIns="45720" tIns="27432" rIns="45720" bIns="27432" anchor="ctr">
             <a:spAutoFit/>
           </a:bodyPr>
           <a:lstStyle/>
           <a:p>
             <a:pPr algn="l"/>
             <a:r>
-              <a:rPr sz="3000" b="1">
+              <a:rPr sz="3000" b="1" lang="en-IN">
                 <a:solidFill>
                   <a:srgbClr val="243B7A"/>
                 </a:solidFill>
@@ -5010,7 +4805,7 @@
           <p:nvPr/>
         </p:nvPicPr>
         <p:blipFill>
-          <a:blip r:embed="rId2"/>
+          <a:blip r:embed="rId3"/>
           <a:stretch>
             <a:fillRect/>
           </a:stretch>
@@ -5042,14 +4837,14 @@
           <a:noFill/>
         </p:spPr>
         <p:txBody>
-          <a:bodyPr wrap="square" anchor="t" lIns="45720" rIns="45720" tIns="27432" bIns="27432">
+          <a:bodyPr wrap="square" lIns="45720" tIns="27432" rIns="45720" bIns="27432" anchor="t">
             <a:spAutoFit/>
           </a:bodyPr>
           <a:lstStyle/>
           <a:p>
             <a:pPr algn="l"/>
             <a:r>
-              <a:rPr sz="1000" b="0">
+              <a:rPr sz="1000" b="0" lang="en-IN">
                 <a:solidFill>
                   <a:srgbClr val="4B5563"/>
                 </a:solidFill>
@@ -5077,14 +4872,14 @@
           <a:noFill/>
         </p:spPr>
         <p:txBody>
-          <a:bodyPr wrap="square" anchor="t" lIns="45720" rIns="45720" tIns="27432" bIns="27432">
+          <a:bodyPr wrap="square" lIns="45720" tIns="27432" rIns="45720" bIns="27432" anchor="t">
             <a:spAutoFit/>
           </a:bodyPr>
           <a:lstStyle/>
           <a:p>
             <a:pPr algn="r"/>
             <a:r>
-              <a:rPr sz="1000" b="0">
+              <a:rPr sz="1000" b="0" lang="en-IN">
                 <a:solidFill>
                   <a:srgbClr val="4B5563"/>
                 </a:solidFill>
@@ -5140,6 +4935,7 @@
           <a:lstStyle/>
           <a:p>
             <a:pPr algn="ctr"/>
+            <a:endParaRPr/>
           </a:p>
         </p:txBody>
       </p:sp>
@@ -5184,6 +4980,7 @@
           <a:lstStyle/>
           <a:p>
             <a:pPr algn="ctr"/>
+            <a:endParaRPr/>
           </a:p>
         </p:txBody>
       </p:sp>
@@ -5196,7 +4993,7 @@
           <p:nvPr/>
         </p:nvPicPr>
         <p:blipFill>
-          <a:blip r:embed="rId3"/>
+          <a:blip r:embed="rId4"/>
           <a:stretch>
             <a:fillRect/>
           </a:stretch>
@@ -5228,14 +5025,14 @@
           <a:noFill/>
         </p:spPr>
         <p:txBody>
-          <a:bodyPr wrap="square" anchor="ctr" lIns="45720" rIns="45720" tIns="27432" bIns="27432">
+          <a:bodyPr wrap="square" lIns="45720" tIns="27432" rIns="45720" bIns="27432" anchor="ctr">
             <a:spAutoFit/>
           </a:bodyPr>
           <a:lstStyle/>
           <a:p>
             <a:pPr algn="l"/>
             <a:r>
-              <a:rPr sz="2100" b="1">
+              <a:rPr sz="2100" b="1" lang="en-IN">
                 <a:solidFill>
                   <a:srgbClr val="243B7A"/>
                 </a:solidFill>
@@ -5263,14 +5060,14 @@
           <a:noFill/>
         </p:spPr>
         <p:txBody>
-          <a:bodyPr wrap="square" anchor="ctr" lIns="45720" rIns="45720" tIns="27432" bIns="27432">
+          <a:bodyPr wrap="square" lIns="45720" tIns="27432" rIns="45720" bIns="27432" anchor="ctr">
             <a:spAutoFit/>
           </a:bodyPr>
           <a:lstStyle/>
           <a:p>
             <a:pPr algn="l"/>
             <a:r>
-              <a:rPr sz="1600" b="0">
+              <a:rPr sz="1600" b="0" lang="en-IN">
                 <a:solidFill>
                   <a:srgbClr val="1F2937"/>
                 </a:solidFill>
@@ -5326,6 +5123,7 @@
           <a:lstStyle/>
           <a:p>
             <a:pPr algn="ctr"/>
+            <a:endParaRPr/>
           </a:p>
         </p:txBody>
       </p:sp>
@@ -5370,6 +5168,7 @@
           <a:lstStyle/>
           <a:p>
             <a:pPr algn="ctr"/>
+            <a:endParaRPr/>
           </a:p>
         </p:txBody>
       </p:sp>
@@ -5382,7 +5181,7 @@
           <p:nvPr/>
         </p:nvPicPr>
         <p:blipFill>
-          <a:blip r:embed="rId4"/>
+          <a:blip r:embed="rId5"/>
           <a:stretch>
             <a:fillRect/>
           </a:stretch>
@@ -5414,14 +5213,14 @@
           <a:noFill/>
         </p:spPr>
         <p:txBody>
-          <a:bodyPr wrap="square" anchor="ctr" lIns="45720" rIns="45720" tIns="27432" bIns="27432">
+          <a:bodyPr wrap="square" lIns="45720" tIns="27432" rIns="45720" bIns="27432" anchor="ctr">
             <a:spAutoFit/>
           </a:bodyPr>
           <a:lstStyle/>
           <a:p>
             <a:pPr algn="l"/>
             <a:r>
-              <a:rPr sz="2100" b="1">
+              <a:rPr sz="2100" b="1" lang="en-IN">
                 <a:solidFill>
                   <a:srgbClr val="243B7A"/>
                 </a:solidFill>
@@ -5449,14 +5248,14 @@
           <a:noFill/>
         </p:spPr>
         <p:txBody>
-          <a:bodyPr wrap="square" anchor="ctr" lIns="45720" rIns="45720" tIns="27432" bIns="27432">
+          <a:bodyPr wrap="square" lIns="45720" tIns="27432" rIns="45720" bIns="27432" anchor="ctr">
             <a:spAutoFit/>
           </a:bodyPr>
           <a:lstStyle/>
           <a:p>
             <a:pPr algn="l"/>
             <a:r>
-              <a:rPr sz="1600" b="0">
+              <a:rPr sz="1600" b="0" lang="en-IN">
                 <a:solidFill>
                   <a:srgbClr val="1F2937"/>
                 </a:solidFill>
@@ -5512,6 +5311,7 @@
           <a:lstStyle/>
           <a:p>
             <a:pPr algn="ctr"/>
+            <a:endParaRPr/>
           </a:p>
         </p:txBody>
       </p:sp>
@@ -5556,6 +5356,7 @@
           <a:lstStyle/>
           <a:p>
             <a:pPr algn="ctr"/>
+            <a:endParaRPr/>
           </a:p>
         </p:txBody>
       </p:sp>
@@ -5568,7 +5369,7 @@
           <p:nvPr/>
         </p:nvPicPr>
         <p:blipFill>
-          <a:blip r:embed="rId5"/>
+          <a:blip r:embed="rId6"/>
           <a:stretch>
             <a:fillRect/>
           </a:stretch>
@@ -5600,14 +5401,14 @@
           <a:noFill/>
         </p:spPr>
         <p:txBody>
-          <a:bodyPr wrap="square" anchor="ctr" lIns="45720" rIns="45720" tIns="27432" bIns="27432">
+          <a:bodyPr wrap="square" lIns="45720" tIns="27432" rIns="45720" bIns="27432" anchor="ctr">
             <a:spAutoFit/>
           </a:bodyPr>
           <a:lstStyle/>
           <a:p>
             <a:pPr algn="l"/>
             <a:r>
-              <a:rPr sz="2100" b="1">
+              <a:rPr sz="2100" b="1" lang="en-IN">
                 <a:solidFill>
                   <a:srgbClr val="243B7A"/>
                 </a:solidFill>
@@ -5635,14 +5436,14 @@
           <a:noFill/>
         </p:spPr>
         <p:txBody>
-          <a:bodyPr wrap="square" anchor="ctr" lIns="45720" rIns="45720" tIns="27432" bIns="27432">
+          <a:bodyPr wrap="square" lIns="45720" tIns="27432" rIns="45720" bIns="27432" anchor="ctr">
             <a:spAutoFit/>
           </a:bodyPr>
           <a:lstStyle/>
           <a:p>
             <a:pPr algn="l"/>
             <a:r>
-              <a:rPr sz="1600" b="0">
+              <a:rPr sz="1600" b="0" lang="en-IN">
                 <a:solidFill>
                   <a:srgbClr val="1F2937"/>
                 </a:solidFill>
@@ -5698,6 +5499,7 @@
           <a:lstStyle/>
           <a:p>
             <a:pPr algn="ctr"/>
+            <a:endParaRPr/>
           </a:p>
         </p:txBody>
       </p:sp>
@@ -5742,6 +5544,7 @@
           <a:lstStyle/>
           <a:p>
             <a:pPr algn="ctr"/>
+            <a:endParaRPr/>
           </a:p>
         </p:txBody>
       </p:sp>
@@ -5754,7 +5557,7 @@
           <p:nvPr/>
         </p:nvPicPr>
         <p:blipFill>
-          <a:blip r:embed="rId6"/>
+          <a:blip r:embed="rId7"/>
           <a:stretch>
             <a:fillRect/>
           </a:stretch>
@@ -5786,14 +5589,14 @@
           <a:noFill/>
         </p:spPr>
         <p:txBody>
-          <a:bodyPr wrap="square" anchor="ctr" lIns="45720" rIns="45720" tIns="27432" bIns="27432">
+          <a:bodyPr wrap="square" lIns="45720" tIns="27432" rIns="45720" bIns="27432" anchor="ctr">
             <a:spAutoFit/>
           </a:bodyPr>
           <a:lstStyle/>
           <a:p>
             <a:pPr algn="l"/>
             <a:r>
-              <a:rPr sz="2100" b="1">
+              <a:rPr sz="2100" b="1" lang="en-IN">
                 <a:solidFill>
                   <a:srgbClr val="243B7A"/>
                 </a:solidFill>
@@ -5821,14 +5624,14 @@
           <a:noFill/>
         </p:spPr>
         <p:txBody>
-          <a:bodyPr wrap="square" anchor="ctr" lIns="45720" rIns="45720" tIns="27432" bIns="27432">
+          <a:bodyPr wrap="square" lIns="45720" tIns="27432" rIns="45720" bIns="27432" anchor="ctr">
             <a:spAutoFit/>
           </a:bodyPr>
           <a:lstStyle/>
           <a:p>
             <a:pPr algn="l"/>
             <a:r>
-              <a:rPr sz="1600" b="0">
+              <a:rPr sz="1600" b="0" lang="en-IN">
                 <a:solidFill>
                   <a:srgbClr val="1F2937"/>
                 </a:solidFill>
@@ -5884,6 +5687,7 @@
           <a:lstStyle/>
           <a:p>
             <a:pPr algn="ctr"/>
+            <a:endParaRPr/>
           </a:p>
         </p:txBody>
       </p:sp>
@@ -5928,6 +5732,7 @@
           <a:lstStyle/>
           <a:p>
             <a:pPr algn="ctr"/>
+            <a:endParaRPr/>
           </a:p>
         </p:txBody>
       </p:sp>
@@ -5940,7 +5745,7 @@
           <p:nvPr/>
         </p:nvPicPr>
         <p:blipFill>
-          <a:blip r:embed="rId7"/>
+          <a:blip r:embed="rId8"/>
           <a:stretch>
             <a:fillRect/>
           </a:stretch>
@@ -5972,14 +5777,14 @@
           <a:noFill/>
         </p:spPr>
         <p:txBody>
-          <a:bodyPr wrap="square" anchor="ctr" lIns="45720" rIns="45720" tIns="27432" bIns="27432">
+          <a:bodyPr wrap="square" lIns="45720" tIns="27432" rIns="45720" bIns="27432" anchor="ctr">
             <a:spAutoFit/>
           </a:bodyPr>
           <a:lstStyle/>
           <a:p>
             <a:pPr algn="l"/>
             <a:r>
-              <a:rPr sz="2100" b="1">
+              <a:rPr sz="2100" b="1" lang="en-IN">
                 <a:solidFill>
                   <a:srgbClr val="243B7A"/>
                 </a:solidFill>
@@ -6007,14 +5812,14 @@
           <a:noFill/>
         </p:spPr>
         <p:txBody>
-          <a:bodyPr wrap="square" anchor="ctr" lIns="45720" rIns="45720" tIns="27432" bIns="27432">
+          <a:bodyPr wrap="square" lIns="45720" tIns="27432" rIns="45720" bIns="27432" anchor="ctr">
             <a:spAutoFit/>
           </a:bodyPr>
           <a:lstStyle/>
           <a:p>
             <a:pPr algn="l"/>
             <a:r>
-              <a:rPr sz="1600" b="0">
+              <a:rPr sz="1600" b="0" lang="en-IN">
                 <a:solidFill>
                   <a:srgbClr val="1F2937"/>
                 </a:solidFill>
@@ -6034,7 +5839,7 @@
 </file>
 
 <file path=ppt/slides/slide11.xml><?xml version="1.0" encoding="utf-8"?>
-<p:sld xmlns:a="http://schemas.openxmlformats.org/drawingml/2006/main" xmlns:p="http://schemas.openxmlformats.org/presentationml/2006/main" xmlns:r="http://schemas.openxmlformats.org/officeDocument/2006/relationships">
+<p:sld xmlns:a="http://schemas.openxmlformats.org/drawingml/2006/main" xmlns:r="http://schemas.openxmlformats.org/officeDocument/2006/relationships" xmlns:p="http://schemas.openxmlformats.org/presentationml/2006/main">
   <p:cSld>
     <p:spTree>
       <p:nvGrpSpPr>
@@ -6042,7 +5847,14 @@
         <p:cNvGrpSpPr/>
         <p:nvPr/>
       </p:nvGrpSpPr>
-      <p:grpSpPr/>
+      <p:grpSpPr>
+        <a:xfrm>
+          <a:off x="0" y="0"/>
+          <a:ext cx="0" cy="0"/>
+          <a:chOff x="0" y="0"/>
+          <a:chExt cx="0" cy="0"/>
+        </a:xfrm>
+      </p:grpSpPr>
       <p:sp>
         <p:nvSpPr>
           <p:cNvPr id="2" name="Rectangle 1"/>
@@ -6083,6 +5895,7 @@
           <a:lstStyle/>
           <a:p>
             <a:pPr algn="ctr"/>
+            <a:endParaRPr/>
           </a:p>
         </p:txBody>
       </p:sp>
@@ -6126,14 +5939,17 @@
           <a:lstStyle/>
           <a:p>
             <a:pPr algn="ctr"/>
-          </a:p>
-        </p:txBody>
-      </p:sp>
-      <p:sp>
-        <p:nvSpPr>
-          <p:cNvPr id="4" name="TextBox 3"/>
-          <p:cNvSpPr txBox="1"/>
-          <p:nvPr/>
+            <a:endParaRPr/>
+          </a:p>
+        </p:txBody>
+      </p:sp>
+      <p:sp>
+        <p:nvSpPr>
+          <p:cNvPr id="4" name="Title"/>
+          <p:cNvSpPr/>
+          <p:nvPr>
+            <p:ph type="title"/>
+          </p:nvPr>
         </p:nvSpPr>
         <p:spPr>
           <a:xfrm>
@@ -6146,14 +5962,14 @@
           <a:noFill/>
         </p:spPr>
         <p:txBody>
-          <a:bodyPr wrap="square" anchor="ctr" lIns="45720" rIns="45720" tIns="27432" bIns="27432">
+          <a:bodyPr wrap="square" lIns="45720" tIns="27432" rIns="45720" bIns="27432" anchor="ctr">
             <a:spAutoFit/>
           </a:bodyPr>
           <a:lstStyle/>
           <a:p>
             <a:pPr algn="l"/>
             <a:r>
-              <a:rPr sz="3000" b="1">
+              <a:rPr sz="3000" b="1" lang="en-IN">
                 <a:solidFill>
                   <a:srgbClr val="243B7A"/>
                 </a:solidFill>
@@ -6173,7 +5989,7 @@
           <p:nvPr/>
         </p:nvPicPr>
         <p:blipFill>
-          <a:blip r:embed="rId2"/>
+          <a:blip r:embed="rId3"/>
           <a:stretch>
             <a:fillRect/>
           </a:stretch>
@@ -6205,14 +6021,14 @@
           <a:noFill/>
         </p:spPr>
         <p:txBody>
-          <a:bodyPr wrap="square" anchor="t" lIns="45720" rIns="45720" tIns="27432" bIns="27432">
+          <a:bodyPr wrap="square" lIns="45720" tIns="27432" rIns="45720" bIns="27432" anchor="t">
             <a:spAutoFit/>
           </a:bodyPr>
           <a:lstStyle/>
           <a:p>
             <a:pPr algn="l"/>
             <a:r>
-              <a:rPr sz="1000" b="0">
+              <a:rPr sz="1000" b="0" lang="en-IN">
                 <a:solidFill>
                   <a:srgbClr val="4B5563"/>
                 </a:solidFill>
@@ -6240,14 +6056,14 @@
           <a:noFill/>
         </p:spPr>
         <p:txBody>
-          <a:bodyPr wrap="square" anchor="t" lIns="45720" rIns="45720" tIns="27432" bIns="27432">
+          <a:bodyPr wrap="square" lIns="45720" tIns="27432" rIns="45720" bIns="27432" anchor="t">
             <a:spAutoFit/>
           </a:bodyPr>
           <a:lstStyle/>
           <a:p>
             <a:pPr algn="r"/>
             <a:r>
-              <a:rPr sz="1000" b="0">
+              <a:rPr sz="1000" b="0" lang="en-IN">
                 <a:solidFill>
                   <a:srgbClr val="4B5563"/>
                 </a:solidFill>
@@ -6303,6 +6119,7 @@
           <a:lstStyle/>
           <a:p>
             <a:pPr algn="ctr"/>
+            <a:endParaRPr/>
           </a:p>
         </p:txBody>
       </p:sp>
@@ -6317,7 +6134,7 @@
           <p:nvPr/>
         </p:nvPicPr>
         <p:blipFill>
-          <a:blip r:embed="rId3"/>
+          <a:blip r:embed="rId5"/>
           <a:stretch>
             <a:fillRect/>
           </a:stretch>
@@ -6377,6 +6194,7 @@
           <a:lstStyle/>
           <a:p>
             <a:pPr algn="ctr"/>
+            <a:endParaRPr/>
           </a:p>
         </p:txBody>
       </p:sp>
@@ -6391,7 +6209,7 @@
           <p:nvPr/>
         </p:nvPicPr>
         <p:blipFill>
-          <a:blip r:embed="rId5"/>
+          <a:blip r:embed="rId7"/>
           <a:stretch>
             <a:fillRect/>
           </a:stretch>
@@ -6423,14 +6241,14 @@
           <a:noFill/>
         </p:spPr>
         <p:txBody>
-          <a:bodyPr wrap="square" anchor="t" lIns="45720" rIns="45720" tIns="27432" bIns="27432">
+          <a:bodyPr wrap="square" lIns="45720" tIns="27432" rIns="45720" bIns="27432" anchor="t">
             <a:spAutoFit/>
           </a:bodyPr>
           <a:lstStyle/>
           <a:p>
             <a:pPr algn="l"/>
             <a:r>
-              <a:rPr sz="1600" b="0">
+              <a:rPr sz="1600" b="0" lang="en-IN">
                 <a:solidFill>
                   <a:srgbClr val="1F2937"/>
                 </a:solidFill>
@@ -6458,14 +6276,14 @@
           <a:noFill/>
         </p:spPr>
         <p:txBody>
-          <a:bodyPr wrap="square" anchor="t" lIns="45720" rIns="45720" tIns="27432" bIns="27432">
+          <a:bodyPr wrap="square" lIns="45720" tIns="27432" rIns="45720" bIns="27432" anchor="t">
             <a:spAutoFit/>
           </a:bodyPr>
           <a:lstStyle/>
           <a:p>
             <a:pPr algn="l"/>
             <a:r>
-              <a:rPr sz="1600" b="0">
+              <a:rPr sz="1600" b="0" lang="en-IN">
                 <a:solidFill>
                   <a:srgbClr val="1F2937"/>
                 </a:solidFill>
@@ -6485,7 +6303,7 @@
 </file>
 
 <file path=ppt/slides/slide12.xml><?xml version="1.0" encoding="utf-8"?>
-<p:sld xmlns:a="http://schemas.openxmlformats.org/drawingml/2006/main" xmlns:p="http://schemas.openxmlformats.org/presentationml/2006/main" xmlns:r="http://schemas.openxmlformats.org/officeDocument/2006/relationships">
+<p:sld xmlns:a="http://schemas.openxmlformats.org/drawingml/2006/main" xmlns:r="http://schemas.openxmlformats.org/officeDocument/2006/relationships" xmlns:p="http://schemas.openxmlformats.org/presentationml/2006/main">
   <p:cSld>
     <p:spTree>
       <p:nvGrpSpPr>
@@ -6493,7 +6311,14 @@
         <p:cNvGrpSpPr/>
         <p:nvPr/>
       </p:nvGrpSpPr>
-      <p:grpSpPr/>
+      <p:grpSpPr>
+        <a:xfrm>
+          <a:off x="0" y="0"/>
+          <a:ext cx="0" cy="0"/>
+          <a:chOff x="0" y="0"/>
+          <a:chExt cx="0" cy="0"/>
+        </a:xfrm>
+      </p:grpSpPr>
       <p:sp>
         <p:nvSpPr>
           <p:cNvPr id="2" name="Rectangle 1"/>
@@ -6534,6 +6359,7 @@
           <a:lstStyle/>
           <a:p>
             <a:pPr algn="ctr"/>
+            <a:endParaRPr/>
           </a:p>
         </p:txBody>
       </p:sp>
@@ -6577,14 +6403,17 @@
           <a:lstStyle/>
           <a:p>
             <a:pPr algn="ctr"/>
-          </a:p>
-        </p:txBody>
-      </p:sp>
-      <p:sp>
-        <p:nvSpPr>
-          <p:cNvPr id="4" name="TextBox 3"/>
-          <p:cNvSpPr txBox="1"/>
-          <p:nvPr/>
+            <a:endParaRPr/>
+          </a:p>
+        </p:txBody>
+      </p:sp>
+      <p:sp>
+        <p:nvSpPr>
+          <p:cNvPr id="4" name="Title"/>
+          <p:cNvSpPr/>
+          <p:nvPr>
+            <p:ph type="title"/>
+          </p:nvPr>
         </p:nvSpPr>
         <p:spPr>
           <a:xfrm>
@@ -6597,14 +6426,14 @@
           <a:noFill/>
         </p:spPr>
         <p:txBody>
-          <a:bodyPr wrap="square" anchor="ctr" lIns="45720" rIns="45720" tIns="27432" bIns="27432">
+          <a:bodyPr wrap="square" lIns="45720" tIns="27432" rIns="45720" bIns="27432" anchor="ctr">
             <a:spAutoFit/>
           </a:bodyPr>
           <a:lstStyle/>
           <a:p>
             <a:pPr algn="l"/>
             <a:r>
-              <a:rPr sz="3000" b="1">
+              <a:rPr sz="3000" b="1" lang="en-IN">
                 <a:solidFill>
                   <a:srgbClr val="243B7A"/>
                 </a:solidFill>
@@ -6624,7 +6453,7 @@
           <p:nvPr/>
         </p:nvPicPr>
         <p:blipFill>
-          <a:blip r:embed="rId2"/>
+          <a:blip r:embed="rId3"/>
           <a:stretch>
             <a:fillRect/>
           </a:stretch>
@@ -6656,14 +6485,14 @@
           <a:noFill/>
         </p:spPr>
         <p:txBody>
-          <a:bodyPr wrap="square" anchor="t" lIns="45720" rIns="45720" tIns="27432" bIns="27432">
+          <a:bodyPr wrap="square" lIns="45720" tIns="27432" rIns="45720" bIns="27432" anchor="t">
             <a:spAutoFit/>
           </a:bodyPr>
           <a:lstStyle/>
           <a:p>
             <a:pPr algn="l"/>
             <a:r>
-              <a:rPr sz="1000" b="0">
+              <a:rPr sz="1000" b="0" lang="en-IN">
                 <a:solidFill>
                   <a:srgbClr val="4B5563"/>
                 </a:solidFill>
@@ -6691,14 +6520,14 @@
           <a:noFill/>
         </p:spPr>
         <p:txBody>
-          <a:bodyPr wrap="square" anchor="t" lIns="45720" rIns="45720" tIns="27432" bIns="27432">
+          <a:bodyPr wrap="square" lIns="45720" tIns="27432" rIns="45720" bIns="27432" anchor="t">
             <a:spAutoFit/>
           </a:bodyPr>
           <a:lstStyle/>
           <a:p>
             <a:pPr algn="r"/>
             <a:r>
-              <a:rPr sz="1000" b="0">
+              <a:rPr sz="1000" b="0" lang="en-IN">
                 <a:solidFill>
                   <a:srgbClr val="4B5563"/>
                 </a:solidFill>
@@ -6754,6 +6583,7 @@
           <a:lstStyle/>
           <a:p>
             <a:pPr algn="ctr"/>
+            <a:endParaRPr/>
           </a:p>
         </p:txBody>
       </p:sp>
@@ -6798,6 +6628,7 @@
           <a:lstStyle/>
           <a:p>
             <a:pPr algn="ctr"/>
+            <a:endParaRPr/>
           </a:p>
         </p:txBody>
       </p:sp>
@@ -6810,7 +6641,7 @@
           <p:nvPr/>
         </p:nvPicPr>
         <p:blipFill>
-          <a:blip r:embed="rId3"/>
+          <a:blip r:embed="rId4"/>
           <a:stretch>
             <a:fillRect/>
           </a:stretch>
@@ -6842,14 +6673,14 @@
           <a:noFill/>
         </p:spPr>
         <p:txBody>
-          <a:bodyPr wrap="square" anchor="t" lIns="45720" rIns="45720" tIns="27432" bIns="27432">
+          <a:bodyPr wrap="square" lIns="45720" tIns="27432" rIns="45720" bIns="27432" anchor="t">
             <a:spAutoFit/>
           </a:bodyPr>
           <a:lstStyle/>
           <a:p>
             <a:pPr algn="ctr"/>
             <a:r>
-              <a:rPr sz="1700" b="1">
+              <a:rPr sz="1700" b="1" lang="en-IN">
                 <a:solidFill>
                   <a:srgbClr val="243B7A"/>
                 </a:solidFill>
@@ -6877,14 +6708,14 @@
           <a:noFill/>
         </p:spPr>
         <p:txBody>
-          <a:bodyPr wrap="square" anchor="t" lIns="45720" rIns="45720" tIns="27432" bIns="27432">
+          <a:bodyPr wrap="square" lIns="45720" tIns="27432" rIns="45720" bIns="27432" anchor="t">
             <a:spAutoFit/>
           </a:bodyPr>
           <a:lstStyle/>
           <a:p>
             <a:pPr algn="ctr"/>
             <a:r>
-              <a:rPr sz="1400" b="0">
+              <a:rPr sz="1400" b="0" lang="en-IN">
                 <a:solidFill>
                   <a:srgbClr val="1F2937"/>
                 </a:solidFill>
@@ -6940,6 +6771,7 @@
           <a:lstStyle/>
           <a:p>
             <a:pPr algn="ctr"/>
+            <a:endParaRPr/>
           </a:p>
         </p:txBody>
       </p:sp>
@@ -6984,6 +6816,7 @@
           <a:lstStyle/>
           <a:p>
             <a:pPr algn="ctr"/>
+            <a:endParaRPr/>
           </a:p>
         </p:txBody>
       </p:sp>
@@ -6996,7 +6829,7 @@
           <p:nvPr/>
         </p:nvPicPr>
         <p:blipFill>
-          <a:blip r:embed="rId4"/>
+          <a:blip r:embed="rId5"/>
           <a:stretch>
             <a:fillRect/>
           </a:stretch>
@@ -7028,14 +6861,14 @@
           <a:noFill/>
         </p:spPr>
         <p:txBody>
-          <a:bodyPr wrap="square" anchor="t" lIns="45720" rIns="45720" tIns="27432" bIns="27432">
+          <a:bodyPr wrap="square" lIns="45720" tIns="27432" rIns="45720" bIns="27432" anchor="t">
             <a:spAutoFit/>
           </a:bodyPr>
           <a:lstStyle/>
           <a:p>
             <a:pPr algn="ctr"/>
             <a:r>
-              <a:rPr sz="1700" b="1">
+              <a:rPr sz="1700" b="1" lang="en-IN">
                 <a:solidFill>
                   <a:srgbClr val="243B7A"/>
                 </a:solidFill>
@@ -7063,14 +6896,14 @@
           <a:noFill/>
         </p:spPr>
         <p:txBody>
-          <a:bodyPr wrap="square" anchor="t" lIns="45720" rIns="45720" tIns="27432" bIns="27432">
+          <a:bodyPr wrap="square" lIns="45720" tIns="27432" rIns="45720" bIns="27432" anchor="t">
             <a:spAutoFit/>
           </a:bodyPr>
           <a:lstStyle/>
           <a:p>
             <a:pPr algn="ctr"/>
             <a:r>
-              <a:rPr sz="1400" b="0">
+              <a:rPr sz="1400" b="0" lang="en-IN">
                 <a:solidFill>
                   <a:srgbClr val="1F2937"/>
                 </a:solidFill>
@@ -7126,6 +6959,7 @@
           <a:lstStyle/>
           <a:p>
             <a:pPr algn="ctr"/>
+            <a:endParaRPr/>
           </a:p>
         </p:txBody>
       </p:sp>
@@ -7170,6 +7004,7 @@
           <a:lstStyle/>
           <a:p>
             <a:pPr algn="ctr"/>
+            <a:endParaRPr/>
           </a:p>
         </p:txBody>
       </p:sp>
@@ -7182,7 +7017,7 @@
           <p:nvPr/>
         </p:nvPicPr>
         <p:blipFill>
-          <a:blip r:embed="rId5"/>
+          <a:blip r:embed="rId6"/>
           <a:stretch>
             <a:fillRect/>
           </a:stretch>
@@ -7214,14 +7049,14 @@
           <a:noFill/>
         </p:spPr>
         <p:txBody>
-          <a:bodyPr wrap="square" anchor="t" lIns="45720" rIns="45720" tIns="27432" bIns="27432">
+          <a:bodyPr wrap="square" lIns="45720" tIns="27432" rIns="45720" bIns="27432" anchor="t">
             <a:spAutoFit/>
           </a:bodyPr>
           <a:lstStyle/>
           <a:p>
             <a:pPr algn="ctr"/>
             <a:r>
-              <a:rPr sz="1700" b="1">
+              <a:rPr sz="1700" b="1" lang="en-IN">
                 <a:solidFill>
                   <a:srgbClr val="243B7A"/>
                 </a:solidFill>
@@ -7249,14 +7084,14 @@
           <a:noFill/>
         </p:spPr>
         <p:txBody>
-          <a:bodyPr wrap="square" anchor="t" lIns="45720" rIns="45720" tIns="27432" bIns="27432">
+          <a:bodyPr wrap="square" lIns="45720" tIns="27432" rIns="45720" bIns="27432" anchor="t">
             <a:spAutoFit/>
           </a:bodyPr>
           <a:lstStyle/>
           <a:p>
             <a:pPr algn="ctr"/>
             <a:r>
-              <a:rPr sz="1400" b="0">
+              <a:rPr sz="1400" b="0" lang="en-IN">
                 <a:solidFill>
                   <a:srgbClr val="1F2937"/>
                 </a:solidFill>
@@ -7312,6 +7147,7 @@
           <a:lstStyle/>
           <a:p>
             <a:pPr algn="ctr"/>
+            <a:endParaRPr/>
           </a:p>
         </p:txBody>
       </p:sp>
@@ -7356,6 +7192,7 @@
           <a:lstStyle/>
           <a:p>
             <a:pPr algn="ctr"/>
+            <a:endParaRPr/>
           </a:p>
         </p:txBody>
       </p:sp>
@@ -7368,7 +7205,7 @@
           <p:nvPr/>
         </p:nvPicPr>
         <p:blipFill>
-          <a:blip r:embed="rId6"/>
+          <a:blip r:embed="rId7"/>
           <a:stretch>
             <a:fillRect/>
           </a:stretch>
@@ -7400,14 +7237,14 @@
           <a:noFill/>
         </p:spPr>
         <p:txBody>
-          <a:bodyPr wrap="square" anchor="t" lIns="45720" rIns="45720" tIns="27432" bIns="27432">
+          <a:bodyPr wrap="square" lIns="45720" tIns="27432" rIns="45720" bIns="27432" anchor="t">
             <a:spAutoFit/>
           </a:bodyPr>
           <a:lstStyle/>
           <a:p>
             <a:pPr algn="ctr"/>
             <a:r>
-              <a:rPr sz="1700" b="1">
+              <a:rPr sz="1700" b="1" lang="en-IN">
                 <a:solidFill>
                   <a:srgbClr val="243B7A"/>
                 </a:solidFill>
@@ -7435,14 +7272,14 @@
           <a:noFill/>
         </p:spPr>
         <p:txBody>
-          <a:bodyPr wrap="square" anchor="t" lIns="45720" rIns="45720" tIns="27432" bIns="27432">
+          <a:bodyPr wrap="square" lIns="45720" tIns="27432" rIns="45720" bIns="27432" anchor="t">
             <a:spAutoFit/>
           </a:bodyPr>
           <a:lstStyle/>
           <a:p>
             <a:pPr algn="ctr"/>
             <a:r>
-              <a:rPr sz="1400" b="0">
+              <a:rPr sz="1400" b="0" lang="en-IN">
                 <a:solidFill>
                   <a:srgbClr val="1F2937"/>
                 </a:solidFill>
@@ -7498,6 +7335,7 @@
           <a:lstStyle/>
           <a:p>
             <a:pPr algn="ctr"/>
+            <a:endParaRPr/>
           </a:p>
         </p:txBody>
       </p:sp>
@@ -7542,6 +7380,7 @@
           <a:lstStyle/>
           <a:p>
             <a:pPr algn="ctr"/>
+            <a:endParaRPr/>
           </a:p>
         </p:txBody>
       </p:sp>
@@ -7554,7 +7393,7 @@
           <p:nvPr/>
         </p:nvPicPr>
         <p:blipFill>
-          <a:blip r:embed="rId7"/>
+          <a:blip r:embed="rId8"/>
           <a:stretch>
             <a:fillRect/>
           </a:stretch>
@@ -7586,14 +7425,14 @@
           <a:noFill/>
         </p:spPr>
         <p:txBody>
-          <a:bodyPr wrap="square" anchor="t" lIns="45720" rIns="45720" tIns="27432" bIns="27432">
+          <a:bodyPr wrap="square" lIns="45720" tIns="27432" rIns="45720" bIns="27432" anchor="t">
             <a:spAutoFit/>
           </a:bodyPr>
           <a:lstStyle/>
           <a:p>
             <a:pPr algn="ctr"/>
             <a:r>
-              <a:rPr sz="1700" b="1">
+              <a:rPr sz="1700" b="1" lang="en-IN">
                 <a:solidFill>
                   <a:srgbClr val="243B7A"/>
                 </a:solidFill>
@@ -7621,14 +7460,14 @@
           <a:noFill/>
         </p:spPr>
         <p:txBody>
-          <a:bodyPr wrap="square" anchor="t" lIns="45720" rIns="45720" tIns="27432" bIns="27432">
+          <a:bodyPr wrap="square" lIns="45720" tIns="27432" rIns="45720" bIns="27432" anchor="t">
             <a:spAutoFit/>
           </a:bodyPr>
           <a:lstStyle/>
           <a:p>
             <a:pPr algn="ctr"/>
             <a:r>
-              <a:rPr sz="1400" b="0">
+              <a:rPr sz="1400" b="0" lang="en-IN">
                 <a:solidFill>
                   <a:srgbClr val="1F2937"/>
                 </a:solidFill>
@@ -7656,7 +7495,7 @@
           <a:noFill/>
         </p:spPr>
         <p:txBody>
-          <a:bodyPr wrap="square" anchor="t" lIns="45720" rIns="45720" tIns="27432" bIns="27432">
+          <a:bodyPr wrap="square" lIns="45720" tIns="27432" rIns="45720" bIns="27432" anchor="t">
             <a:spAutoFit/>
           </a:bodyPr>
           <a:lstStyle/>
@@ -7667,7 +7506,7 @@
               </a:spcAft>
             </a:pPr>
             <a:r>
-              <a:rPr sz="1700" b="0">
+              <a:rPr sz="1700" b="0" lang="en-IN">
                 <a:solidFill>
                   <a:srgbClr val="1F2937"/>
                 </a:solidFill>
@@ -7683,7 +7522,7 @@
               </a:spcAft>
             </a:pPr>
             <a:r>
-              <a:rPr sz="1700" b="0">
+              <a:rPr sz="1700" b="0" lang="en-IN">
                 <a:solidFill>
                   <a:srgbClr val="1F2937"/>
                 </a:solidFill>
@@ -7703,7 +7542,7 @@
 </file>
 
 <file path=ppt/slides/slide13.xml><?xml version="1.0" encoding="utf-8"?>
-<p:sld xmlns:a="http://schemas.openxmlformats.org/drawingml/2006/main" xmlns:p="http://schemas.openxmlformats.org/presentationml/2006/main" xmlns:r="http://schemas.openxmlformats.org/officeDocument/2006/relationships">
+<p:sld xmlns:a="http://schemas.openxmlformats.org/drawingml/2006/main" xmlns:r="http://schemas.openxmlformats.org/officeDocument/2006/relationships" xmlns:p="http://schemas.openxmlformats.org/presentationml/2006/main">
   <p:cSld>
     <p:spTree>
       <p:nvGrpSpPr>
@@ -7711,7 +7550,14 @@
         <p:cNvGrpSpPr/>
         <p:nvPr/>
       </p:nvGrpSpPr>
-      <p:grpSpPr/>
+      <p:grpSpPr>
+        <a:xfrm>
+          <a:off x="0" y="0"/>
+          <a:ext cx="0" cy="0"/>
+          <a:chOff x="0" y="0"/>
+          <a:chExt cx="0" cy="0"/>
+        </a:xfrm>
+      </p:grpSpPr>
       <p:sp>
         <p:nvSpPr>
           <p:cNvPr id="2" name="Rectangle 1"/>
@@ -7752,6 +7598,7 @@
           <a:lstStyle/>
           <a:p>
             <a:pPr algn="ctr"/>
+            <a:endParaRPr/>
           </a:p>
         </p:txBody>
       </p:sp>
@@ -7795,14 +7642,17 @@
           <a:lstStyle/>
           <a:p>
             <a:pPr algn="ctr"/>
-          </a:p>
-        </p:txBody>
-      </p:sp>
-      <p:sp>
-        <p:nvSpPr>
-          <p:cNvPr id="4" name="TextBox 3"/>
-          <p:cNvSpPr txBox="1"/>
-          <p:nvPr/>
+            <a:endParaRPr/>
+          </a:p>
+        </p:txBody>
+      </p:sp>
+      <p:sp>
+        <p:nvSpPr>
+          <p:cNvPr id="4" name="Title"/>
+          <p:cNvSpPr/>
+          <p:nvPr>
+            <p:ph type="title"/>
+          </p:nvPr>
         </p:nvSpPr>
         <p:spPr>
           <a:xfrm>
@@ -7815,14 +7665,14 @@
           <a:noFill/>
         </p:spPr>
         <p:txBody>
-          <a:bodyPr wrap="square" anchor="ctr" lIns="45720" rIns="45720" tIns="27432" bIns="27432">
+          <a:bodyPr wrap="square" lIns="45720" tIns="27432" rIns="45720" bIns="27432" anchor="ctr">
             <a:spAutoFit/>
           </a:bodyPr>
           <a:lstStyle/>
           <a:p>
             <a:pPr algn="l"/>
             <a:r>
-              <a:rPr sz="3000" b="1">
+              <a:rPr sz="3000" b="1" lang="en-IN">
                 <a:solidFill>
                   <a:srgbClr val="243B7A"/>
                 </a:solidFill>
@@ -7842,7 +7692,7 @@
           <p:nvPr/>
         </p:nvPicPr>
         <p:blipFill>
-          <a:blip r:embed="rId2"/>
+          <a:blip r:embed="rId3"/>
           <a:stretch>
             <a:fillRect/>
           </a:stretch>
@@ -7874,14 +7724,14 @@
           <a:noFill/>
         </p:spPr>
         <p:txBody>
-          <a:bodyPr wrap="square" anchor="t" lIns="45720" rIns="45720" tIns="27432" bIns="27432">
+          <a:bodyPr wrap="square" lIns="45720" tIns="27432" rIns="45720" bIns="27432" anchor="t">
             <a:spAutoFit/>
           </a:bodyPr>
           <a:lstStyle/>
           <a:p>
             <a:pPr algn="l"/>
             <a:r>
-              <a:rPr sz="1000" b="0">
+              <a:rPr sz="1000" b="0" lang="en-IN">
                 <a:solidFill>
                   <a:srgbClr val="4B5563"/>
                 </a:solidFill>
@@ -7909,14 +7759,14 @@
           <a:noFill/>
         </p:spPr>
         <p:txBody>
-          <a:bodyPr wrap="square" anchor="t" lIns="45720" rIns="45720" tIns="27432" bIns="27432">
+          <a:bodyPr wrap="square" lIns="45720" tIns="27432" rIns="45720" bIns="27432" anchor="t">
             <a:spAutoFit/>
           </a:bodyPr>
           <a:lstStyle/>
           <a:p>
             <a:pPr algn="r"/>
             <a:r>
-              <a:rPr sz="1000" b="0">
+              <a:rPr sz="1000" b="0" lang="en-IN">
                 <a:solidFill>
                   <a:srgbClr val="4B5563"/>
                 </a:solidFill>
@@ -7972,6 +7822,7 @@
           <a:lstStyle/>
           <a:p>
             <a:pPr algn="ctr"/>
+            <a:endParaRPr/>
           </a:p>
         </p:txBody>
       </p:sp>
@@ -7992,14 +7843,14 @@
           <a:noFill/>
         </p:spPr>
         <p:txBody>
-          <a:bodyPr wrap="square" anchor="t" lIns="45720" rIns="45720" tIns="27432" bIns="27432">
+          <a:bodyPr wrap="square" lIns="45720" tIns="27432" rIns="45720" bIns="27432" anchor="t">
             <a:spAutoFit/>
           </a:bodyPr>
           <a:lstStyle/>
           <a:p>
             <a:pPr algn="l"/>
             <a:r>
-              <a:rPr sz="2200" b="1">
+              <a:rPr sz="2200" b="1" lang="en-IN">
                 <a:solidFill>
                   <a:srgbClr val="243B7A"/>
                 </a:solidFill>
@@ -8027,7 +7878,7 @@
           <a:noFill/>
         </p:spPr>
         <p:txBody>
-          <a:bodyPr wrap="square" anchor="t" lIns="45720" rIns="45720" tIns="27432" bIns="27432">
+          <a:bodyPr wrap="square" lIns="45720" tIns="27432" rIns="45720" bIns="27432" anchor="t">
             <a:spAutoFit/>
           </a:bodyPr>
           <a:lstStyle/>
@@ -8038,7 +7889,7 @@
               </a:spcAft>
             </a:pPr>
             <a:r>
-              <a:rPr sz="1500" b="0">
+              <a:rPr sz="1500" b="0" lang="en-IN">
                 <a:solidFill>
                   <a:srgbClr val="1F2937"/>
                 </a:solidFill>
@@ -8054,7 +7905,7 @@
               </a:spcAft>
             </a:pPr>
             <a:r>
-              <a:rPr sz="1500" b="0">
+              <a:rPr sz="1500" b="0" lang="en-IN">
                 <a:solidFill>
                   <a:srgbClr val="1F2937"/>
                 </a:solidFill>
@@ -8070,7 +7921,7 @@
               </a:spcAft>
             </a:pPr>
             <a:r>
-              <a:rPr sz="1500" b="0">
+              <a:rPr sz="1500" b="0" lang="en-IN">
                 <a:solidFill>
                   <a:srgbClr val="1F2937"/>
                 </a:solidFill>
@@ -8086,7 +7937,7 @@
               </a:spcAft>
             </a:pPr>
             <a:r>
-              <a:rPr sz="1500" b="0">
+              <a:rPr sz="1500" b="0" lang="en-IN">
                 <a:solidFill>
                   <a:srgbClr val="1F2937"/>
                 </a:solidFill>
@@ -8142,6 +7993,7 @@
           <a:lstStyle/>
           <a:p>
             <a:pPr algn="ctr"/>
+            <a:endParaRPr/>
           </a:p>
         </p:txBody>
       </p:sp>
@@ -8162,14 +8014,14 @@
           <a:noFill/>
         </p:spPr>
         <p:txBody>
-          <a:bodyPr wrap="square" anchor="t" lIns="45720" rIns="45720" tIns="27432" bIns="27432">
+          <a:bodyPr wrap="square" lIns="45720" tIns="27432" rIns="45720" bIns="27432" anchor="t">
             <a:spAutoFit/>
           </a:bodyPr>
           <a:lstStyle/>
           <a:p>
             <a:pPr algn="l"/>
             <a:r>
-              <a:rPr sz="2200" b="1">
+              <a:rPr sz="2200" b="1" lang="en-IN">
                 <a:solidFill>
                   <a:srgbClr val="8A6300"/>
                 </a:solidFill>
@@ -8197,7 +8049,7 @@
           <a:noFill/>
         </p:spPr>
         <p:txBody>
-          <a:bodyPr wrap="square" anchor="t" lIns="45720" rIns="45720" tIns="27432" bIns="27432">
+          <a:bodyPr wrap="square" lIns="45720" tIns="27432" rIns="45720" bIns="27432" anchor="t">
             <a:spAutoFit/>
           </a:bodyPr>
           <a:lstStyle/>
@@ -8208,7 +8060,7 @@
               </a:spcAft>
             </a:pPr>
             <a:r>
-              <a:rPr sz="1500" b="0">
+              <a:rPr sz="1500" b="0" lang="en-IN">
                 <a:solidFill>
                   <a:srgbClr val="1F2937"/>
                 </a:solidFill>
@@ -8224,7 +8076,7 @@
               </a:spcAft>
             </a:pPr>
             <a:r>
-              <a:rPr sz="1500" b="0">
+              <a:rPr sz="1500" b="0" lang="en-IN">
                 <a:solidFill>
                   <a:srgbClr val="1F2937"/>
                 </a:solidFill>
@@ -8240,7 +8092,7 @@
               </a:spcAft>
             </a:pPr>
             <a:r>
-              <a:rPr sz="1500" b="0">
+              <a:rPr sz="1500" b="0" lang="en-IN">
                 <a:solidFill>
                   <a:srgbClr val="1F2937"/>
                 </a:solidFill>
@@ -8256,7 +8108,7 @@
               </a:spcAft>
             </a:pPr>
             <a:r>
-              <a:rPr sz="1500" b="0">
+              <a:rPr sz="1500" b="0" lang="en-IN">
                 <a:solidFill>
                   <a:srgbClr val="1F2937"/>
                 </a:solidFill>
@@ -8276,7 +8128,7 @@
 </file>
 
 <file path=ppt/slides/slide14.xml><?xml version="1.0" encoding="utf-8"?>
-<p:sld xmlns:a="http://schemas.openxmlformats.org/drawingml/2006/main" xmlns:p="http://schemas.openxmlformats.org/presentationml/2006/main" xmlns:r="http://schemas.openxmlformats.org/officeDocument/2006/relationships">
+<p:sld xmlns:a="http://schemas.openxmlformats.org/drawingml/2006/main" xmlns:r="http://schemas.openxmlformats.org/officeDocument/2006/relationships" xmlns:p="http://schemas.openxmlformats.org/presentationml/2006/main">
   <p:cSld>
     <p:spTree>
       <p:nvGrpSpPr>
@@ -8284,7 +8136,14 @@
         <p:cNvGrpSpPr/>
         <p:nvPr/>
       </p:nvGrpSpPr>
-      <p:grpSpPr/>
+      <p:grpSpPr>
+        <a:xfrm>
+          <a:off x="0" y="0"/>
+          <a:ext cx="0" cy="0"/>
+          <a:chOff x="0" y="0"/>
+          <a:chExt cx="0" cy="0"/>
+        </a:xfrm>
+      </p:grpSpPr>
       <p:sp>
         <p:nvSpPr>
           <p:cNvPr id="2" name="Rectangle 1"/>
@@ -8325,6 +8184,7 @@
           <a:lstStyle/>
           <a:p>
             <a:pPr algn="ctr"/>
+            <a:endParaRPr/>
           </a:p>
         </p:txBody>
       </p:sp>
@@ -8368,14 +8228,17 @@
           <a:lstStyle/>
           <a:p>
             <a:pPr algn="ctr"/>
-          </a:p>
-        </p:txBody>
-      </p:sp>
-      <p:sp>
-        <p:nvSpPr>
-          <p:cNvPr id="4" name="TextBox 3"/>
-          <p:cNvSpPr txBox="1"/>
-          <p:nvPr/>
+            <a:endParaRPr/>
+          </a:p>
+        </p:txBody>
+      </p:sp>
+      <p:sp>
+        <p:nvSpPr>
+          <p:cNvPr id="4" name="Title"/>
+          <p:cNvSpPr/>
+          <p:nvPr>
+            <p:ph type="title"/>
+          </p:nvPr>
         </p:nvSpPr>
         <p:spPr>
           <a:xfrm>
@@ -8388,14 +8251,14 @@
           <a:noFill/>
         </p:spPr>
         <p:txBody>
-          <a:bodyPr wrap="square" anchor="ctr" lIns="45720" rIns="45720" tIns="27432" bIns="27432">
+          <a:bodyPr wrap="square" lIns="45720" tIns="27432" rIns="45720" bIns="27432" anchor="ctr">
             <a:spAutoFit/>
           </a:bodyPr>
           <a:lstStyle/>
           <a:p>
             <a:pPr algn="l"/>
             <a:r>
-              <a:rPr sz="3000" b="1">
+              <a:rPr sz="3000" b="1" lang="en-IN">
                 <a:solidFill>
                   <a:srgbClr val="243B7A"/>
                 </a:solidFill>
@@ -8415,7 +8278,7 @@
           <p:nvPr/>
         </p:nvPicPr>
         <p:blipFill>
-          <a:blip r:embed="rId2"/>
+          <a:blip r:embed="rId3"/>
           <a:stretch>
             <a:fillRect/>
           </a:stretch>
@@ -8447,14 +8310,14 @@
           <a:noFill/>
         </p:spPr>
         <p:txBody>
-          <a:bodyPr wrap="square" anchor="t" lIns="45720" rIns="45720" tIns="27432" bIns="27432">
+          <a:bodyPr wrap="square" lIns="45720" tIns="27432" rIns="45720" bIns="27432" anchor="t">
             <a:spAutoFit/>
           </a:bodyPr>
           <a:lstStyle/>
           <a:p>
             <a:pPr algn="l"/>
             <a:r>
-              <a:rPr sz="1000" b="0">
+              <a:rPr sz="1000" b="0" lang="en-IN">
                 <a:solidFill>
                   <a:srgbClr val="4B5563"/>
                 </a:solidFill>
@@ -8482,14 +8345,14 @@
           <a:noFill/>
         </p:spPr>
         <p:txBody>
-          <a:bodyPr wrap="square" anchor="t" lIns="45720" rIns="45720" tIns="27432" bIns="27432">
+          <a:bodyPr wrap="square" lIns="45720" tIns="27432" rIns="45720" bIns="27432" anchor="t">
             <a:spAutoFit/>
           </a:bodyPr>
           <a:lstStyle/>
           <a:p>
             <a:pPr algn="r"/>
             <a:r>
-              <a:rPr sz="1000" b="0">
+              <a:rPr sz="1000" b="0" lang="en-IN">
                 <a:solidFill>
                   <a:srgbClr val="4B5563"/>
                 </a:solidFill>
@@ -8545,6 +8408,7 @@
           <a:lstStyle/>
           <a:p>
             <a:pPr algn="ctr"/>
+            <a:endParaRPr/>
           </a:p>
         </p:txBody>
       </p:sp>
@@ -8589,6 +8453,7 @@
           <a:lstStyle/>
           <a:p>
             <a:pPr algn="ctr"/>
+            <a:endParaRPr/>
           </a:p>
         </p:txBody>
       </p:sp>
@@ -8601,7 +8466,7 @@
           <p:nvPr/>
         </p:nvPicPr>
         <p:blipFill>
-          <a:blip r:embed="rId3"/>
+          <a:blip r:embed="rId4"/>
           <a:stretch>
             <a:fillRect/>
           </a:stretch>
@@ -8633,14 +8498,14 @@
           <a:noFill/>
         </p:spPr>
         <p:txBody>
-          <a:bodyPr wrap="square" anchor="ctr" lIns="45720" rIns="45720" tIns="27432" bIns="27432">
+          <a:bodyPr wrap="square" lIns="45720" tIns="27432" rIns="45720" bIns="27432" anchor="ctr">
             <a:spAutoFit/>
           </a:bodyPr>
           <a:lstStyle/>
           <a:p>
             <a:pPr algn="l"/>
             <a:r>
-              <a:rPr sz="2200" b="1">
+              <a:rPr sz="2200" b="1" lang="en-IN">
                 <a:solidFill>
                   <a:srgbClr val="243B7A"/>
                 </a:solidFill>
@@ -8668,14 +8533,14 @@
           <a:noFill/>
         </p:spPr>
         <p:txBody>
-          <a:bodyPr wrap="square" anchor="t" lIns="45720" rIns="45720" tIns="27432" bIns="27432">
+          <a:bodyPr wrap="square" lIns="45720" tIns="27432" rIns="45720" bIns="27432" anchor="t">
             <a:spAutoFit/>
           </a:bodyPr>
           <a:lstStyle/>
           <a:p>
             <a:pPr algn="l"/>
             <a:r>
-              <a:rPr sz="1600" b="0">
+              <a:rPr sz="1600" b="0" lang="en-IN">
                 <a:solidFill>
                   <a:srgbClr val="1F2937"/>
                 </a:solidFill>
@@ -8731,6 +8596,7 @@
           <a:lstStyle/>
           <a:p>
             <a:pPr algn="ctr"/>
+            <a:endParaRPr/>
           </a:p>
         </p:txBody>
       </p:sp>
@@ -8775,6 +8641,7 @@
           <a:lstStyle/>
           <a:p>
             <a:pPr algn="ctr"/>
+            <a:endParaRPr/>
           </a:p>
         </p:txBody>
       </p:sp>
@@ -8787,7 +8654,7 @@
           <p:nvPr/>
         </p:nvPicPr>
         <p:blipFill>
-          <a:blip r:embed="rId4"/>
+          <a:blip r:embed="rId5"/>
           <a:stretch>
             <a:fillRect/>
           </a:stretch>
@@ -8819,14 +8686,14 @@
           <a:noFill/>
         </p:spPr>
         <p:txBody>
-          <a:bodyPr wrap="square" anchor="ctr" lIns="45720" rIns="45720" tIns="27432" bIns="27432">
+          <a:bodyPr wrap="square" lIns="45720" tIns="27432" rIns="45720" bIns="27432" anchor="ctr">
             <a:spAutoFit/>
           </a:bodyPr>
           <a:lstStyle/>
           <a:p>
             <a:pPr algn="l"/>
             <a:r>
-              <a:rPr sz="2200" b="1">
+              <a:rPr sz="2200" b="1" lang="en-IN">
                 <a:solidFill>
                   <a:srgbClr val="243B7A"/>
                 </a:solidFill>
@@ -8854,14 +8721,14 @@
           <a:noFill/>
         </p:spPr>
         <p:txBody>
-          <a:bodyPr wrap="square" anchor="t" lIns="45720" rIns="45720" tIns="27432" bIns="27432">
+          <a:bodyPr wrap="square" lIns="45720" tIns="27432" rIns="45720" bIns="27432" anchor="t">
             <a:spAutoFit/>
           </a:bodyPr>
           <a:lstStyle/>
           <a:p>
             <a:pPr algn="l"/>
             <a:r>
-              <a:rPr sz="1600" b="0">
+              <a:rPr sz="1600" b="0" lang="en-IN">
                 <a:solidFill>
                   <a:srgbClr val="1F2937"/>
                 </a:solidFill>
@@ -8917,6 +8784,7 @@
           <a:lstStyle/>
           <a:p>
             <a:pPr algn="ctr"/>
+            <a:endParaRPr/>
           </a:p>
         </p:txBody>
       </p:sp>
@@ -8961,6 +8829,7 @@
           <a:lstStyle/>
           <a:p>
             <a:pPr algn="ctr"/>
+            <a:endParaRPr/>
           </a:p>
         </p:txBody>
       </p:sp>
@@ -8973,7 +8842,7 @@
           <p:nvPr/>
         </p:nvPicPr>
         <p:blipFill>
-          <a:blip r:embed="rId5"/>
+          <a:blip r:embed="rId6"/>
           <a:stretch>
             <a:fillRect/>
           </a:stretch>
@@ -9005,14 +8874,14 @@
           <a:noFill/>
         </p:spPr>
         <p:txBody>
-          <a:bodyPr wrap="square" anchor="ctr" lIns="45720" rIns="45720" tIns="27432" bIns="27432">
+          <a:bodyPr wrap="square" lIns="45720" tIns="27432" rIns="45720" bIns="27432" anchor="ctr">
             <a:spAutoFit/>
           </a:bodyPr>
           <a:lstStyle/>
           <a:p>
             <a:pPr algn="l"/>
             <a:r>
-              <a:rPr sz="2200" b="1">
+              <a:rPr sz="2200" b="1" lang="en-IN">
                 <a:solidFill>
                   <a:srgbClr val="243B7A"/>
                 </a:solidFill>
@@ -9040,14 +8909,14 @@
           <a:noFill/>
         </p:spPr>
         <p:txBody>
-          <a:bodyPr wrap="square" anchor="t" lIns="45720" rIns="45720" tIns="27432" bIns="27432">
+          <a:bodyPr wrap="square" lIns="45720" tIns="27432" rIns="45720" bIns="27432" anchor="t">
             <a:spAutoFit/>
           </a:bodyPr>
           <a:lstStyle/>
           <a:p>
             <a:pPr algn="l"/>
             <a:r>
-              <a:rPr sz="1600" b="0">
+              <a:rPr sz="1600" b="0" lang="en-IN">
                 <a:solidFill>
                   <a:srgbClr val="1F2937"/>
                 </a:solidFill>
@@ -9103,6 +8972,7 @@
           <a:lstStyle/>
           <a:p>
             <a:pPr algn="ctr"/>
+            <a:endParaRPr/>
           </a:p>
         </p:txBody>
       </p:sp>
@@ -9147,6 +9017,7 @@
           <a:lstStyle/>
           <a:p>
             <a:pPr algn="ctr"/>
+            <a:endParaRPr/>
           </a:p>
         </p:txBody>
       </p:sp>
@@ -9159,7 +9030,7 @@
           <p:nvPr/>
         </p:nvPicPr>
         <p:blipFill>
-          <a:blip r:embed="rId6"/>
+          <a:blip r:embed="rId7"/>
           <a:stretch>
             <a:fillRect/>
           </a:stretch>
@@ -9191,14 +9062,14 @@
           <a:noFill/>
         </p:spPr>
         <p:txBody>
-          <a:bodyPr wrap="square" anchor="ctr" lIns="45720" rIns="45720" tIns="27432" bIns="27432">
+          <a:bodyPr wrap="square" lIns="45720" tIns="27432" rIns="45720" bIns="27432" anchor="ctr">
             <a:spAutoFit/>
           </a:bodyPr>
           <a:lstStyle/>
           <a:p>
             <a:pPr algn="l"/>
             <a:r>
-              <a:rPr sz="2200" b="1">
+              <a:rPr sz="2200" b="1" lang="en-IN">
                 <a:solidFill>
                   <a:srgbClr val="243B7A"/>
                 </a:solidFill>
@@ -9226,14 +9097,14 @@
           <a:noFill/>
         </p:spPr>
         <p:txBody>
-          <a:bodyPr wrap="square" anchor="t" lIns="45720" rIns="45720" tIns="27432" bIns="27432">
+          <a:bodyPr wrap="square" lIns="45720" tIns="27432" rIns="45720" bIns="27432" anchor="t">
             <a:spAutoFit/>
           </a:bodyPr>
           <a:lstStyle/>
           <a:p>
             <a:pPr algn="l"/>
             <a:r>
-              <a:rPr sz="1600" b="0">
+              <a:rPr sz="1600" b="0" lang="en-IN">
                 <a:solidFill>
                   <a:srgbClr val="1F2937"/>
                 </a:solidFill>
@@ -9253,7 +9124,7 @@
 </file>
 
 <file path=ppt/slides/slide15.xml><?xml version="1.0" encoding="utf-8"?>
-<p:sld xmlns:a="http://schemas.openxmlformats.org/drawingml/2006/main" xmlns:p="http://schemas.openxmlformats.org/presentationml/2006/main" xmlns:r="http://schemas.openxmlformats.org/officeDocument/2006/relationships">
+<p:sld xmlns:a="http://schemas.openxmlformats.org/drawingml/2006/main" xmlns:r="http://schemas.openxmlformats.org/officeDocument/2006/relationships" xmlns:p="http://schemas.openxmlformats.org/presentationml/2006/main">
   <p:cSld>
     <p:spTree>
       <p:nvGrpSpPr>
@@ -9261,7 +9132,14 @@
         <p:cNvGrpSpPr/>
         <p:nvPr/>
       </p:nvGrpSpPr>
-      <p:grpSpPr/>
+      <p:grpSpPr>
+        <a:xfrm>
+          <a:off x="0" y="0"/>
+          <a:ext cx="0" cy="0"/>
+          <a:chOff x="0" y="0"/>
+          <a:chExt cx="0" cy="0"/>
+        </a:xfrm>
+      </p:grpSpPr>
       <p:sp>
         <p:nvSpPr>
           <p:cNvPr id="2" name="Rectangle 1"/>
@@ -9302,6 +9180,7 @@
           <a:lstStyle/>
           <a:p>
             <a:pPr algn="ctr"/>
+            <a:endParaRPr/>
           </a:p>
         </p:txBody>
       </p:sp>
@@ -9345,14 +9224,17 @@
           <a:lstStyle/>
           <a:p>
             <a:pPr algn="ctr"/>
-          </a:p>
-        </p:txBody>
-      </p:sp>
-      <p:sp>
-        <p:nvSpPr>
-          <p:cNvPr id="4" name="TextBox 3"/>
-          <p:cNvSpPr txBox="1"/>
-          <p:nvPr/>
+            <a:endParaRPr/>
+          </a:p>
+        </p:txBody>
+      </p:sp>
+      <p:sp>
+        <p:nvSpPr>
+          <p:cNvPr id="4" name="Title"/>
+          <p:cNvSpPr/>
+          <p:nvPr>
+            <p:ph type="title"/>
+          </p:nvPr>
         </p:nvSpPr>
         <p:spPr>
           <a:xfrm>
@@ -9365,14 +9247,14 @@
           <a:noFill/>
         </p:spPr>
         <p:txBody>
-          <a:bodyPr wrap="square" anchor="ctr" lIns="45720" rIns="45720" tIns="27432" bIns="27432">
+          <a:bodyPr wrap="square" lIns="45720" tIns="27432" rIns="45720" bIns="27432" anchor="ctr">
             <a:spAutoFit/>
           </a:bodyPr>
           <a:lstStyle/>
           <a:p>
             <a:pPr algn="l"/>
             <a:r>
-              <a:rPr sz="3000" b="1">
+              <a:rPr sz="3000" b="1" lang="en-IN">
                 <a:solidFill>
                   <a:srgbClr val="243B7A"/>
                 </a:solidFill>
@@ -9392,7 +9274,7 @@
           <p:nvPr/>
         </p:nvPicPr>
         <p:blipFill>
-          <a:blip r:embed="rId2"/>
+          <a:blip r:embed="rId3"/>
           <a:stretch>
             <a:fillRect/>
           </a:stretch>
@@ -9424,14 +9306,14 @@
           <a:noFill/>
         </p:spPr>
         <p:txBody>
-          <a:bodyPr wrap="square" anchor="t" lIns="45720" rIns="45720" tIns="27432" bIns="27432">
+          <a:bodyPr wrap="square" lIns="45720" tIns="27432" rIns="45720" bIns="27432" anchor="t">
             <a:spAutoFit/>
           </a:bodyPr>
           <a:lstStyle/>
           <a:p>
             <a:pPr algn="l"/>
             <a:r>
-              <a:rPr sz="1000" b="0">
+              <a:rPr sz="1000" b="0" lang="en-IN">
                 <a:solidFill>
                   <a:srgbClr val="4B5563"/>
                 </a:solidFill>
@@ -9459,14 +9341,14 @@
           <a:noFill/>
         </p:spPr>
         <p:txBody>
-          <a:bodyPr wrap="square" anchor="t" lIns="45720" rIns="45720" tIns="27432" bIns="27432">
+          <a:bodyPr wrap="square" lIns="45720" tIns="27432" rIns="45720" bIns="27432" anchor="t">
             <a:spAutoFit/>
           </a:bodyPr>
           <a:lstStyle/>
           <a:p>
             <a:pPr algn="r"/>
             <a:r>
-              <a:rPr sz="1000" b="0">
+              <a:rPr sz="1000" b="0" lang="en-IN">
                 <a:solidFill>
                   <a:srgbClr val="4B5563"/>
                 </a:solidFill>
@@ -9522,6 +9404,7 @@
           <a:lstStyle/>
           <a:p>
             <a:pPr algn="ctr"/>
+            <a:endParaRPr/>
           </a:p>
         </p:txBody>
       </p:sp>
@@ -9566,6 +9449,7 @@
           <a:lstStyle/>
           <a:p>
             <a:pPr algn="ctr"/>
+            <a:endParaRPr/>
           </a:p>
         </p:txBody>
       </p:sp>
@@ -9578,7 +9462,7 @@
           <p:nvPr/>
         </p:nvPicPr>
         <p:blipFill>
-          <a:blip r:embed="rId3"/>
+          <a:blip r:embed="rId4"/>
           <a:stretch>
             <a:fillRect/>
           </a:stretch>
@@ -9610,7 +9494,7 @@
           <a:noFill/>
         </p:spPr>
         <p:txBody>
-          <a:bodyPr wrap="square" anchor="t" lIns="45720" rIns="45720" tIns="27432" bIns="27432">
+          <a:bodyPr wrap="square" lIns="45720" tIns="27432" rIns="45720" bIns="27432" anchor="t">
             <a:spAutoFit/>
           </a:bodyPr>
           <a:lstStyle/>
@@ -9621,7 +9505,7 @@
               </a:spcAft>
             </a:pPr>
             <a:r>
-              <a:rPr sz="2000" b="1">
+              <a:rPr sz="2000" b="1" lang="en-IN">
                 <a:solidFill>
                   <a:srgbClr val="1F2937"/>
                 </a:solidFill>
@@ -9637,7 +9521,7 @@
               </a:spcAft>
             </a:pPr>
             <a:r>
-              <a:rPr sz="2000" b="1">
+              <a:rPr sz="2000" b="1" lang="en-IN">
                 <a:solidFill>
                   <a:srgbClr val="1F2937"/>
                 </a:solidFill>
@@ -9665,14 +9549,14 @@
           <a:noFill/>
         </p:spPr>
         <p:txBody>
-          <a:bodyPr wrap="square" anchor="t" lIns="45720" rIns="45720" tIns="27432" bIns="27432">
+          <a:bodyPr wrap="square" lIns="45720" tIns="27432" rIns="45720" bIns="27432" anchor="t">
             <a:spAutoFit/>
           </a:bodyPr>
           <a:lstStyle/>
           <a:p>
             <a:pPr algn="l"/>
             <a:r>
-              <a:rPr sz="2200" b="1">
+              <a:rPr sz="2200" b="1" lang="en-IN">
                 <a:solidFill>
                   <a:srgbClr val="243B7A"/>
                 </a:solidFill>
@@ -9700,7 +9584,7 @@
           <a:noFill/>
         </p:spPr>
         <p:txBody>
-          <a:bodyPr wrap="square" anchor="t" lIns="45720" rIns="45720" tIns="27432" bIns="27432">
+          <a:bodyPr wrap="square" lIns="45720" tIns="27432" rIns="45720" bIns="27432" anchor="t">
             <a:spAutoFit/>
           </a:bodyPr>
           <a:lstStyle/>
@@ -9711,7 +9595,7 @@
               </a:spcAft>
             </a:pPr>
             <a:r>
-              <a:rPr sz="1800" b="0">
+              <a:rPr sz="1800" b="0" lang="en-IN">
                 <a:solidFill>
                   <a:srgbClr val="1F2937"/>
                 </a:solidFill>
@@ -9727,7 +9611,7 @@
               </a:spcAft>
             </a:pPr>
             <a:r>
-              <a:rPr sz="1800" b="0">
+              <a:rPr sz="1800" b="0" lang="en-IN">
                 <a:solidFill>
                   <a:srgbClr val="1F2937"/>
                 </a:solidFill>
@@ -9743,7 +9627,7 @@
               </a:spcAft>
             </a:pPr>
             <a:r>
-              <a:rPr sz="1800" b="0">
+              <a:rPr sz="1800" b="0" lang="en-IN">
                 <a:solidFill>
                   <a:srgbClr val="1F2937"/>
                 </a:solidFill>
@@ -9763,7 +9647,7 @@
 </file>
 
 <file path=ppt/slides/slide2.xml><?xml version="1.0" encoding="utf-8"?>
-<p:sld xmlns:a="http://schemas.openxmlformats.org/drawingml/2006/main" xmlns:p="http://schemas.openxmlformats.org/presentationml/2006/main" xmlns:r="http://schemas.openxmlformats.org/officeDocument/2006/relationships">
+<p:sld xmlns:a="http://schemas.openxmlformats.org/drawingml/2006/main" xmlns:r="http://schemas.openxmlformats.org/officeDocument/2006/relationships" xmlns:p="http://schemas.openxmlformats.org/presentationml/2006/main">
   <p:cSld>
     <p:spTree>
       <p:nvGrpSpPr>
@@ -9771,7 +9655,14 @@
         <p:cNvGrpSpPr/>
         <p:nvPr/>
       </p:nvGrpSpPr>
-      <p:grpSpPr/>
+      <p:grpSpPr>
+        <a:xfrm>
+          <a:off x="0" y="0"/>
+          <a:ext cx="0" cy="0"/>
+          <a:chOff x="0" y="0"/>
+          <a:chExt cx="0" cy="0"/>
+        </a:xfrm>
+      </p:grpSpPr>
       <p:sp>
         <p:nvSpPr>
           <p:cNvPr id="2" name="Rectangle 1"/>
@@ -9812,6 +9703,7 @@
           <a:lstStyle/>
           <a:p>
             <a:pPr algn="ctr"/>
+            <a:endParaRPr/>
           </a:p>
         </p:txBody>
       </p:sp>
@@ -9855,14 +9747,17 @@
           <a:lstStyle/>
           <a:p>
             <a:pPr algn="ctr"/>
-          </a:p>
-        </p:txBody>
-      </p:sp>
-      <p:sp>
-        <p:nvSpPr>
-          <p:cNvPr id="4" name="TextBox 3"/>
-          <p:cNvSpPr txBox="1"/>
-          <p:nvPr/>
+            <a:endParaRPr/>
+          </a:p>
+        </p:txBody>
+      </p:sp>
+      <p:sp>
+        <p:nvSpPr>
+          <p:cNvPr id="4" name="Title"/>
+          <p:cNvSpPr/>
+          <p:nvPr>
+            <p:ph type="title"/>
+          </p:nvPr>
         </p:nvSpPr>
         <p:spPr>
           <a:xfrm>
@@ -9875,14 +9770,14 @@
           <a:noFill/>
         </p:spPr>
         <p:txBody>
-          <a:bodyPr wrap="square" anchor="ctr" lIns="45720" rIns="45720" tIns="27432" bIns="27432">
+          <a:bodyPr wrap="square" lIns="45720" tIns="27432" rIns="45720" bIns="27432" anchor="ctr">
             <a:spAutoFit/>
           </a:bodyPr>
           <a:lstStyle/>
           <a:p>
             <a:pPr algn="l"/>
             <a:r>
-              <a:rPr sz="3000" b="1">
+              <a:rPr sz="3000" b="1" lang="en-IN">
                 <a:solidFill>
                   <a:srgbClr val="243B7A"/>
                 </a:solidFill>
@@ -9902,7 +9797,7 @@
           <p:nvPr/>
         </p:nvPicPr>
         <p:blipFill>
-          <a:blip r:embed="rId2"/>
+          <a:blip r:embed="rId3"/>
           <a:stretch>
             <a:fillRect/>
           </a:stretch>
@@ -9934,14 +9829,14 @@
           <a:noFill/>
         </p:spPr>
         <p:txBody>
-          <a:bodyPr wrap="square" anchor="t" lIns="45720" rIns="45720" tIns="27432" bIns="27432">
+          <a:bodyPr wrap="square" lIns="45720" tIns="27432" rIns="45720" bIns="27432" anchor="t">
             <a:spAutoFit/>
           </a:bodyPr>
           <a:lstStyle/>
           <a:p>
             <a:pPr algn="l"/>
             <a:r>
-              <a:rPr sz="1000" b="0">
+              <a:rPr sz="1000" b="0" lang="en-IN">
                 <a:solidFill>
                   <a:srgbClr val="4B5563"/>
                 </a:solidFill>
@@ -9969,14 +9864,14 @@
           <a:noFill/>
         </p:spPr>
         <p:txBody>
-          <a:bodyPr wrap="square" anchor="t" lIns="45720" rIns="45720" tIns="27432" bIns="27432">
+          <a:bodyPr wrap="square" lIns="45720" tIns="27432" rIns="45720" bIns="27432" anchor="t">
             <a:spAutoFit/>
           </a:bodyPr>
           <a:lstStyle/>
           <a:p>
             <a:pPr algn="r"/>
             <a:r>
-              <a:rPr sz="1000" b="0">
+              <a:rPr sz="1000" b="0" lang="en-IN">
                 <a:solidFill>
                   <a:srgbClr val="4B5563"/>
                 </a:solidFill>
@@ -10032,6 +9927,7 @@
           <a:lstStyle/>
           <a:p>
             <a:pPr algn="ctr"/>
+            <a:endParaRPr/>
           </a:p>
         </p:txBody>
       </p:sp>
@@ -10076,6 +9972,7 @@
           <a:lstStyle/>
           <a:p>
             <a:pPr algn="ctr"/>
+            <a:endParaRPr/>
           </a:p>
         </p:txBody>
       </p:sp>
@@ -10088,7 +9985,7 @@
           <p:nvPr/>
         </p:nvPicPr>
         <p:blipFill>
-          <a:blip r:embed="rId3"/>
+          <a:blip r:embed="rId4"/>
           <a:stretch>
             <a:fillRect/>
           </a:stretch>
@@ -10120,14 +10017,14 @@
           <a:noFill/>
         </p:spPr>
         <p:txBody>
-          <a:bodyPr wrap="square" anchor="t" lIns="45720" rIns="45720" tIns="27432" bIns="27432">
+          <a:bodyPr wrap="square" lIns="45720" tIns="27432" rIns="45720" bIns="27432" anchor="t">
             <a:spAutoFit/>
           </a:bodyPr>
           <a:lstStyle/>
           <a:p>
             <a:pPr algn="l"/>
             <a:r>
-              <a:rPr sz="2200" b="1">
+              <a:rPr sz="2200" b="1" lang="en-IN">
                 <a:solidFill>
                   <a:srgbClr val="243B7A"/>
                 </a:solidFill>
@@ -10155,14 +10052,14 @@
           <a:noFill/>
         </p:spPr>
         <p:txBody>
-          <a:bodyPr wrap="square" anchor="t" lIns="45720" rIns="45720" tIns="27432" bIns="27432">
+          <a:bodyPr wrap="square" lIns="45720" tIns="27432" rIns="45720" bIns="27432" anchor="t">
             <a:spAutoFit/>
           </a:bodyPr>
           <a:lstStyle/>
           <a:p>
             <a:pPr algn="l"/>
             <a:r>
-              <a:rPr sz="1600" b="0">
+              <a:rPr sz="1600" b="0" lang="en-IN">
                 <a:solidFill>
                   <a:srgbClr val="1F2937"/>
                 </a:solidFill>
@@ -10218,6 +10115,7 @@
           <a:lstStyle/>
           <a:p>
             <a:pPr algn="ctr"/>
+            <a:endParaRPr/>
           </a:p>
         </p:txBody>
       </p:sp>
@@ -10262,6 +10160,7 @@
           <a:lstStyle/>
           <a:p>
             <a:pPr algn="ctr"/>
+            <a:endParaRPr/>
           </a:p>
         </p:txBody>
       </p:sp>
@@ -10274,7 +10173,7 @@
           <p:nvPr/>
         </p:nvPicPr>
         <p:blipFill>
-          <a:blip r:embed="rId4"/>
+          <a:blip r:embed="rId5"/>
           <a:stretch>
             <a:fillRect/>
           </a:stretch>
@@ -10306,14 +10205,14 @@
           <a:noFill/>
         </p:spPr>
         <p:txBody>
-          <a:bodyPr wrap="square" anchor="t" lIns="45720" rIns="45720" tIns="27432" bIns="27432">
+          <a:bodyPr wrap="square" lIns="45720" tIns="27432" rIns="45720" bIns="27432" anchor="t">
             <a:spAutoFit/>
           </a:bodyPr>
           <a:lstStyle/>
           <a:p>
             <a:pPr algn="l"/>
             <a:r>
-              <a:rPr sz="2200" b="1">
+              <a:rPr sz="2200" b="1" lang="en-IN">
                 <a:solidFill>
                   <a:srgbClr val="243B7A"/>
                 </a:solidFill>
@@ -10341,14 +10240,14 @@
           <a:noFill/>
         </p:spPr>
         <p:txBody>
-          <a:bodyPr wrap="square" anchor="t" lIns="45720" rIns="45720" tIns="27432" bIns="27432">
+          <a:bodyPr wrap="square" lIns="45720" tIns="27432" rIns="45720" bIns="27432" anchor="t">
             <a:spAutoFit/>
           </a:bodyPr>
           <a:lstStyle/>
           <a:p>
             <a:pPr algn="l"/>
             <a:r>
-              <a:rPr sz="1600" b="0">
+              <a:rPr sz="1600" b="0" lang="en-IN">
                 <a:solidFill>
                   <a:srgbClr val="1F2937"/>
                 </a:solidFill>
@@ -10404,6 +10303,7 @@
           <a:lstStyle/>
           <a:p>
             <a:pPr algn="ctr"/>
+            <a:endParaRPr/>
           </a:p>
         </p:txBody>
       </p:sp>
@@ -10448,6 +10348,7 @@
           <a:lstStyle/>
           <a:p>
             <a:pPr algn="ctr"/>
+            <a:endParaRPr/>
           </a:p>
         </p:txBody>
       </p:sp>
@@ -10460,7 +10361,7 @@
           <p:nvPr/>
         </p:nvPicPr>
         <p:blipFill>
-          <a:blip r:embed="rId5"/>
+          <a:blip r:embed="rId6"/>
           <a:stretch>
             <a:fillRect/>
           </a:stretch>
@@ -10492,14 +10393,14 @@
           <a:noFill/>
         </p:spPr>
         <p:txBody>
-          <a:bodyPr wrap="square" anchor="t" lIns="45720" rIns="45720" tIns="27432" bIns="27432">
+          <a:bodyPr wrap="square" lIns="45720" tIns="27432" rIns="45720" bIns="27432" anchor="t">
             <a:spAutoFit/>
           </a:bodyPr>
           <a:lstStyle/>
           <a:p>
             <a:pPr algn="l"/>
             <a:r>
-              <a:rPr sz="2200" b="1">
+              <a:rPr sz="2200" b="1" lang="en-IN">
                 <a:solidFill>
                   <a:srgbClr val="243B7A"/>
                 </a:solidFill>
@@ -10527,14 +10428,14 @@
           <a:noFill/>
         </p:spPr>
         <p:txBody>
-          <a:bodyPr wrap="square" anchor="t" lIns="45720" rIns="45720" tIns="27432" bIns="27432">
+          <a:bodyPr wrap="square" lIns="45720" tIns="27432" rIns="45720" bIns="27432" anchor="t">
             <a:spAutoFit/>
           </a:bodyPr>
           <a:lstStyle/>
           <a:p>
             <a:pPr algn="l"/>
             <a:r>
-              <a:rPr sz="1600" b="0">
+              <a:rPr sz="1600" b="0" lang="en-IN">
                 <a:solidFill>
                   <a:srgbClr val="1F2937"/>
                 </a:solidFill>
@@ -10562,14 +10463,14 @@
           <a:noFill/>
         </p:spPr>
         <p:txBody>
-          <a:bodyPr wrap="square" anchor="t" lIns="45720" rIns="45720" tIns="27432" bIns="27432">
+          <a:bodyPr wrap="square" lIns="45720" tIns="27432" rIns="45720" bIns="27432" anchor="t">
             <a:spAutoFit/>
           </a:bodyPr>
           <a:lstStyle/>
           <a:p>
             <a:pPr algn="l"/>
             <a:r>
-              <a:rPr sz="2000" b="1">
+              <a:rPr sz="2000" b="1" lang="en-IN">
                 <a:solidFill>
                   <a:srgbClr val="1F2937"/>
                 </a:solidFill>
@@ -10589,7 +10490,7 @@
 </file>
 
 <file path=ppt/slides/slide3.xml><?xml version="1.0" encoding="utf-8"?>
-<p:sld xmlns:a="http://schemas.openxmlformats.org/drawingml/2006/main" xmlns:p="http://schemas.openxmlformats.org/presentationml/2006/main" xmlns:r="http://schemas.openxmlformats.org/officeDocument/2006/relationships">
+<p:sld xmlns:a="http://schemas.openxmlformats.org/drawingml/2006/main" xmlns:r="http://schemas.openxmlformats.org/officeDocument/2006/relationships" xmlns:p="http://schemas.openxmlformats.org/presentationml/2006/main">
   <p:cSld>
     <p:spTree>
       <p:nvGrpSpPr>
@@ -10597,7 +10498,14 @@
         <p:cNvGrpSpPr/>
         <p:nvPr/>
       </p:nvGrpSpPr>
-      <p:grpSpPr/>
+      <p:grpSpPr>
+        <a:xfrm>
+          <a:off x="0" y="0"/>
+          <a:ext cx="0" cy="0"/>
+          <a:chOff x="0" y="0"/>
+          <a:chExt cx="0" cy="0"/>
+        </a:xfrm>
+      </p:grpSpPr>
       <p:sp>
         <p:nvSpPr>
           <p:cNvPr id="2" name="Rectangle 1"/>
@@ -10638,6 +10546,7 @@
           <a:lstStyle/>
           <a:p>
             <a:pPr algn="ctr"/>
+            <a:endParaRPr/>
           </a:p>
         </p:txBody>
       </p:sp>
@@ -10681,14 +10590,17 @@
           <a:lstStyle/>
           <a:p>
             <a:pPr algn="ctr"/>
-          </a:p>
-        </p:txBody>
-      </p:sp>
-      <p:sp>
-        <p:nvSpPr>
-          <p:cNvPr id="4" name="TextBox 3"/>
-          <p:cNvSpPr txBox="1"/>
-          <p:nvPr/>
+            <a:endParaRPr/>
+          </a:p>
+        </p:txBody>
+      </p:sp>
+      <p:sp>
+        <p:nvSpPr>
+          <p:cNvPr id="4" name="Title"/>
+          <p:cNvSpPr/>
+          <p:nvPr>
+            <p:ph type="title"/>
+          </p:nvPr>
         </p:nvSpPr>
         <p:spPr>
           <a:xfrm>
@@ -10701,14 +10613,14 @@
           <a:noFill/>
         </p:spPr>
         <p:txBody>
-          <a:bodyPr wrap="square" anchor="ctr" lIns="45720" rIns="45720" tIns="27432" bIns="27432">
+          <a:bodyPr wrap="square" lIns="45720" tIns="27432" rIns="45720" bIns="27432" anchor="ctr">
             <a:spAutoFit/>
           </a:bodyPr>
           <a:lstStyle/>
           <a:p>
             <a:pPr algn="l"/>
             <a:r>
-              <a:rPr sz="3000" b="1">
+              <a:rPr sz="3000" b="1" lang="en-IN">
                 <a:solidFill>
                   <a:srgbClr val="243B7A"/>
                 </a:solidFill>
@@ -10728,7 +10640,7 @@
           <p:nvPr/>
         </p:nvPicPr>
         <p:blipFill>
-          <a:blip r:embed="rId2"/>
+          <a:blip r:embed="rId3"/>
           <a:stretch>
             <a:fillRect/>
           </a:stretch>
@@ -10760,14 +10672,14 @@
           <a:noFill/>
         </p:spPr>
         <p:txBody>
-          <a:bodyPr wrap="square" anchor="t" lIns="45720" rIns="45720" tIns="27432" bIns="27432">
+          <a:bodyPr wrap="square" lIns="45720" tIns="27432" rIns="45720" bIns="27432" anchor="t">
             <a:spAutoFit/>
           </a:bodyPr>
           <a:lstStyle/>
           <a:p>
             <a:pPr algn="l"/>
             <a:r>
-              <a:rPr sz="1000" b="0">
+              <a:rPr sz="1000" b="0" lang="en-IN">
                 <a:solidFill>
                   <a:srgbClr val="4B5563"/>
                 </a:solidFill>
@@ -10795,14 +10707,14 @@
           <a:noFill/>
         </p:spPr>
         <p:txBody>
-          <a:bodyPr wrap="square" anchor="t" lIns="45720" rIns="45720" tIns="27432" bIns="27432">
+          <a:bodyPr wrap="square" lIns="45720" tIns="27432" rIns="45720" bIns="27432" anchor="t">
             <a:spAutoFit/>
           </a:bodyPr>
           <a:lstStyle/>
           <a:p>
             <a:pPr algn="r"/>
             <a:r>
-              <a:rPr sz="1000" b="0">
+              <a:rPr sz="1000" b="0" lang="en-IN">
                 <a:solidFill>
                   <a:srgbClr val="4B5563"/>
                 </a:solidFill>
@@ -10830,14 +10742,14 @@
           <a:noFill/>
         </p:spPr>
         <p:txBody>
-          <a:bodyPr wrap="square" anchor="t" lIns="45720" rIns="45720" tIns="27432" bIns="27432">
+          <a:bodyPr wrap="square" lIns="45720" tIns="27432" rIns="45720" bIns="27432" anchor="t">
             <a:spAutoFit/>
           </a:bodyPr>
           <a:lstStyle/>
           <a:p>
             <a:pPr algn="l"/>
             <a:r>
-              <a:rPr sz="2000" b="0">
+              <a:rPr sz="2000" b="0" lang="en-IN">
                 <a:solidFill>
                   <a:srgbClr val="1F2937"/>
                 </a:solidFill>
@@ -10893,6 +10805,7 @@
           <a:lstStyle/>
           <a:p>
             <a:pPr algn="ctr"/>
+            <a:endParaRPr/>
           </a:p>
         </p:txBody>
       </p:sp>
@@ -10937,6 +10850,7 @@
           <a:lstStyle/>
           <a:p>
             <a:pPr algn="ctr"/>
+            <a:endParaRPr/>
           </a:p>
         </p:txBody>
       </p:sp>
@@ -10949,7 +10863,7 @@
           <p:nvPr/>
         </p:nvPicPr>
         <p:blipFill>
-          <a:blip r:embed="rId3"/>
+          <a:blip r:embed="rId4"/>
           <a:stretch>
             <a:fillRect/>
           </a:stretch>
@@ -10981,14 +10895,14 @@
           <a:noFill/>
         </p:spPr>
         <p:txBody>
-          <a:bodyPr wrap="square" anchor="ctr" lIns="45720" rIns="45720" tIns="27432" bIns="27432">
+          <a:bodyPr wrap="square" lIns="45720" tIns="27432" rIns="45720" bIns="27432" anchor="ctr">
             <a:spAutoFit/>
           </a:bodyPr>
           <a:lstStyle/>
           <a:p>
             <a:pPr algn="l"/>
             <a:r>
-              <a:rPr sz="2400" b="1">
+              <a:rPr sz="2400" b="1" lang="en-IN">
                 <a:solidFill>
                   <a:srgbClr val="243B7A"/>
                 </a:solidFill>
@@ -11016,14 +10930,14 @@
           <a:noFill/>
         </p:spPr>
         <p:txBody>
-          <a:bodyPr wrap="square" anchor="t" lIns="45720" rIns="45720" tIns="27432" bIns="27432">
+          <a:bodyPr wrap="square" lIns="45720" tIns="27432" rIns="45720" bIns="27432" anchor="t">
             <a:spAutoFit/>
           </a:bodyPr>
           <a:lstStyle/>
           <a:p>
             <a:pPr algn="l"/>
             <a:r>
-              <a:rPr sz="1700" b="0">
+              <a:rPr sz="1700" b="0" lang="en-IN">
                 <a:solidFill>
                   <a:srgbClr val="1F2937"/>
                 </a:solidFill>
@@ -11079,6 +10993,7 @@
           <a:lstStyle/>
           <a:p>
             <a:pPr algn="ctr"/>
+            <a:endParaRPr/>
           </a:p>
         </p:txBody>
       </p:sp>
@@ -11123,6 +11038,7 @@
           <a:lstStyle/>
           <a:p>
             <a:pPr algn="ctr"/>
+            <a:endParaRPr/>
           </a:p>
         </p:txBody>
       </p:sp>
@@ -11135,7 +11051,7 @@
           <p:nvPr/>
         </p:nvPicPr>
         <p:blipFill>
-          <a:blip r:embed="rId4"/>
+          <a:blip r:embed="rId5"/>
           <a:stretch>
             <a:fillRect/>
           </a:stretch>
@@ -11167,14 +11083,14 @@
           <a:noFill/>
         </p:spPr>
         <p:txBody>
-          <a:bodyPr wrap="square" anchor="ctr" lIns="45720" rIns="45720" tIns="27432" bIns="27432">
+          <a:bodyPr wrap="square" lIns="45720" tIns="27432" rIns="45720" bIns="27432" anchor="ctr">
             <a:spAutoFit/>
           </a:bodyPr>
           <a:lstStyle/>
           <a:p>
             <a:pPr algn="l"/>
             <a:r>
-              <a:rPr sz="2400" b="1">
+              <a:rPr sz="2400" b="1" lang="en-IN">
                 <a:solidFill>
                   <a:srgbClr val="243B7A"/>
                 </a:solidFill>
@@ -11202,14 +11118,14 @@
           <a:noFill/>
         </p:spPr>
         <p:txBody>
-          <a:bodyPr wrap="square" anchor="t" lIns="45720" rIns="45720" tIns="27432" bIns="27432">
+          <a:bodyPr wrap="square" lIns="45720" tIns="27432" rIns="45720" bIns="27432" anchor="t">
             <a:spAutoFit/>
           </a:bodyPr>
           <a:lstStyle/>
           <a:p>
             <a:pPr algn="l"/>
             <a:r>
-              <a:rPr sz="1700" b="0">
+              <a:rPr sz="1700" b="0" lang="en-IN">
                 <a:solidFill>
                   <a:srgbClr val="1F2937"/>
                 </a:solidFill>
@@ -11265,6 +11181,7 @@
           <a:lstStyle/>
           <a:p>
             <a:pPr algn="ctr"/>
+            <a:endParaRPr/>
           </a:p>
         </p:txBody>
       </p:sp>
@@ -11309,6 +11226,7 @@
           <a:lstStyle/>
           <a:p>
             <a:pPr algn="ctr"/>
+            <a:endParaRPr/>
           </a:p>
         </p:txBody>
       </p:sp>
@@ -11321,7 +11239,7 @@
           <p:nvPr/>
         </p:nvPicPr>
         <p:blipFill>
-          <a:blip r:embed="rId5"/>
+          <a:blip r:embed="rId6"/>
           <a:stretch>
             <a:fillRect/>
           </a:stretch>
@@ -11353,14 +11271,14 @@
           <a:noFill/>
         </p:spPr>
         <p:txBody>
-          <a:bodyPr wrap="square" anchor="ctr" lIns="45720" rIns="45720" tIns="27432" bIns="27432">
+          <a:bodyPr wrap="square" lIns="45720" tIns="27432" rIns="45720" bIns="27432" anchor="ctr">
             <a:spAutoFit/>
           </a:bodyPr>
           <a:lstStyle/>
           <a:p>
             <a:pPr algn="l"/>
             <a:r>
-              <a:rPr sz="2400" b="1">
+              <a:rPr sz="2400" b="1" lang="en-IN">
                 <a:solidFill>
                   <a:srgbClr val="243B7A"/>
                 </a:solidFill>
@@ -11388,14 +11306,14 @@
           <a:noFill/>
         </p:spPr>
         <p:txBody>
-          <a:bodyPr wrap="square" anchor="t" lIns="45720" rIns="45720" tIns="27432" bIns="27432">
+          <a:bodyPr wrap="square" lIns="45720" tIns="27432" rIns="45720" bIns="27432" anchor="t">
             <a:spAutoFit/>
           </a:bodyPr>
           <a:lstStyle/>
           <a:p>
             <a:pPr algn="l"/>
             <a:r>
-              <a:rPr sz="1700" b="0">
+              <a:rPr sz="1700" b="0" lang="en-IN">
                 <a:solidFill>
                   <a:srgbClr val="1F2937"/>
                 </a:solidFill>
@@ -11423,7 +11341,7 @@
           <a:noFill/>
         </p:spPr>
         <p:txBody>
-          <a:bodyPr wrap="square" anchor="t" lIns="45720" rIns="45720" tIns="27432" bIns="27432">
+          <a:bodyPr wrap="square" lIns="45720" tIns="27432" rIns="45720" bIns="27432" anchor="t">
             <a:spAutoFit/>
           </a:bodyPr>
           <a:lstStyle/>
@@ -11434,7 +11352,7 @@
               </a:spcAft>
             </a:pPr>
             <a:r>
-              <a:rPr sz="1900" b="1">
+              <a:rPr sz="1900" b="1" lang="en-IN">
                 <a:solidFill>
                   <a:srgbClr val="243B7A"/>
                 </a:solidFill>
@@ -11450,7 +11368,7 @@
               </a:spcAft>
             </a:pPr>
             <a:r>
-              <a:rPr sz="1900" b="1">
+              <a:rPr sz="1900" b="1" lang="en-IN">
                 <a:solidFill>
                   <a:srgbClr val="243B7A"/>
                 </a:solidFill>
@@ -11470,7 +11388,7 @@
 </file>
 
 <file path=ppt/slides/slide4.xml><?xml version="1.0" encoding="utf-8"?>
-<p:sld xmlns:a="http://schemas.openxmlformats.org/drawingml/2006/main" xmlns:p="http://schemas.openxmlformats.org/presentationml/2006/main" xmlns:r="http://schemas.openxmlformats.org/officeDocument/2006/relationships">
+<p:sld xmlns:a="http://schemas.openxmlformats.org/drawingml/2006/main" xmlns:r="http://schemas.openxmlformats.org/officeDocument/2006/relationships" xmlns:p="http://schemas.openxmlformats.org/presentationml/2006/main">
   <p:cSld>
     <p:spTree>
       <p:nvGrpSpPr>
@@ -11478,7 +11396,14 @@
         <p:cNvGrpSpPr/>
         <p:nvPr/>
       </p:nvGrpSpPr>
-      <p:grpSpPr/>
+      <p:grpSpPr>
+        <a:xfrm>
+          <a:off x="0" y="0"/>
+          <a:ext cx="0" cy="0"/>
+          <a:chOff x="0" y="0"/>
+          <a:chExt cx="0" cy="0"/>
+        </a:xfrm>
+      </p:grpSpPr>
       <p:sp>
         <p:nvSpPr>
           <p:cNvPr id="2" name="Rectangle 1"/>
@@ -11519,6 +11444,7 @@
           <a:lstStyle/>
           <a:p>
             <a:pPr algn="ctr"/>
+            <a:endParaRPr/>
           </a:p>
         </p:txBody>
       </p:sp>
@@ -11562,14 +11488,17 @@
           <a:lstStyle/>
           <a:p>
             <a:pPr algn="ctr"/>
-          </a:p>
-        </p:txBody>
-      </p:sp>
-      <p:sp>
-        <p:nvSpPr>
-          <p:cNvPr id="4" name="TextBox 3"/>
-          <p:cNvSpPr txBox="1"/>
-          <p:nvPr/>
+            <a:endParaRPr/>
+          </a:p>
+        </p:txBody>
+      </p:sp>
+      <p:sp>
+        <p:nvSpPr>
+          <p:cNvPr id="4" name="Title"/>
+          <p:cNvSpPr/>
+          <p:nvPr>
+            <p:ph type="title"/>
+          </p:nvPr>
         </p:nvSpPr>
         <p:spPr>
           <a:xfrm>
@@ -11582,14 +11511,14 @@
           <a:noFill/>
         </p:spPr>
         <p:txBody>
-          <a:bodyPr wrap="square" anchor="ctr" lIns="45720" rIns="45720" tIns="27432" bIns="27432">
+          <a:bodyPr wrap="square" lIns="45720" tIns="27432" rIns="45720" bIns="27432" anchor="ctr">
             <a:spAutoFit/>
           </a:bodyPr>
           <a:lstStyle/>
           <a:p>
             <a:pPr algn="l"/>
             <a:r>
-              <a:rPr sz="3000" b="1">
+              <a:rPr sz="3000" b="1" lang="en-IN">
                 <a:solidFill>
                   <a:srgbClr val="243B7A"/>
                 </a:solidFill>
@@ -11609,7 +11538,7 @@
           <p:nvPr/>
         </p:nvPicPr>
         <p:blipFill>
-          <a:blip r:embed="rId2"/>
+          <a:blip r:embed="rId3"/>
           <a:stretch>
             <a:fillRect/>
           </a:stretch>
@@ -11641,14 +11570,14 @@
           <a:noFill/>
         </p:spPr>
         <p:txBody>
-          <a:bodyPr wrap="square" anchor="t" lIns="45720" rIns="45720" tIns="27432" bIns="27432">
+          <a:bodyPr wrap="square" lIns="45720" tIns="27432" rIns="45720" bIns="27432" anchor="t">
             <a:spAutoFit/>
           </a:bodyPr>
           <a:lstStyle/>
           <a:p>
             <a:pPr algn="l"/>
             <a:r>
-              <a:rPr sz="1000" b="0">
+              <a:rPr sz="1000" b="0" lang="en-IN">
                 <a:solidFill>
                   <a:srgbClr val="4B5563"/>
                 </a:solidFill>
@@ -11676,14 +11605,14 @@
           <a:noFill/>
         </p:spPr>
         <p:txBody>
-          <a:bodyPr wrap="square" anchor="t" lIns="45720" rIns="45720" tIns="27432" bIns="27432">
+          <a:bodyPr wrap="square" lIns="45720" tIns="27432" rIns="45720" bIns="27432" anchor="t">
             <a:spAutoFit/>
           </a:bodyPr>
           <a:lstStyle/>
           <a:p>
             <a:pPr algn="r"/>
             <a:r>
-              <a:rPr sz="1000" b="0">
+              <a:rPr sz="1000" b="0" lang="en-IN">
                 <a:solidFill>
                   <a:srgbClr val="4B5563"/>
                 </a:solidFill>
@@ -11739,6 +11668,7 @@
           <a:lstStyle/>
           <a:p>
             <a:pPr algn="ctr"/>
+            <a:endParaRPr/>
           </a:p>
         </p:txBody>
       </p:sp>
@@ -11783,6 +11713,7 @@
           <a:lstStyle/>
           <a:p>
             <a:pPr algn="ctr"/>
+            <a:endParaRPr/>
           </a:p>
         </p:txBody>
       </p:sp>
@@ -11795,7 +11726,7 @@
           <p:nvPr/>
         </p:nvPicPr>
         <p:blipFill>
-          <a:blip r:embed="rId3"/>
+          <a:blip r:embed="rId4"/>
           <a:stretch>
             <a:fillRect/>
           </a:stretch>
@@ -11827,14 +11758,14 @@
           <a:noFill/>
         </p:spPr>
         <p:txBody>
-          <a:bodyPr wrap="square" anchor="t" lIns="45720" rIns="45720" tIns="27432" bIns="27432">
+          <a:bodyPr wrap="square" lIns="45720" tIns="27432" rIns="45720" bIns="27432" anchor="t">
             <a:spAutoFit/>
           </a:bodyPr>
           <a:lstStyle/>
           <a:p>
             <a:pPr algn="ctr"/>
             <a:r>
-              <a:rPr sz="1900" b="1">
+              <a:rPr sz="1900" b="1" lang="en-IN">
                 <a:solidFill>
                   <a:srgbClr val="243B7A"/>
                 </a:solidFill>
@@ -11862,14 +11793,14 @@
           <a:noFill/>
         </p:spPr>
         <p:txBody>
-          <a:bodyPr wrap="square" anchor="t" lIns="45720" rIns="45720" tIns="27432" bIns="27432">
+          <a:bodyPr wrap="square" lIns="45720" tIns="27432" rIns="45720" bIns="27432" anchor="t">
             <a:spAutoFit/>
           </a:bodyPr>
           <a:lstStyle/>
           <a:p>
             <a:pPr algn="ctr"/>
             <a:r>
-              <a:rPr sz="1600" b="0">
+              <a:rPr sz="1600" b="0" lang="en-IN">
                 <a:solidFill>
                   <a:srgbClr val="1F2937"/>
                 </a:solidFill>
@@ -11920,6 +11851,7 @@
           <a:lstStyle/>
           <a:p>
             <a:pPr algn="ctr"/>
+            <a:endParaRPr/>
           </a:p>
         </p:txBody>
       </p:sp>
@@ -11968,6 +11900,7 @@
           <a:lstStyle/>
           <a:p>
             <a:pPr algn="ctr"/>
+            <a:endParaRPr/>
           </a:p>
         </p:txBody>
       </p:sp>
@@ -12012,6 +11945,7 @@
           <a:lstStyle/>
           <a:p>
             <a:pPr algn="ctr"/>
+            <a:endParaRPr/>
           </a:p>
         </p:txBody>
       </p:sp>
@@ -12024,7 +11958,7 @@
           <p:nvPr/>
         </p:nvPicPr>
         <p:blipFill>
-          <a:blip r:embed="rId4"/>
+          <a:blip r:embed="rId5"/>
           <a:stretch>
             <a:fillRect/>
           </a:stretch>
@@ -12056,14 +11990,14 @@
           <a:noFill/>
         </p:spPr>
         <p:txBody>
-          <a:bodyPr wrap="square" anchor="t" lIns="45720" rIns="45720" tIns="27432" bIns="27432">
+          <a:bodyPr wrap="square" lIns="45720" tIns="27432" rIns="45720" bIns="27432" anchor="t">
             <a:spAutoFit/>
           </a:bodyPr>
           <a:lstStyle/>
           <a:p>
             <a:pPr algn="ctr"/>
             <a:r>
-              <a:rPr sz="1900" b="1">
+              <a:rPr sz="1900" b="1" lang="en-IN">
                 <a:solidFill>
                   <a:srgbClr val="243B7A"/>
                 </a:solidFill>
@@ -12091,14 +12025,14 @@
           <a:noFill/>
         </p:spPr>
         <p:txBody>
-          <a:bodyPr wrap="square" anchor="t" lIns="45720" rIns="45720" tIns="27432" bIns="27432">
+          <a:bodyPr wrap="square" lIns="45720" tIns="27432" rIns="45720" bIns="27432" anchor="t">
             <a:spAutoFit/>
           </a:bodyPr>
           <a:lstStyle/>
           <a:p>
             <a:pPr algn="ctr"/>
             <a:r>
-              <a:rPr sz="1600" b="0">
+              <a:rPr sz="1600" b="0" lang="en-IN">
                 <a:solidFill>
                   <a:srgbClr val="1F2937"/>
                 </a:solidFill>
@@ -12149,6 +12083,7 @@
           <a:lstStyle/>
           <a:p>
             <a:pPr algn="ctr"/>
+            <a:endParaRPr/>
           </a:p>
         </p:txBody>
       </p:sp>
@@ -12197,6 +12132,7 @@
           <a:lstStyle/>
           <a:p>
             <a:pPr algn="ctr"/>
+            <a:endParaRPr/>
           </a:p>
         </p:txBody>
       </p:sp>
@@ -12241,6 +12177,7 @@
           <a:lstStyle/>
           <a:p>
             <a:pPr algn="ctr"/>
+            <a:endParaRPr/>
           </a:p>
         </p:txBody>
       </p:sp>
@@ -12253,7 +12190,7 @@
           <p:nvPr/>
         </p:nvPicPr>
         <p:blipFill>
-          <a:blip r:embed="rId5"/>
+          <a:blip r:embed="rId6"/>
           <a:stretch>
             <a:fillRect/>
           </a:stretch>
@@ -12285,14 +12222,14 @@
           <a:noFill/>
         </p:spPr>
         <p:txBody>
-          <a:bodyPr wrap="square" anchor="t" lIns="45720" rIns="45720" tIns="27432" bIns="27432">
+          <a:bodyPr wrap="square" lIns="45720" tIns="27432" rIns="45720" bIns="27432" anchor="t">
             <a:spAutoFit/>
           </a:bodyPr>
           <a:lstStyle/>
           <a:p>
             <a:pPr algn="ctr"/>
             <a:r>
-              <a:rPr sz="1900" b="1">
+              <a:rPr sz="1900" b="1" lang="en-IN">
                 <a:solidFill>
                   <a:srgbClr val="243B7A"/>
                 </a:solidFill>
@@ -12320,14 +12257,14 @@
           <a:noFill/>
         </p:spPr>
         <p:txBody>
-          <a:bodyPr wrap="square" anchor="t" lIns="45720" rIns="45720" tIns="27432" bIns="27432">
+          <a:bodyPr wrap="square" lIns="45720" tIns="27432" rIns="45720" bIns="27432" anchor="t">
             <a:spAutoFit/>
           </a:bodyPr>
           <a:lstStyle/>
           <a:p>
             <a:pPr algn="ctr"/>
             <a:r>
-              <a:rPr sz="1600" b="0">
+              <a:rPr sz="1600" b="0" lang="en-IN">
                 <a:solidFill>
                   <a:srgbClr val="1F2937"/>
                 </a:solidFill>
@@ -12378,6 +12315,7 @@
           <a:lstStyle/>
           <a:p>
             <a:pPr algn="ctr"/>
+            <a:endParaRPr/>
           </a:p>
         </p:txBody>
       </p:sp>
@@ -12426,6 +12364,7 @@
           <a:lstStyle/>
           <a:p>
             <a:pPr algn="ctr"/>
+            <a:endParaRPr/>
           </a:p>
         </p:txBody>
       </p:sp>
@@ -12470,6 +12409,7 @@
           <a:lstStyle/>
           <a:p>
             <a:pPr algn="ctr"/>
+            <a:endParaRPr/>
           </a:p>
         </p:txBody>
       </p:sp>
@@ -12482,7 +12422,7 @@
           <p:nvPr/>
         </p:nvPicPr>
         <p:blipFill>
-          <a:blip r:embed="rId6"/>
+          <a:blip r:embed="rId7"/>
           <a:stretch>
             <a:fillRect/>
           </a:stretch>
@@ -12514,14 +12454,14 @@
           <a:noFill/>
         </p:spPr>
         <p:txBody>
-          <a:bodyPr wrap="square" anchor="t" lIns="45720" rIns="45720" tIns="27432" bIns="27432">
+          <a:bodyPr wrap="square" lIns="45720" tIns="27432" rIns="45720" bIns="27432" anchor="t">
             <a:spAutoFit/>
           </a:bodyPr>
           <a:lstStyle/>
           <a:p>
             <a:pPr algn="ctr"/>
             <a:r>
-              <a:rPr sz="1900" b="1">
+              <a:rPr sz="1900" b="1" lang="en-IN">
                 <a:solidFill>
                   <a:srgbClr val="243B7A"/>
                 </a:solidFill>
@@ -12549,14 +12489,14 @@
           <a:noFill/>
         </p:spPr>
         <p:txBody>
-          <a:bodyPr wrap="square" anchor="t" lIns="45720" rIns="45720" tIns="27432" bIns="27432">
+          <a:bodyPr wrap="square" lIns="45720" tIns="27432" rIns="45720" bIns="27432" anchor="t">
             <a:spAutoFit/>
           </a:bodyPr>
           <a:lstStyle/>
           <a:p>
             <a:pPr algn="ctr"/>
             <a:r>
-              <a:rPr sz="1600" b="0">
+              <a:rPr sz="1600" b="0" lang="en-IN">
                 <a:solidFill>
                   <a:srgbClr val="1F2937"/>
                 </a:solidFill>
@@ -12612,6 +12552,7 @@
           <a:lstStyle/>
           <a:p>
             <a:pPr algn="ctr"/>
+            <a:endParaRPr/>
           </a:p>
         </p:txBody>
       </p:sp>
@@ -12632,14 +12573,14 @@
           <a:noFill/>
         </p:spPr>
         <p:txBody>
-          <a:bodyPr wrap="square" anchor="ctr" lIns="45720" rIns="45720" tIns="27432" bIns="27432">
+          <a:bodyPr wrap="square" lIns="45720" tIns="27432" rIns="45720" bIns="27432" anchor="ctr">
             <a:spAutoFit/>
           </a:bodyPr>
           <a:lstStyle/>
           <a:p>
             <a:pPr algn="l"/>
             <a:r>
-              <a:rPr sz="1900" b="1">
+              <a:rPr sz="1900" b="1" lang="en-IN">
                 <a:solidFill>
                   <a:srgbClr val="243B7A"/>
                 </a:solidFill>
@@ -12659,7 +12600,7 @@
 </file>
 
 <file path=ppt/slides/slide5.xml><?xml version="1.0" encoding="utf-8"?>
-<p:sld xmlns:a="http://schemas.openxmlformats.org/drawingml/2006/main" xmlns:p="http://schemas.openxmlformats.org/presentationml/2006/main" xmlns:r="http://schemas.openxmlformats.org/officeDocument/2006/relationships">
+<p:sld xmlns:a="http://schemas.openxmlformats.org/drawingml/2006/main" xmlns:r="http://schemas.openxmlformats.org/officeDocument/2006/relationships" xmlns:p="http://schemas.openxmlformats.org/presentationml/2006/main">
   <p:cSld>
     <p:spTree>
       <p:nvGrpSpPr>
@@ -12667,7 +12608,14 @@
         <p:cNvGrpSpPr/>
         <p:nvPr/>
       </p:nvGrpSpPr>
-      <p:grpSpPr/>
+      <p:grpSpPr>
+        <a:xfrm>
+          <a:off x="0" y="0"/>
+          <a:ext cx="0" cy="0"/>
+          <a:chOff x="0" y="0"/>
+          <a:chExt cx="0" cy="0"/>
+        </a:xfrm>
+      </p:grpSpPr>
       <p:sp>
         <p:nvSpPr>
           <p:cNvPr id="2" name="Rectangle 1"/>
@@ -12708,6 +12656,7 @@
           <a:lstStyle/>
           <a:p>
             <a:pPr algn="ctr"/>
+            <a:endParaRPr/>
           </a:p>
         </p:txBody>
       </p:sp>
@@ -12751,14 +12700,17 @@
           <a:lstStyle/>
           <a:p>
             <a:pPr algn="ctr"/>
-          </a:p>
-        </p:txBody>
-      </p:sp>
-      <p:sp>
-        <p:nvSpPr>
-          <p:cNvPr id="4" name="TextBox 3"/>
-          <p:cNvSpPr txBox="1"/>
-          <p:nvPr/>
+            <a:endParaRPr/>
+          </a:p>
+        </p:txBody>
+      </p:sp>
+      <p:sp>
+        <p:nvSpPr>
+          <p:cNvPr id="4" name="Title"/>
+          <p:cNvSpPr/>
+          <p:nvPr>
+            <p:ph type="title"/>
+          </p:nvPr>
         </p:nvSpPr>
         <p:spPr>
           <a:xfrm>
@@ -12771,14 +12723,14 @@
           <a:noFill/>
         </p:spPr>
         <p:txBody>
-          <a:bodyPr wrap="square" anchor="ctr" lIns="45720" rIns="45720" tIns="27432" bIns="27432">
+          <a:bodyPr wrap="square" lIns="45720" tIns="27432" rIns="45720" bIns="27432" anchor="ctr">
             <a:spAutoFit/>
           </a:bodyPr>
           <a:lstStyle/>
           <a:p>
             <a:pPr algn="l"/>
             <a:r>
-              <a:rPr sz="3000" b="1">
+              <a:rPr sz="3000" b="1" lang="en-IN">
                 <a:solidFill>
                   <a:srgbClr val="243B7A"/>
                 </a:solidFill>
@@ -12798,7 +12750,7 @@
           <p:nvPr/>
         </p:nvPicPr>
         <p:blipFill>
-          <a:blip r:embed="rId2"/>
+          <a:blip r:embed="rId3"/>
           <a:stretch>
             <a:fillRect/>
           </a:stretch>
@@ -12830,14 +12782,14 @@
           <a:noFill/>
         </p:spPr>
         <p:txBody>
-          <a:bodyPr wrap="square" anchor="t" lIns="45720" rIns="45720" tIns="27432" bIns="27432">
+          <a:bodyPr wrap="square" lIns="45720" tIns="27432" rIns="45720" bIns="27432" anchor="t">
             <a:spAutoFit/>
           </a:bodyPr>
           <a:lstStyle/>
           <a:p>
             <a:pPr algn="l"/>
             <a:r>
-              <a:rPr sz="1000" b="0">
+              <a:rPr sz="1000" b="0" lang="en-IN">
                 <a:solidFill>
                   <a:srgbClr val="4B5563"/>
                 </a:solidFill>
@@ -12865,14 +12817,14 @@
           <a:noFill/>
         </p:spPr>
         <p:txBody>
-          <a:bodyPr wrap="square" anchor="t" lIns="45720" rIns="45720" tIns="27432" bIns="27432">
+          <a:bodyPr wrap="square" lIns="45720" tIns="27432" rIns="45720" bIns="27432" anchor="t">
             <a:spAutoFit/>
           </a:bodyPr>
           <a:lstStyle/>
           <a:p>
             <a:pPr algn="r"/>
             <a:r>
-              <a:rPr sz="1000" b="0">
+              <a:rPr sz="1000" b="0" lang="en-IN">
                 <a:solidFill>
                   <a:srgbClr val="4B5563"/>
                 </a:solidFill>
@@ -12900,14 +12852,14 @@
           <a:noFill/>
         </p:spPr>
         <p:txBody>
-          <a:bodyPr wrap="square" anchor="t" lIns="45720" rIns="45720" tIns="27432" bIns="27432">
+          <a:bodyPr wrap="square" lIns="45720" tIns="27432" rIns="45720" bIns="27432" anchor="t">
             <a:spAutoFit/>
           </a:bodyPr>
           <a:lstStyle/>
           <a:p>
             <a:pPr algn="l"/>
             <a:r>
-              <a:rPr sz="1800" b="1">
+              <a:rPr sz="1800" b="1" lang="en-IN">
                 <a:solidFill>
                   <a:srgbClr val="243B7A"/>
                 </a:solidFill>
@@ -12935,7 +12887,7 @@
           <a:noFill/>
         </p:spPr>
         <p:txBody>
-          <a:bodyPr wrap="square" anchor="t" lIns="45720" rIns="45720" tIns="27432" bIns="27432">
+          <a:bodyPr wrap="square" lIns="45720" tIns="27432" rIns="45720" bIns="27432" anchor="t">
             <a:spAutoFit/>
           </a:bodyPr>
           <a:lstStyle/>
@@ -12946,7 +12898,7 @@
               </a:spcAft>
             </a:pPr>
             <a:r>
-              <a:rPr sz="1600" b="0">
+              <a:rPr sz="1600" b="0" lang="en-IN">
                 <a:solidFill>
                   <a:srgbClr val="1F2937"/>
                 </a:solidFill>
@@ -12962,7 +12914,7 @@
               </a:spcAft>
             </a:pPr>
             <a:r>
-              <a:rPr sz="1600" b="0">
+              <a:rPr sz="1600" b="0" lang="en-IN">
                 <a:solidFill>
                   <a:srgbClr val="1F2937"/>
                 </a:solidFill>
@@ -12978,7 +12930,7 @@
               </a:spcAft>
             </a:pPr>
             <a:r>
-              <a:rPr sz="1600" b="0">
+              <a:rPr sz="1600" b="0" lang="en-IN">
                 <a:solidFill>
                   <a:srgbClr val="1F2937"/>
                 </a:solidFill>
@@ -12994,7 +12946,7 @@
               </a:spcAft>
             </a:pPr>
             <a:r>
-              <a:rPr sz="1600" b="0">
+              <a:rPr sz="1600" b="0" lang="en-IN">
                 <a:solidFill>
                   <a:srgbClr val="1F2937"/>
                 </a:solidFill>
@@ -13050,6 +13002,7 @@
           <a:lstStyle/>
           <a:p>
             <a:pPr algn="ctr"/>
+            <a:endParaRPr/>
           </a:p>
         </p:txBody>
       </p:sp>
@@ -13064,7 +13017,7 @@
           <p:nvPr/>
         </p:nvPicPr>
         <p:blipFill>
-          <a:blip r:embed="rId3"/>
+          <a:blip r:embed="rId5"/>
           <a:stretch>
             <a:fillRect/>
           </a:stretch>
@@ -13088,7 +13041,7 @@
 </file>
 
 <file path=ppt/slides/slide6.xml><?xml version="1.0" encoding="utf-8"?>
-<p:sld xmlns:a="http://schemas.openxmlformats.org/drawingml/2006/main" xmlns:p="http://schemas.openxmlformats.org/presentationml/2006/main" xmlns:r="http://schemas.openxmlformats.org/officeDocument/2006/relationships">
+<p:sld xmlns:a="http://schemas.openxmlformats.org/drawingml/2006/main" xmlns:r="http://schemas.openxmlformats.org/officeDocument/2006/relationships" xmlns:p="http://schemas.openxmlformats.org/presentationml/2006/main">
   <p:cSld>
     <p:spTree>
       <p:nvGrpSpPr>
@@ -13096,7 +13049,14 @@
         <p:cNvGrpSpPr/>
         <p:nvPr/>
       </p:nvGrpSpPr>
-      <p:grpSpPr/>
+      <p:grpSpPr>
+        <a:xfrm>
+          <a:off x="0" y="0"/>
+          <a:ext cx="0" cy="0"/>
+          <a:chOff x="0" y="0"/>
+          <a:chExt cx="0" cy="0"/>
+        </a:xfrm>
+      </p:grpSpPr>
       <p:sp>
         <p:nvSpPr>
           <p:cNvPr id="2" name="Rectangle 1"/>
@@ -13137,6 +13097,7 @@
           <a:lstStyle/>
           <a:p>
             <a:pPr algn="ctr"/>
+            <a:endParaRPr/>
           </a:p>
         </p:txBody>
       </p:sp>
@@ -13180,14 +13141,17 @@
           <a:lstStyle/>
           <a:p>
             <a:pPr algn="ctr"/>
-          </a:p>
-        </p:txBody>
-      </p:sp>
-      <p:sp>
-        <p:nvSpPr>
-          <p:cNvPr id="4" name="TextBox 3"/>
-          <p:cNvSpPr txBox="1"/>
-          <p:nvPr/>
+            <a:endParaRPr/>
+          </a:p>
+        </p:txBody>
+      </p:sp>
+      <p:sp>
+        <p:nvSpPr>
+          <p:cNvPr id="4" name="Title"/>
+          <p:cNvSpPr/>
+          <p:nvPr>
+            <p:ph type="title"/>
+          </p:nvPr>
         </p:nvSpPr>
         <p:spPr>
           <a:xfrm>
@@ -13200,14 +13164,14 @@
           <a:noFill/>
         </p:spPr>
         <p:txBody>
-          <a:bodyPr wrap="square" anchor="ctr" lIns="45720" rIns="45720" tIns="27432" bIns="27432">
+          <a:bodyPr wrap="square" lIns="45720" tIns="27432" rIns="45720" bIns="27432" anchor="ctr">
             <a:spAutoFit/>
           </a:bodyPr>
           <a:lstStyle/>
           <a:p>
             <a:pPr algn="l"/>
             <a:r>
-              <a:rPr sz="3000" b="1">
+              <a:rPr sz="3000" b="1" lang="en-IN">
                 <a:solidFill>
                   <a:srgbClr val="243B7A"/>
                 </a:solidFill>
@@ -13227,7 +13191,7 @@
           <p:nvPr/>
         </p:nvPicPr>
         <p:blipFill>
-          <a:blip r:embed="rId2"/>
+          <a:blip r:embed="rId3"/>
           <a:stretch>
             <a:fillRect/>
           </a:stretch>
@@ -13259,14 +13223,14 @@
           <a:noFill/>
         </p:spPr>
         <p:txBody>
-          <a:bodyPr wrap="square" anchor="t" lIns="45720" rIns="45720" tIns="27432" bIns="27432">
+          <a:bodyPr wrap="square" lIns="45720" tIns="27432" rIns="45720" bIns="27432" anchor="t">
             <a:spAutoFit/>
           </a:bodyPr>
           <a:lstStyle/>
           <a:p>
             <a:pPr algn="l"/>
             <a:r>
-              <a:rPr sz="1000" b="0">
+              <a:rPr sz="1000" b="0" lang="en-IN">
                 <a:solidFill>
                   <a:srgbClr val="4B5563"/>
                 </a:solidFill>
@@ -13294,14 +13258,14 @@
           <a:noFill/>
         </p:spPr>
         <p:txBody>
-          <a:bodyPr wrap="square" anchor="t" lIns="45720" rIns="45720" tIns="27432" bIns="27432">
+          <a:bodyPr wrap="square" lIns="45720" tIns="27432" rIns="45720" bIns="27432" anchor="t">
             <a:spAutoFit/>
           </a:bodyPr>
           <a:lstStyle/>
           <a:p>
             <a:pPr algn="r"/>
             <a:r>
-              <a:rPr sz="1000" b="0">
+              <a:rPr sz="1000" b="0" lang="en-IN">
                 <a:solidFill>
                   <a:srgbClr val="4B5563"/>
                 </a:solidFill>
@@ -13357,6 +13321,7 @@
           <a:lstStyle/>
           <a:p>
             <a:pPr algn="ctr"/>
+            <a:endParaRPr/>
           </a:p>
         </p:txBody>
       </p:sp>
@@ -13371,7 +13336,7 @@
           <p:nvPr/>
         </p:nvPicPr>
         <p:blipFill>
-          <a:blip r:embed="rId3"/>
+          <a:blip r:embed="rId5"/>
           <a:stretch>
             <a:fillRect/>
           </a:stretch>
@@ -13431,6 +13396,7 @@
           <a:lstStyle/>
           <a:p>
             <a:pPr algn="ctr"/>
+            <a:endParaRPr/>
           </a:p>
         </p:txBody>
       </p:sp>
@@ -13445,7 +13411,7 @@
           <p:nvPr/>
         </p:nvPicPr>
         <p:blipFill>
-          <a:blip r:embed="rId5"/>
+          <a:blip r:embed="rId7"/>
           <a:stretch>
             <a:fillRect/>
           </a:stretch>
@@ -13477,14 +13443,14 @@
           <a:noFill/>
         </p:spPr>
         <p:txBody>
-          <a:bodyPr wrap="square" anchor="t" lIns="45720" rIns="45720" tIns="27432" bIns="27432">
+          <a:bodyPr wrap="square" lIns="45720" tIns="27432" rIns="45720" bIns="27432" anchor="t">
             <a:spAutoFit/>
           </a:bodyPr>
           <a:lstStyle/>
           <a:p>
             <a:pPr algn="l"/>
             <a:r>
-              <a:rPr sz="1500" b="1">
+              <a:rPr sz="1500" b="1" lang="en-IN">
                 <a:solidFill>
                   <a:srgbClr val="243B7A"/>
                 </a:solidFill>
@@ -13512,14 +13478,14 @@
           <a:noFill/>
         </p:spPr>
         <p:txBody>
-          <a:bodyPr wrap="square" anchor="t" lIns="45720" rIns="45720" tIns="27432" bIns="27432">
+          <a:bodyPr wrap="square" lIns="45720" tIns="27432" rIns="45720" bIns="27432" anchor="t">
             <a:spAutoFit/>
           </a:bodyPr>
           <a:lstStyle/>
           <a:p>
             <a:pPr algn="l"/>
             <a:r>
-              <a:rPr sz="1500" b="1">
+              <a:rPr sz="1500" b="1" lang="en-IN">
                 <a:solidFill>
                   <a:srgbClr val="243B7A"/>
                 </a:solidFill>
@@ -13547,14 +13513,14 @@
           <a:noFill/>
         </p:spPr>
         <p:txBody>
-          <a:bodyPr wrap="square" anchor="t" lIns="45720" rIns="45720" tIns="27432" bIns="27432">
+          <a:bodyPr wrap="square" lIns="45720" tIns="27432" rIns="45720" bIns="27432" anchor="t">
             <a:spAutoFit/>
           </a:bodyPr>
           <a:lstStyle/>
           <a:p>
             <a:pPr algn="l"/>
             <a:r>
-              <a:rPr sz="1600" b="0">
+              <a:rPr sz="1600" b="0" lang="en-IN">
                 <a:solidFill>
                   <a:srgbClr val="1F2937"/>
                 </a:solidFill>
@@ -13582,14 +13548,14 @@
           <a:noFill/>
         </p:spPr>
         <p:txBody>
-          <a:bodyPr wrap="square" anchor="t" lIns="45720" rIns="45720" tIns="27432" bIns="27432">
+          <a:bodyPr wrap="square" lIns="45720" tIns="27432" rIns="45720" bIns="27432" anchor="t">
             <a:spAutoFit/>
           </a:bodyPr>
           <a:lstStyle/>
           <a:p>
             <a:pPr algn="l"/>
             <a:r>
-              <a:rPr sz="1600" b="0">
+              <a:rPr sz="1600" b="0" lang="en-IN">
                 <a:solidFill>
                   <a:srgbClr val="1F2937"/>
                 </a:solidFill>
@@ -13609,7 +13575,7 @@
 </file>
 
 <file path=ppt/slides/slide7.xml><?xml version="1.0" encoding="utf-8"?>
-<p:sld xmlns:a="http://schemas.openxmlformats.org/drawingml/2006/main" xmlns:p="http://schemas.openxmlformats.org/presentationml/2006/main" xmlns:r="http://schemas.openxmlformats.org/officeDocument/2006/relationships">
+<p:sld xmlns:a="http://schemas.openxmlformats.org/drawingml/2006/main" xmlns:r="http://schemas.openxmlformats.org/officeDocument/2006/relationships" xmlns:p="http://schemas.openxmlformats.org/presentationml/2006/main">
   <p:cSld>
     <p:spTree>
       <p:nvGrpSpPr>
@@ -13617,7 +13583,14 @@
         <p:cNvGrpSpPr/>
         <p:nvPr/>
       </p:nvGrpSpPr>
-      <p:grpSpPr/>
+      <p:grpSpPr>
+        <a:xfrm>
+          <a:off x="0" y="0"/>
+          <a:ext cx="0" cy="0"/>
+          <a:chOff x="0" y="0"/>
+          <a:chExt cx="0" cy="0"/>
+        </a:xfrm>
+      </p:grpSpPr>
       <p:sp>
         <p:nvSpPr>
           <p:cNvPr id="2" name="Rectangle 1"/>
@@ -13658,6 +13631,7 @@
           <a:lstStyle/>
           <a:p>
             <a:pPr algn="ctr"/>
+            <a:endParaRPr/>
           </a:p>
         </p:txBody>
       </p:sp>
@@ -13701,14 +13675,17 @@
           <a:lstStyle/>
           <a:p>
             <a:pPr algn="ctr"/>
-          </a:p>
-        </p:txBody>
-      </p:sp>
-      <p:sp>
-        <p:nvSpPr>
-          <p:cNvPr id="4" name="TextBox 3"/>
-          <p:cNvSpPr txBox="1"/>
-          <p:nvPr/>
+            <a:endParaRPr/>
+          </a:p>
+        </p:txBody>
+      </p:sp>
+      <p:sp>
+        <p:nvSpPr>
+          <p:cNvPr id="4" name="Title"/>
+          <p:cNvSpPr/>
+          <p:nvPr>
+            <p:ph type="title"/>
+          </p:nvPr>
         </p:nvSpPr>
         <p:spPr>
           <a:xfrm>
@@ -13721,14 +13698,14 @@
           <a:noFill/>
         </p:spPr>
         <p:txBody>
-          <a:bodyPr wrap="square" anchor="ctr" lIns="45720" rIns="45720" tIns="27432" bIns="27432">
+          <a:bodyPr wrap="square" lIns="45720" tIns="27432" rIns="45720" bIns="27432" anchor="ctr">
             <a:spAutoFit/>
           </a:bodyPr>
           <a:lstStyle/>
           <a:p>
             <a:pPr algn="l"/>
             <a:r>
-              <a:rPr sz="3000" b="1">
+              <a:rPr sz="3000" b="1" lang="en-IN">
                 <a:solidFill>
                   <a:srgbClr val="243B7A"/>
                 </a:solidFill>
@@ -13748,7 +13725,7 @@
           <p:nvPr/>
         </p:nvPicPr>
         <p:blipFill>
-          <a:blip r:embed="rId2"/>
+          <a:blip r:embed="rId3"/>
           <a:stretch>
             <a:fillRect/>
           </a:stretch>
@@ -13780,14 +13757,14 @@
           <a:noFill/>
         </p:spPr>
         <p:txBody>
-          <a:bodyPr wrap="square" anchor="t" lIns="45720" rIns="45720" tIns="27432" bIns="27432">
+          <a:bodyPr wrap="square" lIns="45720" tIns="27432" rIns="45720" bIns="27432" anchor="t">
             <a:spAutoFit/>
           </a:bodyPr>
           <a:lstStyle/>
           <a:p>
             <a:pPr algn="l"/>
             <a:r>
-              <a:rPr sz="1000" b="0">
+              <a:rPr sz="1000" b="0" lang="en-IN">
                 <a:solidFill>
                   <a:srgbClr val="4B5563"/>
                 </a:solidFill>
@@ -13815,14 +13792,14 @@
           <a:noFill/>
         </p:spPr>
         <p:txBody>
-          <a:bodyPr wrap="square" anchor="t" lIns="45720" rIns="45720" tIns="27432" bIns="27432">
+          <a:bodyPr wrap="square" lIns="45720" tIns="27432" rIns="45720" bIns="27432" anchor="t">
             <a:spAutoFit/>
           </a:bodyPr>
           <a:lstStyle/>
           <a:p>
             <a:pPr algn="r"/>
             <a:r>
-              <a:rPr sz="1000" b="0">
+              <a:rPr sz="1000" b="0" lang="en-IN">
                 <a:solidFill>
                   <a:srgbClr val="4B5563"/>
                 </a:solidFill>
@@ -13850,14 +13827,14 @@
           <a:noFill/>
         </p:spPr>
         <p:txBody>
-          <a:bodyPr wrap="square" anchor="t" lIns="45720" rIns="45720" tIns="27432" bIns="27432">
+          <a:bodyPr wrap="square" lIns="45720" tIns="27432" rIns="45720" bIns="27432" anchor="t">
             <a:spAutoFit/>
           </a:bodyPr>
           <a:lstStyle/>
           <a:p>
             <a:pPr algn="l"/>
             <a:r>
-              <a:rPr sz="1800" b="1">
+              <a:rPr sz="1800" b="1" lang="en-IN">
                 <a:solidFill>
                   <a:srgbClr val="243B7A"/>
                 </a:solidFill>
@@ -13885,7 +13862,7 @@
           <a:noFill/>
         </p:spPr>
         <p:txBody>
-          <a:bodyPr wrap="square" anchor="t" lIns="45720" rIns="45720" tIns="27432" bIns="27432">
+          <a:bodyPr wrap="square" lIns="45720" tIns="27432" rIns="45720" bIns="27432" anchor="t">
             <a:spAutoFit/>
           </a:bodyPr>
           <a:lstStyle/>
@@ -13896,7 +13873,7 @@
               </a:spcAft>
             </a:pPr>
             <a:r>
-              <a:rPr sz="1600" b="0">
+              <a:rPr sz="1600" b="0" lang="en-IN">
                 <a:solidFill>
                   <a:srgbClr val="1F2937"/>
                 </a:solidFill>
@@ -13912,7 +13889,7 @@
               </a:spcAft>
             </a:pPr>
             <a:r>
-              <a:rPr sz="1600" b="0">
+              <a:rPr sz="1600" b="0" lang="en-IN">
                 <a:solidFill>
                   <a:srgbClr val="1F2937"/>
                 </a:solidFill>
@@ -13928,7 +13905,7 @@
               </a:spcAft>
             </a:pPr>
             <a:r>
-              <a:rPr sz="1600" b="0">
+              <a:rPr sz="1600" b="0" lang="en-IN">
                 <a:solidFill>
                   <a:srgbClr val="1F2937"/>
                 </a:solidFill>
@@ -13944,7 +13921,7 @@
               </a:spcAft>
             </a:pPr>
             <a:r>
-              <a:rPr sz="1600" b="0">
+              <a:rPr sz="1600" b="0" lang="en-IN">
                 <a:solidFill>
                   <a:srgbClr val="1F2937"/>
                 </a:solidFill>
@@ -14000,6 +13977,7 @@
           <a:lstStyle/>
           <a:p>
             <a:pPr algn="ctr"/>
+            <a:endParaRPr/>
           </a:p>
         </p:txBody>
       </p:sp>
@@ -14014,7 +13992,7 @@
           <p:nvPr/>
         </p:nvPicPr>
         <p:blipFill>
-          <a:blip r:embed="rId3"/>
+          <a:blip r:embed="rId5"/>
           <a:stretch>
             <a:fillRect/>
           </a:stretch>
@@ -14038,7 +14016,7 @@
 </file>
 
 <file path=ppt/slides/slide8.xml><?xml version="1.0" encoding="utf-8"?>
-<p:sld xmlns:a="http://schemas.openxmlformats.org/drawingml/2006/main" xmlns:p="http://schemas.openxmlformats.org/presentationml/2006/main" xmlns:r="http://schemas.openxmlformats.org/officeDocument/2006/relationships">
+<p:sld xmlns:a="http://schemas.openxmlformats.org/drawingml/2006/main" xmlns:r="http://schemas.openxmlformats.org/officeDocument/2006/relationships" xmlns:p="http://schemas.openxmlformats.org/presentationml/2006/main">
   <p:cSld>
     <p:spTree>
       <p:nvGrpSpPr>
@@ -14046,7 +14024,14 @@
         <p:cNvGrpSpPr/>
         <p:nvPr/>
       </p:nvGrpSpPr>
-      <p:grpSpPr/>
+      <p:grpSpPr>
+        <a:xfrm>
+          <a:off x="0" y="0"/>
+          <a:ext cx="0" cy="0"/>
+          <a:chOff x="0" y="0"/>
+          <a:chExt cx="0" cy="0"/>
+        </a:xfrm>
+      </p:grpSpPr>
       <p:sp>
         <p:nvSpPr>
           <p:cNvPr id="2" name="Rectangle 1"/>
@@ -14087,6 +14072,7 @@
           <a:lstStyle/>
           <a:p>
             <a:pPr algn="ctr"/>
+            <a:endParaRPr/>
           </a:p>
         </p:txBody>
       </p:sp>
@@ -14130,14 +14116,17 @@
           <a:lstStyle/>
           <a:p>
             <a:pPr algn="ctr"/>
-          </a:p>
-        </p:txBody>
-      </p:sp>
-      <p:sp>
-        <p:nvSpPr>
-          <p:cNvPr id="4" name="TextBox 3"/>
-          <p:cNvSpPr txBox="1"/>
-          <p:nvPr/>
+            <a:endParaRPr/>
+          </a:p>
+        </p:txBody>
+      </p:sp>
+      <p:sp>
+        <p:nvSpPr>
+          <p:cNvPr id="4" name="Title"/>
+          <p:cNvSpPr/>
+          <p:nvPr>
+            <p:ph type="title"/>
+          </p:nvPr>
         </p:nvSpPr>
         <p:spPr>
           <a:xfrm>
@@ -14150,14 +14139,14 @@
           <a:noFill/>
         </p:spPr>
         <p:txBody>
-          <a:bodyPr wrap="square" anchor="ctr" lIns="45720" rIns="45720" tIns="27432" bIns="27432">
+          <a:bodyPr wrap="square" lIns="45720" tIns="27432" rIns="45720" bIns="27432" anchor="ctr">
             <a:spAutoFit/>
           </a:bodyPr>
           <a:lstStyle/>
           <a:p>
             <a:pPr algn="l"/>
             <a:r>
-              <a:rPr sz="3000" b="1">
+              <a:rPr sz="3000" b="1" lang="en-IN">
                 <a:solidFill>
                   <a:srgbClr val="243B7A"/>
                 </a:solidFill>
@@ -14177,7 +14166,7 @@
           <p:nvPr/>
         </p:nvPicPr>
         <p:blipFill>
-          <a:blip r:embed="rId2"/>
+          <a:blip r:embed="rId3"/>
           <a:stretch>
             <a:fillRect/>
           </a:stretch>
@@ -14209,14 +14198,14 @@
           <a:noFill/>
         </p:spPr>
         <p:txBody>
-          <a:bodyPr wrap="square" anchor="t" lIns="45720" rIns="45720" tIns="27432" bIns="27432">
+          <a:bodyPr wrap="square" lIns="45720" tIns="27432" rIns="45720" bIns="27432" anchor="t">
             <a:spAutoFit/>
           </a:bodyPr>
           <a:lstStyle/>
           <a:p>
             <a:pPr algn="l"/>
             <a:r>
-              <a:rPr sz="1000" b="0">
+              <a:rPr sz="1000" b="0" lang="en-IN">
                 <a:solidFill>
                   <a:srgbClr val="4B5563"/>
                 </a:solidFill>
@@ -14244,14 +14233,14 @@
           <a:noFill/>
         </p:spPr>
         <p:txBody>
-          <a:bodyPr wrap="square" anchor="t" lIns="45720" rIns="45720" tIns="27432" bIns="27432">
+          <a:bodyPr wrap="square" lIns="45720" tIns="27432" rIns="45720" bIns="27432" anchor="t">
             <a:spAutoFit/>
           </a:bodyPr>
           <a:lstStyle/>
           <a:p>
             <a:pPr algn="r"/>
             <a:r>
-              <a:rPr sz="1000" b="0">
+              <a:rPr sz="1000" b="0" lang="en-IN">
                 <a:solidFill>
                   <a:srgbClr val="4B5563"/>
                 </a:solidFill>
@@ -14307,6 +14296,7 @@
           <a:lstStyle/>
           <a:p>
             <a:pPr algn="ctr"/>
+            <a:endParaRPr/>
           </a:p>
         </p:txBody>
       </p:sp>
@@ -14351,6 +14341,7 @@
           <a:lstStyle/>
           <a:p>
             <a:pPr algn="ctr"/>
+            <a:endParaRPr/>
           </a:p>
         </p:txBody>
       </p:sp>
@@ -14363,7 +14354,7 @@
           <p:nvPr/>
         </p:nvPicPr>
         <p:blipFill>
-          <a:blip r:embed="rId3"/>
+          <a:blip r:embed="rId4"/>
           <a:stretch>
             <a:fillRect/>
           </a:stretch>
@@ -14395,14 +14386,14 @@
           <a:noFill/>
         </p:spPr>
         <p:txBody>
-          <a:bodyPr wrap="square" anchor="ctr" lIns="45720" rIns="45720" tIns="27432" bIns="27432">
+          <a:bodyPr wrap="square" lIns="45720" tIns="27432" rIns="45720" bIns="27432" anchor="ctr">
             <a:spAutoFit/>
           </a:bodyPr>
           <a:lstStyle/>
           <a:p>
             <a:pPr algn="l"/>
             <a:r>
-              <a:rPr sz="3400" b="1">
+              <a:rPr sz="3400" b="1" lang="en-IN">
                 <a:solidFill>
                   <a:srgbClr val="243B7A"/>
                 </a:solidFill>
@@ -14410,6 +14401,15 @@
               </a:rPr>
               <a:t>9,322</a:t>
             </a:r>
+            <a:r>
+              <a:rPr sz="1800" b="0" lang="en-IN">
+                <a:solidFill>
+                  <a:srgbClr val="243B7A"/>
+                </a:solidFill>
+                <a:latin typeface="Calibri"/>
+              </a:rPr>
+              <a:t> records</a:t>
+            </a:r>
           </a:p>
         </p:txBody>
       </p:sp>
@@ -14430,14 +14430,14 @@
           <a:noFill/>
         </p:spPr>
         <p:txBody>
-          <a:bodyPr wrap="square" anchor="t" lIns="45720" rIns="45720" tIns="27432" bIns="27432">
+          <a:bodyPr wrap="square" lIns="45720" tIns="27432" rIns="45720" bIns="27432" anchor="t">
             <a:spAutoFit/>
           </a:bodyPr>
           <a:lstStyle/>
           <a:p>
             <a:pPr algn="l"/>
             <a:r>
-              <a:rPr sz="1400" b="0">
+              <a:rPr sz="1400" b="0" lang="en-IN">
                 <a:solidFill>
                   <a:srgbClr val="1F2937"/>
                 </a:solidFill>
@@ -14493,6 +14493,7 @@
           <a:lstStyle/>
           <a:p>
             <a:pPr algn="ctr"/>
+            <a:endParaRPr/>
           </a:p>
         </p:txBody>
       </p:sp>
@@ -14537,6 +14538,7 @@
           <a:lstStyle/>
           <a:p>
             <a:pPr algn="ctr"/>
+            <a:endParaRPr/>
           </a:p>
         </p:txBody>
       </p:sp>
@@ -14549,7 +14551,7 @@
           <p:nvPr/>
         </p:nvPicPr>
         <p:blipFill>
-          <a:blip r:embed="rId4"/>
+          <a:blip r:embed="rId5"/>
           <a:stretch>
             <a:fillRect/>
           </a:stretch>
@@ -14581,14 +14583,14 @@
           <a:noFill/>
         </p:spPr>
         <p:txBody>
-          <a:bodyPr wrap="square" anchor="ctr" lIns="45720" rIns="45720" tIns="27432" bIns="27432">
+          <a:bodyPr wrap="square" lIns="45720" tIns="27432" rIns="45720" bIns="27432" anchor="ctr">
             <a:spAutoFit/>
           </a:bodyPr>
           <a:lstStyle/>
           <a:p>
             <a:pPr algn="l"/>
             <a:r>
-              <a:rPr sz="3400" b="1">
+              <a:rPr sz="3400" b="1" lang="en-IN">
                 <a:solidFill>
                   <a:srgbClr val="243B7A"/>
                 </a:solidFill>
@@ -14596,6 +14598,15 @@
               </a:rPr>
               <a:t>28,405</a:t>
             </a:r>
+            <a:r>
+              <a:rPr sz="1800" b="0" lang="en-IN">
+                <a:solidFill>
+                  <a:srgbClr val="243B7A"/>
+                </a:solidFill>
+                <a:latin typeface="Calibri"/>
+              </a:rPr>
+              <a:t> shops</a:t>
+            </a:r>
           </a:p>
         </p:txBody>
       </p:sp>
@@ -14616,14 +14627,14 @@
           <a:noFill/>
         </p:spPr>
         <p:txBody>
-          <a:bodyPr wrap="square" anchor="t" lIns="45720" rIns="45720" tIns="27432" bIns="27432">
+          <a:bodyPr wrap="square" lIns="45720" tIns="27432" rIns="45720" bIns="27432" anchor="t">
             <a:spAutoFit/>
           </a:bodyPr>
           <a:lstStyle/>
           <a:p>
             <a:pPr algn="l"/>
             <a:r>
-              <a:rPr sz="1400" b="0">
+              <a:rPr sz="1400" b="0" lang="en-IN">
                 <a:solidFill>
                   <a:srgbClr val="1F2937"/>
                 </a:solidFill>
@@ -14679,6 +14690,7 @@
           <a:lstStyle/>
           <a:p>
             <a:pPr algn="ctr"/>
+            <a:endParaRPr/>
           </a:p>
         </p:txBody>
       </p:sp>
@@ -14723,6 +14735,7 @@
           <a:lstStyle/>
           <a:p>
             <a:pPr algn="ctr"/>
+            <a:endParaRPr/>
           </a:p>
         </p:txBody>
       </p:sp>
@@ -14735,7 +14748,7 @@
           <p:nvPr/>
         </p:nvPicPr>
         <p:blipFill>
-          <a:blip r:embed="rId5"/>
+          <a:blip r:embed="rId6"/>
           <a:stretch>
             <a:fillRect/>
           </a:stretch>
@@ -14758,8 +14771,8 @@
         </p:nvSpPr>
         <p:spPr>
           <a:xfrm>
-            <a:off x="9052559" y="1554480"/>
-            <a:ext cx="2377440" cy="731520"/>
+            <a:off x="9052559" y="1630930"/>
+            <a:ext cx="2377440" cy="578620"/>
           </a:xfrm>
           <a:prstGeom prst="rect">
             <a:avLst/>
@@ -14767,14 +14780,14 @@
           <a:noFill/>
         </p:spPr>
         <p:txBody>
-          <a:bodyPr wrap="square" anchor="ctr" lIns="45720" rIns="45720" tIns="27432" bIns="27432">
+          <a:bodyPr wrap="square" lIns="45720" tIns="27432" rIns="45720" bIns="27432" anchor="ctr">
             <a:spAutoFit/>
           </a:bodyPr>
           <a:lstStyle/>
           <a:p>
             <a:pPr algn="l"/>
             <a:r>
-              <a:rPr sz="3400" b="1">
+              <a:rPr sz="3400" b="1" dirty="0" lang="en-IN">
                 <a:solidFill>
                   <a:srgbClr val="243B7A"/>
                 </a:solidFill>
@@ -14782,6 +14795,21 @@
               </a:rPr>
               <a:t>3,455</a:t>
             </a:r>
+            <a:r>
+              <a:rPr lang="en-IN" sz="1800" b="0" dirty="0">
+                <a:solidFill>
+                  <a:srgbClr val="243B7A"/>
+                </a:solidFill>
+                <a:latin typeface="Calibri"/>
+              </a:rPr>
+              <a:t> records</a:t>
+            </a:r>
+            <a:endParaRPr sz="3400" b="1" dirty="0">
+              <a:solidFill>
+                <a:srgbClr val="243B7A"/>
+              </a:solidFill>
+              <a:latin typeface="Calibri"/>
+            </a:endParaRPr>
           </a:p>
         </p:txBody>
       </p:sp>
@@ -14802,14 +14830,14 @@
           <a:noFill/>
         </p:spPr>
         <p:txBody>
-          <a:bodyPr wrap="square" anchor="t" lIns="45720" rIns="45720" tIns="27432" bIns="27432">
+          <a:bodyPr wrap="square" lIns="45720" tIns="27432" rIns="45720" bIns="27432" anchor="t">
             <a:spAutoFit/>
           </a:bodyPr>
           <a:lstStyle/>
           <a:p>
             <a:pPr algn="l"/>
             <a:r>
-              <a:rPr sz="1400" b="0">
+              <a:rPr sz="1400" b="0" lang="en-IN">
                 <a:solidFill>
                   <a:srgbClr val="1F2937"/>
                 </a:solidFill>
@@ -14865,6 +14893,7 @@
           <a:lstStyle/>
           <a:p>
             <a:pPr algn="ctr"/>
+            <a:endParaRPr/>
           </a:p>
         </p:txBody>
       </p:sp>
@@ -14909,6 +14938,7 @@
           <a:lstStyle/>
           <a:p>
             <a:pPr algn="ctr"/>
+            <a:endParaRPr/>
           </a:p>
         </p:txBody>
       </p:sp>
@@ -14921,7 +14951,7 @@
           <p:nvPr/>
         </p:nvPicPr>
         <p:blipFill>
-          <a:blip r:embed="rId6"/>
+          <a:blip r:embed="rId7"/>
           <a:stretch>
             <a:fillRect/>
           </a:stretch>
@@ -14953,14 +14983,14 @@
           <a:noFill/>
         </p:spPr>
         <p:txBody>
-          <a:bodyPr wrap="square" anchor="ctr" lIns="45720" rIns="45720" tIns="27432" bIns="27432">
+          <a:bodyPr wrap="square" lIns="45720" tIns="27432" rIns="45720" bIns="27432" anchor="ctr">
             <a:spAutoFit/>
           </a:bodyPr>
           <a:lstStyle/>
           <a:p>
             <a:pPr algn="l"/>
             <a:r>
-              <a:rPr sz="3400" b="1">
+              <a:rPr sz="3400" b="1" lang="en-IN">
                 <a:solidFill>
                   <a:srgbClr val="243B7A"/>
                 </a:solidFill>
@@ -14968,6 +14998,15 @@
               </a:rPr>
               <a:t>3,812</a:t>
             </a:r>
+            <a:r>
+              <a:rPr sz="1800" b="0" lang="en-IN">
+                <a:solidFill>
+                  <a:srgbClr val="243B7A"/>
+                </a:solidFill>
+                <a:latin typeface="Calibri"/>
+              </a:rPr>
+              <a:t> records</a:t>
+            </a:r>
           </a:p>
         </p:txBody>
       </p:sp>
@@ -14988,14 +15027,14 @@
           <a:noFill/>
         </p:spPr>
         <p:txBody>
-          <a:bodyPr wrap="square" anchor="t" lIns="45720" rIns="45720" tIns="27432" bIns="27432">
+          <a:bodyPr wrap="square" lIns="45720" tIns="27432" rIns="45720" bIns="27432" anchor="t">
             <a:spAutoFit/>
           </a:bodyPr>
           <a:lstStyle/>
           <a:p>
             <a:pPr algn="l"/>
             <a:r>
-              <a:rPr sz="1400" b="0">
+              <a:rPr sz="1400" b="0" dirty="0" lang="en-IN">
                 <a:solidFill>
                   <a:srgbClr val="1F2937"/>
                 </a:solidFill>
@@ -15051,6 +15090,7 @@
           <a:lstStyle/>
           <a:p>
             <a:pPr algn="ctr"/>
+            <a:endParaRPr/>
           </a:p>
         </p:txBody>
       </p:sp>
@@ -15095,6 +15135,7 @@
           <a:lstStyle/>
           <a:p>
             <a:pPr algn="ctr"/>
+            <a:endParaRPr/>
           </a:p>
         </p:txBody>
       </p:sp>
@@ -15107,7 +15148,7 @@
           <p:nvPr/>
         </p:nvPicPr>
         <p:blipFill>
-          <a:blip r:embed="rId7"/>
+          <a:blip r:embed="rId8"/>
           <a:stretch>
             <a:fillRect/>
           </a:stretch>
@@ -15139,14 +15180,14 @@
           <a:noFill/>
         </p:spPr>
         <p:txBody>
-          <a:bodyPr wrap="square" anchor="ctr" lIns="45720" rIns="45720" tIns="27432" bIns="27432">
+          <a:bodyPr wrap="square" lIns="45720" tIns="27432" rIns="45720" bIns="27432" anchor="ctr">
             <a:spAutoFit/>
           </a:bodyPr>
           <a:lstStyle/>
           <a:p>
             <a:pPr algn="l"/>
             <a:r>
-              <a:rPr sz="3400" b="1">
+              <a:rPr sz="3400" b="1" dirty="0" lang="en-IN">
                 <a:solidFill>
                   <a:srgbClr val="243B7A"/>
                 </a:solidFill>
@@ -15154,6 +15195,15 @@
               </a:rPr>
               <a:t>11,124</a:t>
             </a:r>
+            <a:r>
+              <a:rPr sz="1800" b="0" dirty="0" lang="en-IN">
+                <a:solidFill>
+                  <a:srgbClr val="243B7A"/>
+                </a:solidFill>
+                <a:latin typeface="Calibri"/>
+              </a:rPr>
+              <a:t> records</a:t>
+            </a:r>
           </a:p>
         </p:txBody>
       </p:sp>
@@ -15174,14 +15224,14 @@
           <a:noFill/>
         </p:spPr>
         <p:txBody>
-          <a:bodyPr wrap="square" anchor="t" lIns="45720" rIns="45720" tIns="27432" bIns="27432">
+          <a:bodyPr wrap="square" lIns="45720" tIns="27432" rIns="45720" bIns="27432" anchor="t">
             <a:spAutoFit/>
           </a:bodyPr>
           <a:lstStyle/>
           <a:p>
             <a:pPr algn="l"/>
             <a:r>
-              <a:rPr sz="1400" b="0">
+              <a:rPr sz="1400" b="0" lang="en-IN">
                 <a:solidFill>
                   <a:srgbClr val="1F2937"/>
                 </a:solidFill>
@@ -15237,6 +15287,7 @@
           <a:lstStyle/>
           <a:p>
             <a:pPr algn="ctr"/>
+            <a:endParaRPr/>
           </a:p>
         </p:txBody>
       </p:sp>
@@ -15281,6 +15332,7 @@
           <a:lstStyle/>
           <a:p>
             <a:pPr algn="ctr"/>
+            <a:endParaRPr/>
           </a:p>
         </p:txBody>
       </p:sp>
@@ -15293,7 +15345,7 @@
           <p:nvPr/>
         </p:nvPicPr>
         <p:blipFill>
-          <a:blip r:embed="rId8"/>
+          <a:blip r:embed="rId9"/>
           <a:stretch>
             <a:fillRect/>
           </a:stretch>
@@ -15325,14 +15377,14 @@
           <a:noFill/>
         </p:spPr>
         <p:txBody>
-          <a:bodyPr wrap="square" anchor="ctr" lIns="45720" rIns="45720" tIns="27432" bIns="27432">
+          <a:bodyPr wrap="square" lIns="45720" tIns="27432" rIns="45720" bIns="27432" anchor="ctr">
             <a:spAutoFit/>
           </a:bodyPr>
           <a:lstStyle/>
           <a:p>
             <a:pPr algn="l"/>
             <a:r>
-              <a:rPr sz="3400" b="1">
+              <a:rPr sz="3400" b="1" lang="en-IN">
                 <a:solidFill>
                   <a:srgbClr val="243B7A"/>
                 </a:solidFill>
@@ -15340,6 +15392,15 @@
               </a:rPr>
               <a:t>330+</a:t>
             </a:r>
+            <a:r>
+              <a:rPr sz="1800" b="0" lang="en-IN">
+                <a:solidFill>
+                  <a:srgbClr val="243B7A"/>
+                </a:solidFill>
+                <a:latin typeface="Calibri"/>
+              </a:rPr>
+              <a:t> documents</a:t>
+            </a:r>
           </a:p>
         </p:txBody>
       </p:sp>
@@ -15360,14 +15421,14 @@
           <a:noFill/>
         </p:spPr>
         <p:txBody>
-          <a:bodyPr wrap="square" anchor="t" lIns="45720" rIns="45720" tIns="27432" bIns="27432">
+          <a:bodyPr wrap="square" lIns="45720" tIns="27432" rIns="45720" bIns="27432" anchor="t">
             <a:spAutoFit/>
           </a:bodyPr>
           <a:lstStyle/>
           <a:p>
             <a:pPr algn="l"/>
             <a:r>
-              <a:rPr sz="1400" b="0">
+              <a:rPr sz="1400" b="0" lang="en-IN">
                 <a:solidFill>
                   <a:srgbClr val="1F2937"/>
                 </a:solidFill>
@@ -15395,14 +15456,14 @@
           <a:noFill/>
         </p:spPr>
         <p:txBody>
-          <a:bodyPr wrap="square" anchor="t" lIns="45720" rIns="45720" tIns="27432" bIns="27432">
+          <a:bodyPr wrap="square" lIns="45720" tIns="27432" rIns="45720" bIns="27432" anchor="t">
             <a:spAutoFit/>
           </a:bodyPr>
           <a:lstStyle/>
           <a:p>
             <a:pPr algn="l"/>
             <a:r>
-              <a:rPr sz="1600" b="1">
+              <a:rPr sz="1600" b="1" lang="en-IN">
                 <a:solidFill>
                   <a:srgbClr val="243B7A"/>
                 </a:solidFill>
@@ -15422,7 +15483,7 @@
 </file>
 
 <file path=ppt/slides/slide9.xml><?xml version="1.0" encoding="utf-8"?>
-<p:sld xmlns:a="http://schemas.openxmlformats.org/drawingml/2006/main" xmlns:p="http://schemas.openxmlformats.org/presentationml/2006/main" xmlns:r="http://schemas.openxmlformats.org/officeDocument/2006/relationships">
+<p:sld xmlns:a="http://schemas.openxmlformats.org/drawingml/2006/main" xmlns:r="http://schemas.openxmlformats.org/officeDocument/2006/relationships" xmlns:p="http://schemas.openxmlformats.org/presentationml/2006/main">
   <p:cSld>
     <p:spTree>
       <p:nvGrpSpPr>
@@ -15430,7 +15491,14 @@
         <p:cNvGrpSpPr/>
         <p:nvPr/>
       </p:nvGrpSpPr>
-      <p:grpSpPr/>
+      <p:grpSpPr>
+        <a:xfrm>
+          <a:off x="0" y="0"/>
+          <a:ext cx="0" cy="0"/>
+          <a:chOff x="0" y="0"/>
+          <a:chExt cx="0" cy="0"/>
+        </a:xfrm>
+      </p:grpSpPr>
       <p:sp>
         <p:nvSpPr>
           <p:cNvPr id="2" name="Rectangle 1"/>
@@ -15471,6 +15539,7 @@
           <a:lstStyle/>
           <a:p>
             <a:pPr algn="ctr"/>
+            <a:endParaRPr/>
           </a:p>
         </p:txBody>
       </p:sp>
@@ -15514,14 +15583,17 @@
           <a:lstStyle/>
           <a:p>
             <a:pPr algn="ctr"/>
-          </a:p>
-        </p:txBody>
-      </p:sp>
-      <p:sp>
-        <p:nvSpPr>
-          <p:cNvPr id="4" name="TextBox 3"/>
-          <p:cNvSpPr txBox="1"/>
-          <p:nvPr/>
+            <a:endParaRPr/>
+          </a:p>
+        </p:txBody>
+      </p:sp>
+      <p:sp>
+        <p:nvSpPr>
+          <p:cNvPr id="4" name="Title"/>
+          <p:cNvSpPr/>
+          <p:nvPr>
+            <p:ph type="title"/>
+          </p:nvPr>
         </p:nvSpPr>
         <p:spPr>
           <a:xfrm>
@@ -15534,14 +15606,14 @@
           <a:noFill/>
         </p:spPr>
         <p:txBody>
-          <a:bodyPr wrap="square" anchor="ctr" lIns="45720" rIns="45720" tIns="27432" bIns="27432">
+          <a:bodyPr wrap="square" lIns="45720" tIns="27432" rIns="45720" bIns="27432" anchor="ctr">
             <a:spAutoFit/>
           </a:bodyPr>
           <a:lstStyle/>
           <a:p>
             <a:pPr algn="l"/>
             <a:r>
-              <a:rPr sz="3000" b="1">
+              <a:rPr sz="3000" b="1" lang="en-IN">
                 <a:solidFill>
                   <a:srgbClr val="243B7A"/>
                 </a:solidFill>
@@ -15561,7 +15633,7 @@
           <p:nvPr/>
         </p:nvPicPr>
         <p:blipFill>
-          <a:blip r:embed="rId2"/>
+          <a:blip r:embed="rId3"/>
           <a:stretch>
             <a:fillRect/>
           </a:stretch>
@@ -15593,14 +15665,14 @@
           <a:noFill/>
         </p:spPr>
         <p:txBody>
-          <a:bodyPr wrap="square" anchor="t" lIns="45720" rIns="45720" tIns="27432" bIns="27432">
+          <a:bodyPr wrap="square" lIns="45720" tIns="27432" rIns="45720" bIns="27432" anchor="t">
             <a:spAutoFit/>
           </a:bodyPr>
           <a:lstStyle/>
           <a:p>
             <a:pPr algn="l"/>
             <a:r>
-              <a:rPr sz="1000" b="0">
+              <a:rPr sz="1000" b="0" lang="en-IN">
                 <a:solidFill>
                   <a:srgbClr val="4B5563"/>
                 </a:solidFill>
@@ -15628,14 +15700,14 @@
           <a:noFill/>
         </p:spPr>
         <p:txBody>
-          <a:bodyPr wrap="square" anchor="t" lIns="45720" rIns="45720" tIns="27432" bIns="27432">
+          <a:bodyPr wrap="square" lIns="45720" tIns="27432" rIns="45720" bIns="27432" anchor="t">
             <a:spAutoFit/>
           </a:bodyPr>
           <a:lstStyle/>
           <a:p>
             <a:pPr algn="r"/>
             <a:r>
-              <a:rPr sz="1000" b="0">
+              <a:rPr sz="1000" b="0" lang="en-IN">
                 <a:solidFill>
                   <a:srgbClr val="4B5563"/>
                 </a:solidFill>
@@ -15663,14 +15735,14 @@
           <a:noFill/>
         </p:spPr>
         <p:txBody>
-          <a:bodyPr wrap="square" anchor="t" lIns="45720" rIns="45720" tIns="27432" bIns="27432">
+          <a:bodyPr wrap="square" lIns="45720" tIns="27432" rIns="45720" bIns="27432" anchor="t">
             <a:spAutoFit/>
           </a:bodyPr>
           <a:lstStyle/>
           <a:p>
             <a:pPr algn="l"/>
             <a:r>
-              <a:rPr sz="1900" b="0">
+              <a:rPr sz="1900" b="0" lang="en-IN">
                 <a:solidFill>
                   <a:srgbClr val="1F2937"/>
                 </a:solidFill>
@@ -15726,6 +15798,7 @@
           <a:lstStyle/>
           <a:p>
             <a:pPr algn="ctr"/>
+            <a:endParaRPr/>
           </a:p>
         </p:txBody>
       </p:sp>
@@ -15770,6 +15843,7 @@
           <a:lstStyle/>
           <a:p>
             <a:pPr algn="ctr"/>
+            <a:endParaRPr/>
           </a:p>
         </p:txBody>
       </p:sp>
@@ -15782,7 +15856,7 @@
           <p:nvPr/>
         </p:nvPicPr>
         <p:blipFill>
-          <a:blip r:embed="rId3"/>
+          <a:blip r:embed="rId4"/>
           <a:stretch>
             <a:fillRect/>
           </a:stretch>
@@ -15814,14 +15888,14 @@
           <a:noFill/>
         </p:spPr>
         <p:txBody>
-          <a:bodyPr wrap="square" anchor="t" lIns="45720" rIns="45720" tIns="27432" bIns="27432">
+          <a:bodyPr wrap="square" lIns="45720" tIns="27432" rIns="45720" bIns="27432" anchor="t">
             <a:spAutoFit/>
           </a:bodyPr>
           <a:lstStyle/>
           <a:p>
             <a:pPr algn="l"/>
             <a:r>
-              <a:rPr sz="2200" b="1">
+              <a:rPr sz="2200" b="1" lang="en-IN">
                 <a:solidFill>
                   <a:srgbClr val="243B7A"/>
                 </a:solidFill>
@@ -15849,14 +15923,14 @@
           <a:noFill/>
         </p:spPr>
         <p:txBody>
-          <a:bodyPr wrap="square" anchor="t" lIns="45720" rIns="45720" tIns="27432" bIns="27432">
+          <a:bodyPr wrap="square" lIns="45720" tIns="27432" rIns="45720" bIns="27432" anchor="t">
             <a:spAutoFit/>
           </a:bodyPr>
           <a:lstStyle/>
           <a:p>
             <a:pPr algn="l"/>
             <a:r>
-              <a:rPr sz="1500" b="0">
+              <a:rPr sz="1500" b="0" lang="en-IN">
                 <a:solidFill>
                   <a:srgbClr val="8A6300"/>
                 </a:solidFill>
@@ -15884,14 +15958,14 @@
           <a:noFill/>
         </p:spPr>
         <p:txBody>
-          <a:bodyPr wrap="square" anchor="t" lIns="45720" rIns="45720" tIns="27432" bIns="27432">
+          <a:bodyPr wrap="square" lIns="45720" tIns="27432" rIns="45720" bIns="27432" anchor="t">
             <a:spAutoFit/>
           </a:bodyPr>
           <a:lstStyle/>
           <a:p>
             <a:pPr algn="l"/>
             <a:r>
-              <a:rPr sz="1700" b="0">
+              <a:rPr sz="1700" b="0" lang="en-IN">
                 <a:solidFill>
                   <a:srgbClr val="1F2937"/>
                 </a:solidFill>
@@ -15947,6 +16021,7 @@
           <a:lstStyle/>
           <a:p>
             <a:pPr algn="ctr"/>
+            <a:endParaRPr/>
           </a:p>
         </p:txBody>
       </p:sp>
@@ -15991,6 +16066,7 @@
           <a:lstStyle/>
           <a:p>
             <a:pPr algn="ctr"/>
+            <a:endParaRPr/>
           </a:p>
         </p:txBody>
       </p:sp>
@@ -16003,7 +16079,7 @@
           <p:nvPr/>
         </p:nvPicPr>
         <p:blipFill>
-          <a:blip r:embed="rId4"/>
+          <a:blip r:embed="rId5"/>
           <a:stretch>
             <a:fillRect/>
           </a:stretch>
@@ -16035,14 +16111,14 @@
           <a:noFill/>
         </p:spPr>
         <p:txBody>
-          <a:bodyPr wrap="square" anchor="t" lIns="45720" rIns="45720" tIns="27432" bIns="27432">
+          <a:bodyPr wrap="square" lIns="45720" tIns="27432" rIns="45720" bIns="27432" anchor="t">
             <a:spAutoFit/>
           </a:bodyPr>
           <a:lstStyle/>
           <a:p>
             <a:pPr algn="l"/>
             <a:r>
-              <a:rPr sz="2200" b="1">
+              <a:rPr sz="2200" b="1" lang="en-IN">
                 <a:solidFill>
                   <a:srgbClr val="243B7A"/>
                 </a:solidFill>
@@ -16070,14 +16146,14 @@
           <a:noFill/>
         </p:spPr>
         <p:txBody>
-          <a:bodyPr wrap="square" anchor="t" lIns="45720" rIns="45720" tIns="27432" bIns="27432">
+          <a:bodyPr wrap="square" lIns="45720" tIns="27432" rIns="45720" bIns="27432" anchor="t">
             <a:spAutoFit/>
           </a:bodyPr>
           <a:lstStyle/>
           <a:p>
             <a:pPr algn="l"/>
             <a:r>
-              <a:rPr sz="1500" b="0">
+              <a:rPr sz="1500" b="0" lang="en-IN">
                 <a:solidFill>
                   <a:srgbClr val="8A6300"/>
                 </a:solidFill>
@@ -16105,14 +16181,14 @@
           <a:noFill/>
         </p:spPr>
         <p:txBody>
-          <a:bodyPr wrap="square" anchor="t" lIns="45720" rIns="45720" tIns="27432" bIns="27432">
+          <a:bodyPr wrap="square" lIns="45720" tIns="27432" rIns="45720" bIns="27432" anchor="t">
             <a:spAutoFit/>
           </a:bodyPr>
           <a:lstStyle/>
           <a:p>
             <a:pPr algn="l"/>
             <a:r>
-              <a:rPr sz="1700" b="0">
+              <a:rPr sz="1700" b="0" lang="en-IN">
                 <a:solidFill>
                   <a:srgbClr val="1F2937"/>
                 </a:solidFill>
@@ -16168,6 +16244,7 @@
           <a:lstStyle/>
           <a:p>
             <a:pPr algn="ctr"/>
+            <a:endParaRPr/>
           </a:p>
         </p:txBody>
       </p:sp>
@@ -16188,7 +16265,7 @@
           <a:noFill/>
         </p:spPr>
         <p:txBody>
-          <a:bodyPr wrap="square" anchor="ctr" lIns="45720" rIns="45720" tIns="27432" bIns="27432">
+          <a:bodyPr wrap="square" lIns="45720" tIns="27432" rIns="45720" bIns="27432" anchor="ctr">
             <a:spAutoFit/>
           </a:bodyPr>
           <a:lstStyle/>
@@ -16199,7 +16276,7 @@
               </a:spcAft>
             </a:pPr>
             <a:r>
-              <a:rPr sz="1700" b="1">
+              <a:rPr sz="1700" b="1" lang="en-IN">
                 <a:solidFill>
                   <a:srgbClr val="243B7A"/>
                 </a:solidFill>
@@ -16215,7 +16292,7 @@
               </a:spcAft>
             </a:pPr>
             <a:r>
-              <a:rPr sz="1700" b="1">
+              <a:rPr sz="1700" b="1" lang="en-IN">
                 <a:solidFill>
                   <a:srgbClr val="243B7A"/>
                 </a:solidFill>
@@ -16565,44 +16642,44 @@
         <a:sysClr val="window" lastClr="FFFFFF"/>
       </a:lt1>
       <a:dk2>
-        <a:srgbClr val="1F497D"/>
+        <a:srgbClr val="0E2841"/>
       </a:dk2>
       <a:lt2>
-        <a:srgbClr val="EEECE1"/>
+        <a:srgbClr val="E8E8E8"/>
       </a:lt2>
       <a:accent1>
-        <a:srgbClr val="4F81BD"/>
+        <a:srgbClr val="156082"/>
       </a:accent1>
       <a:accent2>
-        <a:srgbClr val="C0504D"/>
+        <a:srgbClr val="E97132"/>
       </a:accent2>
       <a:accent3>
-        <a:srgbClr val="9BBB59"/>
+        <a:srgbClr val="196B24"/>
       </a:accent3>
       <a:accent4>
-        <a:srgbClr val="8064A2"/>
+        <a:srgbClr val="0F9ED5"/>
       </a:accent4>
       <a:accent5>
-        <a:srgbClr val="4BACC6"/>
+        <a:srgbClr val="A02B93"/>
       </a:accent5>
       <a:accent6>
-        <a:srgbClr val="F79646"/>
+        <a:srgbClr val="4EA72E"/>
       </a:accent6>
       <a:hlink>
-        <a:srgbClr val="0000FF"/>
+        <a:srgbClr val="467886"/>
       </a:hlink>
       <a:folHlink>
-        <a:srgbClr val="800080"/>
+        <a:srgbClr val="96607D"/>
       </a:folHlink>
     </a:clrScheme>
     <a:fontScheme name="Office">
       <a:majorFont>
-        <a:latin typeface="Calibri"/>
+        <a:latin typeface="Aptos Display" panose="02110004020202020204"/>
         <a:ea typeface=""/>
         <a:cs typeface=""/>
-        <a:font script="Jpan" typeface="ＭＳ Ｐゴシック"/>
+        <a:font script="Jpan" typeface="游ゴシック Light"/>
         <a:font script="Hang" typeface="맑은 고딕"/>
-        <a:font script="Hans" typeface="宋体"/>
+        <a:font script="Hans" typeface="等线 Light"/>
         <a:font script="Hant" typeface="新細明體"/>
         <a:font script="Arab" typeface="Times New Roman"/>
         <a:font script="Hebr" typeface="Times New Roman"/>
@@ -16630,14 +16707,31 @@
         <a:font script="Viet" typeface="Times New Roman"/>
         <a:font script="Uigh" typeface="Microsoft Uighur"/>
         <a:font script="Geor" typeface="Sylfaen"/>
+        <a:font script="Armn" typeface="Arial"/>
+        <a:font script="Bugi" typeface="Leelawadee UI"/>
+        <a:font script="Bopo" typeface="Microsoft JhengHei"/>
+        <a:font script="Java" typeface="Javanese Text"/>
+        <a:font script="Lisu" typeface="Segoe UI"/>
+        <a:font script="Mymr" typeface="Myanmar Text"/>
+        <a:font script="Nkoo" typeface="Ebrima"/>
+        <a:font script="Olck" typeface="Nirmala UI"/>
+        <a:font script="Osma" typeface="Ebrima"/>
+        <a:font script="Phag" typeface="Phagspa"/>
+        <a:font script="Syrn" typeface="Estrangelo Edessa"/>
+        <a:font script="Syrj" typeface="Estrangelo Edessa"/>
+        <a:font script="Syre" typeface="Estrangelo Edessa"/>
+        <a:font script="Sora" typeface="Nirmala UI"/>
+        <a:font script="Tale" typeface="Microsoft Tai Le"/>
+        <a:font script="Talu" typeface="Microsoft New Tai Lue"/>
+        <a:font script="Tfng" typeface="Ebrima"/>
       </a:majorFont>
       <a:minorFont>
-        <a:latin typeface="Calibri"/>
+        <a:latin typeface="Aptos" panose="02110004020202020204"/>
         <a:ea typeface=""/>
         <a:cs typeface=""/>
-        <a:font script="Jpan" typeface="ＭＳ Ｐゴシック"/>
+        <a:font script="Jpan" typeface="游ゴシック"/>
         <a:font script="Hang" typeface="맑은 고딕"/>
-        <a:font script="Hans" typeface="宋体"/>
+        <a:font script="Hans" typeface="等线"/>
         <a:font script="Hant" typeface="新細明體"/>
         <a:font script="Arab" typeface="Arial"/>
         <a:font script="Hebr" typeface="Arial"/>
@@ -16665,6 +16759,23 @@
         <a:font script="Viet" typeface="Arial"/>
         <a:font script="Uigh" typeface="Microsoft Uighur"/>
         <a:font script="Geor" typeface="Sylfaen"/>
+        <a:font script="Armn" typeface="Arial"/>
+        <a:font script="Bugi" typeface="Leelawadee UI"/>
+        <a:font script="Bopo" typeface="Microsoft JhengHei"/>
+        <a:font script="Java" typeface="Javanese Text"/>
+        <a:font script="Lisu" typeface="Segoe UI"/>
+        <a:font script="Mymr" typeface="Myanmar Text"/>
+        <a:font script="Nkoo" typeface="Ebrima"/>
+        <a:font script="Olck" typeface="Nirmala UI"/>
+        <a:font script="Osma" typeface="Ebrima"/>
+        <a:font script="Phag" typeface="Phagspa"/>
+        <a:font script="Syrn" typeface="Estrangelo Edessa"/>
+        <a:font script="Syrj" typeface="Estrangelo Edessa"/>
+        <a:font script="Syre" typeface="Estrangelo Edessa"/>
+        <a:font script="Sora" typeface="Nirmala UI"/>
+        <a:font script="Tale" typeface="Microsoft Tai Le"/>
+        <a:font script="Talu" typeface="Microsoft New Tai Lue"/>
+        <a:font script="Tfng" typeface="Ebrima"/>
       </a:minorFont>
     </a:fontScheme>
     <a:fmtScheme name="Office">
@@ -16676,180 +16787,136 @@
           <a:gsLst>
             <a:gs pos="0">
               <a:schemeClr val="phClr">
-                <a:tint val="50000"/>
-                <a:satMod val="300000"/>
+                <a:lumMod val="110000"/>
+                <a:satMod val="105000"/>
+                <a:tint val="67000"/>
               </a:schemeClr>
             </a:gs>
-            <a:gs pos="35000">
+            <a:gs pos="50000">
               <a:schemeClr val="phClr">
-                <a:tint val="37000"/>
-                <a:satMod val="300000"/>
+                <a:lumMod val="105000"/>
+                <a:satMod val="103000"/>
+                <a:tint val="73000"/>
               </a:schemeClr>
             </a:gs>
             <a:gs pos="100000">
               <a:schemeClr val="phClr">
-                <a:tint val="15000"/>
-                <a:satMod val="350000"/>
+                <a:lumMod val="105000"/>
+                <a:satMod val="109000"/>
+                <a:tint val="81000"/>
               </a:schemeClr>
             </a:gs>
           </a:gsLst>
-          <a:lin ang="16200000" scaled="1"/>
+          <a:lin ang="5400000" scaled="0"/>
         </a:gradFill>
         <a:gradFill rotWithShape="1">
           <a:gsLst>
             <a:gs pos="0">
               <a:schemeClr val="phClr">
-                <a:tint val="100000"/>
+                <a:satMod val="103000"/>
+                <a:lumMod val="102000"/>
+                <a:tint val="94000"/>
+              </a:schemeClr>
+            </a:gs>
+            <a:gs pos="50000">
+              <a:schemeClr val="phClr">
+                <a:satMod val="110000"/>
+                <a:lumMod val="100000"/>
                 <a:shade val="100000"/>
-                <a:satMod val="130000"/>
               </a:schemeClr>
             </a:gs>
             <a:gs pos="100000">
               <a:schemeClr val="phClr">
-                <a:tint val="50000"/>
-                <a:shade val="100000"/>
-                <a:satMod val="350000"/>
+                <a:lumMod val="99000"/>
+                <a:satMod val="120000"/>
+                <a:shade val="78000"/>
               </a:schemeClr>
             </a:gs>
           </a:gsLst>
-          <a:lin ang="16200000" scaled="0"/>
+          <a:lin ang="5400000" scaled="0"/>
         </a:gradFill>
       </a:fillStyleLst>
       <a:lnStyleLst>
-        <a:ln w="9525" cap="flat" cmpd="sng" algn="ctr">
+        <a:ln w="12700" cap="flat" cmpd="sng" algn="ctr">
           <a:solidFill>
-            <a:schemeClr val="phClr">
-              <a:shade val="95000"/>
-              <a:satMod val="105000"/>
-            </a:schemeClr>
+            <a:schemeClr val="phClr"/>
           </a:solidFill>
           <a:prstDash val="solid"/>
+          <a:miter lim="800000"/>
+        </a:ln>
+        <a:ln w="19050" cap="flat" cmpd="sng" algn="ctr">
+          <a:solidFill>
+            <a:schemeClr val="phClr"/>
+          </a:solidFill>
+          <a:prstDash val="solid"/>
+          <a:miter lim="800000"/>
         </a:ln>
         <a:ln w="25400" cap="flat" cmpd="sng" algn="ctr">
           <a:solidFill>
             <a:schemeClr val="phClr"/>
           </a:solidFill>
           <a:prstDash val="solid"/>
-        </a:ln>
-        <a:ln w="38100" cap="flat" cmpd="sng" algn="ctr">
-          <a:solidFill>
-            <a:schemeClr val="phClr"/>
-          </a:solidFill>
-          <a:prstDash val="solid"/>
+          <a:miter lim="800000"/>
         </a:ln>
       </a:lnStyleLst>
       <a:effectStyleLst>
         <a:effectStyle>
+          <a:effectLst/>
+        </a:effectStyle>
+        <a:effectStyle>
+          <a:effectLst/>
+        </a:effectStyle>
+        <a:effectStyle>
           <a:effectLst>
-            <a:outerShdw blurRad="40000" dist="20000" dir="5400000" rotWithShape="0">
+            <a:outerShdw blurRad="57150" dist="19050" dir="5400000" algn="ctr" rotWithShape="0">
               <a:srgbClr val="000000">
-                <a:alpha val="38000"/>
+                <a:alpha val="63000"/>
               </a:srgbClr>
             </a:outerShdw>
           </a:effectLst>
-        </a:effectStyle>
-        <a:effectStyle>
-          <a:effectLst>
-            <a:outerShdw blurRad="40000" dist="23000" dir="5400000" rotWithShape="0">
-              <a:srgbClr val="000000">
-                <a:alpha val="35000"/>
-              </a:srgbClr>
-            </a:outerShdw>
-          </a:effectLst>
-        </a:effectStyle>
-        <a:effectStyle>
-          <a:effectLst>
-            <a:outerShdw blurRad="40000" dist="23000" dir="5400000" rotWithShape="0">
-              <a:srgbClr val="000000">
-                <a:alpha val="35000"/>
-              </a:srgbClr>
-            </a:outerShdw>
-          </a:effectLst>
-          <a:scene3d>
-            <a:camera prst="orthographicFront">
-              <a:rot lat="0" lon="0" rev="0"/>
-            </a:camera>
-            <a:lightRig rig="threePt" dir="t">
-              <a:rot lat="0" lon="0" rev="1200000"/>
-            </a:lightRig>
-          </a:scene3d>
-          <a:sp3d>
-            <a:bevelT w="63500" h="25400"/>
-          </a:sp3d>
         </a:effectStyle>
       </a:effectStyleLst>
       <a:bgFillStyleLst>
         <a:solidFill>
           <a:schemeClr val="phClr"/>
         </a:solidFill>
+        <a:solidFill>
+          <a:schemeClr val="phClr">
+            <a:tint val="95000"/>
+            <a:satMod val="170000"/>
+          </a:schemeClr>
+        </a:solidFill>
         <a:gradFill rotWithShape="1">
           <a:gsLst>
             <a:gs pos="0">
               <a:schemeClr val="phClr">
-                <a:tint val="40000"/>
-                <a:satMod val="350000"/>
+                <a:tint val="93000"/>
+                <a:satMod val="150000"/>
+                <a:shade val="98000"/>
+                <a:lumMod val="102000"/>
               </a:schemeClr>
             </a:gs>
-            <a:gs pos="40000">
+            <a:gs pos="50000">
               <a:schemeClr val="phClr">
-                <a:tint val="45000"/>
-                <a:shade val="99000"/>
-                <a:satMod val="350000"/>
+                <a:tint val="98000"/>
+                <a:satMod val="130000"/>
+                <a:shade val="90000"/>
+                <a:lumMod val="103000"/>
               </a:schemeClr>
             </a:gs>
             <a:gs pos="100000">
               <a:schemeClr val="phClr">
-                <a:shade val="20000"/>
-                <a:satMod val="255000"/>
+                <a:shade val="63000"/>
+                <a:satMod val="120000"/>
               </a:schemeClr>
             </a:gs>
           </a:gsLst>
-          <a:path path="circle">
-            <a:fillToRect l="50000" t="-80000" r="50000" b="180000"/>
-          </a:path>
-        </a:gradFill>
-        <a:gradFill rotWithShape="1">
-          <a:gsLst>
-            <a:gs pos="0">
-              <a:schemeClr val="phClr">
-                <a:tint val="80000"/>
-                <a:satMod val="300000"/>
-              </a:schemeClr>
-            </a:gs>
-            <a:gs pos="100000">
-              <a:schemeClr val="phClr">
-                <a:shade val="30000"/>
-                <a:satMod val="200000"/>
-              </a:schemeClr>
-            </a:gs>
-          </a:gsLst>
-          <a:path path="circle">
-            <a:fillToRect l="50000" t="50000" r="50000" b="50000"/>
-          </a:path>
+          <a:lin ang="5400000" scaled="0"/>
         </a:gradFill>
       </a:bgFillStyleLst>
     </a:fmtScheme>
   </a:themeElements>
   <a:objectDefaults>
-    <a:spDef>
-      <a:spPr/>
-      <a:bodyPr/>
-      <a:lstStyle/>
-      <a:style>
-        <a:lnRef idx="1">
-          <a:schemeClr val="accent1"/>
-        </a:lnRef>
-        <a:fillRef idx="3">
-          <a:schemeClr val="accent1"/>
-        </a:fillRef>
-        <a:effectRef idx="2">
-          <a:schemeClr val="accent1"/>
-        </a:effectRef>
-        <a:fontRef idx="minor">
-          <a:schemeClr val="lt1"/>
-        </a:fontRef>
-      </a:style>
-    </a:spDef>
     <a:lnDef>
       <a:spPr/>
       <a:bodyPr/>
@@ -16871,5 +16938,10 @@
     </a:lnDef>
   </a:objectDefaults>
   <a:extraClrSchemeLst/>
+  <a:extLst>
+    <a:ext uri="{05A4C25C-085E-4340-85A3-A5531E510DB2}">
+      <thm15:themeFamily xmlns:thm15="http://schemas.microsoft.com/office/thememl/2012/main" name="Office Theme" id="{2E142A2C-CD16-42D6-873A-C26D2A0506FA}" vid="{1BDDFF52-6CD6-40A5-AB3C-68EB2F1E4D0A}"/>
+    </a:ext>
+  </a:extLst>
 </a:theme>
 </file>